--- a/docs/第一周汇报.pptx
+++ b/docs/第一周汇报.pptx
@@ -11323,7 +11323,7 @@
                 <a:ea typeface="微软雅黑" panose="020B0503020204020204" charset="-122"/>
                 <a:cs typeface="微软雅黑" panose="020B0503020204020204" charset="-122"/>
               </a:rPr>
-              <a:t>三、问题与下一步</a:t>
+              <a:t>三、Bad Case 与时间分配</a:t>
             </a:r>
             <a:endParaRPr sz="1700" b="1">
               <a:solidFill>
@@ -11352,7 +11352,7 @@
                 <a:ea typeface="微软雅黑" panose="020B0503020204020204" charset="-122"/>
                 <a:cs typeface="微软雅黑" panose="020B0503020204020204" charset="-122"/>
               </a:rPr>
-              <a:t>Bad Case 分析、当前实验的局限、改进计划</a:t>
+              <a:t>典型失败案例；实验与学习两条线的时间投入</a:t>
             </a:r>
             <a:endParaRPr sz="1500" b="0">
               <a:solidFill>
@@ -12972,7 +12972,7 @@
                 <a:ea typeface="微软雅黑" panose="020B0503020204020204" charset="-122"/>
                 <a:cs typeface="微软雅黑" panose="020B0503020204020204" charset="-122"/>
               </a:rPr>
-              <a:t>结论与下一步</a:t>
+              <a:t>时间分配</a:t>
             </a:r>
             <a:endParaRPr sz="2700" b="1">
               <a:solidFill>
@@ -13021,7 +13021,7 @@
                 <a:ea typeface="微软雅黑" panose="020B0503020204020204" charset="-122"/>
                 <a:cs typeface="微软雅黑" panose="020B0503020204020204" charset="-122"/>
               </a:rPr>
-              <a:t>总结 · 当前实验的局限 · 改进计划</a:t>
+              <a:t>实验与学习两条线的时间投入</a:t>
             </a:r>
             <a:endParaRPr sz="1350" b="0">
               <a:solidFill>
@@ -13077,493 +13077,240 @@
           </a:p>
         </p:txBody>
       </p:sp>
-      <p:sp>
-        <p:nvSpPr>
-          <p:cNvPr id="6" name="TextBox 5"/>
-          <p:cNvSpPr txBox="1"/>
+      <p:graphicFrame>
+        <p:nvGraphicFramePr>
+          <p:cNvPr id="6" name="Table 5"/>
+          <p:cNvGraphicFramePr>
+            <a:graphicFrameLocks noGrp="1"/>
+          </p:cNvGraphicFramePr>
           <p:nvPr/>
-        </p:nvSpPr>
-        <p:spPr>
-          <a:xfrm>
-            <a:off x="594360" y="1600200"/>
-            <a:ext cx="11155680" cy="5029200"/>
-          </a:xfrm>
-          <a:prstGeom prst="rect">
-            <a:avLst/>
-          </a:prstGeom>
-          <a:noFill/>
-        </p:spPr>
-        <p:txBody>
-          <a:bodyPr wrap="square">
-            <a:noAutofit/>
-          </a:bodyPr>
-          <a:lstStyle/>
-          <a:p>
-            <a:pPr>
-              <a:lnSpc>
-                <a:spcPct val="118000"/>
-              </a:lnSpc>
-              <a:spcAft>
-                <a:spcPts val="400"/>
-              </a:spcAft>
-            </a:pPr>
-            <a:r>
-              <a:rPr sz="1400" b="1">
-                <a:solidFill>
-                  <a:srgbClr val="1F3864"/>
-                </a:solidFill>
-                <a:latin typeface="微软雅黑" panose="020B0503020204020204" charset="-122"/>
-                <a:ea typeface="微软雅黑" panose="020B0503020204020204" charset="-122"/>
-                <a:cs typeface="微软雅黑" panose="020B0503020204020204" charset="-122"/>
-              </a:rPr>
-              <a:t>结论</a:t>
-            </a:r>
-            <a:endParaRPr sz="1400" b="1">
-              <a:solidFill>
-                <a:srgbClr val="1F3864"/>
-              </a:solidFill>
-              <a:latin typeface="微软雅黑" panose="020B0503020204020204" charset="-122"/>
-              <a:ea typeface="微软雅黑" panose="020B0503020204020204" charset="-122"/>
-              <a:cs typeface="微软雅黑" panose="020B0503020204020204" charset="-122"/>
-            </a:endParaRPr>
-          </a:p>
-          <a:p>
-            <a:pPr lvl="1">
-              <a:lnSpc>
-                <a:spcPct val="118000"/>
-              </a:lnSpc>
-              <a:spcAft>
-                <a:spcPts val="400"/>
-              </a:spcAft>
-            </a:pPr>
-            <a:r>
-              <a:rPr sz="1200" b="0">
-                <a:solidFill>
-                  <a:srgbClr val="595959"/>
-                </a:solidFill>
-                <a:latin typeface="微软雅黑" panose="020B0503020204020204" charset="-122"/>
-                <a:ea typeface="微软雅黑" panose="020B0503020204020204" charset="-122"/>
-                <a:cs typeface="微软雅黑" panose="020B0503020204020204" charset="-122"/>
-              </a:rPr>
-              <a:t>1. ResNet-50 精度最高（Test Top-1 51.05%）；MobileNetV3-Large 性价比最高（MACs 仅 1/17.7，batch=32 吞吐量高 3.9 倍）</a:t>
-            </a:r>
-            <a:endParaRPr sz="1200" b="0">
-              <a:solidFill>
-                <a:srgbClr val="595959"/>
-              </a:solidFill>
-              <a:latin typeface="微软雅黑" panose="020B0503020204020204" charset="-122"/>
-              <a:ea typeface="微软雅黑" panose="020B0503020204020204" charset="-122"/>
-              <a:cs typeface="微软雅黑" panose="020B0503020204020204" charset="-122"/>
-            </a:endParaRPr>
-          </a:p>
-          <a:p>
-            <a:pPr lvl="1">
-              <a:lnSpc>
-                <a:spcPct val="118000"/>
-              </a:lnSpc>
-              <a:spcAft>
-                <a:spcPts val="400"/>
-              </a:spcAft>
-            </a:pPr>
-            <a:r>
-              <a:rPr sz="1200" b="0">
-                <a:solidFill>
-                  <a:srgbClr val="595959"/>
-                </a:solidFill>
-                <a:latin typeface="微软雅黑" panose="020B0503020204020204" charset="-122"/>
-                <a:ea typeface="微软雅黑" panose="020B0503020204020204" charset="-122"/>
-                <a:cs typeface="微软雅黑" panose="020B0503020204020204" charset="-122"/>
-              </a:rPr>
-              <a:t>2. ConvNeXt-Tiny 在本数据规模下未体现优势，符合其「依赖大规模数据与强增强」的架构特性</a:t>
-            </a:r>
-            <a:endParaRPr sz="1200" b="0">
-              <a:solidFill>
-                <a:srgbClr val="595959"/>
-              </a:solidFill>
-              <a:latin typeface="微软雅黑" panose="020B0503020204020204" charset="-122"/>
-              <a:ea typeface="微软雅黑" panose="020B0503020204020204" charset="-122"/>
-              <a:cs typeface="微软雅黑" panose="020B0503020204020204" charset="-122"/>
-            </a:endParaRPr>
-          </a:p>
-          <a:p>
-            <a:pPr lvl="1">
-              <a:lnSpc>
-                <a:spcPct val="118000"/>
-              </a:lnSpc>
-              <a:spcAft>
-                <a:spcPts val="400"/>
-              </a:spcAft>
-            </a:pPr>
-            <a:r>
-              <a:rPr sz="1200" b="0">
-                <a:solidFill>
-                  <a:srgbClr val="595959"/>
-                </a:solidFill>
-                <a:latin typeface="微软雅黑" panose="020B0503020204020204" charset="-122"/>
-                <a:ea typeface="微软雅黑" panose="020B0503020204020204" charset="-122"/>
-                <a:cs typeface="微软雅黑" panose="020B0503020204020204" charset="-122"/>
-              </a:rPr>
-              <a:t>3. Label Smoothing (α=0.1) 有小幅正收益，但不支持「显著缓解过拟合」</a:t>
-            </a:r>
-            <a:endParaRPr sz="1200" b="0">
-              <a:solidFill>
-                <a:srgbClr val="595959"/>
-              </a:solidFill>
-              <a:latin typeface="微软雅黑" panose="020B0503020204020204" charset="-122"/>
-              <a:ea typeface="微软雅黑" panose="020B0503020204020204" charset="-122"/>
-              <a:cs typeface="微软雅黑" panose="020B0503020204020204" charset="-122"/>
-            </a:endParaRPr>
-          </a:p>
-          <a:p>
-            <a:pPr lvl="1">
-              <a:lnSpc>
-                <a:spcPct val="118000"/>
-              </a:lnSpc>
-              <a:spcAft>
-                <a:spcPts val="400"/>
-              </a:spcAft>
-            </a:pPr>
-            <a:r>
-              <a:rPr sz="1200" b="0">
-                <a:solidFill>
-                  <a:srgbClr val="595959"/>
-                </a:solidFill>
-                <a:latin typeface="微软雅黑" panose="020B0503020204020204" charset="-122"/>
-                <a:ea typeface="微软雅黑" panose="020B0503020204020204" charset="-122"/>
-                <a:cs typeface="微软雅黑" panose="020B0503020204020204" charset="-122"/>
-              </a:rPr>
-              <a:t>4. 三个模型都严重过拟合，根因是训练集无数据增强</a:t>
-            </a:r>
-            <a:endParaRPr sz="1200" b="0">
-              <a:solidFill>
-                <a:srgbClr val="595959"/>
-              </a:solidFill>
-              <a:latin typeface="微软雅黑" panose="020B0503020204020204" charset="-122"/>
-              <a:ea typeface="微软雅黑" panose="020B0503020204020204" charset="-122"/>
-              <a:cs typeface="微软雅黑" panose="020B0503020204020204" charset="-122"/>
-            </a:endParaRPr>
-          </a:p>
-          <a:p>
-            <a:pPr lvl="1">
-              <a:lnSpc>
-                <a:spcPct val="118000"/>
-              </a:lnSpc>
-              <a:spcAft>
-                <a:spcPts val="400"/>
-              </a:spcAft>
-            </a:pPr>
-            <a:r>
-              <a:rPr sz="1200" b="0">
-                <a:solidFill>
-                  <a:srgbClr val="595959"/>
-                </a:solidFill>
-                <a:latin typeface="微软雅黑" panose="020B0503020204020204" charset="-122"/>
-                <a:ea typeface="微软雅黑" panose="020B0503020204020204" charset="-122"/>
-                <a:cs typeface="微软雅黑" panose="020B0503020204020204" charset="-122"/>
-              </a:rPr>
-              <a:t>5. 测试精度被系统性低估，改用「验证准确率最高」选点可回收 +0.89 ~ +3.21 pt</a:t>
-            </a:r>
-            <a:endParaRPr sz="1200" b="0">
-              <a:solidFill>
-                <a:srgbClr val="595959"/>
-              </a:solidFill>
-              <a:latin typeface="微软雅黑" panose="020B0503020204020204" charset="-122"/>
-              <a:ea typeface="微软雅黑" panose="020B0503020204020204" charset="-122"/>
-              <a:cs typeface="微软雅黑" panose="020B0503020204020204" charset="-122"/>
-            </a:endParaRPr>
-          </a:p>
-          <a:p>
-            <a:pPr>
-              <a:lnSpc>
-                <a:spcPct val="118000"/>
-              </a:lnSpc>
-              <a:spcAft>
-                <a:spcPts val="400"/>
-              </a:spcAft>
-            </a:pPr>
-            <a:r>
-              <a:rPr sz="1400" b="1">
-                <a:solidFill>
-                  <a:srgbClr val="1F3864"/>
-                </a:solidFill>
-                <a:latin typeface="微软雅黑" panose="020B0503020204020204" charset="-122"/>
-                <a:ea typeface="微软雅黑" panose="020B0503020204020204" charset="-122"/>
-                <a:cs typeface="微软雅黑" panose="020B0503020204020204" charset="-122"/>
-              </a:rPr>
-              <a:t>当前实验的局限</a:t>
-            </a:r>
-            <a:endParaRPr sz="1400" b="1">
-              <a:solidFill>
-                <a:srgbClr val="1F3864"/>
-              </a:solidFill>
-              <a:latin typeface="微软雅黑" panose="020B0503020204020204" charset="-122"/>
-              <a:ea typeface="微软雅黑" panose="020B0503020204020204" charset="-122"/>
-              <a:cs typeface="微软雅黑" panose="020B0503020204020204" charset="-122"/>
-            </a:endParaRPr>
-          </a:p>
-          <a:p>
-            <a:pPr lvl="1">
-              <a:lnSpc>
-                <a:spcPct val="118000"/>
-              </a:lnSpc>
-              <a:spcAft>
-                <a:spcPts val="400"/>
-              </a:spcAft>
-            </a:pPr>
-            <a:r>
-              <a:rPr sz="1200" b="0">
-                <a:solidFill>
-                  <a:srgbClr val="595959"/>
-                </a:solidFill>
-                <a:latin typeface="微软雅黑" panose="020B0503020204020204" charset="-122"/>
-                <a:ea typeface="微软雅黑" panose="020B0503020204020204" charset="-122"/>
-                <a:cs typeface="微软雅黑" panose="020B0503020204020204" charset="-122"/>
-              </a:rPr>
-              <a:t>模型选择按「验证损失最小」，比按「验证准确率最高」系统性更早、更差，表中 Test Top-1 因此偏低</a:t>
-            </a:r>
-            <a:endParaRPr sz="1200" b="0">
-              <a:solidFill>
-                <a:srgbClr val="595959"/>
-              </a:solidFill>
-              <a:latin typeface="微软雅黑" panose="020B0503020204020204" charset="-122"/>
-              <a:ea typeface="微软雅黑" panose="020B0503020204020204" charset="-122"/>
-              <a:cs typeface="微软雅黑" panose="020B0503020204020204" charset="-122"/>
-            </a:endParaRPr>
-          </a:p>
-          <a:p>
-            <a:pPr lvl="1">
-              <a:lnSpc>
-                <a:spcPct val="118000"/>
-              </a:lnSpc>
-              <a:spcAft>
-                <a:spcPts val="400"/>
-              </a:spcAft>
-            </a:pPr>
-            <a:r>
-              <a:rPr sz="1200" b="0">
-                <a:solidFill>
-                  <a:srgbClr val="595959"/>
-                </a:solidFill>
-                <a:latin typeface="微软雅黑" panose="020B0503020204020204" charset="-122"/>
-                <a:ea typeface="微软雅黑" panose="020B0503020204020204" charset="-122"/>
-                <a:cs typeface="微软雅黑" panose="020B0503020204020204" charset="-122"/>
-              </a:rPr>
-              <a:t>训练集无任何数据增强；只跑了 1 个 seed，+0.69 pt 这类小差异无法与随机波动区分</a:t>
-            </a:r>
-            <a:endParaRPr sz="1200" b="0">
-              <a:solidFill>
-                <a:srgbClr val="595959"/>
-              </a:solidFill>
-              <a:latin typeface="微软雅黑" panose="020B0503020204020204" charset="-122"/>
-              <a:ea typeface="微软雅黑" panose="020B0503020204020204" charset="-122"/>
-              <a:cs typeface="微软雅黑" panose="020B0503020204020204" charset="-122"/>
-            </a:endParaRPr>
-          </a:p>
-          <a:p>
-            <a:pPr lvl="1">
-              <a:lnSpc>
-                <a:spcPct val="118000"/>
-              </a:lnSpc>
-              <a:spcAft>
-                <a:spcPts val="400"/>
-              </a:spcAft>
-            </a:pPr>
-            <a:r>
-              <a:rPr sz="1200" b="0">
-                <a:solidFill>
-                  <a:srgbClr val="595959"/>
-                </a:solidFill>
-                <a:latin typeface="微软雅黑" panose="020B0503020204020204" charset="-122"/>
-                <a:ea typeface="微软雅黑" panose="020B0503020204020204" charset="-122"/>
-                <a:cs typeface="微软雅黑" panose="020B0503020204020204" charset="-122"/>
-              </a:rPr>
-              <a:t>原始延迟记录失真（CUDA 列偏高 15~20%、CPU 列偏高 3.5~4.5 倍），已改用复测值</a:t>
-            </a:r>
-            <a:endParaRPr sz="1200" b="0">
-              <a:solidFill>
-                <a:srgbClr val="595959"/>
-              </a:solidFill>
-              <a:latin typeface="微软雅黑" panose="020B0503020204020204" charset="-122"/>
-              <a:ea typeface="微软雅黑" panose="020B0503020204020204" charset="-122"/>
-              <a:cs typeface="微软雅黑" panose="020B0503020204020204" charset="-122"/>
-            </a:endParaRPr>
-          </a:p>
-          <a:p>
-            <a:pPr>
-              <a:lnSpc>
-                <a:spcPct val="118000"/>
-              </a:lnSpc>
-              <a:spcAft>
-                <a:spcPts val="400"/>
-              </a:spcAft>
-            </a:pPr>
-            <a:r>
-              <a:rPr sz="1400" b="1">
-                <a:solidFill>
-                  <a:srgbClr val="1F3864"/>
-                </a:solidFill>
-                <a:latin typeface="微软雅黑" panose="020B0503020204020204" charset="-122"/>
-                <a:ea typeface="微软雅黑" panose="020B0503020204020204" charset="-122"/>
-                <a:cs typeface="微软雅黑" panose="020B0503020204020204" charset="-122"/>
-              </a:rPr>
-              <a:t>下一步（按优先级）</a:t>
-            </a:r>
-            <a:endParaRPr sz="1400" b="1">
-              <a:solidFill>
-                <a:srgbClr val="1F3864"/>
-              </a:solidFill>
-              <a:latin typeface="微软雅黑" panose="020B0503020204020204" charset="-122"/>
-              <a:ea typeface="微软雅黑" panose="020B0503020204020204" charset="-122"/>
-              <a:cs typeface="微软雅黑" panose="020B0503020204020204" charset="-122"/>
-            </a:endParaRPr>
-          </a:p>
-          <a:p>
-            <a:pPr lvl="1">
-              <a:lnSpc>
-                <a:spcPct val="118000"/>
-              </a:lnSpc>
-              <a:spcAft>
-                <a:spcPts val="400"/>
-              </a:spcAft>
-            </a:pPr>
-            <a:r>
-              <a:rPr sz="1200" b="0">
-                <a:solidFill>
-                  <a:srgbClr val="595959"/>
-                </a:solidFill>
-                <a:latin typeface="微软雅黑" panose="020B0503020204020204" charset="-122"/>
-                <a:ea typeface="微软雅黑" panose="020B0503020204020204" charset="-122"/>
-                <a:cs typeface="微软雅黑" panose="020B0503020204020204" charset="-122"/>
-              </a:rPr>
-              <a:t>P0 模型选择改为按验证 Top-1（用已保存权重重评，无需重训）</a:t>
-            </a:r>
-            <a:endParaRPr sz="1200" b="0">
-              <a:solidFill>
-                <a:srgbClr val="595959"/>
-              </a:solidFill>
-              <a:latin typeface="微软雅黑" panose="020B0503020204020204" charset="-122"/>
-              <a:ea typeface="微软雅黑" panose="020B0503020204020204" charset="-122"/>
-              <a:cs typeface="微软雅黑" panose="020B0503020204020204" charset="-122"/>
-            </a:endParaRPr>
-          </a:p>
-          <a:p>
-            <a:pPr lvl="1">
-              <a:lnSpc>
-                <a:spcPct val="118000"/>
-              </a:lnSpc>
-              <a:spcAft>
-                <a:spcPts val="400"/>
-              </a:spcAft>
-            </a:pPr>
-            <a:r>
-              <a:rPr sz="1200" b="0">
-                <a:solidFill>
-                  <a:srgbClr val="595959"/>
-                </a:solidFill>
-                <a:latin typeface="微软雅黑" panose="020B0503020204020204" charset="-122"/>
-                <a:ea typeface="微软雅黑" panose="020B0503020204020204" charset="-122"/>
-                <a:cs typeface="微软雅黑" panose="020B0503020204020204" charset="-122"/>
-              </a:rPr>
-              <a:t>P0 加入 RandomResizedCrop + RandomHorizontalFlip（需重训）</a:t>
-            </a:r>
-            <a:endParaRPr sz="1200" b="0">
-              <a:solidFill>
-                <a:srgbClr val="595959"/>
-              </a:solidFill>
-              <a:latin typeface="微软雅黑" panose="020B0503020204020204" charset="-122"/>
-              <a:ea typeface="微软雅黑" panose="020B0503020204020204" charset="-122"/>
-              <a:cs typeface="微软雅黑" panose="020B0503020204020204" charset="-122"/>
-            </a:endParaRPr>
-          </a:p>
-          <a:p>
-            <a:pPr lvl="1">
-              <a:lnSpc>
-                <a:spcPct val="118000"/>
-              </a:lnSpc>
-              <a:spcAft>
-                <a:spcPts val="400"/>
-              </a:spcAft>
-            </a:pPr>
-            <a:r>
-              <a:rPr sz="1200" b="0">
-                <a:solidFill>
-                  <a:srgbClr val="595959"/>
-                </a:solidFill>
-                <a:latin typeface="微软雅黑" panose="020B0503020204020204" charset="-122"/>
-                <a:ea typeface="微软雅黑" panose="020B0503020204020204" charset="-122"/>
-                <a:cs typeface="微软雅黑" panose="020B0503020204020204" charset="-122"/>
-              </a:rPr>
-              <a:t>P1 消融补 2 个额外 seed（需重训）</a:t>
-            </a:r>
-            <a:endParaRPr sz="1200" b="0">
-              <a:solidFill>
-                <a:srgbClr val="595959"/>
-              </a:solidFill>
-              <a:latin typeface="微软雅黑" panose="020B0503020204020204" charset="-122"/>
-              <a:ea typeface="微软雅黑" panose="020B0503020204020204" charset="-122"/>
-              <a:cs typeface="微软雅黑" panose="020B0503020204020204" charset="-122"/>
-            </a:endParaRPr>
-          </a:p>
-          <a:p>
-            <a:pPr lvl="1">
-              <a:lnSpc>
-                <a:spcPct val="118000"/>
-              </a:lnSpc>
-              <a:spcAft>
-                <a:spcPts val="400"/>
-              </a:spcAft>
-            </a:pPr>
-            <a:r>
-              <a:rPr sz="1200" b="0">
-                <a:solidFill>
-                  <a:srgbClr val="595959"/>
-                </a:solidFill>
-                <a:latin typeface="微软雅黑" panose="020B0503020204020204" charset="-122"/>
-                <a:ea typeface="微软雅黑" panose="020B0503020204020204" charset="-122"/>
-                <a:cs typeface="微软雅黑" panose="020B0503020204020204" charset="-122"/>
-              </a:rPr>
-              <a:t>P1 阈值口径改为 MACs；延迟改用 batch=32 吞吐量</a:t>
-            </a:r>
-            <a:endParaRPr sz="1200" b="0">
-              <a:solidFill>
-                <a:srgbClr val="595959"/>
-              </a:solidFill>
-              <a:latin typeface="微软雅黑" panose="020B0503020204020204" charset="-122"/>
-              <a:ea typeface="微软雅黑" panose="020B0503020204020204" charset="-122"/>
-              <a:cs typeface="微软雅黑" panose="020B0503020204020204" charset="-122"/>
-            </a:endParaRPr>
-          </a:p>
-          <a:p>
-            <a:pPr lvl="1">
-              <a:lnSpc>
-                <a:spcPct val="118000"/>
-              </a:lnSpc>
-              <a:spcAft>
-                <a:spcPts val="400"/>
-              </a:spcAft>
-            </a:pPr>
-            <a:r>
-              <a:rPr sz="1200" b="0">
-                <a:solidFill>
-                  <a:srgbClr val="595959"/>
-                </a:solidFill>
-                <a:latin typeface="微软雅黑" panose="020B0503020204020204" charset="-122"/>
-                <a:ea typeface="微软雅黑" panose="020B0503020204020204" charset="-122"/>
-                <a:cs typeface="微软雅黑" panose="020B0503020204020204" charset="-122"/>
-              </a:rPr>
-              <a:t>P2 补充端到端延迟（含读图、预处理、后处理）</a:t>
-            </a:r>
-            <a:endParaRPr sz="1200" b="0">
-              <a:solidFill>
-                <a:srgbClr val="595959"/>
-              </a:solidFill>
-              <a:latin typeface="微软雅黑" panose="020B0503020204020204" charset="-122"/>
-              <a:ea typeface="微软雅黑" panose="020B0503020204020204" charset="-122"/>
-              <a:cs typeface="微软雅黑" panose="020B0503020204020204" charset="-122"/>
-            </a:endParaRPr>
-          </a:p>
-        </p:txBody>
-      </p:sp>
+        </p:nvGraphicFramePr>
+        <p:xfrm>
+          <a:off x="548640" y="1828800"/>
+          <a:ext cx="11109959" cy="3291840"/>
+        </p:xfrm>
+        <a:graphic>
+          <a:graphicData uri="http://schemas.openxmlformats.org/drawingml/2006/table">
+            <a:tbl>
+              <a:tblPr firstRow="1" bandRow="1">
+                <a:tableStyleId>{5C22544A-7EE6-4342-B048-85BDC9FD1C3A}</a:tableStyleId>
+              </a:tblPr>
+              <a:tblGrid>
+                <a:gridCol w="4666183"/>
+                <a:gridCol w="6443776"/>
+              </a:tblGrid>
+              <a:tr h="822960">
+                <a:tc>
+                  <a:txBody>
+                    <a:bodyPr/>
+                    <a:lstStyle/>
+                    <a:p>
+                      <a:pPr algn="l"/>
+                      <a:r>
+                        <a:rPr sz="1500" b="1">
+                          <a:solidFill>
+                            <a:srgbClr val="FFFFFF"/>
+                          </a:solidFill>
+                          <a:latin typeface="微软雅黑"/>
+                          <a:ea typeface="微软雅黑"/>
+                          <a:cs typeface="微软雅黑"/>
+                        </a:rPr>
+                        <a:t>实验</a:t>
+                      </a:r>
+                    </a:p>
+                  </a:txBody>
+                  <a:tcPr anchor="ctr" marL="109728" marR="73152">
+                    <a:solidFill>
+                      <a:srgbClr val="1F3864"/>
+                    </a:solidFill>
+                  </a:tcPr>
+                </a:tc>
+                <a:tc>
+                  <a:txBody>
+                    <a:bodyPr/>
+                    <a:lstStyle/>
+                    <a:p>
+                      <a:pPr algn="l"/>
+                      <a:r>
+                        <a:rPr sz="1500" b="1">
+                          <a:solidFill>
+                            <a:srgbClr val="FFFFFF"/>
+                          </a:solidFill>
+                          <a:latin typeface="微软雅黑"/>
+                          <a:ea typeface="微软雅黑"/>
+                          <a:cs typeface="微软雅黑"/>
+                        </a:rPr>
+                        <a:t>学习与调研</a:t>
+                      </a:r>
+                    </a:p>
+                  </a:txBody>
+                  <a:tcPr anchor="ctr" marL="109728" marR="73152">
+                    <a:solidFill>
+                      <a:srgbClr val="1F3864"/>
+                    </a:solidFill>
+                  </a:tcPr>
+                </a:tc>
+              </a:tr>
+              <a:tr h="822960">
+                <a:tc>
+                  <a:txBody>
+                    <a:bodyPr/>
+                    <a:lstStyle/>
+                    <a:p>
+                      <a:pPr algn="l"/>
+                      <a:r>
+                        <a:rPr sz="1400" b="1">
+                          <a:solidFill>
+                            <a:srgbClr val="262626"/>
+                          </a:solidFill>
+                          <a:latin typeface="微软雅黑"/>
+                          <a:ea typeface="微软雅黑"/>
+                          <a:cs typeface="微软雅黑"/>
+                        </a:rPr>
+                        <a:t>10.09 – 10.12　完成主体代码</a:t>
+                      </a:r>
+                    </a:p>
+                  </a:txBody>
+                  <a:tcPr anchor="ctr" marL="109728" marR="73152">
+                    <a:solidFill>
+                      <a:srgbClr val="F2F6FB"/>
+                    </a:solidFill>
+                  </a:tcPr>
+                </a:tc>
+                <a:tc>
+                  <a:txBody>
+                    <a:bodyPr/>
+                    <a:lstStyle/>
+                    <a:p>
+                      <a:pPr algn="l"/>
+                      <a:r>
+                        <a:rPr sz="1400" b="0">
+                          <a:solidFill>
+                            <a:srgbClr val="262626"/>
+                          </a:solidFill>
+                          <a:latin typeface="微软雅黑"/>
+                          <a:ea typeface="微软雅黑"/>
+                          <a:cs typeface="微软雅黑"/>
+                        </a:rPr>
+                        <a:t>10.12 – 10.14　查找资料（主要为 CSDN 的解析）</a:t>
+                      </a:r>
+                    </a:p>
+                  </a:txBody>
+                  <a:tcPr anchor="ctr" marL="109728" marR="73152">
+                    <a:solidFill>
+                      <a:srgbClr val="F2F6FB"/>
+                    </a:solidFill>
+                  </a:tcPr>
+                </a:tc>
+              </a:tr>
+              <a:tr h="822960">
+                <a:tc>
+                  <a:txBody>
+                    <a:bodyPr/>
+                    <a:lstStyle/>
+                    <a:p>
+                      <a:pPr algn="l"/>
+                      <a:r>
+                        <a:rPr sz="1400" b="1">
+                          <a:solidFill>
+                            <a:srgbClr val="262626"/>
+                          </a:solidFill>
+                          <a:latin typeface="微软雅黑"/>
+                          <a:ea typeface="微软雅黑"/>
+                          <a:cs typeface="微软雅黑"/>
+                        </a:rPr>
+                        <a:t>10.13 – 10.14　修复 bug 并跑出最终的实验</a:t>
+                      </a:r>
+                    </a:p>
+                  </a:txBody>
+                  <a:tcPr anchor="ctr" marL="109728" marR="73152">
+                    <a:solidFill>
+                      <a:srgbClr val="FFFFFF"/>
+                    </a:solidFill>
+                  </a:tcPr>
+                </a:tc>
+                <a:tc>
+                  <a:txBody>
+                    <a:bodyPr/>
+                    <a:lstStyle/>
+                    <a:p>
+                      <a:pPr algn="l"/>
+                      <a:r>
+                        <a:rPr sz="1400" b="0">
+                          <a:solidFill>
+                            <a:srgbClr val="262626"/>
+                          </a:solidFill>
+                          <a:latin typeface="微软雅黑"/>
+                          <a:ea typeface="微软雅黑"/>
+                          <a:cs typeface="微软雅黑"/>
+                        </a:rPr>
+                        <a:t>10.14 – 10.16　根据资料内容总结笔记</a:t>
+                      </a:r>
+                    </a:p>
+                  </a:txBody>
+                  <a:tcPr anchor="ctr" marL="109728" marR="73152">
+                    <a:solidFill>
+                      <a:srgbClr val="FFFFFF"/>
+                    </a:solidFill>
+                  </a:tcPr>
+                </a:tc>
+              </a:tr>
+              <a:tr h="822960">
+                <a:tc>
+                  <a:txBody>
+                    <a:bodyPr/>
+                    <a:lstStyle/>
+                    <a:p>
+                      <a:pPr algn="l"/>
+                      <a:r>
+                        <a:rPr sz="1400" b="1">
+                          <a:solidFill>
+                            <a:srgbClr val="262626"/>
+                          </a:solidFill>
+                          <a:latin typeface="微软雅黑"/>
+                          <a:ea typeface="微软雅黑"/>
+                          <a:cs typeface="微软雅黑"/>
+                        </a:rPr>
+                        <a:t>10.16　AI debug 并补充单张推理脚本</a:t>
+                      </a:r>
+                    </a:p>
+                  </a:txBody>
+                  <a:tcPr anchor="ctr" marL="109728" marR="73152">
+                    <a:solidFill>
+                      <a:srgbClr val="F2F6FB"/>
+                    </a:solidFill>
+                  </a:tcPr>
+                </a:tc>
+                <a:tc>
+                  <a:txBody>
+                    <a:bodyPr/>
+                    <a:lstStyle/>
+                    <a:p>
+                      <a:pPr algn="l"/>
+                      <a:r>
+                        <a:rPr sz="1400" b="0">
+                          <a:solidFill>
+                            <a:srgbClr val="262626"/>
+                          </a:solidFill>
+                          <a:latin typeface="微软雅黑"/>
+                          <a:ea typeface="微软雅黑"/>
+                          <a:cs typeface="微软雅黑"/>
+                        </a:rPr>
+                        <a:t>10.15 – 10.16　用 AI 设计问题、自己回答，以完善理解</a:t>
+                      </a:r>
+                    </a:p>
+                  </a:txBody>
+                  <a:tcPr anchor="ctr" marL="109728" marR="73152">
+                    <a:solidFill>
+                      <a:srgbClr val="F2F6FB"/>
+                    </a:solidFill>
+                  </a:tcPr>
+                </a:tc>
+              </a:tr>
+            </a:tbl>
+          </a:graphicData>
+        </a:graphic>
+      </p:graphicFrame>
     </p:spTree>
   </p:cSld>
   <p:clrMapOvr>

--- a/docs/第一周汇报.pptx
+++ b/docs/第一周汇报.pptx
@@ -12746,7 +12746,7 @@
                 <a:ea typeface="微软雅黑" panose="020B0503020204020204" charset="-122"/>
                 <a:cs typeface="微软雅黑" panose="020B0503020204020204" charset="-122"/>
               </a:rPr>
-              <a:t>三个模型独立地判成同一个错误类别 n04515003（管状喂食器）</a:t>
+              <a:t>三个模型独立地判成同一个错误类别 n04515003</a:t>
             </a:r>
             <a:endParaRPr sz="1400" b="1">
               <a:solidFill>
@@ -12775,7 +12775,40 @@
                 <a:ea typeface="微软雅黑" panose="020B0503020204020204" charset="-122"/>
                 <a:cs typeface="微软雅黑" panose="020B0503020204020204" charset="-122"/>
               </a:rPr>
-              <a:t>技术归因：鸟只占画面很小一块，而背景中的喂食器尺寸大、纹理显著、与某训练类别高度相似；三个模型都采用全局平均池化 + 单标签 softmax，对“显著性最大的区域”敏感，容易被大背景目标主导</a:t>
+              <a:t>技术归因：鸟只占画面很小一块，而背景中的喂食器尺寸大、纹理显著</a:t>
+            </a:r>
+            <a:r>
+              <a:rPr lang="en-US" sz="1400" b="0">
+                <a:solidFill>
+                  <a:srgbClr val="1F3864"/>
+                </a:solidFill>
+                <a:latin typeface="微软雅黑" panose="020B0503020204020204" charset="-122"/>
+                <a:ea typeface="微软雅黑" panose="020B0503020204020204" charset="-122"/>
+                <a:cs typeface="微软雅黑" panose="020B0503020204020204" charset="-122"/>
+              </a:rPr>
+              <a:t>,</a:t>
+            </a:r>
+            <a:r>
+              <a:rPr lang="zh-CN" altLang="en-US" sz="1400" b="0">
+                <a:solidFill>
+                  <a:srgbClr val="1F3864"/>
+                </a:solidFill>
+                <a:latin typeface="微软雅黑" panose="020B0503020204020204" charset="-122"/>
+                <a:ea typeface="微软雅黑" panose="020B0503020204020204" charset="-122"/>
+                <a:cs typeface="微软雅黑" panose="020B0503020204020204" charset="-122"/>
+              </a:rPr>
+              <a:t>模型</a:t>
+            </a:r>
+            <a:r>
+              <a:rPr sz="1400" b="0">
+                <a:solidFill>
+                  <a:srgbClr val="1F3864"/>
+                </a:solidFill>
+                <a:latin typeface="微软雅黑" panose="020B0503020204020204" charset="-122"/>
+                <a:ea typeface="微软雅黑" panose="020B0503020204020204" charset="-122"/>
+                <a:cs typeface="微软雅黑" panose="020B0503020204020204" charset="-122"/>
+              </a:rPr>
+              <a:t>被大背景目标主导</a:t>
             </a:r>
             <a:endParaRPr sz="1400" b="0">
               <a:solidFill>
@@ -12795,75 +12828,6 @@
                 <a:spcPts val="600"/>
               </a:spcAft>
             </a:pPr>
-            <a:r>
-              <a:rPr sz="1400" b="0">
-                <a:solidFill>
-                  <a:srgbClr val="1F3864"/>
-                </a:solidFill>
-                <a:latin typeface="微软雅黑" panose="020B0503020204020204" charset="-122"/>
-                <a:ea typeface="微软雅黑" panose="020B0503020204020204" charset="-122"/>
-                <a:cs typeface="微软雅黑" panose="020B0503020204020204" charset="-122"/>
-              </a:rPr>
-              <a:t>三个模型独立做出同样错误 → 不是随机误差，而是该类样本的共性失败模式</a:t>
-            </a:r>
-            <a:endParaRPr sz="1400" b="0">
-              <a:solidFill>
-                <a:srgbClr val="1F3864"/>
-              </a:solidFill>
-              <a:latin typeface="微软雅黑" panose="020B0503020204020204" charset="-122"/>
-              <a:ea typeface="微软雅黑" panose="020B0503020204020204" charset="-122"/>
-              <a:cs typeface="微软雅黑" panose="020B0503020204020204" charset="-122"/>
-            </a:endParaRPr>
-          </a:p>
-          <a:p>
-            <a:pPr>
-              <a:lnSpc>
-                <a:spcPct val="118000"/>
-              </a:lnSpc>
-              <a:spcAft>
-                <a:spcPts val="600"/>
-              </a:spcAft>
-            </a:pPr>
-            <a:r>
-              <a:rPr sz="1400" b="0">
-                <a:solidFill>
-                  <a:srgbClr val="1F3864"/>
-                </a:solidFill>
-                <a:latin typeface="微软雅黑" panose="020B0503020204020204" charset="-122"/>
-                <a:ea typeface="微软雅黑" panose="020B0503020204020204" charset="-122"/>
-                <a:cs typeface="微软雅黑" panose="020B0503020204020204" charset="-122"/>
-              </a:rPr>
-              <a:t>改进方向：训练期加入 RandomResizedCrop / CutMix，让模型见到更多“目标被裁剪放大”与“局部遮挡”的形态；推理期可尝试多尺度或中心裁剪 TTA</a:t>
-            </a:r>
-            <a:endParaRPr sz="1400" b="0">
-              <a:solidFill>
-                <a:srgbClr val="1F3864"/>
-              </a:solidFill>
-              <a:latin typeface="微软雅黑" panose="020B0503020204020204" charset="-122"/>
-              <a:ea typeface="微软雅黑" panose="020B0503020204020204" charset="-122"/>
-              <a:cs typeface="微软雅黑" panose="020B0503020204020204" charset="-122"/>
-            </a:endParaRPr>
-          </a:p>
-          <a:p>
-            <a:pPr>
-              <a:lnSpc>
-                <a:spcPct val="118000"/>
-              </a:lnSpc>
-              <a:spcAft>
-                <a:spcPts val="600"/>
-              </a:spcAft>
-            </a:pPr>
-            <a:r>
-              <a:rPr sz="1400" b="0">
-                <a:solidFill>
-                  <a:srgbClr val="1F3864"/>
-                </a:solidFill>
-                <a:latin typeface="微软雅黑" panose="020B0503020204020204" charset="-122"/>
-                <a:ea typeface="微软雅黑" panose="020B0503020204020204" charset="-122"/>
-                <a:cs typeface="微软雅黑" panose="020B0503020204020204" charset="-122"/>
-              </a:rPr>
-              <a:t>附带发现：ResNet-50 的 Top-1 logit 为 3.045，ConvNeXt-Tiny 为 7.266（相差 2.4 倍）。若要做置信度阈值、温度标定或 OOD 检测，两个模型不能共用同一套阈值</a:t>
-            </a:r>
             <a:endParaRPr sz="1400" b="0">
               <a:solidFill>
                 <a:srgbClr val="1F3864"/>
@@ -13111,15 +13075,23 @@
                           <a:solidFill>
                             <a:srgbClr val="FFFFFF"/>
                           </a:solidFill>
-                          <a:latin typeface="微软雅黑"/>
-                          <a:ea typeface="微软雅黑"/>
-                          <a:cs typeface="微软雅黑"/>
+                          <a:latin typeface="微软雅黑" panose="020B0503020204020204" charset="-122"/>
+                          <a:ea typeface="微软雅黑" panose="020B0503020204020204" charset="-122"/>
+                          <a:cs typeface="微软雅黑" panose="020B0503020204020204" charset="-122"/>
                         </a:rPr>
                         <a:t>实验</a:t>
                       </a:r>
+                      <a:endParaRPr sz="1500" b="1">
+                        <a:solidFill>
+                          <a:srgbClr val="FFFFFF"/>
+                        </a:solidFill>
+                        <a:latin typeface="微软雅黑" panose="020B0503020204020204" charset="-122"/>
+                        <a:ea typeface="微软雅黑" panose="020B0503020204020204" charset="-122"/>
+                        <a:cs typeface="微软雅黑" panose="020B0503020204020204" charset="-122"/>
+                      </a:endParaRPr>
                     </a:p>
                   </a:txBody>
-                  <a:tcPr anchor="ctr" marL="109728" marR="73152">
+                  <a:tcPr marL="109728" marR="73152" anchor="ctr">
                     <a:solidFill>
                       <a:srgbClr val="1F3864"/>
                     </a:solidFill>
@@ -13136,15 +13108,23 @@
                           <a:solidFill>
                             <a:srgbClr val="FFFFFF"/>
                           </a:solidFill>
-                          <a:latin typeface="微软雅黑"/>
-                          <a:ea typeface="微软雅黑"/>
-                          <a:cs typeface="微软雅黑"/>
+                          <a:latin typeface="微软雅黑" panose="020B0503020204020204" charset="-122"/>
+                          <a:ea typeface="微软雅黑" panose="020B0503020204020204" charset="-122"/>
+                          <a:cs typeface="微软雅黑" panose="020B0503020204020204" charset="-122"/>
                         </a:rPr>
                         <a:t>学习与调研</a:t>
                       </a:r>
+                      <a:endParaRPr sz="1500" b="1">
+                        <a:solidFill>
+                          <a:srgbClr val="FFFFFF"/>
+                        </a:solidFill>
+                        <a:latin typeface="微软雅黑" panose="020B0503020204020204" charset="-122"/>
+                        <a:ea typeface="微软雅黑" panose="020B0503020204020204" charset="-122"/>
+                        <a:cs typeface="微软雅黑" panose="020B0503020204020204" charset="-122"/>
+                      </a:endParaRPr>
                     </a:p>
                   </a:txBody>
-                  <a:tcPr anchor="ctr" marL="109728" marR="73152">
+                  <a:tcPr marL="109728" marR="73152" anchor="ctr">
                     <a:solidFill>
                       <a:srgbClr val="1F3864"/>
                     </a:solidFill>
@@ -13163,15 +13143,23 @@
                           <a:solidFill>
                             <a:srgbClr val="262626"/>
                           </a:solidFill>
-                          <a:latin typeface="微软雅黑"/>
-                          <a:ea typeface="微软雅黑"/>
-                          <a:cs typeface="微软雅黑"/>
+                          <a:latin typeface="微软雅黑" panose="020B0503020204020204" charset="-122"/>
+                          <a:ea typeface="微软雅黑" panose="020B0503020204020204" charset="-122"/>
+                          <a:cs typeface="微软雅黑" panose="020B0503020204020204" charset="-122"/>
                         </a:rPr>
                         <a:t>10.09 – 10.12　完成主体代码</a:t>
                       </a:r>
+                      <a:endParaRPr sz="1400" b="1">
+                        <a:solidFill>
+                          <a:srgbClr val="262626"/>
+                        </a:solidFill>
+                        <a:latin typeface="微软雅黑" panose="020B0503020204020204" charset="-122"/>
+                        <a:ea typeface="微软雅黑" panose="020B0503020204020204" charset="-122"/>
+                        <a:cs typeface="微软雅黑" panose="020B0503020204020204" charset="-122"/>
+                      </a:endParaRPr>
                     </a:p>
                   </a:txBody>
-                  <a:tcPr anchor="ctr" marL="109728" marR="73152">
+                  <a:tcPr marL="109728" marR="73152" anchor="ctr">
                     <a:solidFill>
                       <a:srgbClr val="F2F6FB"/>
                     </a:solidFill>
@@ -13188,15 +13176,23 @@
                           <a:solidFill>
                             <a:srgbClr val="262626"/>
                           </a:solidFill>
-                          <a:latin typeface="微软雅黑"/>
-                          <a:ea typeface="微软雅黑"/>
-                          <a:cs typeface="微软雅黑"/>
+                          <a:latin typeface="微软雅黑" panose="020B0503020204020204" charset="-122"/>
+                          <a:ea typeface="微软雅黑" panose="020B0503020204020204" charset="-122"/>
+                          <a:cs typeface="微软雅黑" panose="020B0503020204020204" charset="-122"/>
                         </a:rPr>
                         <a:t>10.12 – 10.14　查找资料（主要为 CSDN 的解析）</a:t>
                       </a:r>
+                      <a:endParaRPr sz="1400" b="0">
+                        <a:solidFill>
+                          <a:srgbClr val="262626"/>
+                        </a:solidFill>
+                        <a:latin typeface="微软雅黑" panose="020B0503020204020204" charset="-122"/>
+                        <a:ea typeface="微软雅黑" panose="020B0503020204020204" charset="-122"/>
+                        <a:cs typeface="微软雅黑" panose="020B0503020204020204" charset="-122"/>
+                      </a:endParaRPr>
                     </a:p>
                   </a:txBody>
-                  <a:tcPr anchor="ctr" marL="109728" marR="73152">
+                  <a:tcPr marL="109728" marR="73152" anchor="ctr">
                     <a:solidFill>
                       <a:srgbClr val="F2F6FB"/>
                     </a:solidFill>
@@ -13215,15 +13211,23 @@
                           <a:solidFill>
                             <a:srgbClr val="262626"/>
                           </a:solidFill>
-                          <a:latin typeface="微软雅黑"/>
-                          <a:ea typeface="微软雅黑"/>
-                          <a:cs typeface="微软雅黑"/>
+                          <a:latin typeface="微软雅黑" panose="020B0503020204020204" charset="-122"/>
+                          <a:ea typeface="微软雅黑" panose="020B0503020204020204" charset="-122"/>
+                          <a:cs typeface="微软雅黑" panose="020B0503020204020204" charset="-122"/>
                         </a:rPr>
                         <a:t>10.13 – 10.14　修复 bug 并跑出最终的实验</a:t>
                       </a:r>
+                      <a:endParaRPr sz="1400" b="1">
+                        <a:solidFill>
+                          <a:srgbClr val="262626"/>
+                        </a:solidFill>
+                        <a:latin typeface="微软雅黑" panose="020B0503020204020204" charset="-122"/>
+                        <a:ea typeface="微软雅黑" panose="020B0503020204020204" charset="-122"/>
+                        <a:cs typeface="微软雅黑" panose="020B0503020204020204" charset="-122"/>
+                      </a:endParaRPr>
                     </a:p>
                   </a:txBody>
-                  <a:tcPr anchor="ctr" marL="109728" marR="73152">
+                  <a:tcPr marL="109728" marR="73152" anchor="ctr">
                     <a:solidFill>
                       <a:srgbClr val="FFFFFF"/>
                     </a:solidFill>
@@ -13240,15 +13244,23 @@
                           <a:solidFill>
                             <a:srgbClr val="262626"/>
                           </a:solidFill>
-                          <a:latin typeface="微软雅黑"/>
-                          <a:ea typeface="微软雅黑"/>
-                          <a:cs typeface="微软雅黑"/>
+                          <a:latin typeface="微软雅黑" panose="020B0503020204020204" charset="-122"/>
+                          <a:ea typeface="微软雅黑" panose="020B0503020204020204" charset="-122"/>
+                          <a:cs typeface="微软雅黑" panose="020B0503020204020204" charset="-122"/>
                         </a:rPr>
                         <a:t>10.14 – 10.16　根据资料内容总结笔记</a:t>
                       </a:r>
+                      <a:endParaRPr sz="1400" b="0">
+                        <a:solidFill>
+                          <a:srgbClr val="262626"/>
+                        </a:solidFill>
+                        <a:latin typeface="微软雅黑" panose="020B0503020204020204" charset="-122"/>
+                        <a:ea typeface="微软雅黑" panose="020B0503020204020204" charset="-122"/>
+                        <a:cs typeface="微软雅黑" panose="020B0503020204020204" charset="-122"/>
+                      </a:endParaRPr>
                     </a:p>
                   </a:txBody>
-                  <a:tcPr anchor="ctr" marL="109728" marR="73152">
+                  <a:tcPr marL="109728" marR="73152" anchor="ctr">
                     <a:solidFill>
                       <a:srgbClr val="FFFFFF"/>
                     </a:solidFill>
@@ -13267,15 +13279,23 @@
                           <a:solidFill>
                             <a:srgbClr val="262626"/>
                           </a:solidFill>
-                          <a:latin typeface="微软雅黑"/>
-                          <a:ea typeface="微软雅黑"/>
-                          <a:cs typeface="微软雅黑"/>
+                          <a:latin typeface="微软雅黑" panose="020B0503020204020204" charset="-122"/>
+                          <a:ea typeface="微软雅黑" panose="020B0503020204020204" charset="-122"/>
+                          <a:cs typeface="微软雅黑" panose="020B0503020204020204" charset="-122"/>
                         </a:rPr>
                         <a:t>10.16　AI debug 并补充单张推理脚本</a:t>
                       </a:r>
+                      <a:endParaRPr sz="1400" b="1">
+                        <a:solidFill>
+                          <a:srgbClr val="262626"/>
+                        </a:solidFill>
+                        <a:latin typeface="微软雅黑" panose="020B0503020204020204" charset="-122"/>
+                        <a:ea typeface="微软雅黑" panose="020B0503020204020204" charset="-122"/>
+                        <a:cs typeface="微软雅黑" panose="020B0503020204020204" charset="-122"/>
+                      </a:endParaRPr>
                     </a:p>
                   </a:txBody>
-                  <a:tcPr anchor="ctr" marL="109728" marR="73152">
+                  <a:tcPr marL="109728" marR="73152" anchor="ctr">
                     <a:solidFill>
                       <a:srgbClr val="F2F6FB"/>
                     </a:solidFill>
@@ -13292,15 +13312,23 @@
                           <a:solidFill>
                             <a:srgbClr val="262626"/>
                           </a:solidFill>
-                          <a:latin typeface="微软雅黑"/>
-                          <a:ea typeface="微软雅黑"/>
-                          <a:cs typeface="微软雅黑"/>
+                          <a:latin typeface="微软雅黑" panose="020B0503020204020204" charset="-122"/>
+                          <a:ea typeface="微软雅黑" panose="020B0503020204020204" charset="-122"/>
+                          <a:cs typeface="微软雅黑" panose="020B0503020204020204" charset="-122"/>
                         </a:rPr>
                         <a:t>10.15 – 10.16　用 AI 设计问题、自己回答，以完善理解</a:t>
                       </a:r>
+                      <a:endParaRPr sz="1400" b="0">
+                        <a:solidFill>
+                          <a:srgbClr val="262626"/>
+                        </a:solidFill>
+                        <a:latin typeface="微软雅黑" panose="020B0503020204020204" charset="-122"/>
+                        <a:ea typeface="微软雅黑" panose="020B0503020204020204" charset="-122"/>
+                        <a:cs typeface="微软雅黑" panose="020B0503020204020204" charset="-122"/>
+                      </a:endParaRPr>
                     </a:p>
                   </a:txBody>
-                  <a:tcPr anchor="ctr" marL="109728" marR="73152">
+                  <a:tcPr marL="109728" marR="73152" anchor="ctr">
                     <a:solidFill>
                       <a:srgbClr val="F2F6FB"/>
                     </a:solidFill>

--- a/docs/第一周汇报.pptx
+++ b/docs/第一周汇报.pptx
@@ -5,31 +5,31 @@
     <p:sldMasterId id="2147483648" r:id="rId1"/>
   </p:sldMasterIdLst>
   <p:sldIdLst>
-    <p:sldId id="256" r:id="rId3"/>
-    <p:sldId id="257" r:id="rId4"/>
-    <p:sldId id="258" r:id="rId5"/>
-    <p:sldId id="259" r:id="rId6"/>
-    <p:sldId id="260" r:id="rId7"/>
-    <p:sldId id="261" r:id="rId8"/>
-    <p:sldId id="262" r:id="rId9"/>
-    <p:sldId id="263" r:id="rId10"/>
-    <p:sldId id="264" r:id="rId11"/>
-    <p:sldId id="265" r:id="rId12"/>
-    <p:sldId id="266" r:id="rId13"/>
-    <p:sldId id="267" r:id="rId14"/>
-    <p:sldId id="268" r:id="rId15"/>
-    <p:sldId id="269" r:id="rId16"/>
-    <p:sldId id="270" r:id="rId17"/>
-    <p:sldId id="271" r:id="rId18"/>
-    <p:sldId id="272" r:id="rId19"/>
-    <p:sldId id="273" r:id="rId20"/>
-    <p:sldId id="274" r:id="rId21"/>
-    <p:sldId id="275" r:id="rId22"/>
-    <p:sldId id="276" r:id="rId23"/>
-    <p:sldId id="277" r:id="rId24"/>
-    <p:sldId id="278" r:id="rId25"/>
+    <p:sldId id="256" r:id="rId2"/>
+    <p:sldId id="257" r:id="rId3"/>
+    <p:sldId id="258" r:id="rId4"/>
+    <p:sldId id="259" r:id="rId5"/>
+    <p:sldId id="260" r:id="rId6"/>
+    <p:sldId id="261" r:id="rId7"/>
+    <p:sldId id="262" r:id="rId8"/>
+    <p:sldId id="263" r:id="rId9"/>
+    <p:sldId id="264" r:id="rId10"/>
+    <p:sldId id="265" r:id="rId11"/>
+    <p:sldId id="266" r:id="rId12"/>
+    <p:sldId id="267" r:id="rId13"/>
+    <p:sldId id="268" r:id="rId14"/>
+    <p:sldId id="269" r:id="rId15"/>
+    <p:sldId id="270" r:id="rId16"/>
+    <p:sldId id="271" r:id="rId17"/>
+    <p:sldId id="272" r:id="rId18"/>
+    <p:sldId id="273" r:id="rId19"/>
+    <p:sldId id="274" r:id="rId20"/>
+    <p:sldId id="275" r:id="rId21"/>
+    <p:sldId id="276" r:id="rId22"/>
+    <p:sldId id="277" r:id="rId23"/>
+    <p:sldId id="278" r:id="rId24"/>
   </p:sldIdLst>
-  <p:sldSz cx="12191365" cy="6858000" type="screen4x3"/>
+  <p:sldSz cx="12192000" cy="6858000"/>
   <p:notesSz cx="6858000" cy="9144000"/>
   <p:defaultTextStyle>
     <a:defPPr>
@@ -326,6 +326,7 @@
           <a:p>
             <a:fld id="{5BCAD085-E8A6-8845-BD4E-CB4CCA059FC4}" type="datetimeFigureOut">
               <a:rPr lang="en-US" smtClean="0"/>
+              <a:t>10/16/2026</a:t>
             </a:fld>
             <a:endParaRPr lang="en-US"/>
           </a:p>
@@ -367,6 +368,7 @@
           <a:p>
             <a:fld id="{C1FF6DA9-008F-8B48-92A6-B652298478BF}" type="slidenum">
               <a:rPr lang="en-US" smtClean="0"/>
+              <a:t>‹#›</a:t>
             </a:fld>
             <a:endParaRPr lang="en-US"/>
           </a:p>
@@ -440,7 +442,6 @@
               <a:rPr lang="en-US" smtClean="0"/>
               <a:t>Click to edit Master text styles</a:t>
             </a:r>
-            <a:endParaRPr lang="en-US" smtClean="0"/>
           </a:p>
           <a:p>
             <a:pPr lvl="1"/>
@@ -448,7 +449,6 @@
               <a:rPr lang="en-US" smtClean="0"/>
               <a:t>Second level</a:t>
             </a:r>
-            <a:endParaRPr lang="en-US" smtClean="0"/>
           </a:p>
           <a:p>
             <a:pPr lvl="2"/>
@@ -456,7 +456,6 @@
               <a:rPr lang="en-US" smtClean="0"/>
               <a:t>Third level</a:t>
             </a:r>
-            <a:endParaRPr lang="en-US" smtClean="0"/>
           </a:p>
           <a:p>
             <a:pPr lvl="3"/>
@@ -464,7 +463,6 @@
               <a:rPr lang="en-US" smtClean="0"/>
               <a:t>Fourth level</a:t>
             </a:r>
-            <a:endParaRPr lang="en-US" smtClean="0"/>
           </a:p>
           <a:p>
             <a:pPr lvl="4"/>
@@ -493,6 +491,7 @@
           <a:p>
             <a:fld id="{5BCAD085-E8A6-8845-BD4E-CB4CCA059FC4}" type="datetimeFigureOut">
               <a:rPr lang="en-US" smtClean="0"/>
+              <a:t>10/16/2026</a:t>
             </a:fld>
             <a:endParaRPr lang="en-US"/>
           </a:p>
@@ -534,6 +533,7 @@
           <a:p>
             <a:fld id="{C1FF6DA9-008F-8B48-92A6-B652298478BF}" type="slidenum">
               <a:rPr lang="en-US" smtClean="0"/>
+              <a:t>‹#›</a:t>
             </a:fld>
             <a:endParaRPr lang="en-US"/>
           </a:p>
@@ -617,7 +617,6 @@
               <a:rPr lang="en-US" smtClean="0"/>
               <a:t>Click to edit Master text styles</a:t>
             </a:r>
-            <a:endParaRPr lang="en-US" smtClean="0"/>
           </a:p>
           <a:p>
             <a:pPr lvl="1"/>
@@ -625,7 +624,6 @@
               <a:rPr lang="en-US" smtClean="0"/>
               <a:t>Second level</a:t>
             </a:r>
-            <a:endParaRPr lang="en-US" smtClean="0"/>
           </a:p>
           <a:p>
             <a:pPr lvl="2"/>
@@ -633,7 +631,6 @@
               <a:rPr lang="en-US" smtClean="0"/>
               <a:t>Third level</a:t>
             </a:r>
-            <a:endParaRPr lang="en-US" smtClean="0"/>
           </a:p>
           <a:p>
             <a:pPr lvl="3"/>
@@ -641,7 +638,6 @@
               <a:rPr lang="en-US" smtClean="0"/>
               <a:t>Fourth level</a:t>
             </a:r>
-            <a:endParaRPr lang="en-US" smtClean="0"/>
           </a:p>
           <a:p>
             <a:pPr lvl="4"/>
@@ -670,6 +666,7 @@
           <a:p>
             <a:fld id="{5BCAD085-E8A6-8845-BD4E-CB4CCA059FC4}" type="datetimeFigureOut">
               <a:rPr lang="en-US" smtClean="0"/>
+              <a:t>10/16/2026</a:t>
             </a:fld>
             <a:endParaRPr lang="en-US"/>
           </a:p>
@@ -711,6 +708,7 @@
           <a:p>
             <a:fld id="{C1FF6DA9-008F-8B48-92A6-B652298478BF}" type="slidenum">
               <a:rPr lang="en-US" smtClean="0"/>
+              <a:t>‹#›</a:t>
             </a:fld>
             <a:endParaRPr lang="en-US"/>
           </a:p>
@@ -784,7 +782,6 @@
               <a:rPr lang="en-US" smtClean="0"/>
               <a:t>Click to edit Master text styles</a:t>
             </a:r>
-            <a:endParaRPr lang="en-US" smtClean="0"/>
           </a:p>
           <a:p>
             <a:pPr lvl="1"/>
@@ -792,7 +789,6 @@
               <a:rPr lang="en-US" smtClean="0"/>
               <a:t>Second level</a:t>
             </a:r>
-            <a:endParaRPr lang="en-US" smtClean="0"/>
           </a:p>
           <a:p>
             <a:pPr lvl="2"/>
@@ -800,7 +796,6 @@
               <a:rPr lang="en-US" smtClean="0"/>
               <a:t>Third level</a:t>
             </a:r>
-            <a:endParaRPr lang="en-US" smtClean="0"/>
           </a:p>
           <a:p>
             <a:pPr lvl="3"/>
@@ -808,7 +803,6 @@
               <a:rPr lang="en-US" smtClean="0"/>
               <a:t>Fourth level</a:t>
             </a:r>
-            <a:endParaRPr lang="en-US" smtClean="0"/>
           </a:p>
           <a:p>
             <a:pPr lvl="4"/>
@@ -837,6 +831,7 @@
           <a:p>
             <a:fld id="{5BCAD085-E8A6-8845-BD4E-CB4CCA059FC4}" type="datetimeFigureOut">
               <a:rPr lang="en-US" smtClean="0"/>
+              <a:t>10/16/2026</a:t>
             </a:fld>
             <a:endParaRPr lang="en-US"/>
           </a:p>
@@ -878,6 +873,7 @@
           <a:p>
             <a:fld id="{C1FF6DA9-008F-8B48-92A6-B652298478BF}" type="slidenum">
               <a:rPr lang="en-US" smtClean="0"/>
+              <a:t>‹#›</a:t>
             </a:fld>
             <a:endParaRPr lang="en-US"/>
           </a:p>
@@ -1056,7 +1052,6 @@
               <a:rPr lang="en-US" smtClean="0"/>
               <a:t>Click to edit Master text styles</a:t>
             </a:r>
-            <a:endParaRPr lang="en-US" smtClean="0"/>
           </a:p>
         </p:txBody>
       </p:sp>
@@ -1077,6 +1072,7 @@
           <a:p>
             <a:fld id="{5BCAD085-E8A6-8845-BD4E-CB4CCA059FC4}" type="datetimeFigureOut">
               <a:rPr lang="en-US" smtClean="0"/>
+              <a:t>10/16/2026</a:t>
             </a:fld>
             <a:endParaRPr lang="en-US"/>
           </a:p>
@@ -1118,6 +1114,7 @@
           <a:p>
             <a:fld id="{C1FF6DA9-008F-8B48-92A6-B652298478BF}" type="slidenum">
               <a:rPr lang="en-US" smtClean="0"/>
+              <a:t>‹#›</a:t>
             </a:fld>
             <a:endParaRPr lang="en-US"/>
           </a:p>
@@ -1224,7 +1221,6 @@
               <a:rPr lang="en-US" smtClean="0"/>
               <a:t>Click to edit Master text styles</a:t>
             </a:r>
-            <a:endParaRPr lang="en-US" smtClean="0"/>
           </a:p>
           <a:p>
             <a:pPr lvl="1"/>
@@ -1232,7 +1228,6 @@
               <a:rPr lang="en-US" smtClean="0"/>
               <a:t>Second level</a:t>
             </a:r>
-            <a:endParaRPr lang="en-US" smtClean="0"/>
           </a:p>
           <a:p>
             <a:pPr lvl="2"/>
@@ -1240,7 +1235,6 @@
               <a:rPr lang="en-US" smtClean="0"/>
               <a:t>Third level</a:t>
             </a:r>
-            <a:endParaRPr lang="en-US" smtClean="0"/>
           </a:p>
           <a:p>
             <a:pPr lvl="3"/>
@@ -1248,7 +1242,6 @@
               <a:rPr lang="en-US" smtClean="0"/>
               <a:t>Fourth level</a:t>
             </a:r>
-            <a:endParaRPr lang="en-US" smtClean="0"/>
           </a:p>
           <a:p>
             <a:pPr lvl="4"/>
@@ -1313,7 +1306,6 @@
               <a:rPr lang="en-US" smtClean="0"/>
               <a:t>Click to edit Master text styles</a:t>
             </a:r>
-            <a:endParaRPr lang="en-US" smtClean="0"/>
           </a:p>
           <a:p>
             <a:pPr lvl="1"/>
@@ -1321,7 +1313,6 @@
               <a:rPr lang="en-US" smtClean="0"/>
               <a:t>Second level</a:t>
             </a:r>
-            <a:endParaRPr lang="en-US" smtClean="0"/>
           </a:p>
           <a:p>
             <a:pPr lvl="2"/>
@@ -1329,7 +1320,6 @@
               <a:rPr lang="en-US" smtClean="0"/>
               <a:t>Third level</a:t>
             </a:r>
-            <a:endParaRPr lang="en-US" smtClean="0"/>
           </a:p>
           <a:p>
             <a:pPr lvl="3"/>
@@ -1337,7 +1327,6 @@
               <a:rPr lang="en-US" smtClean="0"/>
               <a:t>Fourth level</a:t>
             </a:r>
-            <a:endParaRPr lang="en-US" smtClean="0"/>
           </a:p>
           <a:p>
             <a:pPr lvl="4"/>
@@ -1366,6 +1355,7 @@
           <a:p>
             <a:fld id="{5BCAD085-E8A6-8845-BD4E-CB4CCA059FC4}" type="datetimeFigureOut">
               <a:rPr lang="en-US" smtClean="0"/>
+              <a:t>10/16/2026</a:t>
             </a:fld>
             <a:endParaRPr lang="en-US"/>
           </a:p>
@@ -1407,6 +1397,7 @@
           <a:p>
             <a:fld id="{C1FF6DA9-008F-8B48-92A6-B652298478BF}" type="slidenum">
               <a:rPr lang="en-US" smtClean="0"/>
+              <a:t>‹#›</a:t>
             </a:fld>
             <a:endParaRPr lang="en-US"/>
           </a:p>
@@ -1526,7 +1517,6 @@
               <a:rPr lang="en-US" smtClean="0"/>
               <a:t>Click to edit Master text styles</a:t>
             </a:r>
-            <a:endParaRPr lang="en-US" smtClean="0"/>
           </a:p>
         </p:txBody>
       </p:sp>
@@ -1583,7 +1573,6 @@
               <a:rPr lang="en-US" smtClean="0"/>
               <a:t>Click to edit Master text styles</a:t>
             </a:r>
-            <a:endParaRPr lang="en-US" smtClean="0"/>
           </a:p>
           <a:p>
             <a:pPr lvl="1"/>
@@ -1591,7 +1580,6 @@
               <a:rPr lang="en-US" smtClean="0"/>
               <a:t>Second level</a:t>
             </a:r>
-            <a:endParaRPr lang="en-US" smtClean="0"/>
           </a:p>
           <a:p>
             <a:pPr lvl="2"/>
@@ -1599,7 +1587,6 @@
               <a:rPr lang="en-US" smtClean="0"/>
               <a:t>Third level</a:t>
             </a:r>
-            <a:endParaRPr lang="en-US" smtClean="0"/>
           </a:p>
           <a:p>
             <a:pPr lvl="3"/>
@@ -1607,7 +1594,6 @@
               <a:rPr lang="en-US" smtClean="0"/>
               <a:t>Fourth level</a:t>
             </a:r>
-            <a:endParaRPr lang="en-US" smtClean="0"/>
           </a:p>
           <a:p>
             <a:pPr lvl="4"/>
@@ -1681,7 +1667,6 @@
               <a:rPr lang="en-US" smtClean="0"/>
               <a:t>Click to edit Master text styles</a:t>
             </a:r>
-            <a:endParaRPr lang="en-US" smtClean="0"/>
           </a:p>
         </p:txBody>
       </p:sp>
@@ -1738,7 +1723,6 @@
               <a:rPr lang="en-US" smtClean="0"/>
               <a:t>Click to edit Master text styles</a:t>
             </a:r>
-            <a:endParaRPr lang="en-US" smtClean="0"/>
           </a:p>
           <a:p>
             <a:pPr lvl="1"/>
@@ -1746,7 +1730,6 @@
               <a:rPr lang="en-US" smtClean="0"/>
               <a:t>Second level</a:t>
             </a:r>
-            <a:endParaRPr lang="en-US" smtClean="0"/>
           </a:p>
           <a:p>
             <a:pPr lvl="2"/>
@@ -1754,7 +1737,6 @@
               <a:rPr lang="en-US" smtClean="0"/>
               <a:t>Third level</a:t>
             </a:r>
-            <a:endParaRPr lang="en-US" smtClean="0"/>
           </a:p>
           <a:p>
             <a:pPr lvl="3"/>
@@ -1762,7 +1744,6 @@
               <a:rPr lang="en-US" smtClean="0"/>
               <a:t>Fourth level</a:t>
             </a:r>
-            <a:endParaRPr lang="en-US" smtClean="0"/>
           </a:p>
           <a:p>
             <a:pPr lvl="4"/>
@@ -1791,6 +1772,7 @@
           <a:p>
             <a:fld id="{5BCAD085-E8A6-8845-BD4E-CB4CCA059FC4}" type="datetimeFigureOut">
               <a:rPr lang="en-US" smtClean="0"/>
+              <a:t>10/16/2026</a:t>
             </a:fld>
             <a:endParaRPr lang="en-US"/>
           </a:p>
@@ -1832,6 +1814,7 @@
           <a:p>
             <a:fld id="{C1FF6DA9-008F-8B48-92A6-B652298478BF}" type="slidenum">
               <a:rPr lang="en-US" smtClean="0"/>
+              <a:t>‹#›</a:t>
             </a:fld>
             <a:endParaRPr lang="en-US"/>
           </a:p>
@@ -1902,6 +1885,7 @@
           <a:p>
             <a:fld id="{5BCAD085-E8A6-8845-BD4E-CB4CCA059FC4}" type="datetimeFigureOut">
               <a:rPr lang="en-US" smtClean="0"/>
+              <a:t>10/16/2026</a:t>
             </a:fld>
             <a:endParaRPr lang="en-US"/>
           </a:p>
@@ -1943,6 +1927,7 @@
           <a:p>
             <a:fld id="{C1FF6DA9-008F-8B48-92A6-B652298478BF}" type="slidenum">
               <a:rPr lang="en-US" smtClean="0"/>
+              <a:t>‹#›</a:t>
             </a:fld>
             <a:endParaRPr lang="en-US"/>
           </a:p>
@@ -1990,6 +1975,7 @@
           <a:p>
             <a:fld id="{5BCAD085-E8A6-8845-BD4E-CB4CCA059FC4}" type="datetimeFigureOut">
               <a:rPr lang="en-US" smtClean="0"/>
+              <a:t>10/16/2026</a:t>
             </a:fld>
             <a:endParaRPr lang="en-US"/>
           </a:p>
@@ -2031,6 +2017,7 @@
           <a:p>
             <a:fld id="{C1FF6DA9-008F-8B48-92A6-B652298478BF}" type="slidenum">
               <a:rPr lang="en-US" smtClean="0"/>
+              <a:t>‹#›</a:t>
             </a:fld>
             <a:endParaRPr lang="en-US"/>
           </a:p>
@@ -2146,7 +2133,6 @@
               <a:rPr lang="en-US" smtClean="0"/>
               <a:t>Click to edit Master text styles</a:t>
             </a:r>
-            <a:endParaRPr lang="en-US" smtClean="0"/>
           </a:p>
           <a:p>
             <a:pPr lvl="1"/>
@@ -2154,7 +2140,6 @@
               <a:rPr lang="en-US" smtClean="0"/>
               <a:t>Second level</a:t>
             </a:r>
-            <a:endParaRPr lang="en-US" smtClean="0"/>
           </a:p>
           <a:p>
             <a:pPr lvl="2"/>
@@ -2162,7 +2147,6 @@
               <a:rPr lang="en-US" smtClean="0"/>
               <a:t>Third level</a:t>
             </a:r>
-            <a:endParaRPr lang="en-US" smtClean="0"/>
           </a:p>
           <a:p>
             <a:pPr lvl="3"/>
@@ -2170,7 +2154,6 @@
               <a:rPr lang="en-US" smtClean="0"/>
               <a:t>Fourth level</a:t>
             </a:r>
-            <a:endParaRPr lang="en-US" smtClean="0"/>
           </a:p>
           <a:p>
             <a:pPr lvl="4"/>
@@ -2244,7 +2227,6 @@
               <a:rPr lang="en-US" smtClean="0"/>
               <a:t>Click to edit Master text styles</a:t>
             </a:r>
-            <a:endParaRPr lang="en-US" smtClean="0"/>
           </a:p>
         </p:txBody>
       </p:sp>
@@ -2265,6 +2247,7 @@
           <a:p>
             <a:fld id="{5BCAD085-E8A6-8845-BD4E-CB4CCA059FC4}" type="datetimeFigureOut">
               <a:rPr lang="en-US" smtClean="0"/>
+              <a:t>10/16/2026</a:t>
             </a:fld>
             <a:endParaRPr lang="en-US"/>
           </a:p>
@@ -2306,6 +2289,7 @@
           <a:p>
             <a:fld id="{C1FF6DA9-008F-8B48-92A6-B652298478BF}" type="slidenum">
               <a:rPr lang="en-US" smtClean="0"/>
+              <a:t>‹#›</a:t>
             </a:fld>
             <a:endParaRPr lang="en-US"/>
           </a:p>
@@ -2491,7 +2475,6 @@
               <a:rPr lang="en-US" smtClean="0"/>
               <a:t>Click to edit Master text styles</a:t>
             </a:r>
-            <a:endParaRPr lang="en-US" smtClean="0"/>
           </a:p>
         </p:txBody>
       </p:sp>
@@ -2512,6 +2495,7 @@
           <a:p>
             <a:fld id="{5BCAD085-E8A6-8845-BD4E-CB4CCA059FC4}" type="datetimeFigureOut">
               <a:rPr lang="en-US" smtClean="0"/>
+              <a:t>10/16/2026</a:t>
             </a:fld>
             <a:endParaRPr lang="en-US"/>
           </a:p>
@@ -2553,6 +2537,7 @@
           <a:p>
             <a:fld id="{C1FF6DA9-008F-8B48-92A6-B652298478BF}" type="slidenum">
               <a:rPr lang="en-US" smtClean="0"/>
+              <a:t>‹#›</a:t>
             </a:fld>
             <a:endParaRPr lang="en-US"/>
           </a:p>
@@ -2651,7 +2636,6 @@
               <a:rPr lang="en-US" smtClean="0"/>
               <a:t>Click to edit Master text styles</a:t>
             </a:r>
-            <a:endParaRPr lang="en-US" smtClean="0"/>
           </a:p>
           <a:p>
             <a:pPr lvl="1"/>
@@ -2659,7 +2643,6 @@
               <a:rPr lang="en-US" smtClean="0"/>
               <a:t>Second level</a:t>
             </a:r>
-            <a:endParaRPr lang="en-US" smtClean="0"/>
           </a:p>
           <a:p>
             <a:pPr lvl="2"/>
@@ -2667,7 +2650,6 @@
               <a:rPr lang="en-US" smtClean="0"/>
               <a:t>Third level</a:t>
             </a:r>
-            <a:endParaRPr lang="en-US" smtClean="0"/>
           </a:p>
           <a:p>
             <a:pPr lvl="3"/>
@@ -2675,7 +2657,6 @@
               <a:rPr lang="en-US" smtClean="0"/>
               <a:t>Fourth level</a:t>
             </a:r>
-            <a:endParaRPr lang="en-US" smtClean="0"/>
           </a:p>
           <a:p>
             <a:pPr lvl="4"/>
@@ -2722,6 +2703,7 @@
           <a:p>
             <a:fld id="{5BCAD085-E8A6-8845-BD4E-CB4CCA059FC4}" type="datetimeFigureOut">
               <a:rPr lang="en-US" smtClean="0"/>
+              <a:t>10/16/2026</a:t>
             </a:fld>
             <a:endParaRPr lang="en-US"/>
           </a:p>
@@ -2799,6 +2781,7 @@
           <a:p>
             <a:fld id="{C1FF6DA9-008F-8B48-92A6-B652298478BF}" type="slidenum">
               <a:rPr lang="en-US" smtClean="0"/>
+              <a:t>‹#›</a:t>
             </a:fld>
             <a:endParaRPr lang="en-US"/>
           </a:p>
@@ -3082,7 +3065,14 @@
         <p:cNvGrpSpPr/>
         <p:nvPr/>
       </p:nvGrpSpPr>
-      <p:grpSpPr/>
+      <p:grpSpPr>
+        <a:xfrm>
+          <a:off x="0" y="0"/>
+          <a:ext cx="0" cy="0"/>
+          <a:chOff x="0" y="0"/>
+          <a:chExt cx="0" cy="0"/>
+        </a:xfrm>
+      </p:grpSpPr>
       <p:sp>
         <p:nvSpPr>
           <p:cNvPr id="2" name="Rectangle 1"/>
@@ -3123,6 +3113,7 @@
           <a:lstStyle/>
           <a:p>
             <a:pPr algn="ctr"/>
+            <a:endParaRPr/>
           </a:p>
         </p:txBody>
       </p:sp>
@@ -3164,14 +3155,6 @@
               </a:rPr>
               <a:t>第一周：图像分类算法</a:t>
             </a:r>
-            <a:endParaRPr sz="4000" b="1">
-              <a:solidFill>
-                <a:srgbClr val="FFFFFF"/>
-              </a:solidFill>
-              <a:latin typeface="微软雅黑" panose="020B0503020204020204" charset="-122"/>
-              <a:ea typeface="微软雅黑" panose="020B0503020204020204" charset="-122"/>
-              <a:cs typeface="微软雅黑" panose="020B0503020204020204" charset="-122"/>
-            </a:endParaRPr>
           </a:p>
         </p:txBody>
       </p:sp>
@@ -3213,14 +3196,6 @@
               </a:rPr>
               <a:t>学习总结与实验汇报</a:t>
             </a:r>
-            <a:endParaRPr sz="2200" b="0">
-              <a:solidFill>
-                <a:srgbClr val="BDD7EE"/>
-              </a:solidFill>
-              <a:latin typeface="微软雅黑" panose="020B0503020204020204" charset="-122"/>
-              <a:ea typeface="微软雅黑" panose="020B0503020204020204" charset="-122"/>
-              <a:cs typeface="微软雅黑" panose="020B0503020204020204" charset="-122"/>
-            </a:endParaRPr>
           </a:p>
         </p:txBody>
       </p:sp>
@@ -3262,14 +3237,6 @@
               </a:rPr>
               <a:t>统一训练框架 · 三模型横向对比 · Cross-Entropy vs Label Smoothing 消融</a:t>
             </a:r>
-            <a:endParaRPr sz="1700" b="0">
-              <a:solidFill>
-                <a:srgbClr val="595959"/>
-              </a:solidFill>
-              <a:latin typeface="微软雅黑" panose="020B0503020204020204" charset="-122"/>
-              <a:ea typeface="微软雅黑" panose="020B0503020204020204" charset="-122"/>
-              <a:cs typeface="微软雅黑" panose="020B0503020204020204" charset="-122"/>
-            </a:endParaRPr>
           </a:p>
         </p:txBody>
       </p:sp>
@@ -3311,14 +3278,6 @@
               </a:rPr>
               <a:t>数据集：Mini-ImageNet-100      模型：ResNet-50 / MobileNetV3-Large / ConvNeXt-Tiny</a:t>
             </a:r>
-            <a:endParaRPr sz="1500" b="0">
-              <a:solidFill>
-                <a:srgbClr val="595959"/>
-              </a:solidFill>
-              <a:latin typeface="微软雅黑" panose="020B0503020204020204" charset="-122"/>
-              <a:ea typeface="微软雅黑" panose="020B0503020204020204" charset="-122"/>
-              <a:cs typeface="微软雅黑" panose="020B0503020204020204" charset="-122"/>
-            </a:endParaRPr>
           </a:p>
         </p:txBody>
       </p:sp>
@@ -3350,7 +3309,7 @@
               </a:lnSpc>
             </a:pPr>
             <a:r>
-              <a:rPr sz="1500" b="0">
+              <a:rPr sz="1500" b="0" dirty="0" smtClean="0">
                 <a:solidFill>
                   <a:srgbClr val="595959"/>
                 </a:solidFill>
@@ -3358,16 +3317,19 @@
                 <a:ea typeface="微软雅黑" panose="020B0503020204020204" charset="-122"/>
                 <a:cs typeface="微软雅黑" panose="020B0503020204020204" charset="-122"/>
               </a:rPr>
-              <a:t>汇报人：___________          日期：2026-10-16</a:t>
-            </a:r>
-            <a:endParaRPr sz="1500" b="0">
-              <a:solidFill>
-                <a:srgbClr val="595959"/>
-              </a:solidFill>
-              <a:latin typeface="微软雅黑" panose="020B0503020204020204" charset="-122"/>
-              <a:ea typeface="微软雅黑" panose="020B0503020204020204" charset="-122"/>
-              <a:cs typeface="微软雅黑" panose="020B0503020204020204" charset="-122"/>
-            </a:endParaRPr>
+              <a:t>日期</a:t>
+            </a:r>
+            <a:r>
+              <a:rPr sz="1500" b="0" dirty="0">
+                <a:solidFill>
+                  <a:srgbClr val="595959"/>
+                </a:solidFill>
+                <a:latin typeface="微软雅黑" panose="020B0503020204020204" charset="-122"/>
+                <a:ea typeface="微软雅黑" panose="020B0503020204020204" charset="-122"/>
+                <a:cs typeface="微软雅黑" panose="020B0503020204020204" charset="-122"/>
+              </a:rPr>
+              <a:t>：2026-10-16</a:t>
+            </a:r>
           </a:p>
         </p:txBody>
       </p:sp>
@@ -3388,7 +3350,14 @@
         <p:cNvGrpSpPr/>
         <p:nvPr/>
       </p:nvGrpSpPr>
-      <p:grpSpPr/>
+      <p:grpSpPr>
+        <a:xfrm>
+          <a:off x="0" y="0"/>
+          <a:ext cx="0" cy="0"/>
+          <a:chOff x="0" y="0"/>
+          <a:chExt cx="0" cy="0"/>
+        </a:xfrm>
+      </p:grpSpPr>
       <p:sp>
         <p:nvSpPr>
           <p:cNvPr id="2" name="Rectangle 1"/>
@@ -3429,6 +3398,7 @@
           <a:lstStyle/>
           <a:p>
             <a:pPr algn="ctr"/>
+            <a:endParaRPr/>
           </a:p>
         </p:txBody>
       </p:sp>
@@ -3470,14 +3440,6 @@
               </a:rPr>
               <a:t>MobileNetV3：深度分离卷积 + NAS 搜索 + SE 模块</a:t>
             </a:r>
-            <a:endParaRPr sz="2700" b="1">
-              <a:solidFill>
-                <a:srgbClr val="1F3864"/>
-              </a:solidFill>
-              <a:latin typeface="微软雅黑" panose="020B0503020204020204" charset="-122"/>
-              <a:ea typeface="微软雅黑" panose="020B0503020204020204" charset="-122"/>
-              <a:cs typeface="微软雅黑" panose="020B0503020204020204" charset="-122"/>
-            </a:endParaRPr>
           </a:p>
         </p:txBody>
       </p:sp>
@@ -3519,14 +3481,6 @@
               </a:rPr>
               <a:t>轻量化架构</a:t>
             </a:r>
-            <a:endParaRPr sz="1350" b="0">
-              <a:solidFill>
-                <a:srgbClr val="595959"/>
-              </a:solidFill>
-              <a:latin typeface="微软雅黑" panose="020B0503020204020204" charset="-122"/>
-              <a:ea typeface="微软雅黑" panose="020B0503020204020204" charset="-122"/>
-              <a:cs typeface="微软雅黑" panose="020B0503020204020204" charset="-122"/>
-            </a:endParaRPr>
           </a:p>
         </p:txBody>
       </p:sp>
@@ -3570,6 +3524,7 @@
           <a:lstStyle/>
           <a:p>
             <a:pPr algn="ctr"/>
+            <a:endParaRPr/>
           </a:p>
         </p:txBody>
       </p:sp>
@@ -3614,14 +3569,6 @@
               </a:rPr>
               <a:t>1. 深度可分离卷积</a:t>
             </a:r>
-            <a:endParaRPr sz="1500" b="1">
-              <a:solidFill>
-                <a:srgbClr val="1F3864"/>
-              </a:solidFill>
-              <a:latin typeface="微软雅黑" panose="020B0503020204020204" charset="-122"/>
-              <a:ea typeface="微软雅黑" panose="020B0503020204020204" charset="-122"/>
-              <a:cs typeface="微软雅黑" panose="020B0503020204020204" charset="-122"/>
-            </a:endParaRPr>
           </a:p>
           <a:p>
             <a:pPr lvl="1">
@@ -3643,14 +3590,6 @@
               </a:rPr>
               <a:t>深度卷积 + 逐点卷积。卷积核、输出通道越大，相对标准卷积越压缩。</a:t>
             </a:r>
-            <a:endParaRPr sz="1300" b="0">
-              <a:solidFill>
-                <a:srgbClr val="595959"/>
-              </a:solidFill>
-              <a:latin typeface="微软雅黑" panose="020B0503020204020204" charset="-122"/>
-              <a:ea typeface="微软雅黑" panose="020B0503020204020204" charset="-122"/>
-              <a:cs typeface="微软雅黑" panose="020B0503020204020204" charset="-122"/>
-            </a:endParaRPr>
           </a:p>
           <a:p>
             <a:pPr lvl="1">
@@ -3672,14 +3611,6 @@
               </a:rPr>
               <a:t>实际延迟不一定下降。</a:t>
             </a:r>
-            <a:endParaRPr sz="1300" b="0">
-              <a:solidFill>
-                <a:srgbClr val="595959"/>
-              </a:solidFill>
-              <a:latin typeface="微软雅黑" panose="020B0503020204020204" charset="-122"/>
-              <a:ea typeface="微软雅黑" panose="020B0503020204020204" charset="-122"/>
-              <a:cs typeface="微软雅黑" panose="020B0503020204020204" charset="-122"/>
-            </a:endParaRPr>
           </a:p>
           <a:p>
             <a:pPr lvl="1">
@@ -3701,14 +3632,6 @@
               </a:rPr>
               <a:t>相比标准卷积，深度可分离卷积算术强度（flops/bytes）降低，在同样字节搬运量下，标准卷积能进行更多计算。</a:t>
             </a:r>
-            <a:endParaRPr sz="1300" b="0">
-              <a:solidFill>
-                <a:srgbClr val="595959"/>
-              </a:solidFill>
-              <a:latin typeface="微软雅黑" panose="020B0503020204020204" charset="-122"/>
-              <a:ea typeface="微软雅黑" panose="020B0503020204020204" charset="-122"/>
-              <a:cs typeface="微软雅黑" panose="020B0503020204020204" charset="-122"/>
-            </a:endParaRPr>
           </a:p>
           <a:p>
             <a:pPr lvl="1">
@@ -3730,14 +3653,6 @@
               </a:rPr>
               <a:t>DW 单任务量过小，并行度低。</a:t>
             </a:r>
-            <a:endParaRPr sz="1300" b="0">
-              <a:solidFill>
-                <a:srgbClr val="595959"/>
-              </a:solidFill>
-              <a:latin typeface="微软雅黑" panose="020B0503020204020204" charset="-122"/>
-              <a:ea typeface="微软雅黑" panose="020B0503020204020204" charset="-122"/>
-              <a:cs typeface="微软雅黑" panose="020B0503020204020204" charset="-122"/>
-            </a:endParaRPr>
           </a:p>
           <a:p>
             <a:pPr>
@@ -3759,14 +3674,6 @@
               </a:rPr>
               <a:t>2. SE 模块</a:t>
             </a:r>
-            <a:endParaRPr sz="1500" b="1">
-              <a:solidFill>
-                <a:srgbClr val="1F3864"/>
-              </a:solidFill>
-              <a:latin typeface="微软雅黑" panose="020B0503020204020204" charset="-122"/>
-              <a:ea typeface="微软雅黑" panose="020B0503020204020204" charset="-122"/>
-              <a:cs typeface="微软雅黑" panose="020B0503020204020204" charset="-122"/>
-            </a:endParaRPr>
           </a:p>
           <a:p>
             <a:pPr lvl="1">
@@ -3788,14 +3695,6 @@
               </a:rPr>
               <a:t>att = MLP(GAP(h, w))，将 att 按通道乘回特征层；插入在通道数多、分辨率低的特征层。</a:t>
             </a:r>
-            <a:endParaRPr sz="1300" b="0">
-              <a:solidFill>
-                <a:srgbClr val="595959"/>
-              </a:solidFill>
-              <a:latin typeface="微软雅黑" panose="020B0503020204020204" charset="-122"/>
-              <a:ea typeface="微软雅黑" panose="020B0503020204020204" charset="-122"/>
-              <a:cs typeface="微软雅黑" panose="020B0503020204020204" charset="-122"/>
-            </a:endParaRPr>
           </a:p>
           <a:p>
             <a:pPr>
@@ -3817,14 +3716,6 @@
               </a:rPr>
               <a:t>3. NAS 搜索</a:t>
             </a:r>
-            <a:endParaRPr sz="1500" b="1">
-              <a:solidFill>
-                <a:srgbClr val="1F3864"/>
-              </a:solidFill>
-              <a:latin typeface="微软雅黑" panose="020B0503020204020204" charset="-122"/>
-              <a:ea typeface="微软雅黑" panose="020B0503020204020204" charset="-122"/>
-              <a:cs typeface="微软雅黑" panose="020B0503020204020204" charset="-122"/>
-            </a:endParaRPr>
           </a:p>
           <a:p>
             <a:pPr lvl="1">
@@ -3846,14 +3737,6 @@
               </a:rPr>
               <a:t>搜索维度：卷积核大小 / 主干网络输出通道数与 MLP 隐藏层通道数比 / 主干网络输出通道数 / SE 放置位置。</a:t>
             </a:r>
-            <a:endParaRPr sz="1300" b="0">
-              <a:solidFill>
-                <a:srgbClr val="595959"/>
-              </a:solidFill>
-              <a:latin typeface="微软雅黑" panose="020B0503020204020204" charset="-122"/>
-              <a:ea typeface="微软雅黑" panose="020B0503020204020204" charset="-122"/>
-              <a:cs typeface="微软雅黑" panose="020B0503020204020204" charset="-122"/>
-            </a:endParaRPr>
           </a:p>
         </p:txBody>
       </p:sp>
@@ -3895,14 +3778,6 @@
               </a:rPr>
               <a:t>关键公式</a:t>
             </a:r>
-            <a:endParaRPr sz="1600" b="1">
-              <a:solidFill>
-                <a:srgbClr val="1F3864"/>
-              </a:solidFill>
-              <a:latin typeface="微软雅黑" panose="020B0503020204020204" charset="-122"/>
-              <a:ea typeface="微软雅黑" panose="020B0503020204020204" charset="-122"/>
-              <a:cs typeface="微软雅黑" panose="020B0503020204020204" charset="-122"/>
-            </a:endParaRPr>
           </a:p>
         </p:txBody>
       </p:sp>
@@ -3944,14 +3819,6 @@
               </a:rPr>
               <a:t>与标准卷积的计算量比</a:t>
             </a:r>
-            <a:endParaRPr sz="1200" b="0">
-              <a:solidFill>
-                <a:srgbClr val="595959"/>
-              </a:solidFill>
-              <a:latin typeface="微软雅黑" panose="020B0503020204020204" charset="-122"/>
-              <a:ea typeface="微软雅黑" panose="020B0503020204020204" charset="-122"/>
-              <a:cs typeface="微软雅黑" panose="020B0503020204020204" charset="-122"/>
-            </a:endParaRPr>
           </a:p>
         </p:txBody>
       </p:sp>
@@ -3964,7 +3831,7 @@
           <p:nvPr/>
         </p:nvPicPr>
         <p:blipFill>
-          <a:blip r:embed="rId1"/>
+          <a:blip r:embed="rId2"/>
           <a:stretch>
             <a:fillRect/>
           </a:stretch>
@@ -4017,14 +3884,6 @@
               </a:rPr>
               <a:t>NAS 目标函数（platform-aware）</a:t>
             </a:r>
-            <a:endParaRPr sz="1200" b="0">
-              <a:solidFill>
-                <a:srgbClr val="595959"/>
-              </a:solidFill>
-              <a:latin typeface="微软雅黑" panose="020B0503020204020204" charset="-122"/>
-              <a:ea typeface="微软雅黑" panose="020B0503020204020204" charset="-122"/>
-              <a:cs typeface="微软雅黑" panose="020B0503020204020204" charset="-122"/>
-            </a:endParaRPr>
           </a:p>
         </p:txBody>
       </p:sp>
@@ -4037,7 +3896,7 @@
           <p:nvPr/>
         </p:nvPicPr>
         <p:blipFill>
-          <a:blip r:embed="rId2"/>
+          <a:blip r:embed="rId3"/>
           <a:stretch>
             <a:fillRect/>
           </a:stretch>
@@ -4069,7 +3928,14 @@
         <p:cNvGrpSpPr/>
         <p:nvPr/>
       </p:nvGrpSpPr>
-      <p:grpSpPr/>
+      <p:grpSpPr>
+        <a:xfrm>
+          <a:off x="0" y="0"/>
+          <a:ext cx="0" cy="0"/>
+          <a:chOff x="0" y="0"/>
+          <a:chExt cx="0" cy="0"/>
+        </a:xfrm>
+      </p:grpSpPr>
       <p:sp>
         <p:nvSpPr>
           <p:cNvPr id="2" name="Rectangle 1"/>
@@ -4110,6 +3976,7 @@
           <a:lstStyle/>
           <a:p>
             <a:pPr algn="ctr"/>
+            <a:endParaRPr/>
           </a:p>
         </p:txBody>
       </p:sp>
@@ -4151,14 +4018,6 @@
               </a:rPr>
               <a:t>ShuffleNetV2：硬件友好度设计原则</a:t>
             </a:r>
-            <a:endParaRPr sz="2700" b="1">
-              <a:solidFill>
-                <a:srgbClr val="1F3864"/>
-              </a:solidFill>
-              <a:latin typeface="微软雅黑" panose="020B0503020204020204" charset="-122"/>
-              <a:ea typeface="微软雅黑" panose="020B0503020204020204" charset="-122"/>
-              <a:cs typeface="微软雅黑" panose="020B0503020204020204" charset="-122"/>
-            </a:endParaRPr>
           </a:p>
         </p:txBody>
       </p:sp>
@@ -4200,14 +4059,6 @@
               </a:rPr>
               <a:t>目标：提升算术强度</a:t>
             </a:r>
-            <a:endParaRPr sz="1350" b="0">
-              <a:solidFill>
-                <a:srgbClr val="595959"/>
-              </a:solidFill>
-              <a:latin typeface="微软雅黑" panose="020B0503020204020204" charset="-122"/>
-              <a:ea typeface="微软雅黑" panose="020B0503020204020204" charset="-122"/>
-              <a:cs typeface="微软雅黑" panose="020B0503020204020204" charset="-122"/>
-            </a:endParaRPr>
           </a:p>
         </p:txBody>
       </p:sp>
@@ -4251,6 +4102,7 @@
           <a:lstStyle/>
           <a:p>
             <a:pPr algn="ctr"/>
+            <a:endParaRPr/>
           </a:p>
         </p:txBody>
       </p:sp>
@@ -4295,14 +4147,6 @@
               </a:rPr>
               <a:t>G1 计算量一定，输入输出矩阵通道相同时内存访问代价最小</a:t>
             </a:r>
-            <a:endParaRPr sz="1500" b="1">
-              <a:solidFill>
-                <a:srgbClr val="1F3864"/>
-              </a:solidFill>
-              <a:latin typeface="微软雅黑" panose="020B0503020204020204" charset="-122"/>
-              <a:ea typeface="微软雅黑" panose="020B0503020204020204" charset="-122"/>
-              <a:cs typeface="微软雅黑" panose="020B0503020204020204" charset="-122"/>
-            </a:endParaRPr>
           </a:p>
           <a:p>
             <a:pPr lvl="1">
@@ -4324,14 +4168,6 @@
               </a:rPr>
               <a:t>basic block 将输入通道分为两组，一组直接输出，另一组经过深度可分离卷积输出，之后洗混通道，全程保持通道总数不变。</a:t>
             </a:r>
-            <a:endParaRPr sz="1300" b="0">
-              <a:solidFill>
-                <a:srgbClr val="595959"/>
-              </a:solidFill>
-              <a:latin typeface="微软雅黑" panose="020B0503020204020204" charset="-122"/>
-              <a:ea typeface="微软雅黑" panose="020B0503020204020204" charset="-122"/>
-              <a:cs typeface="微软雅黑" panose="020B0503020204020204" charset="-122"/>
-            </a:endParaRPr>
           </a:p>
           <a:p>
             <a:pPr>
@@ -4353,14 +4189,6 @@
               </a:rPr>
               <a:t>G2 组卷积分组数增加，内存访问增加</a:t>
             </a:r>
-            <a:endParaRPr sz="1500" b="1">
-              <a:solidFill>
-                <a:srgbClr val="1F3864"/>
-              </a:solidFill>
-              <a:latin typeface="微软雅黑" panose="020B0503020204020204" charset="-122"/>
-              <a:ea typeface="微软雅黑" panose="020B0503020204020204" charset="-122"/>
-              <a:cs typeface="微软雅黑" panose="020B0503020204020204" charset="-122"/>
-            </a:endParaRPr>
           </a:p>
           <a:p>
             <a:pPr lvl="1">
@@ -4382,14 +4210,6 @@
               </a:rPr>
               <a:t>相对于 v1，v2 去除了分组卷积。通道间交换信息由混洗承担，这个操作的 FLOPs 是 O(0)，mac 是 O(hwc)，卷积分组数为 1，mac 降低。</a:t>
             </a:r>
-            <a:endParaRPr sz="1300" b="0">
-              <a:solidFill>
-                <a:srgbClr val="595959"/>
-              </a:solidFill>
-              <a:latin typeface="微软雅黑" panose="020B0503020204020204" charset="-122"/>
-              <a:ea typeface="微软雅黑" panose="020B0503020204020204" charset="-122"/>
-              <a:cs typeface="微软雅黑" panose="020B0503020204020204" charset="-122"/>
-            </a:endParaRPr>
           </a:p>
           <a:p>
             <a:pPr>
@@ -4411,14 +4231,6 @@
               </a:rPr>
               <a:t>G3 网络越碎片化，并行度越低</a:t>
             </a:r>
-            <a:endParaRPr sz="1500" b="1">
-              <a:solidFill>
-                <a:srgbClr val="1F3864"/>
-              </a:solidFill>
-              <a:latin typeface="微软雅黑" panose="020B0503020204020204" charset="-122"/>
-              <a:ea typeface="微软雅黑" panose="020B0503020204020204" charset="-122"/>
-              <a:cs typeface="微软雅黑" panose="020B0503020204020204" charset="-122"/>
-            </a:endParaRPr>
           </a:p>
           <a:p>
             <a:pPr lvl="1">
@@ -4440,14 +4252,6 @@
               </a:rPr>
               <a:t>碎片化 = 一个 block 内独立算子过多 + kernel 过小；降低碎片化：减少独立算子数量，增大卷积核。</a:t>
             </a:r>
-            <a:endParaRPr sz="1300" b="0">
-              <a:solidFill>
-                <a:srgbClr val="595959"/>
-              </a:solidFill>
-              <a:latin typeface="微软雅黑" panose="020B0503020204020204" charset="-122"/>
-              <a:ea typeface="微软雅黑" panose="020B0503020204020204" charset="-122"/>
-              <a:cs typeface="微软雅黑" panose="020B0503020204020204" charset="-122"/>
-            </a:endParaRPr>
           </a:p>
           <a:p>
             <a:pPr>
@@ -4469,14 +4273,6 @@
               </a:rPr>
               <a:t>G4 逐元素操作在延迟中不可忽略，但是 flops 占比很低</a:t>
             </a:r>
-            <a:endParaRPr sz="1500" b="1">
-              <a:solidFill>
-                <a:srgbClr val="1F3864"/>
-              </a:solidFill>
-              <a:latin typeface="微软雅黑" panose="020B0503020204020204" charset="-122"/>
-              <a:ea typeface="微软雅黑" panose="020B0503020204020204" charset="-122"/>
-              <a:cs typeface="微软雅黑" panose="020B0503020204020204" charset="-122"/>
-            </a:endParaRPr>
           </a:p>
           <a:p>
             <a:pPr lvl="1">
@@ -4498,14 +4294,6 @@
               </a:rPr>
               <a:t>逐元素操作包括激活函数、归一化层、张量间对齐/广播、逐通道算子（DW、池化）。特点是 flops 小，但是需要读取整个张量，复用率低。</a:t>
             </a:r>
-            <a:endParaRPr sz="1300" b="0">
-              <a:solidFill>
-                <a:srgbClr val="595959"/>
-              </a:solidFill>
-              <a:latin typeface="微软雅黑" panose="020B0503020204020204" charset="-122"/>
-              <a:ea typeface="微软雅黑" panose="020B0503020204020204" charset="-122"/>
-              <a:cs typeface="微软雅黑" panose="020B0503020204020204" charset="-122"/>
-            </a:endParaRPr>
           </a:p>
         </p:txBody>
       </p:sp>
@@ -4526,7 +4314,14 @@
         <p:cNvGrpSpPr/>
         <p:nvPr/>
       </p:nvGrpSpPr>
-      <p:grpSpPr/>
+      <p:grpSpPr>
+        <a:xfrm>
+          <a:off x="0" y="0"/>
+          <a:ext cx="0" cy="0"/>
+          <a:chOff x="0" y="0"/>
+          <a:chExt cx="0" cy="0"/>
+        </a:xfrm>
+      </p:grpSpPr>
       <p:sp>
         <p:nvSpPr>
           <p:cNvPr id="2" name="Rectangle 1"/>
@@ -4567,6 +4362,7 @@
           <a:lstStyle/>
           <a:p>
             <a:pPr algn="ctr"/>
+            <a:endParaRPr/>
           </a:p>
         </p:txBody>
       </p:sp>
@@ -4608,14 +4404,6 @@
               </a:rPr>
               <a:t>Vision Transformer (ViT)</a:t>
             </a:r>
-            <a:endParaRPr sz="2700" b="1">
-              <a:solidFill>
-                <a:srgbClr val="1F3864"/>
-              </a:solidFill>
-              <a:latin typeface="微软雅黑" panose="020B0503020204020204" charset="-122"/>
-              <a:ea typeface="微软雅黑" panose="020B0503020204020204" charset="-122"/>
-              <a:cs typeface="微软雅黑" panose="020B0503020204020204" charset="-122"/>
-            </a:endParaRPr>
           </a:p>
         </p:txBody>
       </p:sp>
@@ -4657,14 +4445,6 @@
               </a:rPr>
               <a:t>Patch Embedding · Self-Attention · MAE · 与 CNN 的归纳偏置对比</a:t>
             </a:r>
-            <a:endParaRPr sz="1350" b="0">
-              <a:solidFill>
-                <a:srgbClr val="595959"/>
-              </a:solidFill>
-              <a:latin typeface="微软雅黑" panose="020B0503020204020204" charset="-122"/>
-              <a:ea typeface="微软雅黑" panose="020B0503020204020204" charset="-122"/>
-              <a:cs typeface="微软雅黑" panose="020B0503020204020204" charset="-122"/>
-            </a:endParaRPr>
           </a:p>
         </p:txBody>
       </p:sp>
@@ -4708,6 +4488,7 @@
           <a:lstStyle/>
           <a:p>
             <a:pPr algn="ctr"/>
+            <a:endParaRPr/>
           </a:p>
         </p:txBody>
       </p:sp>
@@ -4752,14 +4533,6 @@
               </a:rPr>
               <a:t>Patch Embedding</a:t>
             </a:r>
-            <a:endParaRPr sz="1500" b="1">
-              <a:solidFill>
-                <a:srgbClr val="1F3864"/>
-              </a:solidFill>
-              <a:latin typeface="微软雅黑" panose="020B0503020204020204" charset="-122"/>
-              <a:ea typeface="微软雅黑" panose="020B0503020204020204" charset="-122"/>
-              <a:cs typeface="微软雅黑" panose="020B0503020204020204" charset="-122"/>
-            </a:endParaRPr>
           </a:p>
           <a:p>
             <a:pPr lvl="1">
@@ -4781,14 +4554,6 @@
               </a:rPr>
               <a:t>进行核大小为 P、步幅为 S 的卷积，输出通道为 D。将 H、W 展平，输出为 (HW, D)。</a:t>
             </a:r>
-            <a:endParaRPr sz="1300" b="0">
-              <a:solidFill>
-                <a:srgbClr val="595959"/>
-              </a:solidFill>
-              <a:latin typeface="微软雅黑" panose="020B0503020204020204" charset="-122"/>
-              <a:ea typeface="微软雅黑" panose="020B0503020204020204" charset="-122"/>
-              <a:cs typeface="微软雅黑" panose="020B0503020204020204" charset="-122"/>
-            </a:endParaRPr>
           </a:p>
           <a:p>
             <a:pPr>
@@ -4810,14 +4575,6 @@
               </a:rPr>
               <a:t>Self-Attention</a:t>
             </a:r>
-            <a:endParaRPr sz="1500" b="1">
-              <a:solidFill>
-                <a:srgbClr val="1F3864"/>
-              </a:solidFill>
-              <a:latin typeface="微软雅黑" panose="020B0503020204020204" charset="-122"/>
-              <a:ea typeface="微软雅黑" panose="020B0503020204020204" charset="-122"/>
-              <a:cs typeface="微软雅黑" panose="020B0503020204020204" charset="-122"/>
-            </a:endParaRPr>
           </a:p>
           <a:p>
             <a:pPr lvl="1">
@@ -4839,14 +4596,6 @@
               </a:rPr>
               <a:t>将通道 D 经过线性投影得到 3D 的输出通道，按通道分组得到 Q、K、V（各 D 维），多头再分成 h 份；多头将 att 拼接回 D 维。</a:t>
             </a:r>
-            <a:endParaRPr sz="1300" b="0">
-              <a:solidFill>
-                <a:srgbClr val="595959"/>
-              </a:solidFill>
-              <a:latin typeface="微软雅黑" panose="020B0503020204020204" charset="-122"/>
-              <a:ea typeface="微软雅黑" panose="020B0503020204020204" charset="-122"/>
-              <a:cs typeface="微软雅黑" panose="020B0503020204020204" charset="-122"/>
-            </a:endParaRPr>
           </a:p>
           <a:p>
             <a:pPr>
@@ -4868,14 +4617,6 @@
               </a:rPr>
               <a:t>MAE</a:t>
             </a:r>
-            <a:endParaRPr sz="1500" b="1">
-              <a:solidFill>
-                <a:srgbClr val="1F3864"/>
-              </a:solidFill>
-              <a:latin typeface="微软雅黑" panose="020B0503020204020204" charset="-122"/>
-              <a:ea typeface="微软雅黑" panose="020B0503020204020204" charset="-122"/>
-              <a:cs typeface="微软雅黑" panose="020B0503020204020204" charset="-122"/>
-            </a:endParaRPr>
           </a:p>
           <a:p>
             <a:pPr lvl="1">
@@ -4897,14 +4638,6 @@
               </a:rPr>
               <a:t>对 patch 随机掩码，可见 token 加入位置编码送入编码器，使用轻量 Transformer 解码，计算重建损失。</a:t>
             </a:r>
-            <a:endParaRPr sz="1300" b="0">
-              <a:solidFill>
-                <a:srgbClr val="595959"/>
-              </a:solidFill>
-              <a:latin typeface="微软雅黑" panose="020B0503020204020204" charset="-122"/>
-              <a:ea typeface="微软雅黑" panose="020B0503020204020204" charset="-122"/>
-              <a:cs typeface="微软雅黑" panose="020B0503020204020204" charset="-122"/>
-            </a:endParaRPr>
           </a:p>
         </p:txBody>
       </p:sp>
@@ -4946,14 +4679,6 @@
               </a:rPr>
               <a:t>复杂度</a:t>
             </a:r>
-            <a:endParaRPr sz="1200" b="0">
-              <a:solidFill>
-                <a:srgbClr val="595959"/>
-              </a:solidFill>
-              <a:latin typeface="微软雅黑" panose="020B0503020204020204" charset="-122"/>
-              <a:ea typeface="微软雅黑" panose="020B0503020204020204" charset="-122"/>
-              <a:cs typeface="微软雅黑" panose="020B0503020204020204" charset="-122"/>
-            </a:endParaRPr>
           </a:p>
         </p:txBody>
       </p:sp>
@@ -4966,7 +4691,7 @@
           <p:nvPr/>
         </p:nvPicPr>
         <p:blipFill>
-          <a:blip r:embed="rId1"/>
+          <a:blip r:embed="rId2"/>
           <a:stretch>
             <a:fillRect/>
           </a:stretch>
@@ -5019,14 +4744,6 @@
               </a:rPr>
               <a:t>注意力公式</a:t>
             </a:r>
-            <a:endParaRPr sz="1200" b="0">
-              <a:solidFill>
-                <a:srgbClr val="595959"/>
-              </a:solidFill>
-              <a:latin typeface="微软雅黑" panose="020B0503020204020204" charset="-122"/>
-              <a:ea typeface="微软雅黑" panose="020B0503020204020204" charset="-122"/>
-              <a:cs typeface="微软雅黑" panose="020B0503020204020204" charset="-122"/>
-            </a:endParaRPr>
           </a:p>
         </p:txBody>
       </p:sp>
@@ -5039,7 +4756,7 @@
           <p:nvPr/>
         </p:nvPicPr>
         <p:blipFill>
-          <a:blip r:embed="rId2"/>
+          <a:blip r:embed="rId3"/>
           <a:stretch>
             <a:fillRect/>
           </a:stretch>
@@ -5073,9 +4790,27 @@
                 <a:tableStyleId>{5C22544A-7EE6-4342-B048-85BDC9FD1C3A}</a:tableStyleId>
               </a:tblPr>
               <a:tblGrid>
-                <a:gridCol w="1596043"/>
-                <a:gridCol w="4389120"/>
-                <a:gridCol w="4987636"/>
+                <a:gridCol w="1596043">
+                  <a:extLst>
+                    <a:ext uri="{9D8B030D-6E8A-4147-A177-3AD203B41FA5}">
+                      <a16:colId xmlns:a16="http://schemas.microsoft.com/office/drawing/2014/main" val="20000"/>
+                    </a:ext>
+                  </a:extLst>
+                </a:gridCol>
+                <a:gridCol w="4389120">
+                  <a:extLst>
+                    <a:ext uri="{9D8B030D-6E8A-4147-A177-3AD203B41FA5}">
+                      <a16:colId xmlns:a16="http://schemas.microsoft.com/office/drawing/2014/main" val="20001"/>
+                    </a:ext>
+                  </a:extLst>
+                </a:gridCol>
+                <a:gridCol w="4987636">
+                  <a:extLst>
+                    <a:ext uri="{9D8B030D-6E8A-4147-A177-3AD203B41FA5}">
+                      <a16:colId xmlns:a16="http://schemas.microsoft.com/office/drawing/2014/main" val="20002"/>
+                    </a:ext>
+                  </a:extLst>
+                </a:gridCol>
               </a:tblGrid>
               <a:tr h="365760">
                 <a:tc>
@@ -5095,14 +4830,6 @@
                         </a:rPr>
                         <a:t>归纳偏置</a:t>
                       </a:r>
-                      <a:endParaRPr sz="1250" b="1">
-                        <a:solidFill>
-                          <a:srgbClr val="FFFFFF"/>
-                        </a:solidFill>
-                        <a:latin typeface="微软雅黑" panose="020B0503020204020204" charset="-122"/>
-                        <a:ea typeface="微软雅黑" panose="020B0503020204020204" charset="-122"/>
-                        <a:cs typeface="微软雅黑" panose="020B0503020204020204" charset="-122"/>
-                      </a:endParaRPr>
                     </a:p>
                   </a:txBody>
                   <a:tcPr marL="54864" marR="54864" marT="18288" marB="18288" anchor="ctr">
@@ -5128,14 +4855,6 @@
                         </a:rPr>
                         <a:t>CNN</a:t>
                       </a:r>
-                      <a:endParaRPr sz="1250" b="1">
-                        <a:solidFill>
-                          <a:srgbClr val="FFFFFF"/>
-                        </a:solidFill>
-                        <a:latin typeface="微软雅黑" panose="020B0503020204020204" charset="-122"/>
-                        <a:ea typeface="微软雅黑" panose="020B0503020204020204" charset="-122"/>
-                        <a:cs typeface="微软雅黑" panose="020B0503020204020204" charset="-122"/>
-                      </a:endParaRPr>
                     </a:p>
                   </a:txBody>
                   <a:tcPr marL="54864" marR="54864" marT="18288" marB="18288" anchor="ctr">
@@ -5161,14 +4880,6 @@
                         </a:rPr>
                         <a:t>ViT</a:t>
                       </a:r>
-                      <a:endParaRPr sz="1250" b="1">
-                        <a:solidFill>
-                          <a:srgbClr val="FFFFFF"/>
-                        </a:solidFill>
-                        <a:latin typeface="微软雅黑" panose="020B0503020204020204" charset="-122"/>
-                        <a:ea typeface="微软雅黑" panose="020B0503020204020204" charset="-122"/>
-                        <a:cs typeface="微软雅黑" panose="020B0503020204020204" charset="-122"/>
-                      </a:endParaRPr>
                     </a:p>
                   </a:txBody>
                   <a:tcPr marL="54864" marR="54864" marT="18288" marB="18288" anchor="ctr">
@@ -5177,6 +4888,11 @@
                     </a:solidFill>
                   </a:tcPr>
                 </a:tc>
+                <a:extLst>
+                  <a:ext uri="{0D108BD9-81ED-4DB2-BD59-A6C34878D82A}">
+                    <a16:rowId xmlns:a16="http://schemas.microsoft.com/office/drawing/2014/main" val="10000"/>
+                  </a:ext>
+                </a:extLst>
               </a:tr>
               <a:tr h="365760">
                 <a:tc>
@@ -5196,14 +4912,6 @@
                         </a:rPr>
                         <a:t>局部性</a:t>
                       </a:r>
-                      <a:endParaRPr sz="1150" b="0">
-                        <a:solidFill>
-                          <a:srgbClr val="262626"/>
-                        </a:solidFill>
-                        <a:latin typeface="微软雅黑" panose="020B0503020204020204" charset="-122"/>
-                        <a:ea typeface="微软雅黑" panose="020B0503020204020204" charset="-122"/>
-                        <a:cs typeface="微软雅黑" panose="020B0503020204020204" charset="-122"/>
-                      </a:endParaRPr>
                     </a:p>
                   </a:txBody>
                   <a:tcPr marL="54864" marR="54864" marT="18288" marB="18288" anchor="ctr">
@@ -5229,14 +4937,6 @@
                         </a:rPr>
                         <a:t>输出依赖于邻域</a:t>
                       </a:r>
-                      <a:endParaRPr sz="1150" b="0">
-                        <a:solidFill>
-                          <a:srgbClr val="262626"/>
-                        </a:solidFill>
-                        <a:latin typeface="微软雅黑" panose="020B0503020204020204" charset="-122"/>
-                        <a:ea typeface="微软雅黑" panose="020B0503020204020204" charset="-122"/>
-                        <a:cs typeface="微软雅黑" panose="020B0503020204020204" charset="-122"/>
-                      </a:endParaRPr>
                     </a:p>
                   </a:txBody>
                   <a:tcPr marL="54864" marR="54864" marT="18288" marB="18288" anchor="ctr">
@@ -5262,14 +4962,6 @@
                         </a:rPr>
                         <a:t>保留每个 patch 的局部性，patch 间可以交互</a:t>
                       </a:r>
-                      <a:endParaRPr sz="1150" b="0">
-                        <a:solidFill>
-                          <a:srgbClr val="262626"/>
-                        </a:solidFill>
-                        <a:latin typeface="微软雅黑" panose="020B0503020204020204" charset="-122"/>
-                        <a:ea typeface="微软雅黑" panose="020B0503020204020204" charset="-122"/>
-                        <a:cs typeface="微软雅黑" panose="020B0503020204020204" charset="-122"/>
-                      </a:endParaRPr>
                     </a:p>
                   </a:txBody>
                   <a:tcPr marL="54864" marR="54864" marT="18288" marB="18288" anchor="ctr">
@@ -5278,6 +4970,11 @@
                     </a:solidFill>
                   </a:tcPr>
                 </a:tc>
+                <a:extLst>
+                  <a:ext uri="{0D108BD9-81ED-4DB2-BD59-A6C34878D82A}">
+                    <a16:rowId xmlns:a16="http://schemas.microsoft.com/office/drawing/2014/main" val="10001"/>
+                  </a:ext>
+                </a:extLst>
               </a:tr>
               <a:tr h="365760">
                 <a:tc>
@@ -5297,14 +4994,6 @@
                         </a:rPr>
                         <a:t>权重共享</a:t>
                       </a:r>
-                      <a:endParaRPr sz="1150" b="0">
-                        <a:solidFill>
-                          <a:srgbClr val="262626"/>
-                        </a:solidFill>
-                        <a:latin typeface="微软雅黑" panose="020B0503020204020204" charset="-122"/>
-                        <a:ea typeface="微软雅黑" panose="020B0503020204020204" charset="-122"/>
-                        <a:cs typeface="微软雅黑" panose="020B0503020204020204" charset="-122"/>
-                      </a:endParaRPr>
                     </a:p>
                   </a:txBody>
                   <a:tcPr marL="54864" marR="54864" marT="18288" marB="18288" anchor="ctr">
@@ -5330,14 +5019,6 @@
                         </a:rPr>
                         <a:t>同一卷积核可以处理图像的所有位置</a:t>
                       </a:r>
-                      <a:endParaRPr sz="1150" b="0">
-                        <a:solidFill>
-                          <a:srgbClr val="262626"/>
-                        </a:solidFill>
-                        <a:latin typeface="微软雅黑" panose="020B0503020204020204" charset="-122"/>
-                        <a:ea typeface="微软雅黑" panose="020B0503020204020204" charset="-122"/>
-                        <a:cs typeface="微软雅黑" panose="020B0503020204020204" charset="-122"/>
-                      </a:endParaRPr>
                     </a:p>
                   </a:txBody>
                   <a:tcPr marL="54864" marR="54864" marT="18288" marB="18288" anchor="ctr">
@@ -5363,14 +5044,6 @@
                         </a:rPr>
                         <a:t>使用绝对位置编码，att 使用全局 softmax</a:t>
                       </a:r>
-                      <a:endParaRPr sz="1150" b="0">
-                        <a:solidFill>
-                          <a:srgbClr val="262626"/>
-                        </a:solidFill>
-                        <a:latin typeface="微软雅黑" panose="020B0503020204020204" charset="-122"/>
-                        <a:ea typeface="微软雅黑" panose="020B0503020204020204" charset="-122"/>
-                        <a:cs typeface="微软雅黑" panose="020B0503020204020204" charset="-122"/>
-                      </a:endParaRPr>
                     </a:p>
                   </a:txBody>
                   <a:tcPr marL="54864" marR="54864" marT="18288" marB="18288" anchor="ctr">
@@ -5379,6 +5052,11 @@
                     </a:solidFill>
                   </a:tcPr>
                 </a:tc>
+                <a:extLst>
+                  <a:ext uri="{0D108BD9-81ED-4DB2-BD59-A6C34878D82A}">
+                    <a16:rowId xmlns:a16="http://schemas.microsoft.com/office/drawing/2014/main" val="10002"/>
+                  </a:ext>
+                </a:extLst>
               </a:tr>
               <a:tr h="365760">
                 <a:tc>
@@ -5398,14 +5076,6 @@
                         </a:rPr>
                         <a:t>层次化</a:t>
                       </a:r>
-                      <a:endParaRPr sz="1150" b="0">
-                        <a:solidFill>
-                          <a:srgbClr val="262626"/>
-                        </a:solidFill>
-                        <a:latin typeface="微软雅黑" panose="020B0503020204020204" charset="-122"/>
-                        <a:ea typeface="微软雅黑" panose="020B0503020204020204" charset="-122"/>
-                        <a:cs typeface="微软雅黑" panose="020B0503020204020204" charset="-122"/>
-                      </a:endParaRPr>
                     </a:p>
                   </a:txBody>
                   <a:tcPr marL="54864" marR="54864" marT="18288" marB="18288" anchor="ctr">
@@ -5431,14 +5101,6 @@
                         </a:rPr>
                         <a:t>逐层降采样</a:t>
                       </a:r>
-                      <a:endParaRPr sz="1150" b="0">
-                        <a:solidFill>
-                          <a:srgbClr val="262626"/>
-                        </a:solidFill>
-                        <a:latin typeface="微软雅黑" panose="020B0503020204020204" charset="-122"/>
-                        <a:ea typeface="微软雅黑" panose="020B0503020204020204" charset="-122"/>
-                        <a:cs typeface="微软雅黑" panose="020B0503020204020204" charset="-122"/>
-                      </a:endParaRPr>
                     </a:p>
                   </a:txBody>
                   <a:tcPr marL="54864" marR="54864" marT="18288" marB="18288" anchor="ctr">
@@ -5464,14 +5126,6 @@
                         </a:rPr>
                         <a:t>—</a:t>
                       </a:r>
-                      <a:endParaRPr sz="1150" b="0">
-                        <a:solidFill>
-                          <a:srgbClr val="262626"/>
-                        </a:solidFill>
-                        <a:latin typeface="微软雅黑" panose="020B0503020204020204" charset="-122"/>
-                        <a:ea typeface="微软雅黑" panose="020B0503020204020204" charset="-122"/>
-                        <a:cs typeface="微软雅黑" panose="020B0503020204020204" charset="-122"/>
-                      </a:endParaRPr>
                     </a:p>
                   </a:txBody>
                   <a:tcPr marL="54864" marR="54864" marT="18288" marB="18288" anchor="ctr">
@@ -5480,6 +5134,11 @@
                     </a:solidFill>
                   </a:tcPr>
                 </a:tc>
+                <a:extLst>
+                  <a:ext uri="{0D108BD9-81ED-4DB2-BD59-A6C34878D82A}">
+                    <a16:rowId xmlns:a16="http://schemas.microsoft.com/office/drawing/2014/main" val="10003"/>
+                  </a:ext>
+                </a:extLst>
               </a:tr>
             </a:tbl>
           </a:graphicData>
@@ -5523,14 +5182,6 @@
               </a:rPr>
               <a:t>ViT 的可学习偏置 / 内置偏置更大，需要更大数据集。</a:t>
             </a:r>
-            <a:endParaRPr sz="1300" b="0">
-              <a:solidFill>
-                <a:srgbClr val="595959"/>
-              </a:solidFill>
-              <a:latin typeface="微软雅黑" panose="020B0503020204020204" charset="-122"/>
-              <a:ea typeface="微软雅黑" panose="020B0503020204020204" charset="-122"/>
-              <a:cs typeface="微软雅黑" panose="020B0503020204020204" charset="-122"/>
-            </a:endParaRPr>
           </a:p>
         </p:txBody>
       </p:sp>
@@ -5551,7 +5202,14 @@
         <p:cNvGrpSpPr/>
         <p:nvPr/>
       </p:nvGrpSpPr>
-      <p:grpSpPr/>
+      <p:grpSpPr>
+        <a:xfrm>
+          <a:off x="0" y="0"/>
+          <a:ext cx="0" cy="0"/>
+          <a:chOff x="0" y="0"/>
+          <a:chExt cx="0" cy="0"/>
+        </a:xfrm>
+      </p:grpSpPr>
       <p:sp>
         <p:nvSpPr>
           <p:cNvPr id="2" name="Rectangle 1"/>
@@ -5592,6 +5250,7 @@
           <a:lstStyle/>
           <a:p>
             <a:pPr algn="ctr"/>
+            <a:endParaRPr/>
           </a:p>
         </p:txBody>
       </p:sp>
@@ -5633,14 +5292,6 @@
               </a:rPr>
               <a:t>Swin Transformer</a:t>
             </a:r>
-            <a:endParaRPr sz="2700" b="1">
-              <a:solidFill>
-                <a:srgbClr val="1F3864"/>
-              </a:solidFill>
-              <a:latin typeface="微软雅黑" panose="020B0503020204020204" charset="-122"/>
-              <a:ea typeface="微软雅黑" panose="020B0503020204020204" charset="-122"/>
-              <a:cs typeface="微软雅黑" panose="020B0503020204020204" charset="-122"/>
-            </a:endParaRPr>
           </a:p>
         </p:txBody>
       </p:sp>
@@ -5682,14 +5333,6 @@
               </a:rPr>
               <a:t>分层滑动窗口注意力（针对密集预测）</a:t>
             </a:r>
-            <a:endParaRPr sz="1350" b="0">
-              <a:solidFill>
-                <a:srgbClr val="595959"/>
-              </a:solidFill>
-              <a:latin typeface="微软雅黑" panose="020B0503020204020204" charset="-122"/>
-              <a:ea typeface="微软雅黑" panose="020B0503020204020204" charset="-122"/>
-              <a:cs typeface="微软雅黑" panose="020B0503020204020204" charset="-122"/>
-            </a:endParaRPr>
           </a:p>
         </p:txBody>
       </p:sp>
@@ -5733,6 +5376,7 @@
           <a:lstStyle/>
           <a:p>
             <a:pPr algn="ctr"/>
+            <a:endParaRPr/>
           </a:p>
         </p:txBody>
       </p:sp>
@@ -5777,14 +5421,6 @@
               </a:rPr>
               <a:t>组件 1：Patch Partition + Linear Embedding</a:t>
             </a:r>
-            <a:endParaRPr sz="1550" b="1">
-              <a:solidFill>
-                <a:srgbClr val="1F3864"/>
-              </a:solidFill>
-              <a:latin typeface="微软雅黑" panose="020B0503020204020204" charset="-122"/>
-              <a:ea typeface="微软雅黑" panose="020B0503020204020204" charset="-122"/>
-              <a:cs typeface="微软雅黑" panose="020B0503020204020204" charset="-122"/>
-            </a:endParaRPr>
           </a:p>
           <a:p>
             <a:pPr lvl="1">
@@ -5806,14 +5442,6 @@
               </a:rPr>
               <a:t>使用更小的 patch 保持高分辨率。</a:t>
             </a:r>
-            <a:endParaRPr sz="1350" b="0">
-              <a:solidFill>
-                <a:srgbClr val="595959"/>
-              </a:solidFill>
-              <a:latin typeface="微软雅黑" panose="020B0503020204020204" charset="-122"/>
-              <a:ea typeface="微软雅黑" panose="020B0503020204020204" charset="-122"/>
-              <a:cs typeface="微软雅黑" panose="020B0503020204020204" charset="-122"/>
-            </a:endParaRPr>
           </a:p>
           <a:p>
             <a:pPr>
@@ -5835,14 +5463,6 @@
               </a:rPr>
               <a:t>组件 2：Patch Merging</a:t>
             </a:r>
-            <a:endParaRPr sz="1550" b="1">
-              <a:solidFill>
-                <a:srgbClr val="1F3864"/>
-              </a:solidFill>
-              <a:latin typeface="微软雅黑" panose="020B0503020204020204" charset="-122"/>
-              <a:ea typeface="微软雅黑" panose="020B0503020204020204" charset="-122"/>
-              <a:cs typeface="微软雅黑" panose="020B0503020204020204" charset="-122"/>
-            </a:endParaRPr>
           </a:p>
           <a:p>
             <a:pPr lvl="1">
@@ -5864,14 +5484,6 @@
               </a:rPr>
               <a:t>在 2×2 的块上对通道进行拼接，过线性层通道减半实现降采样。</a:t>
             </a:r>
-            <a:endParaRPr sz="1350" b="0">
-              <a:solidFill>
-                <a:srgbClr val="595959"/>
-              </a:solidFill>
-              <a:latin typeface="微软雅黑" panose="020B0503020204020204" charset="-122"/>
-              <a:ea typeface="微软雅黑" panose="020B0503020204020204" charset="-122"/>
-              <a:cs typeface="微软雅黑" panose="020B0503020204020204" charset="-122"/>
-            </a:endParaRPr>
           </a:p>
           <a:p>
             <a:pPr>
@@ -5893,14 +5505,6 @@
               </a:rPr>
               <a:t>组件 3：Window Multi-head Self-Attention</a:t>
             </a:r>
-            <a:endParaRPr sz="1550" b="1">
-              <a:solidFill>
-                <a:srgbClr val="1F3864"/>
-              </a:solidFill>
-              <a:latin typeface="微软雅黑" panose="020B0503020204020204" charset="-122"/>
-              <a:ea typeface="微软雅黑" panose="020B0503020204020204" charset="-122"/>
-              <a:cs typeface="微软雅黑" panose="020B0503020204020204" charset="-122"/>
-            </a:endParaRPr>
           </a:p>
           <a:p>
             <a:pPr lvl="1">
@@ -5922,14 +5526,6 @@
               </a:rPr>
               <a:t>窗口内 token 能直接交互，窗口间信息隔离。在 token 增多的情况下避免了计算量爆炸的情况。</a:t>
             </a:r>
-            <a:endParaRPr sz="1350" b="0">
-              <a:solidFill>
-                <a:srgbClr val="595959"/>
-              </a:solidFill>
-              <a:latin typeface="微软雅黑" panose="020B0503020204020204" charset="-122"/>
-              <a:ea typeface="微软雅黑" panose="020B0503020204020204" charset="-122"/>
-              <a:cs typeface="微软雅黑" panose="020B0503020204020204" charset="-122"/>
-            </a:endParaRPr>
           </a:p>
           <a:p>
             <a:pPr>
@@ -5951,14 +5547,6 @@
               </a:rPr>
               <a:t>组件 4：SW-MSA</a:t>
             </a:r>
-            <a:endParaRPr sz="1550" b="1">
-              <a:solidFill>
-                <a:srgbClr val="1F3864"/>
-              </a:solidFill>
-              <a:latin typeface="微软雅黑" panose="020B0503020204020204" charset="-122"/>
-              <a:ea typeface="微软雅黑" panose="020B0503020204020204" charset="-122"/>
-              <a:cs typeface="微软雅黑" panose="020B0503020204020204" charset="-122"/>
-            </a:endParaRPr>
           </a:p>
           <a:p>
             <a:pPr lvl="1">
@@ -5980,14 +5568,6 @@
               </a:rPr>
               <a:t>相对于 W-MSA，在 H、W 方向移动窗口大小的一半，把不全的 patch 重新组合为 patch 块进行 Self-Attention；一个不全块拼接组合中的 token 只计算自己块内的 Self-Attention，不计算拼接的块间。</a:t>
             </a:r>
-            <a:endParaRPr sz="1350" b="0">
-              <a:solidFill>
-                <a:srgbClr val="595959"/>
-              </a:solidFill>
-              <a:latin typeface="微软雅黑" panose="020B0503020204020204" charset="-122"/>
-              <a:ea typeface="微软雅黑" panose="020B0503020204020204" charset="-122"/>
-              <a:cs typeface="微软雅黑" panose="020B0503020204020204" charset="-122"/>
-            </a:endParaRPr>
           </a:p>
         </p:txBody>
       </p:sp>
@@ -6008,7 +5588,14 @@
         <p:cNvGrpSpPr/>
         <p:nvPr/>
       </p:nvGrpSpPr>
-      <p:grpSpPr/>
+      <p:grpSpPr>
+        <a:xfrm>
+          <a:off x="0" y="0"/>
+          <a:ext cx="0" cy="0"/>
+          <a:chOff x="0" y="0"/>
+          <a:chExt cx="0" cy="0"/>
+        </a:xfrm>
+      </p:grpSpPr>
       <p:sp>
         <p:nvSpPr>
           <p:cNvPr id="2" name="Rectangle 1"/>
@@ -6049,6 +5636,7 @@
           <a:lstStyle/>
           <a:p>
             <a:pPr algn="ctr"/>
+            <a:endParaRPr/>
           </a:p>
         </p:txBody>
       </p:sp>
@@ -6090,14 +5678,6 @@
               </a:rPr>
               <a:t>ConvNeXt / ConvNeXt-V2</a:t>
             </a:r>
-            <a:endParaRPr sz="2700" b="1">
-              <a:solidFill>
-                <a:srgbClr val="1F3864"/>
-              </a:solidFill>
-              <a:latin typeface="微软雅黑" panose="020B0503020204020204" charset="-122"/>
-              <a:ea typeface="微软雅黑" panose="020B0503020204020204" charset="-122"/>
-              <a:cs typeface="微软雅黑" panose="020B0503020204020204" charset="-122"/>
-            </a:endParaRPr>
           </a:p>
         </p:txBody>
       </p:sp>
@@ -6139,14 +5719,6 @@
               </a:rPr>
               <a:t>借鉴 Transformer 的现代化 CNN，向 Swin Transformer 对齐</a:t>
             </a:r>
-            <a:endParaRPr sz="1350" b="0">
-              <a:solidFill>
-                <a:srgbClr val="595959"/>
-              </a:solidFill>
-              <a:latin typeface="微软雅黑" panose="020B0503020204020204" charset="-122"/>
-              <a:ea typeface="微软雅黑" panose="020B0503020204020204" charset="-122"/>
-              <a:cs typeface="微软雅黑" panose="020B0503020204020204" charset="-122"/>
-            </a:endParaRPr>
           </a:p>
         </p:txBody>
       </p:sp>
@@ -6190,6 +5762,7 @@
           <a:lstStyle/>
           <a:p>
             <a:pPr algn="ctr"/>
+            <a:endParaRPr/>
           </a:p>
         </p:txBody>
       </p:sp>
@@ -6234,14 +5807,6 @@
               </a:rPr>
               <a:t>ConvNeXt：向 Swin Transformer 对齐的架构</a:t>
             </a:r>
-            <a:endParaRPr sz="1550" b="1">
-              <a:solidFill>
-                <a:srgbClr val="1F3864"/>
-              </a:solidFill>
-              <a:latin typeface="微软雅黑" panose="020B0503020204020204" charset="-122"/>
-              <a:ea typeface="微软雅黑" panose="020B0503020204020204" charset="-122"/>
-              <a:cs typeface="微软雅黑" panose="020B0503020204020204" charset="-122"/>
-            </a:endParaRPr>
           </a:p>
           <a:p>
             <a:pPr lvl="1">
@@ -6263,14 +5828,6 @@
               </a:rPr>
               <a:t>宏观架构</a:t>
             </a:r>
-            <a:endParaRPr sz="1350" b="1">
-              <a:solidFill>
-                <a:srgbClr val="595959"/>
-              </a:solidFill>
-              <a:latin typeface="微软雅黑" panose="020B0503020204020204" charset="-122"/>
-              <a:ea typeface="微软雅黑" panose="020B0503020204020204" charset="-122"/>
-              <a:cs typeface="微软雅黑" panose="020B0503020204020204" charset="-122"/>
-            </a:endParaRPr>
           </a:p>
           <a:p>
             <a:pPr lvl="2">
@@ -6292,14 +5849,6 @@
               </a:rPr>
               <a:t>Patchify Stem：4×4、s = 4 的卷积。</a:t>
             </a:r>
-            <a:endParaRPr sz="1350" b="0">
-              <a:solidFill>
-                <a:srgbClr val="595959"/>
-              </a:solidFill>
-              <a:latin typeface="微软雅黑" panose="020B0503020204020204" charset="-122"/>
-              <a:ea typeface="微软雅黑" panose="020B0503020204020204" charset="-122"/>
-              <a:cs typeface="微软雅黑" panose="020B0503020204020204" charset="-122"/>
-            </a:endParaRPr>
           </a:p>
           <a:p>
             <a:pPr lvl="2">
@@ -6321,14 +5870,6 @@
               </a:rPr>
               <a:t>Stage Ratio：1:1:3:1 或 3:3:9:3。</a:t>
             </a:r>
-            <a:endParaRPr sz="1350" b="0">
-              <a:solidFill>
-                <a:srgbClr val="595959"/>
-              </a:solidFill>
-              <a:latin typeface="微软雅黑" panose="020B0503020204020204" charset="-122"/>
-              <a:ea typeface="微软雅黑" panose="020B0503020204020204" charset="-122"/>
-              <a:cs typeface="微软雅黑" panose="020B0503020204020204" charset="-122"/>
-            </a:endParaRPr>
           </a:p>
           <a:p>
             <a:pPr lvl="2">
@@ -6350,14 +5891,6 @@
               </a:rPr>
               <a:t>独立下采样层：stage 间使用独立下采样层。</a:t>
             </a:r>
-            <a:endParaRPr sz="1350" b="0">
-              <a:solidFill>
-                <a:srgbClr val="595959"/>
-              </a:solidFill>
-              <a:latin typeface="微软雅黑" panose="020B0503020204020204" charset="-122"/>
-              <a:ea typeface="微软雅黑" panose="020B0503020204020204" charset="-122"/>
-              <a:cs typeface="微软雅黑" panose="020B0503020204020204" charset="-122"/>
-            </a:endParaRPr>
           </a:p>
           <a:p>
             <a:pPr lvl="1">
@@ -6379,14 +5912,6 @@
               </a:rPr>
               <a:t>block 内部对齐</a:t>
             </a:r>
-            <a:endParaRPr sz="1350" b="1">
-              <a:solidFill>
-                <a:srgbClr val="595959"/>
-              </a:solidFill>
-              <a:latin typeface="微软雅黑" panose="020B0503020204020204" charset="-122"/>
-              <a:ea typeface="微软雅黑" panose="020B0503020204020204" charset="-122"/>
-              <a:cs typeface="微软雅黑" panose="020B0503020204020204" charset="-122"/>
-            </a:endParaRPr>
           </a:p>
           <a:p>
             <a:pPr lvl="2">
@@ -6408,14 +5933,6 @@
               </a:rPr>
               <a:t>倒瓶颈 → 对齐 MLP：D → 4D → D。</a:t>
             </a:r>
-            <a:endParaRPr sz="1350" b="0">
-              <a:solidFill>
-                <a:srgbClr val="595959"/>
-              </a:solidFill>
-              <a:latin typeface="微软雅黑" panose="020B0503020204020204" charset="-122"/>
-              <a:ea typeface="微软雅黑" panose="020B0503020204020204" charset="-122"/>
-              <a:cs typeface="微软雅黑" panose="020B0503020204020204" charset="-122"/>
-            </a:endParaRPr>
           </a:p>
           <a:p>
             <a:pPr lvl="2">
@@ -6437,14 +5954,6 @@
               </a:rPr>
               <a:t>LayerNorm。</a:t>
             </a:r>
-            <a:endParaRPr sz="1350" b="0">
-              <a:solidFill>
-                <a:srgbClr val="595959"/>
-              </a:solidFill>
-              <a:latin typeface="微软雅黑" panose="020B0503020204020204" charset="-122"/>
-              <a:ea typeface="微软雅黑" panose="020B0503020204020204" charset="-122"/>
-              <a:cs typeface="微软雅黑" panose="020B0503020204020204" charset="-122"/>
-            </a:endParaRPr>
           </a:p>
           <a:p>
             <a:pPr lvl="2">
@@ -6466,14 +5975,6 @@
               </a:rPr>
               <a:t>GELU。</a:t>
             </a:r>
-            <a:endParaRPr sz="1350" b="0">
-              <a:solidFill>
-                <a:srgbClr val="595959"/>
-              </a:solidFill>
-              <a:latin typeface="微软雅黑" panose="020B0503020204020204" charset="-122"/>
-              <a:ea typeface="微软雅黑" panose="020B0503020204020204" charset="-122"/>
-              <a:cs typeface="微软雅黑" panose="020B0503020204020204" charset="-122"/>
-            </a:endParaRPr>
           </a:p>
           <a:p>
             <a:pPr>
@@ -6495,14 +5996,6 @@
               </a:rPr>
               <a:t>ConvNeXt-V2 核心改动</a:t>
             </a:r>
-            <a:endParaRPr sz="1550" b="1">
-              <a:solidFill>
-                <a:srgbClr val="1F3864"/>
-              </a:solidFill>
-              <a:latin typeface="微软雅黑" panose="020B0503020204020204" charset="-122"/>
-              <a:ea typeface="微软雅黑" panose="020B0503020204020204" charset="-122"/>
-              <a:cs typeface="微软雅黑" panose="020B0503020204020204" charset="-122"/>
-            </a:endParaRPr>
           </a:p>
           <a:p>
             <a:pPr lvl="1">
@@ -6524,14 +6017,6 @@
               </a:rPr>
               <a:t>GRN：增强强响应的通道，削弱弱响应的通道。有残差连接能保证弱通道仍有更新。</a:t>
             </a:r>
-            <a:endParaRPr sz="1350" b="0">
-              <a:solidFill>
-                <a:srgbClr val="595959"/>
-              </a:solidFill>
-              <a:latin typeface="微软雅黑" panose="020B0503020204020204" charset="-122"/>
-              <a:ea typeface="微软雅黑" panose="020B0503020204020204" charset="-122"/>
-              <a:cs typeface="微软雅黑" panose="020B0503020204020204" charset="-122"/>
-            </a:endParaRPr>
           </a:p>
           <a:p>
             <a:pPr lvl="1">
@@ -6553,14 +6038,6 @@
               </a:rPr>
               <a:t>FCMAE：模拟 MAE，使用稀疏卷积处理可见像素，计算重建损失。</a:t>
             </a:r>
-            <a:endParaRPr sz="1350" b="0">
-              <a:solidFill>
-                <a:srgbClr val="595959"/>
-              </a:solidFill>
-              <a:latin typeface="微软雅黑" panose="020B0503020204020204" charset="-122"/>
-              <a:ea typeface="微软雅黑" panose="020B0503020204020204" charset="-122"/>
-              <a:cs typeface="微软雅黑" panose="020B0503020204020204" charset="-122"/>
-            </a:endParaRPr>
           </a:p>
         </p:txBody>
       </p:sp>
@@ -6581,7 +6058,14 @@
         <p:cNvGrpSpPr/>
         <p:nvPr/>
       </p:nvGrpSpPr>
-      <p:grpSpPr/>
+      <p:grpSpPr>
+        <a:xfrm>
+          <a:off x="0" y="0"/>
+          <a:ext cx="0" cy="0"/>
+          <a:chOff x="0" y="0"/>
+          <a:chExt cx="0" cy="0"/>
+        </a:xfrm>
+      </p:grpSpPr>
       <p:sp>
         <p:nvSpPr>
           <p:cNvPr id="2" name="Rectangle 1"/>
@@ -6622,6 +6106,7 @@
           <a:lstStyle/>
           <a:p>
             <a:pPr algn="ctr"/>
+            <a:endParaRPr/>
           </a:p>
         </p:txBody>
       </p:sp>
@@ -6663,14 +6148,6 @@
               </a:rPr>
               <a:t>Part 3</a:t>
             </a:r>
-            <a:endParaRPr sz="2000" b="0">
-              <a:solidFill>
-                <a:srgbClr val="9DC3E6"/>
-              </a:solidFill>
-              <a:latin typeface="微软雅黑" panose="020B0503020204020204" charset="-122"/>
-              <a:ea typeface="微软雅黑" panose="020B0503020204020204" charset="-122"/>
-              <a:cs typeface="微软雅黑" panose="020B0503020204020204" charset="-122"/>
-            </a:endParaRPr>
           </a:p>
         </p:txBody>
       </p:sp>
@@ -6712,14 +6189,6 @@
               </a:rPr>
               <a:t>动手实验与结果</a:t>
             </a:r>
-            <a:endParaRPr sz="3600" b="1">
-              <a:solidFill>
-                <a:srgbClr val="FFFFFF"/>
-              </a:solidFill>
-              <a:latin typeface="微软雅黑" panose="020B0503020204020204" charset="-122"/>
-              <a:ea typeface="微软雅黑" panose="020B0503020204020204" charset="-122"/>
-              <a:cs typeface="微软雅黑" panose="020B0503020204020204" charset="-122"/>
-            </a:endParaRPr>
           </a:p>
         </p:txBody>
       </p:sp>
@@ -6740,7 +6209,14 @@
         <p:cNvGrpSpPr/>
         <p:nvPr/>
       </p:nvGrpSpPr>
-      <p:grpSpPr/>
+      <p:grpSpPr>
+        <a:xfrm>
+          <a:off x="0" y="0"/>
+          <a:ext cx="0" cy="0"/>
+          <a:chOff x="0" y="0"/>
+          <a:chExt cx="0" cy="0"/>
+        </a:xfrm>
+      </p:grpSpPr>
       <p:sp>
         <p:nvSpPr>
           <p:cNvPr id="2" name="Rectangle 1"/>
@@ -6781,6 +6257,7 @@
           <a:lstStyle/>
           <a:p>
             <a:pPr algn="ctr"/>
+            <a:endParaRPr/>
           </a:p>
         </p:txBody>
       </p:sp>
@@ -6822,14 +6299,6 @@
               </a:rPr>
               <a:t>实验设置</a:t>
             </a:r>
-            <a:endParaRPr sz="2700" b="1">
-              <a:solidFill>
-                <a:srgbClr val="1F3864"/>
-              </a:solidFill>
-              <a:latin typeface="微软雅黑" panose="020B0503020204020204" charset="-122"/>
-              <a:ea typeface="微软雅黑" panose="020B0503020204020204" charset="-122"/>
-              <a:cs typeface="微软雅黑" panose="020B0503020204020204" charset="-122"/>
-            </a:endParaRPr>
           </a:p>
         </p:txBody>
       </p:sp>
@@ -6871,14 +6340,6 @@
               </a:rPr>
               <a:t>所有模型共用同一套训练框架与超参数</a:t>
             </a:r>
-            <a:endParaRPr sz="1350" b="0">
-              <a:solidFill>
-                <a:srgbClr val="595959"/>
-              </a:solidFill>
-              <a:latin typeface="微软雅黑" panose="020B0503020204020204" charset="-122"/>
-              <a:ea typeface="微软雅黑" panose="020B0503020204020204" charset="-122"/>
-              <a:cs typeface="微软雅黑" panose="020B0503020204020204" charset="-122"/>
-            </a:endParaRPr>
           </a:p>
         </p:txBody>
       </p:sp>
@@ -6922,6 +6383,7 @@
           <a:lstStyle/>
           <a:p>
             <a:pPr algn="ctr"/>
+            <a:endParaRPr/>
           </a:p>
         </p:txBody>
       </p:sp>
@@ -6944,8 +6406,20 @@
                 <a:tableStyleId>{5C22544A-7EE6-4342-B048-85BDC9FD1C3A}</a:tableStyleId>
               </a:tblPr>
               <a:tblGrid>
-                <a:gridCol w="1859279"/>
-                <a:gridCol w="9296400"/>
+                <a:gridCol w="1859279">
+                  <a:extLst>
+                    <a:ext uri="{9D8B030D-6E8A-4147-A177-3AD203B41FA5}">
+                      <a16:colId xmlns:a16="http://schemas.microsoft.com/office/drawing/2014/main" val="20000"/>
+                    </a:ext>
+                  </a:extLst>
+                </a:gridCol>
+                <a:gridCol w="9296400">
+                  <a:extLst>
+                    <a:ext uri="{9D8B030D-6E8A-4147-A177-3AD203B41FA5}">
+                      <a16:colId xmlns:a16="http://schemas.microsoft.com/office/drawing/2014/main" val="20001"/>
+                    </a:ext>
+                  </a:extLst>
+                </a:gridCol>
               </a:tblGrid>
               <a:tr h="514350">
                 <a:tc>
@@ -6965,14 +6439,6 @@
                         </a:rPr>
                         <a:t>维度</a:t>
                       </a:r>
-                      <a:endParaRPr sz="1400" b="1">
-                        <a:solidFill>
-                          <a:srgbClr val="FFFFFF"/>
-                        </a:solidFill>
-                        <a:latin typeface="微软雅黑" panose="020B0503020204020204" charset="-122"/>
-                        <a:ea typeface="微软雅黑" panose="020B0503020204020204" charset="-122"/>
-                        <a:cs typeface="微软雅黑" panose="020B0503020204020204" charset="-122"/>
-                      </a:endParaRPr>
                     </a:p>
                   </a:txBody>
                   <a:tcPr marL="54864" marR="54864" marT="18288" marB="18288" anchor="ctr">
@@ -6998,14 +6464,6 @@
                         </a:rPr>
                         <a:t>配置</a:t>
                       </a:r>
-                      <a:endParaRPr sz="1400" b="1">
-                        <a:solidFill>
-                          <a:srgbClr val="FFFFFF"/>
-                        </a:solidFill>
-                        <a:latin typeface="微软雅黑" panose="020B0503020204020204" charset="-122"/>
-                        <a:ea typeface="微软雅黑" panose="020B0503020204020204" charset="-122"/>
-                        <a:cs typeface="微软雅黑" panose="020B0503020204020204" charset="-122"/>
-                      </a:endParaRPr>
                     </a:p>
                   </a:txBody>
                   <a:tcPr marL="54864" marR="54864" marT="18288" marB="18288" anchor="ctr">
@@ -7014,6 +6472,11 @@
                     </a:solidFill>
                   </a:tcPr>
                 </a:tc>
+                <a:extLst>
+                  <a:ext uri="{0D108BD9-81ED-4DB2-BD59-A6C34878D82A}">
+                    <a16:rowId xmlns:a16="http://schemas.microsoft.com/office/drawing/2014/main" val="10000"/>
+                  </a:ext>
+                </a:extLst>
               </a:tr>
               <a:tr h="514350">
                 <a:tc>
@@ -7033,14 +6496,6 @@
                         </a:rPr>
                         <a:t>数据集</a:t>
                       </a:r>
-                      <a:endParaRPr sz="1300" b="0">
-                        <a:solidFill>
-                          <a:srgbClr val="262626"/>
-                        </a:solidFill>
-                        <a:latin typeface="微软雅黑" panose="020B0503020204020204" charset="-122"/>
-                        <a:ea typeface="微软雅黑" panose="020B0503020204020204" charset="-122"/>
-                        <a:cs typeface="微软雅黑" panose="020B0503020204020204" charset="-122"/>
-                      </a:endParaRPr>
                     </a:p>
                   </a:txBody>
                   <a:tcPr marL="54864" marR="54864" marT="18288" marB="18288" anchor="ctr">
@@ -7066,14 +6521,6 @@
                         </a:rPr>
                         <a:t>Mini-ImageNet-100（100 类）；训练 38,400 / 验证 9,600 / 测试 12,000 张</a:t>
                       </a:r>
-                      <a:endParaRPr sz="1300" b="0">
-                        <a:solidFill>
-                          <a:srgbClr val="262626"/>
-                        </a:solidFill>
-                        <a:latin typeface="微软雅黑" panose="020B0503020204020204" charset="-122"/>
-                        <a:ea typeface="微软雅黑" panose="020B0503020204020204" charset="-122"/>
-                        <a:cs typeface="微软雅黑" panose="020B0503020204020204" charset="-122"/>
-                      </a:endParaRPr>
                     </a:p>
                   </a:txBody>
                   <a:tcPr marL="54864" marR="54864" marT="18288" marB="18288" anchor="ctr">
@@ -7082,6 +6529,11 @@
                     </a:solidFill>
                   </a:tcPr>
                 </a:tc>
+                <a:extLst>
+                  <a:ext uri="{0D108BD9-81ED-4DB2-BD59-A6C34878D82A}">
+                    <a16:rowId xmlns:a16="http://schemas.microsoft.com/office/drawing/2014/main" val="10001"/>
+                  </a:ext>
+                </a:extLst>
               </a:tr>
               <a:tr h="514350">
                 <a:tc>
@@ -7101,14 +6553,6 @@
                         </a:rPr>
                         <a:t>输入</a:t>
                       </a:r>
-                      <a:endParaRPr sz="1300" b="0">
-                        <a:solidFill>
-                          <a:srgbClr val="262626"/>
-                        </a:solidFill>
-                        <a:latin typeface="微软雅黑" panose="020B0503020204020204" charset="-122"/>
-                        <a:ea typeface="微软雅黑" panose="020B0503020204020204" charset="-122"/>
-                        <a:cs typeface="微软雅黑" panose="020B0503020204020204" charset="-122"/>
-                      </a:endParaRPr>
                     </a:p>
                   </a:txBody>
                   <a:tcPr marL="54864" marR="54864" marT="18288" marB="18288" anchor="ctr">
@@ -7134,14 +6578,6 @@
                         </a:rPr>
                         <a:t>224 × 224 × 3；Resize → Normalize(0.5, 0.5) → ToTensor，映射到 [-1, 1]</a:t>
                       </a:r>
-                      <a:endParaRPr sz="1300" b="0">
-                        <a:solidFill>
-                          <a:srgbClr val="262626"/>
-                        </a:solidFill>
-                        <a:latin typeface="微软雅黑" panose="020B0503020204020204" charset="-122"/>
-                        <a:ea typeface="微软雅黑" panose="020B0503020204020204" charset="-122"/>
-                        <a:cs typeface="微软雅黑" panose="020B0503020204020204" charset="-122"/>
-                      </a:endParaRPr>
                     </a:p>
                   </a:txBody>
                   <a:tcPr marL="54864" marR="54864" marT="18288" marB="18288" anchor="ctr">
@@ -7150,6 +6586,11 @@
                     </a:solidFill>
                   </a:tcPr>
                 </a:tc>
+                <a:extLst>
+                  <a:ext uri="{0D108BD9-81ED-4DB2-BD59-A6C34878D82A}">
+                    <a16:rowId xmlns:a16="http://schemas.microsoft.com/office/drawing/2014/main" val="10002"/>
+                  </a:ext>
+                </a:extLst>
               </a:tr>
               <a:tr h="514350">
                 <a:tc>
@@ -7169,14 +6610,6 @@
                         </a:rPr>
                         <a:t>数据增强</a:t>
                       </a:r>
-                      <a:endParaRPr sz="1300" b="0">
-                        <a:solidFill>
-                          <a:srgbClr val="262626"/>
-                        </a:solidFill>
-                        <a:latin typeface="微软雅黑" panose="020B0503020204020204" charset="-122"/>
-                        <a:ea typeface="微软雅黑" panose="020B0503020204020204" charset="-122"/>
-                        <a:cs typeface="微软雅黑" panose="020B0503020204020204" charset="-122"/>
-                      </a:endParaRPr>
                     </a:p>
                   </a:txBody>
                   <a:tcPr marL="54864" marR="54864" marT="18288" marB="18288" anchor="ctr">
@@ -7202,14 +6635,6 @@
                         </a:rPr>
                         <a:t>无（训练与验证共用同一确定性管道）</a:t>
                       </a:r>
-                      <a:endParaRPr sz="1300" b="0">
-                        <a:solidFill>
-                          <a:srgbClr val="262626"/>
-                        </a:solidFill>
-                        <a:latin typeface="微软雅黑" panose="020B0503020204020204" charset="-122"/>
-                        <a:ea typeface="微软雅黑" panose="020B0503020204020204" charset="-122"/>
-                        <a:cs typeface="微软雅黑" panose="020B0503020204020204" charset="-122"/>
-                      </a:endParaRPr>
                     </a:p>
                   </a:txBody>
                   <a:tcPr marL="54864" marR="54864" marT="18288" marB="18288" anchor="ctr">
@@ -7218,6 +6643,11 @@
                     </a:solidFill>
                   </a:tcPr>
                 </a:tc>
+                <a:extLst>
+                  <a:ext uri="{0D108BD9-81ED-4DB2-BD59-A6C34878D82A}">
+                    <a16:rowId xmlns:a16="http://schemas.microsoft.com/office/drawing/2014/main" val="10003"/>
+                  </a:ext>
+                </a:extLst>
               </a:tr>
               <a:tr h="514350">
                 <a:tc>
@@ -7237,14 +6667,6 @@
                         </a:rPr>
                         <a:t>模型</a:t>
                       </a:r>
-                      <a:endParaRPr sz="1300" b="0">
-                        <a:solidFill>
-                          <a:srgbClr val="262626"/>
-                        </a:solidFill>
-                        <a:latin typeface="微软雅黑" panose="020B0503020204020204" charset="-122"/>
-                        <a:ea typeface="微软雅黑" panose="020B0503020204020204" charset="-122"/>
-                        <a:cs typeface="微软雅黑" panose="020B0503020204020204" charset="-122"/>
-                      </a:endParaRPr>
                     </a:p>
                   </a:txBody>
                   <a:tcPr marL="54864" marR="54864" marT="18288" marB="18288" anchor="ctr">
@@ -7270,14 +6692,6 @@
                         </a:rPr>
                         <a:t>ResNet-50 / MobileNetV3-Large / ConvNeXt-Tiny，均为从零训练（无预训练权重）</a:t>
                       </a:r>
-                      <a:endParaRPr sz="1300" b="0">
-                        <a:solidFill>
-                          <a:srgbClr val="262626"/>
-                        </a:solidFill>
-                        <a:latin typeface="微软雅黑" panose="020B0503020204020204" charset="-122"/>
-                        <a:ea typeface="微软雅黑" panose="020B0503020204020204" charset="-122"/>
-                        <a:cs typeface="微软雅黑" panose="020B0503020204020204" charset="-122"/>
-                      </a:endParaRPr>
                     </a:p>
                   </a:txBody>
                   <a:tcPr marL="54864" marR="54864" marT="18288" marB="18288" anchor="ctr">
@@ -7286,6 +6700,11 @@
                     </a:solidFill>
                   </a:tcPr>
                 </a:tc>
+                <a:extLst>
+                  <a:ext uri="{0D108BD9-81ED-4DB2-BD59-A6C34878D82A}">
+                    <a16:rowId xmlns:a16="http://schemas.microsoft.com/office/drawing/2014/main" val="10004"/>
+                  </a:ext>
+                </a:extLst>
               </a:tr>
               <a:tr h="514350">
                 <a:tc>
@@ -7305,14 +6724,6 @@
                         </a:rPr>
                         <a:t>训练</a:t>
                       </a:r>
-                      <a:endParaRPr sz="1300" b="0">
-                        <a:solidFill>
-                          <a:srgbClr val="262626"/>
-                        </a:solidFill>
-                        <a:latin typeface="微软雅黑" panose="020B0503020204020204" charset="-122"/>
-                        <a:ea typeface="微软雅黑" panose="020B0503020204020204" charset="-122"/>
-                        <a:cs typeface="微软雅黑" panose="020B0503020204020204" charset="-122"/>
-                      </a:endParaRPr>
                     </a:p>
                   </a:txBody>
                   <a:tcPr marL="54864" marR="54864" marT="18288" marB="18288" anchor="ctr">
@@ -7338,14 +6749,6 @@
                         </a:rPr>
                         <a:t>30 epoch，batch size 32，Adam，lr = 1e-3（固定），随机种子 seed = 0</a:t>
                       </a:r>
-                      <a:endParaRPr sz="1300" b="0">
-                        <a:solidFill>
-                          <a:srgbClr val="262626"/>
-                        </a:solidFill>
-                        <a:latin typeface="微软雅黑" panose="020B0503020204020204" charset="-122"/>
-                        <a:ea typeface="微软雅黑" panose="020B0503020204020204" charset="-122"/>
-                        <a:cs typeface="微软雅黑" panose="020B0503020204020204" charset="-122"/>
-                      </a:endParaRPr>
                     </a:p>
                   </a:txBody>
                   <a:tcPr marL="54864" marR="54864" marT="18288" marB="18288" anchor="ctr">
@@ -7354,6 +6757,11 @@
                     </a:solidFill>
                   </a:tcPr>
                 </a:tc>
+                <a:extLst>
+                  <a:ext uri="{0D108BD9-81ED-4DB2-BD59-A6C34878D82A}">
+                    <a16:rowId xmlns:a16="http://schemas.microsoft.com/office/drawing/2014/main" val="10005"/>
+                  </a:ext>
+                </a:extLst>
               </a:tr>
               <a:tr h="514350">
                 <a:tc>
@@ -7373,14 +6781,6 @@
                         </a:rPr>
                         <a:t>模型选择</a:t>
                       </a:r>
-                      <a:endParaRPr sz="1300" b="0">
-                        <a:solidFill>
-                          <a:srgbClr val="262626"/>
-                        </a:solidFill>
-                        <a:latin typeface="微软雅黑" panose="020B0503020204020204" charset="-122"/>
-                        <a:ea typeface="微软雅黑" panose="020B0503020204020204" charset="-122"/>
-                        <a:cs typeface="微软雅黑" panose="020B0503020204020204" charset="-122"/>
-                      </a:endParaRPr>
                     </a:p>
                   </a:txBody>
                   <a:tcPr marL="54864" marR="54864" marT="18288" marB="18288" anchor="ctr">
@@ -7406,14 +6806,6 @@
                         </a:rPr>
                         <a:t>验证损失最小的 epoch</a:t>
                       </a:r>
-                      <a:endParaRPr sz="1300" b="0">
-                        <a:solidFill>
-                          <a:srgbClr val="262626"/>
-                        </a:solidFill>
-                        <a:latin typeface="微软雅黑" panose="020B0503020204020204" charset="-122"/>
-                        <a:ea typeface="微软雅黑" panose="020B0503020204020204" charset="-122"/>
-                        <a:cs typeface="微软雅黑" panose="020B0503020204020204" charset="-122"/>
-                      </a:endParaRPr>
                     </a:p>
                   </a:txBody>
                   <a:tcPr marL="54864" marR="54864" marT="18288" marB="18288" anchor="ctr">
@@ -7422,6 +6814,11 @@
                     </a:solidFill>
                   </a:tcPr>
                 </a:tc>
+                <a:extLst>
+                  <a:ext uri="{0D108BD9-81ED-4DB2-BD59-A6C34878D82A}">
+                    <a16:rowId xmlns:a16="http://schemas.microsoft.com/office/drawing/2014/main" val="10006"/>
+                  </a:ext>
+                </a:extLst>
               </a:tr>
               <a:tr h="514350">
                 <a:tc>
@@ -7441,14 +6838,6 @@
                         </a:rPr>
                         <a:t>评测指标</a:t>
                       </a:r>
-                      <a:endParaRPr sz="1300" b="0">
-                        <a:solidFill>
-                          <a:srgbClr val="262626"/>
-                        </a:solidFill>
-                        <a:latin typeface="微软雅黑" panose="020B0503020204020204" charset="-122"/>
-                        <a:ea typeface="微软雅黑" panose="020B0503020204020204" charset="-122"/>
-                        <a:cs typeface="微软雅黑" panose="020B0503020204020204" charset="-122"/>
-                      </a:endParaRPr>
                     </a:p>
                   </a:txBody>
                   <a:tcPr marL="54864" marR="54864" marT="18288" marB="18288" anchor="ctr">
@@ -7474,14 +6863,6 @@
                         </a:rPr>
                         <a:t>Top-1 / Top-5 Accuracy；Params、MACs；CUDA / CPU 单张前向延迟</a:t>
                       </a:r>
-                      <a:endParaRPr sz="1300" b="0">
-                        <a:solidFill>
-                          <a:srgbClr val="262626"/>
-                        </a:solidFill>
-                        <a:latin typeface="微软雅黑" panose="020B0503020204020204" charset="-122"/>
-                        <a:ea typeface="微软雅黑" panose="020B0503020204020204" charset="-122"/>
-                        <a:cs typeface="微软雅黑" panose="020B0503020204020204" charset="-122"/>
-                      </a:endParaRPr>
                     </a:p>
                   </a:txBody>
                   <a:tcPr marL="54864" marR="54864" marT="18288" marB="18288" anchor="ctr">
@@ -7490,6 +6871,11 @@
                     </a:solidFill>
                   </a:tcPr>
                 </a:tc>
+                <a:extLst>
+                  <a:ext uri="{0D108BD9-81ED-4DB2-BD59-A6C34878D82A}">
+                    <a16:rowId xmlns:a16="http://schemas.microsoft.com/office/drawing/2014/main" val="10007"/>
+                  </a:ext>
+                </a:extLst>
               </a:tr>
             </a:tbl>
           </a:graphicData>
@@ -7533,14 +6919,6 @@
               </a:rPr>
               <a:t>延迟定义：服务端已经持有模型、并且已经把图片张量搬到 GPU 上之后，再跑一次单张（batch=1）前向要多久。</a:t>
             </a:r>
-            <a:endParaRPr sz="1350" b="1">
-              <a:solidFill>
-                <a:srgbClr val="2E75B6"/>
-              </a:solidFill>
-              <a:latin typeface="微软雅黑" panose="020B0503020204020204" charset="-122"/>
-              <a:ea typeface="微软雅黑" panose="020B0503020204020204" charset="-122"/>
-              <a:cs typeface="微软雅黑" panose="020B0503020204020204" charset="-122"/>
-            </a:endParaRPr>
           </a:p>
         </p:txBody>
       </p:sp>
@@ -7582,14 +6960,6 @@
               </a:rPr>
               <a:t>计入：一次前向的全部 kernel 执行时间（含 kernel 之间的发车空洞）。不计入：模型加载、CUDA 上下文初始化、读图与解码、预处理、CPU→GPU 拷贝、后处理。</a:t>
             </a:r>
-            <a:endParaRPr sz="1200" b="0">
-              <a:solidFill>
-                <a:srgbClr val="595959"/>
-              </a:solidFill>
-              <a:latin typeface="微软雅黑" panose="020B0503020204020204" charset="-122"/>
-              <a:ea typeface="微软雅黑" panose="020B0503020204020204" charset="-122"/>
-              <a:cs typeface="微软雅黑" panose="020B0503020204020204" charset="-122"/>
-            </a:endParaRPr>
           </a:p>
         </p:txBody>
       </p:sp>
@@ -7610,7 +6980,14 @@
         <p:cNvGrpSpPr/>
         <p:nvPr/>
       </p:nvGrpSpPr>
-      <p:grpSpPr/>
+      <p:grpSpPr>
+        <a:xfrm>
+          <a:off x="0" y="0"/>
+          <a:ext cx="0" cy="0"/>
+          <a:chOff x="0" y="0"/>
+          <a:chExt cx="0" cy="0"/>
+        </a:xfrm>
+      </p:grpSpPr>
       <p:sp>
         <p:nvSpPr>
           <p:cNvPr id="2" name="Rectangle 1"/>
@@ -7651,6 +7028,7 @@
           <a:lstStyle/>
           <a:p>
             <a:pPr algn="ctr"/>
+            <a:endParaRPr/>
           </a:p>
         </p:txBody>
       </p:sp>
@@ -7692,14 +7070,6 @@
               </a:rPr>
               <a:t>基准性能对比表</a:t>
             </a:r>
-            <a:endParaRPr sz="2700" b="1">
-              <a:solidFill>
-                <a:srgbClr val="1F3864"/>
-              </a:solidFill>
-              <a:latin typeface="微软雅黑" panose="020B0503020204020204" charset="-122"/>
-              <a:ea typeface="微软雅黑" panose="020B0503020204020204" charset="-122"/>
-              <a:cs typeface="微软雅黑" panose="020B0503020204020204" charset="-122"/>
-            </a:endParaRPr>
           </a:p>
         </p:txBody>
       </p:sp>
@@ -7741,14 +7111,6 @@
               </a:rPr>
               <a:t>30 epoch · seed=0 · 无数据增强 · 延迟口径见报告 §1</a:t>
             </a:r>
-            <a:endParaRPr sz="1350" b="0">
-              <a:solidFill>
-                <a:srgbClr val="595959"/>
-              </a:solidFill>
-              <a:latin typeface="微软雅黑" panose="020B0503020204020204" charset="-122"/>
-              <a:ea typeface="微软雅黑" panose="020B0503020204020204" charset="-122"/>
-              <a:cs typeface="微软雅黑" panose="020B0503020204020204" charset="-122"/>
-            </a:endParaRPr>
           </a:p>
         </p:txBody>
       </p:sp>
@@ -7792,6 +7154,7 @@
           <a:lstStyle/>
           <a:p>
             <a:pPr algn="ctr"/>
+            <a:endParaRPr/>
           </a:p>
         </p:txBody>
       </p:sp>
@@ -7814,13 +7177,55 @@
                 <a:tableStyleId>{5C22544A-7EE6-4342-B048-85BDC9FD1C3A}</a:tableStyleId>
               </a:tblPr>
               <a:tblGrid>
-                <a:gridCol w="2732138"/>
-                <a:gridCol w="1457140"/>
-                <a:gridCol w="1457140"/>
-                <a:gridCol w="1366069"/>
-                <a:gridCol w="1183926"/>
-                <a:gridCol w="1548211"/>
-                <a:gridCol w="1548211"/>
+                <a:gridCol w="2732138">
+                  <a:extLst>
+                    <a:ext uri="{9D8B030D-6E8A-4147-A177-3AD203B41FA5}">
+                      <a16:colId xmlns:a16="http://schemas.microsoft.com/office/drawing/2014/main" val="20000"/>
+                    </a:ext>
+                  </a:extLst>
+                </a:gridCol>
+                <a:gridCol w="1457140">
+                  <a:extLst>
+                    <a:ext uri="{9D8B030D-6E8A-4147-A177-3AD203B41FA5}">
+                      <a16:colId xmlns:a16="http://schemas.microsoft.com/office/drawing/2014/main" val="20001"/>
+                    </a:ext>
+                  </a:extLst>
+                </a:gridCol>
+                <a:gridCol w="1457140">
+                  <a:extLst>
+                    <a:ext uri="{9D8B030D-6E8A-4147-A177-3AD203B41FA5}">
+                      <a16:colId xmlns:a16="http://schemas.microsoft.com/office/drawing/2014/main" val="20002"/>
+                    </a:ext>
+                  </a:extLst>
+                </a:gridCol>
+                <a:gridCol w="1366069">
+                  <a:extLst>
+                    <a:ext uri="{9D8B030D-6E8A-4147-A177-3AD203B41FA5}">
+                      <a16:colId xmlns:a16="http://schemas.microsoft.com/office/drawing/2014/main" val="20003"/>
+                    </a:ext>
+                  </a:extLst>
+                </a:gridCol>
+                <a:gridCol w="1183926">
+                  <a:extLst>
+                    <a:ext uri="{9D8B030D-6E8A-4147-A177-3AD203B41FA5}">
+                      <a16:colId xmlns:a16="http://schemas.microsoft.com/office/drawing/2014/main" val="20004"/>
+                    </a:ext>
+                  </a:extLst>
+                </a:gridCol>
+                <a:gridCol w="1548211">
+                  <a:extLst>
+                    <a:ext uri="{9D8B030D-6E8A-4147-A177-3AD203B41FA5}">
+                      <a16:colId xmlns:a16="http://schemas.microsoft.com/office/drawing/2014/main" val="20005"/>
+                    </a:ext>
+                  </a:extLst>
+                </a:gridCol>
+                <a:gridCol w="1548211">
+                  <a:extLst>
+                    <a:ext uri="{9D8B030D-6E8A-4147-A177-3AD203B41FA5}">
+                      <a16:colId xmlns:a16="http://schemas.microsoft.com/office/drawing/2014/main" val="20006"/>
+                    </a:ext>
+                  </a:extLst>
+                </a:gridCol>
               </a:tblGrid>
               <a:tr h="457200">
                 <a:tc>
@@ -7840,14 +7245,6 @@
                         </a:rPr>
                         <a:t>模型</a:t>
                       </a:r>
-                      <a:endParaRPr sz="1300" b="1">
-                        <a:solidFill>
-                          <a:srgbClr val="FFFFFF"/>
-                        </a:solidFill>
-                        <a:latin typeface="微软雅黑" panose="020B0503020204020204" charset="-122"/>
-                        <a:ea typeface="微软雅黑" panose="020B0503020204020204" charset="-122"/>
-                        <a:cs typeface="微软雅黑" panose="020B0503020204020204" charset="-122"/>
-                      </a:endParaRPr>
                     </a:p>
                   </a:txBody>
                   <a:tcPr marL="54864" marR="54864" marT="18288" marB="18288" anchor="ctr">
@@ -7873,14 +7270,6 @@
                         </a:rPr>
                         <a:t>Test Top-1</a:t>
                       </a:r>
-                      <a:endParaRPr sz="1300" b="1">
-                        <a:solidFill>
-                          <a:srgbClr val="FFFFFF"/>
-                        </a:solidFill>
-                        <a:latin typeface="微软雅黑" panose="020B0503020204020204" charset="-122"/>
-                        <a:ea typeface="微软雅黑" panose="020B0503020204020204" charset="-122"/>
-                        <a:cs typeface="微软雅黑" panose="020B0503020204020204" charset="-122"/>
-                      </a:endParaRPr>
                     </a:p>
                   </a:txBody>
                   <a:tcPr marL="54864" marR="54864" marT="18288" marB="18288" anchor="ctr">
@@ -7906,14 +7295,6 @@
                         </a:rPr>
                         <a:t>Test Top-5</a:t>
                       </a:r>
-                      <a:endParaRPr sz="1300" b="1">
-                        <a:solidFill>
-                          <a:srgbClr val="FFFFFF"/>
-                        </a:solidFill>
-                        <a:latin typeface="微软雅黑" panose="020B0503020204020204" charset="-122"/>
-                        <a:ea typeface="微软雅黑" panose="020B0503020204020204" charset="-122"/>
-                        <a:cs typeface="微软雅黑" panose="020B0503020204020204" charset="-122"/>
-                      </a:endParaRPr>
                     </a:p>
                   </a:txBody>
                   <a:tcPr marL="54864" marR="54864" marT="18288" marB="18288" anchor="ctr">
@@ -7939,14 +7320,6 @@
                         </a:rPr>
                         <a:t>Params (M)</a:t>
                       </a:r>
-                      <a:endParaRPr sz="1300" b="1">
-                        <a:solidFill>
-                          <a:srgbClr val="FFFFFF"/>
-                        </a:solidFill>
-                        <a:latin typeface="微软雅黑" panose="020B0503020204020204" charset="-122"/>
-                        <a:ea typeface="微软雅黑" panose="020B0503020204020204" charset="-122"/>
-                        <a:cs typeface="微软雅黑" panose="020B0503020204020204" charset="-122"/>
-                      </a:endParaRPr>
                     </a:p>
                   </a:txBody>
                   <a:tcPr marL="54864" marR="54864" marT="18288" marB="18288" anchor="ctr">
@@ -7972,14 +7345,6 @@
                         </a:rPr>
                         <a:t>MACs (G)</a:t>
                       </a:r>
-                      <a:endParaRPr sz="1300" b="1">
-                        <a:solidFill>
-                          <a:srgbClr val="FFFFFF"/>
-                        </a:solidFill>
-                        <a:latin typeface="微软雅黑" panose="020B0503020204020204" charset="-122"/>
-                        <a:ea typeface="微软雅黑" panose="020B0503020204020204" charset="-122"/>
-                        <a:cs typeface="微软雅黑" panose="020B0503020204020204" charset="-122"/>
-                      </a:endParaRPr>
                     </a:p>
                   </a:txBody>
                   <a:tcPr marL="54864" marR="54864" marT="18288" marB="18288" anchor="ctr">
@@ -8005,14 +7370,6 @@
                         </a:rPr>
                         <a:t>延迟 CUDA (ms)</a:t>
                       </a:r>
-                      <a:endParaRPr sz="1300" b="1">
-                        <a:solidFill>
-                          <a:srgbClr val="FFFFFF"/>
-                        </a:solidFill>
-                        <a:latin typeface="微软雅黑" panose="020B0503020204020204" charset="-122"/>
-                        <a:ea typeface="微软雅黑" panose="020B0503020204020204" charset="-122"/>
-                        <a:cs typeface="微软雅黑" panose="020B0503020204020204" charset="-122"/>
-                      </a:endParaRPr>
                     </a:p>
                   </a:txBody>
                   <a:tcPr marL="54864" marR="54864" marT="18288" marB="18288" anchor="ctr">
@@ -8038,14 +7395,6 @@
                         </a:rPr>
                         <a:t>延迟 CPU (ms)</a:t>
                       </a:r>
-                      <a:endParaRPr sz="1300" b="1">
-                        <a:solidFill>
-                          <a:srgbClr val="FFFFFF"/>
-                        </a:solidFill>
-                        <a:latin typeface="微软雅黑" panose="020B0503020204020204" charset="-122"/>
-                        <a:ea typeface="微软雅黑" panose="020B0503020204020204" charset="-122"/>
-                        <a:cs typeface="微软雅黑" panose="020B0503020204020204" charset="-122"/>
-                      </a:endParaRPr>
                     </a:p>
                   </a:txBody>
                   <a:tcPr marL="54864" marR="54864" marT="18288" marB="18288" anchor="ctr">
@@ -8054,6 +7403,11 @@
                     </a:solidFill>
                   </a:tcPr>
                 </a:tc>
+                <a:extLst>
+                  <a:ext uri="{0D108BD9-81ED-4DB2-BD59-A6C34878D82A}">
+                    <a16:rowId xmlns:a16="http://schemas.microsoft.com/office/drawing/2014/main" val="10000"/>
+                  </a:ext>
+                </a:extLst>
               </a:tr>
               <a:tr h="457200">
                 <a:tc>
@@ -8073,14 +7427,6 @@
                         </a:rPr>
                         <a:t>ResNet-50</a:t>
                       </a:r>
-                      <a:endParaRPr sz="1300" b="1">
-                        <a:solidFill>
-                          <a:srgbClr val="262626"/>
-                        </a:solidFill>
-                        <a:latin typeface="微软雅黑" panose="020B0503020204020204" charset="-122"/>
-                        <a:ea typeface="微软雅黑" panose="020B0503020204020204" charset="-122"/>
-                        <a:cs typeface="微软雅黑" panose="020B0503020204020204" charset="-122"/>
-                      </a:endParaRPr>
                     </a:p>
                   </a:txBody>
                   <a:tcPr marL="54864" marR="54864" marT="18288" marB="18288" anchor="ctr">
@@ -8106,14 +7452,6 @@
                         </a:rPr>
                         <a:t>51.05%</a:t>
                       </a:r>
-                      <a:endParaRPr sz="1300" b="0">
-                        <a:solidFill>
-                          <a:srgbClr val="262626"/>
-                        </a:solidFill>
-                        <a:latin typeface="微软雅黑" panose="020B0503020204020204" charset="-122"/>
-                        <a:ea typeface="微软雅黑" panose="020B0503020204020204" charset="-122"/>
-                        <a:cs typeface="微软雅黑" panose="020B0503020204020204" charset="-122"/>
-                      </a:endParaRPr>
                     </a:p>
                   </a:txBody>
                   <a:tcPr marL="54864" marR="54864" marT="18288" marB="18288" anchor="ctr">
@@ -8139,14 +7477,6 @@
                         </a:rPr>
                         <a:t>79.44%</a:t>
                       </a:r>
-                      <a:endParaRPr sz="1300" b="0">
-                        <a:solidFill>
-                          <a:srgbClr val="262626"/>
-                        </a:solidFill>
-                        <a:latin typeface="微软雅黑" panose="020B0503020204020204" charset="-122"/>
-                        <a:ea typeface="微软雅黑" panose="020B0503020204020204" charset="-122"/>
-                        <a:cs typeface="微软雅黑" panose="020B0503020204020204" charset="-122"/>
-                      </a:endParaRPr>
                     </a:p>
                   </a:txBody>
                   <a:tcPr marL="54864" marR="54864" marT="18288" marB="18288" anchor="ctr">
@@ -8172,14 +7502,6 @@
                         </a:rPr>
                         <a:t>23.71</a:t>
                       </a:r>
-                      <a:endParaRPr sz="1300" b="0">
-                        <a:solidFill>
-                          <a:srgbClr val="262626"/>
-                        </a:solidFill>
-                        <a:latin typeface="微软雅黑" panose="020B0503020204020204" charset="-122"/>
-                        <a:ea typeface="微软雅黑" panose="020B0503020204020204" charset="-122"/>
-                        <a:cs typeface="微软雅黑" panose="020B0503020204020204" charset="-122"/>
-                      </a:endParaRPr>
                     </a:p>
                   </a:txBody>
                   <a:tcPr marL="54864" marR="54864" marT="18288" marB="18288" anchor="ctr">
@@ -8205,14 +7527,6 @@
                         </a:rPr>
                         <a:t>4.13</a:t>
                       </a:r>
-                      <a:endParaRPr sz="1300" b="0">
-                        <a:solidFill>
-                          <a:srgbClr val="262626"/>
-                        </a:solidFill>
-                        <a:latin typeface="微软雅黑" panose="020B0503020204020204" charset="-122"/>
-                        <a:ea typeface="微软雅黑" panose="020B0503020204020204" charset="-122"/>
-                        <a:cs typeface="微软雅黑" panose="020B0503020204020204" charset="-122"/>
-                      </a:endParaRPr>
                     </a:p>
                   </a:txBody>
                   <a:tcPr marL="54864" marR="54864" marT="18288" marB="18288" anchor="ctr">
@@ -8238,14 +7552,6 @@
                         </a:rPr>
                         <a:t>4.11</a:t>
                       </a:r>
-                      <a:endParaRPr sz="1300" b="0">
-                        <a:solidFill>
-                          <a:srgbClr val="262626"/>
-                        </a:solidFill>
-                        <a:latin typeface="微软雅黑" panose="020B0503020204020204" charset="-122"/>
-                        <a:ea typeface="微软雅黑" panose="020B0503020204020204" charset="-122"/>
-                        <a:cs typeface="微软雅黑" panose="020B0503020204020204" charset="-122"/>
-                      </a:endParaRPr>
                     </a:p>
                   </a:txBody>
                   <a:tcPr marL="54864" marR="54864" marT="18288" marB="18288" anchor="ctr">
@@ -8271,14 +7577,6 @@
                         </a:rPr>
                         <a:t>17.1</a:t>
                       </a:r>
-                      <a:endParaRPr sz="1300" b="0">
-                        <a:solidFill>
-                          <a:srgbClr val="262626"/>
-                        </a:solidFill>
-                        <a:latin typeface="微软雅黑" panose="020B0503020204020204" charset="-122"/>
-                        <a:ea typeface="微软雅黑" panose="020B0503020204020204" charset="-122"/>
-                        <a:cs typeface="微软雅黑" panose="020B0503020204020204" charset="-122"/>
-                      </a:endParaRPr>
                     </a:p>
                   </a:txBody>
                   <a:tcPr marL="54864" marR="54864" marT="18288" marB="18288" anchor="ctr">
@@ -8287,6 +7585,11 @@
                     </a:solidFill>
                   </a:tcPr>
                 </a:tc>
+                <a:extLst>
+                  <a:ext uri="{0D108BD9-81ED-4DB2-BD59-A6C34878D82A}">
+                    <a16:rowId xmlns:a16="http://schemas.microsoft.com/office/drawing/2014/main" val="10001"/>
+                  </a:ext>
+                </a:extLst>
               </a:tr>
               <a:tr h="457200">
                 <a:tc>
@@ -8306,14 +7609,6 @@
                         </a:rPr>
                         <a:t>MobileNetV3-Large</a:t>
                       </a:r>
-                      <a:endParaRPr sz="1300" b="1">
-                        <a:solidFill>
-                          <a:srgbClr val="262626"/>
-                        </a:solidFill>
-                        <a:latin typeface="微软雅黑" panose="020B0503020204020204" charset="-122"/>
-                        <a:ea typeface="微软雅黑" panose="020B0503020204020204" charset="-122"/>
-                        <a:cs typeface="微软雅黑" panose="020B0503020204020204" charset="-122"/>
-                      </a:endParaRPr>
                     </a:p>
                   </a:txBody>
                   <a:tcPr marL="54864" marR="54864" marT="18288" marB="18288" anchor="ctr">
@@ -8339,14 +7634,6 @@
                         </a:rPr>
                         <a:t>44.13%</a:t>
                       </a:r>
-                      <a:endParaRPr sz="1300" b="0">
-                        <a:solidFill>
-                          <a:srgbClr val="262626"/>
-                        </a:solidFill>
-                        <a:latin typeface="微软雅黑" panose="020B0503020204020204" charset="-122"/>
-                        <a:ea typeface="微软雅黑" panose="020B0503020204020204" charset="-122"/>
-                        <a:cs typeface="微软雅黑" panose="020B0503020204020204" charset="-122"/>
-                      </a:endParaRPr>
                     </a:p>
                   </a:txBody>
                   <a:tcPr marL="54864" marR="54864" marT="18288" marB="18288" anchor="ctr">
@@ -8372,14 +7659,6 @@
                         </a:rPr>
                         <a:t>74.30%</a:t>
                       </a:r>
-                      <a:endParaRPr sz="1300" b="0">
-                        <a:solidFill>
-                          <a:srgbClr val="262626"/>
-                        </a:solidFill>
-                        <a:latin typeface="微软雅黑" panose="020B0503020204020204" charset="-122"/>
-                        <a:ea typeface="微软雅黑" panose="020B0503020204020204" charset="-122"/>
-                        <a:cs typeface="微软雅黑" panose="020B0503020204020204" charset="-122"/>
-                      </a:endParaRPr>
                     </a:p>
                   </a:txBody>
                   <a:tcPr marL="54864" marR="54864" marT="18288" marB="18288" anchor="ctr">
@@ -8405,14 +7684,6 @@
                         </a:rPr>
                         <a:t>4.33</a:t>
                       </a:r>
-                      <a:endParaRPr sz="1300" b="0">
-                        <a:solidFill>
-                          <a:srgbClr val="262626"/>
-                        </a:solidFill>
-                        <a:latin typeface="微软雅黑" panose="020B0503020204020204" charset="-122"/>
-                        <a:ea typeface="微软雅黑" panose="020B0503020204020204" charset="-122"/>
-                        <a:cs typeface="微软雅黑" panose="020B0503020204020204" charset="-122"/>
-                      </a:endParaRPr>
                     </a:p>
                   </a:txBody>
                   <a:tcPr marL="54864" marR="54864" marT="18288" marB="18288" anchor="ctr">
@@ -8438,14 +7709,6 @@
                         </a:rPr>
                         <a:t>0.23</a:t>
                       </a:r>
-                      <a:endParaRPr sz="1300" b="0">
-                        <a:solidFill>
-                          <a:srgbClr val="262626"/>
-                        </a:solidFill>
-                        <a:latin typeface="微软雅黑" panose="020B0503020204020204" charset="-122"/>
-                        <a:ea typeface="微软雅黑" panose="020B0503020204020204" charset="-122"/>
-                        <a:cs typeface="微软雅黑" panose="020B0503020204020204" charset="-122"/>
-                      </a:endParaRPr>
                     </a:p>
                   </a:txBody>
                   <a:tcPr marL="54864" marR="54864" marT="18288" marB="18288" anchor="ctr">
@@ -8471,14 +7734,6 @@
                         </a:rPr>
                         <a:t>3.91</a:t>
                       </a:r>
-                      <a:endParaRPr sz="1300" b="0">
-                        <a:solidFill>
-                          <a:srgbClr val="262626"/>
-                        </a:solidFill>
-                        <a:latin typeface="微软雅黑" panose="020B0503020204020204" charset="-122"/>
-                        <a:ea typeface="微软雅黑" panose="020B0503020204020204" charset="-122"/>
-                        <a:cs typeface="微软雅黑" panose="020B0503020204020204" charset="-122"/>
-                      </a:endParaRPr>
                     </a:p>
                   </a:txBody>
                   <a:tcPr marL="54864" marR="54864" marT="18288" marB="18288" anchor="ctr">
@@ -8504,14 +7759,6 @@
                         </a:rPr>
                         <a:t>7.1</a:t>
                       </a:r>
-                      <a:endParaRPr sz="1300" b="0">
-                        <a:solidFill>
-                          <a:srgbClr val="262626"/>
-                        </a:solidFill>
-                        <a:latin typeface="微软雅黑" panose="020B0503020204020204" charset="-122"/>
-                        <a:ea typeface="微软雅黑" panose="020B0503020204020204" charset="-122"/>
-                        <a:cs typeface="微软雅黑" panose="020B0503020204020204" charset="-122"/>
-                      </a:endParaRPr>
                     </a:p>
                   </a:txBody>
                   <a:tcPr marL="54864" marR="54864" marT="18288" marB="18288" anchor="ctr">
@@ -8520,6 +7767,11 @@
                     </a:solidFill>
                   </a:tcPr>
                 </a:tc>
+                <a:extLst>
+                  <a:ext uri="{0D108BD9-81ED-4DB2-BD59-A6C34878D82A}">
+                    <a16:rowId xmlns:a16="http://schemas.microsoft.com/office/drawing/2014/main" val="10002"/>
+                  </a:ext>
+                </a:extLst>
               </a:tr>
               <a:tr h="457200">
                 <a:tc>
@@ -8539,14 +7791,6 @@
                         </a:rPr>
                         <a:t>ConvNeXt-Tiny</a:t>
                       </a:r>
-                      <a:endParaRPr sz="1300" b="1">
-                        <a:solidFill>
-                          <a:srgbClr val="262626"/>
-                        </a:solidFill>
-                        <a:latin typeface="微软雅黑" panose="020B0503020204020204" charset="-122"/>
-                        <a:ea typeface="微软雅黑" panose="020B0503020204020204" charset="-122"/>
-                        <a:cs typeface="微软雅黑" panose="020B0503020204020204" charset="-122"/>
-                      </a:endParaRPr>
                     </a:p>
                   </a:txBody>
                   <a:tcPr marL="54864" marR="54864" marT="18288" marB="18288" anchor="ctr">
@@ -8572,14 +7816,6 @@
                         </a:rPr>
                         <a:t>45.67%</a:t>
                       </a:r>
-                      <a:endParaRPr sz="1300" b="0">
-                        <a:solidFill>
-                          <a:srgbClr val="262626"/>
-                        </a:solidFill>
-                        <a:latin typeface="微软雅黑" panose="020B0503020204020204" charset="-122"/>
-                        <a:ea typeface="微软雅黑" panose="020B0503020204020204" charset="-122"/>
-                        <a:cs typeface="微软雅黑" panose="020B0503020204020204" charset="-122"/>
-                      </a:endParaRPr>
                     </a:p>
                   </a:txBody>
                   <a:tcPr marL="54864" marR="54864" marT="18288" marB="18288" anchor="ctr">
@@ -8605,14 +7841,6 @@
                         </a:rPr>
                         <a:t>74.73%</a:t>
                       </a:r>
-                      <a:endParaRPr sz="1300" b="0">
-                        <a:solidFill>
-                          <a:srgbClr val="262626"/>
-                        </a:solidFill>
-                        <a:latin typeface="微软雅黑" panose="020B0503020204020204" charset="-122"/>
-                        <a:ea typeface="微软雅黑" panose="020B0503020204020204" charset="-122"/>
-                        <a:cs typeface="微软雅黑" panose="020B0503020204020204" charset="-122"/>
-                      </a:endParaRPr>
                     </a:p>
                   </a:txBody>
                   <a:tcPr marL="54864" marR="54864" marT="18288" marB="18288" anchor="ctr">
@@ -8638,14 +7866,6 @@
                         </a:rPr>
                         <a:t>27.89</a:t>
                       </a:r>
-                      <a:endParaRPr sz="1300" b="0">
-                        <a:solidFill>
-                          <a:srgbClr val="262626"/>
-                        </a:solidFill>
-                        <a:latin typeface="微软雅黑" panose="020B0503020204020204" charset="-122"/>
-                        <a:ea typeface="微软雅黑" panose="020B0503020204020204" charset="-122"/>
-                        <a:cs typeface="微软雅黑" panose="020B0503020204020204" charset="-122"/>
-                      </a:endParaRPr>
                     </a:p>
                   </a:txBody>
                   <a:tcPr marL="54864" marR="54864" marT="18288" marB="18288" anchor="ctr">
@@ -8671,14 +7891,6 @@
                         </a:rPr>
                         <a:t>4.46</a:t>
                       </a:r>
-                      <a:endParaRPr sz="1300" b="0">
-                        <a:solidFill>
-                          <a:srgbClr val="262626"/>
-                        </a:solidFill>
-                        <a:latin typeface="微软雅黑" panose="020B0503020204020204" charset="-122"/>
-                        <a:ea typeface="微软雅黑" panose="020B0503020204020204" charset="-122"/>
-                        <a:cs typeface="微软雅黑" panose="020B0503020204020204" charset="-122"/>
-                      </a:endParaRPr>
                     </a:p>
                   </a:txBody>
                   <a:tcPr marL="54864" marR="54864" marT="18288" marB="18288" anchor="ctr">
@@ -8704,14 +7916,6 @@
                         </a:rPr>
                         <a:t>4.33</a:t>
                       </a:r>
-                      <a:endParaRPr sz="1300" b="0">
-                        <a:solidFill>
-                          <a:srgbClr val="262626"/>
-                        </a:solidFill>
-                        <a:latin typeface="微软雅黑" panose="020B0503020204020204" charset="-122"/>
-                        <a:ea typeface="微软雅黑" panose="020B0503020204020204" charset="-122"/>
-                        <a:cs typeface="微软雅黑" panose="020B0503020204020204" charset="-122"/>
-                      </a:endParaRPr>
                     </a:p>
                   </a:txBody>
                   <a:tcPr marL="54864" marR="54864" marT="18288" marB="18288" anchor="ctr">
@@ -8737,14 +7941,6 @@
                         </a:rPr>
                         <a:t>14.4</a:t>
                       </a:r>
-                      <a:endParaRPr sz="1300" b="0">
-                        <a:solidFill>
-                          <a:srgbClr val="262626"/>
-                        </a:solidFill>
-                        <a:latin typeface="微软雅黑" panose="020B0503020204020204" charset="-122"/>
-                        <a:ea typeface="微软雅黑" panose="020B0503020204020204" charset="-122"/>
-                        <a:cs typeface="微软雅黑" panose="020B0503020204020204" charset="-122"/>
-                      </a:endParaRPr>
                     </a:p>
                   </a:txBody>
                   <a:tcPr marL="54864" marR="54864" marT="18288" marB="18288" anchor="ctr">
@@ -8753,6 +7949,11 @@
                     </a:solidFill>
                   </a:tcPr>
                 </a:tc>
+                <a:extLst>
+                  <a:ext uri="{0D108BD9-81ED-4DB2-BD59-A6C34878D82A}">
+                    <a16:rowId xmlns:a16="http://schemas.microsoft.com/office/drawing/2014/main" val="10003"/>
+                  </a:ext>
+                </a:extLst>
               </a:tr>
               <a:tr h="457200">
                 <a:tc>
@@ -8772,14 +7973,6 @@
                         </a:rPr>
                         <a:t>ConvNeXt-Tiny + LS(0.1)</a:t>
                       </a:r>
-                      <a:endParaRPr sz="1300" b="1">
-                        <a:solidFill>
-                          <a:srgbClr val="262626"/>
-                        </a:solidFill>
-                        <a:latin typeface="微软雅黑" panose="020B0503020204020204" charset="-122"/>
-                        <a:ea typeface="微软雅黑" panose="020B0503020204020204" charset="-122"/>
-                        <a:cs typeface="微软雅黑" panose="020B0503020204020204" charset="-122"/>
-                      </a:endParaRPr>
                     </a:p>
                   </a:txBody>
                   <a:tcPr marL="54864" marR="54864" marT="18288" marB="18288" anchor="ctr">
@@ -8805,14 +7998,6 @@
                         </a:rPr>
                         <a:t>46.36%</a:t>
                       </a:r>
-                      <a:endParaRPr sz="1300" b="0">
-                        <a:solidFill>
-                          <a:srgbClr val="262626"/>
-                        </a:solidFill>
-                        <a:latin typeface="微软雅黑" panose="020B0503020204020204" charset="-122"/>
-                        <a:ea typeface="微软雅黑" panose="020B0503020204020204" charset="-122"/>
-                        <a:cs typeface="微软雅黑" panose="020B0503020204020204" charset="-122"/>
-                      </a:endParaRPr>
                     </a:p>
                   </a:txBody>
                   <a:tcPr marL="54864" marR="54864" marT="18288" marB="18288" anchor="ctr">
@@ -8838,14 +8023,6 @@
                         </a:rPr>
                         <a:t>74.46%</a:t>
                       </a:r>
-                      <a:endParaRPr sz="1300" b="0">
-                        <a:solidFill>
-                          <a:srgbClr val="262626"/>
-                        </a:solidFill>
-                        <a:latin typeface="微软雅黑" panose="020B0503020204020204" charset="-122"/>
-                        <a:ea typeface="微软雅黑" panose="020B0503020204020204" charset="-122"/>
-                        <a:cs typeface="微软雅黑" panose="020B0503020204020204" charset="-122"/>
-                      </a:endParaRPr>
                     </a:p>
                   </a:txBody>
                   <a:tcPr marL="54864" marR="54864" marT="18288" marB="18288" anchor="ctr">
@@ -8871,14 +8048,6 @@
                         </a:rPr>
                         <a:t>27.89</a:t>
                       </a:r>
-                      <a:endParaRPr sz="1300" b="0">
-                        <a:solidFill>
-                          <a:srgbClr val="262626"/>
-                        </a:solidFill>
-                        <a:latin typeface="微软雅黑" panose="020B0503020204020204" charset="-122"/>
-                        <a:ea typeface="微软雅黑" panose="020B0503020204020204" charset="-122"/>
-                        <a:cs typeface="微软雅黑" panose="020B0503020204020204" charset="-122"/>
-                      </a:endParaRPr>
                     </a:p>
                   </a:txBody>
                   <a:tcPr marL="54864" marR="54864" marT="18288" marB="18288" anchor="ctr">
@@ -8904,14 +8073,6 @@
                         </a:rPr>
                         <a:t>4.46</a:t>
                       </a:r>
-                      <a:endParaRPr sz="1300" b="0">
-                        <a:solidFill>
-                          <a:srgbClr val="262626"/>
-                        </a:solidFill>
-                        <a:latin typeface="微软雅黑" panose="020B0503020204020204" charset="-122"/>
-                        <a:ea typeface="微软雅黑" panose="020B0503020204020204" charset="-122"/>
-                        <a:cs typeface="微软雅黑" panose="020B0503020204020204" charset="-122"/>
-                      </a:endParaRPr>
                     </a:p>
                   </a:txBody>
                   <a:tcPr marL="54864" marR="54864" marT="18288" marB="18288" anchor="ctr">
@@ -8937,14 +8098,6 @@
                         </a:rPr>
                         <a:t>—</a:t>
                       </a:r>
-                      <a:endParaRPr sz="1300" b="0">
-                        <a:solidFill>
-                          <a:srgbClr val="262626"/>
-                        </a:solidFill>
-                        <a:latin typeface="微软雅黑" panose="020B0503020204020204" charset="-122"/>
-                        <a:ea typeface="微软雅黑" panose="020B0503020204020204" charset="-122"/>
-                        <a:cs typeface="微软雅黑" panose="020B0503020204020204" charset="-122"/>
-                      </a:endParaRPr>
                     </a:p>
                   </a:txBody>
                   <a:tcPr marL="54864" marR="54864" marT="18288" marB="18288" anchor="ctr">
@@ -8970,14 +8123,6 @@
                         </a:rPr>
                         <a:t>—</a:t>
                       </a:r>
-                      <a:endParaRPr sz="1300" b="0">
-                        <a:solidFill>
-                          <a:srgbClr val="262626"/>
-                        </a:solidFill>
-                        <a:latin typeface="微软雅黑" panose="020B0503020204020204" charset="-122"/>
-                        <a:ea typeface="微软雅黑" panose="020B0503020204020204" charset="-122"/>
-                        <a:cs typeface="微软雅黑" panose="020B0503020204020204" charset="-122"/>
-                      </a:endParaRPr>
                     </a:p>
                   </a:txBody>
                   <a:tcPr marL="54864" marR="54864" marT="18288" marB="18288" anchor="ctr">
@@ -8986,6 +8131,11 @@
                     </a:solidFill>
                   </a:tcPr>
                 </a:tc>
+                <a:extLst>
+                  <a:ext uri="{0D108BD9-81ED-4DB2-BD59-A6C34878D82A}">
+                    <a16:rowId xmlns:a16="http://schemas.microsoft.com/office/drawing/2014/main" val="10004"/>
+                  </a:ext>
+                </a:extLst>
               </a:tr>
             </a:tbl>
           </a:graphicData>
@@ -9032,14 +8182,6 @@
               </a:rPr>
               <a:t>① ResNet-50 精度最高：Test Top-1 领先 ConvNeXt-Tiny 5.38 pt、领先 MobileNetV3-Large 6.92 pt</a:t>
             </a:r>
-            <a:endParaRPr sz="1400" b="0">
-              <a:solidFill>
-                <a:srgbClr val="1F3864"/>
-              </a:solidFill>
-              <a:latin typeface="微软雅黑" panose="020B0503020204020204" charset="-122"/>
-              <a:ea typeface="微软雅黑" panose="020B0503020204020204" charset="-122"/>
-              <a:cs typeface="微软雅黑" panose="020B0503020204020204" charset="-122"/>
-            </a:endParaRPr>
           </a:p>
           <a:p>
             <a:pPr>
@@ -9061,14 +8203,6 @@
               </a:rPr>
               <a:t>② MobileNetV3-Large 性价比最高：参数量仅为 ResNet-50 的 1/5.5、MACs 为 1/17.7，CPU 延迟快 2.4 倍</a:t>
             </a:r>
-            <a:endParaRPr sz="1400" b="0">
-              <a:solidFill>
-                <a:srgbClr val="1F3864"/>
-              </a:solidFill>
-              <a:latin typeface="微软雅黑" panose="020B0503020204020204" charset="-122"/>
-              <a:ea typeface="微软雅黑" panose="020B0503020204020204" charset="-122"/>
-              <a:cs typeface="微软雅黑" panose="020B0503020204020204" charset="-122"/>
-            </a:endParaRPr>
           </a:p>
           <a:p>
             <a:pPr>
@@ -9090,14 +8224,6 @@
               </a:rPr>
               <a:t>③ ConvNeXt-Tiny 未兑现架构优势：参数量与算力最大，精度却最低（更依赖大规模数据与强增强）</a:t>
             </a:r>
-            <a:endParaRPr sz="1400" b="0">
-              <a:solidFill>
-                <a:srgbClr val="1F3864"/>
-              </a:solidFill>
-              <a:latin typeface="微软雅黑" panose="020B0503020204020204" charset="-122"/>
-              <a:ea typeface="微软雅黑" panose="020B0503020204020204" charset="-122"/>
-              <a:cs typeface="微软雅黑" panose="020B0503020204020204" charset="-122"/>
-            </a:endParaRPr>
           </a:p>
           <a:p>
             <a:pPr>
@@ -9229,14 +8355,6 @@
               </a:rPr>
               <a:t>.</a:t>
             </a:r>
-            <a:endParaRPr lang="en-US" altLang="zh-CN" sz="1400">
-              <a:solidFill>
-                <a:srgbClr val="1F3864"/>
-              </a:solidFill>
-              <a:latin typeface="微软雅黑" panose="020B0503020204020204" charset="-122"/>
-              <a:ea typeface="微软雅黑" panose="020B0503020204020204" charset="-122"/>
-              <a:cs typeface="微软雅黑" panose="020B0503020204020204" charset="-122"/>
-            </a:endParaRPr>
           </a:p>
         </p:txBody>
       </p:sp>
@@ -9257,7 +8375,14 @@
         <p:cNvGrpSpPr/>
         <p:nvPr/>
       </p:nvGrpSpPr>
-      <p:grpSpPr/>
+      <p:grpSpPr>
+        <a:xfrm>
+          <a:off x="0" y="0"/>
+          <a:ext cx="0" cy="0"/>
+          <a:chOff x="0" y="0"/>
+          <a:chExt cx="0" cy="0"/>
+        </a:xfrm>
+      </p:grpSpPr>
       <p:sp>
         <p:nvSpPr>
           <p:cNvPr id="2" name="Rectangle 1"/>
@@ -9298,6 +8423,7 @@
           <a:lstStyle/>
           <a:p>
             <a:pPr algn="ctr"/>
+            <a:endParaRPr/>
           </a:p>
         </p:txBody>
       </p:sp>
@@ -9339,14 +8465,6 @@
               </a:rPr>
               <a:t>训练曲线：三个模型均严重过拟合</a:t>
             </a:r>
-            <a:endParaRPr sz="2700" b="1">
-              <a:solidFill>
-                <a:srgbClr val="1F3864"/>
-              </a:solidFill>
-              <a:latin typeface="微软雅黑" panose="020B0503020204020204" charset="-122"/>
-              <a:ea typeface="微软雅黑" panose="020B0503020204020204" charset="-122"/>
-              <a:cs typeface="微软雅黑" panose="020B0503020204020204" charset="-122"/>
-            </a:endParaRPr>
           </a:p>
         </p:txBody>
       </p:sp>
@@ -9388,14 +8506,6 @@
               </a:rPr>
               <a:t>Cross-Entropy；三个模型训练集几乎完全拟合，验证集早在第 10~11 轮就不再改善</a:t>
             </a:r>
-            <a:endParaRPr sz="1350" b="0">
-              <a:solidFill>
-                <a:srgbClr val="595959"/>
-              </a:solidFill>
-              <a:latin typeface="微软雅黑" panose="020B0503020204020204" charset="-122"/>
-              <a:ea typeface="微软雅黑" panose="020B0503020204020204" charset="-122"/>
-              <a:cs typeface="微软雅黑" panose="020B0503020204020204" charset="-122"/>
-            </a:endParaRPr>
           </a:p>
         </p:txBody>
       </p:sp>
@@ -9439,36 +8549,13 @@
           <a:lstStyle/>
           <a:p>
             <a:pPr algn="ctr"/>
+            <a:endParaRPr/>
           </a:p>
         </p:txBody>
       </p:sp>
       <p:pic>
         <p:nvPicPr>
           <p:cNvPr id="9" name="Picture 8" descr="image.png"/>
-          <p:cNvPicPr>
-            <a:picLocks noChangeAspect="1"/>
-          </p:cNvPicPr>
-          <p:nvPr/>
-        </p:nvPicPr>
-        <p:blipFill>
-          <a:blip r:embed="rId1"/>
-          <a:stretch>
-            <a:fillRect/>
-          </a:stretch>
-        </p:blipFill>
-        <p:spPr>
-          <a:xfrm>
-            <a:off x="356616" y="1554480"/>
-            <a:ext cx="3703320" cy="2777490"/>
-          </a:xfrm>
-          <a:prstGeom prst="rect">
-            <a:avLst/>
-          </a:prstGeom>
-        </p:spPr>
-      </p:pic>
-      <p:pic>
-        <p:nvPicPr>
-          <p:cNvPr id="10" name="Picture 9" descr="mobilenetv3_accuracy_curve.png"/>
           <p:cNvPicPr>
             <a:picLocks noChangeAspect="1"/>
           </p:cNvPicPr>
@@ -9482,7 +8569,7 @@
         </p:blipFill>
         <p:spPr>
           <a:xfrm>
-            <a:off x="4242816" y="1554480"/>
+            <a:off x="356616" y="1554480"/>
             <a:ext cx="3703320" cy="2777490"/>
           </a:xfrm>
           <a:prstGeom prst="rect">
@@ -9492,7 +8579,7 @@
       </p:pic>
       <p:pic>
         <p:nvPicPr>
-          <p:cNvPr id="11" name="Picture 10" descr="image.png"/>
+          <p:cNvPr id="10" name="Picture 9" descr="mobilenetv3_accuracy_curve.png"/>
           <p:cNvPicPr>
             <a:picLocks noChangeAspect="1"/>
           </p:cNvPicPr>
@@ -9506,6 +8593,30 @@
         </p:blipFill>
         <p:spPr>
           <a:xfrm>
+            <a:off x="4242816" y="1554480"/>
+            <a:ext cx="3703320" cy="2777490"/>
+          </a:xfrm>
+          <a:prstGeom prst="rect">
+            <a:avLst/>
+          </a:prstGeom>
+        </p:spPr>
+      </p:pic>
+      <p:pic>
+        <p:nvPicPr>
+          <p:cNvPr id="11" name="Picture 10" descr="image.png"/>
+          <p:cNvPicPr>
+            <a:picLocks noChangeAspect="1"/>
+          </p:cNvPicPr>
+          <p:nvPr/>
+        </p:nvPicPr>
+        <p:blipFill>
+          <a:blip r:embed="rId4"/>
+          <a:stretch>
+            <a:fillRect/>
+          </a:stretch>
+        </p:blipFill>
+        <p:spPr>
+          <a:xfrm>
             <a:off x="8129016" y="1554480"/>
             <a:ext cx="3703320" cy="2777490"/>
           </a:xfrm>
@@ -9555,14 +8666,6 @@
               </a:rPr>
               <a:t>三个模型训练 Top-1 达 89.9% ~ 97.5%，验证 Top-1 最高只有 48.07%，差距 41.8 ~ 49.5 pt</a:t>
             </a:r>
-            <a:endParaRPr sz="1500" b="1">
-              <a:solidFill>
-                <a:srgbClr val="1F3864"/>
-              </a:solidFill>
-              <a:latin typeface="微软雅黑" panose="020B0503020204020204" charset="-122"/>
-              <a:ea typeface="微软雅黑" panose="020B0503020204020204" charset="-122"/>
-              <a:cs typeface="微软雅黑" panose="020B0503020204020204" charset="-122"/>
-            </a:endParaRPr>
           </a:p>
           <a:p>
             <a:pPr>
@@ -9584,14 +8687,6 @@
               </a:rPr>
               <a:t>训练损失单调降到 0.08 ~ 0.32，而验证损失在第 10 ~ 11 轮触底后一路上升</a:t>
             </a:r>
-            <a:endParaRPr sz="1500" b="0">
-              <a:solidFill>
-                <a:srgbClr val="1F3864"/>
-              </a:solidFill>
-              <a:latin typeface="微软雅黑" panose="020B0503020204020204" charset="-122"/>
-              <a:ea typeface="微软雅黑" panose="020B0503020204020204" charset="-122"/>
-              <a:cs typeface="微软雅黑" panose="020B0503020204020204" charset="-122"/>
-            </a:endParaRPr>
           </a:p>
           <a:p>
             <a:pPr>
@@ -9613,14 +8708,6 @@
               </a:rPr>
               <a:t>ResNet-50 验证损失 1.93 → 2.99；ConvNeXt-Tiny 2.18 → 3.88（劣化最严重，是最低点的 1.78 倍）</a:t>
             </a:r>
-            <a:endParaRPr sz="1500" b="0">
-              <a:solidFill>
-                <a:srgbClr val="1F3864"/>
-              </a:solidFill>
-              <a:latin typeface="微软雅黑" panose="020B0503020204020204" charset="-122"/>
-              <a:ea typeface="微软雅黑" panose="020B0503020204020204" charset="-122"/>
-              <a:cs typeface="微软雅黑" panose="020B0503020204020204" charset="-122"/>
-            </a:endParaRPr>
           </a:p>
           <a:p>
             <a:pPr>
@@ -9642,14 +8729,6 @@
               </a:rPr>
               <a:t>根因：训练集没有任何数据增强（无 RandomResizedCrop / 翻转 / Mixup）</a:t>
             </a:r>
-            <a:endParaRPr sz="1500" b="0">
-              <a:solidFill>
-                <a:srgbClr val="1F3864"/>
-              </a:solidFill>
-              <a:latin typeface="微软雅黑" panose="020B0503020204020204" charset="-122"/>
-              <a:ea typeface="微软雅黑" panose="020B0503020204020204" charset="-122"/>
-              <a:cs typeface="微软雅黑" panose="020B0503020204020204" charset="-122"/>
-            </a:endParaRPr>
           </a:p>
         </p:txBody>
       </p:sp>
@@ -9670,7 +8749,14 @@
         <p:cNvGrpSpPr/>
         <p:nvPr/>
       </p:nvGrpSpPr>
-      <p:grpSpPr/>
+      <p:grpSpPr>
+        <a:xfrm>
+          <a:off x="0" y="0"/>
+          <a:ext cx="0" cy="0"/>
+          <a:chOff x="0" y="0"/>
+          <a:chExt cx="0" cy="0"/>
+        </a:xfrm>
+      </p:grpSpPr>
       <p:sp>
         <p:nvSpPr>
           <p:cNvPr id="2" name="Rectangle 1"/>
@@ -9711,6 +8797,7 @@
           <a:lstStyle/>
           <a:p>
             <a:pPr algn="ctr"/>
+            <a:endParaRPr/>
           </a:p>
         </p:txBody>
       </p:sp>
@@ -9752,14 +8839,6 @@
               </a:rPr>
               <a:t>消融实验：Cross-Entropy vs Label Smoothing</a:t>
             </a:r>
-            <a:endParaRPr sz="2700" b="1">
-              <a:solidFill>
-                <a:srgbClr val="1F3864"/>
-              </a:solidFill>
-              <a:latin typeface="微软雅黑" panose="020B0503020204020204" charset="-122"/>
-              <a:ea typeface="微软雅黑" panose="020B0503020204020204" charset="-122"/>
-              <a:cs typeface="微软雅黑" panose="020B0503020204020204" charset="-122"/>
-            </a:endParaRPr>
           </a:p>
         </p:txBody>
       </p:sp>
@@ -9801,14 +8880,6 @@
               </a:rPr>
               <a:t>固定 ConvNeXt-Tiny，仅替换损失函数；30 epoch、seed=0、α=0.1</a:t>
             </a:r>
-            <a:endParaRPr sz="1350" b="0">
-              <a:solidFill>
-                <a:srgbClr val="595959"/>
-              </a:solidFill>
-              <a:latin typeface="微软雅黑" panose="020B0503020204020204" charset="-122"/>
-              <a:ea typeface="微软雅黑" panose="020B0503020204020204" charset="-122"/>
-              <a:cs typeface="微软雅黑" panose="020B0503020204020204" charset="-122"/>
-            </a:endParaRPr>
           </a:p>
         </p:txBody>
       </p:sp>
@@ -9852,6 +8923,7 @@
           <a:lstStyle/>
           <a:p>
             <a:pPr algn="ctr"/>
+            <a:endParaRPr/>
           </a:p>
         </p:txBody>
       </p:sp>
@@ -9874,10 +8946,34 @@
                 <a:tableStyleId>{5C22544A-7EE6-4342-B048-85BDC9FD1C3A}</a:tableStyleId>
               </a:tblPr>
               <a:tblGrid>
-                <a:gridCol w="3096423"/>
-                <a:gridCol w="3096423"/>
-                <a:gridCol w="3278566"/>
-                <a:gridCol w="1821425"/>
+                <a:gridCol w="3096423">
+                  <a:extLst>
+                    <a:ext uri="{9D8B030D-6E8A-4147-A177-3AD203B41FA5}">
+                      <a16:colId xmlns:a16="http://schemas.microsoft.com/office/drawing/2014/main" val="20000"/>
+                    </a:ext>
+                  </a:extLst>
+                </a:gridCol>
+                <a:gridCol w="3096423">
+                  <a:extLst>
+                    <a:ext uri="{9D8B030D-6E8A-4147-A177-3AD203B41FA5}">
+                      <a16:colId xmlns:a16="http://schemas.microsoft.com/office/drawing/2014/main" val="20001"/>
+                    </a:ext>
+                  </a:extLst>
+                </a:gridCol>
+                <a:gridCol w="3278566">
+                  <a:extLst>
+                    <a:ext uri="{9D8B030D-6E8A-4147-A177-3AD203B41FA5}">
+                      <a16:colId xmlns:a16="http://schemas.microsoft.com/office/drawing/2014/main" val="20002"/>
+                    </a:ext>
+                  </a:extLst>
+                </a:gridCol>
+                <a:gridCol w="1821425">
+                  <a:extLst>
+                    <a:ext uri="{9D8B030D-6E8A-4147-A177-3AD203B41FA5}">
+                      <a16:colId xmlns:a16="http://schemas.microsoft.com/office/drawing/2014/main" val="20003"/>
+                    </a:ext>
+                  </a:extLst>
+                </a:gridCol>
               </a:tblGrid>
               <a:tr h="514350">
                 <a:tc>
@@ -9897,14 +8993,6 @@
                         </a:rPr>
                         <a:t>指标</a:t>
                       </a:r>
-                      <a:endParaRPr sz="1300" b="1">
-                        <a:solidFill>
-                          <a:srgbClr val="FFFFFF"/>
-                        </a:solidFill>
-                        <a:latin typeface="微软雅黑" panose="020B0503020204020204" charset="-122"/>
-                        <a:ea typeface="微软雅黑" panose="020B0503020204020204" charset="-122"/>
-                        <a:cs typeface="微软雅黑" panose="020B0503020204020204" charset="-122"/>
-                      </a:endParaRPr>
                     </a:p>
                   </a:txBody>
                   <a:tcPr marL="54864" marR="54864" marT="18288" marB="18288" anchor="ctr">
@@ -9930,14 +9018,6 @@
                         </a:rPr>
                         <a:t>Cross-Entropy</a:t>
                       </a:r>
-                      <a:endParaRPr sz="1300" b="1">
-                        <a:solidFill>
-                          <a:srgbClr val="FFFFFF"/>
-                        </a:solidFill>
-                        <a:latin typeface="微软雅黑" panose="020B0503020204020204" charset="-122"/>
-                        <a:ea typeface="微软雅黑" panose="020B0503020204020204" charset="-122"/>
-                        <a:cs typeface="微软雅黑" panose="020B0503020204020204" charset="-122"/>
-                      </a:endParaRPr>
                     </a:p>
                   </a:txBody>
                   <a:tcPr marL="54864" marR="54864" marT="18288" marB="18288" anchor="ctr">
@@ -9963,14 +9043,6 @@
                         </a:rPr>
                         <a:t>Label Smoothing (α=0.1)</a:t>
                       </a:r>
-                      <a:endParaRPr sz="1300" b="1">
-                        <a:solidFill>
-                          <a:srgbClr val="FFFFFF"/>
-                        </a:solidFill>
-                        <a:latin typeface="微软雅黑" panose="020B0503020204020204" charset="-122"/>
-                        <a:ea typeface="微软雅黑" panose="020B0503020204020204" charset="-122"/>
-                        <a:cs typeface="微软雅黑" panose="020B0503020204020204" charset="-122"/>
-                      </a:endParaRPr>
                     </a:p>
                   </a:txBody>
                   <a:tcPr marL="54864" marR="54864" marT="18288" marB="18288" anchor="ctr">
@@ -9996,14 +9068,6 @@
                         </a:rPr>
                         <a:t>变化</a:t>
                       </a:r>
-                      <a:endParaRPr sz="1300" b="1">
-                        <a:solidFill>
-                          <a:srgbClr val="FFFFFF"/>
-                        </a:solidFill>
-                        <a:latin typeface="微软雅黑" panose="020B0503020204020204" charset="-122"/>
-                        <a:ea typeface="微软雅黑" panose="020B0503020204020204" charset="-122"/>
-                        <a:cs typeface="微软雅黑" panose="020B0503020204020204" charset="-122"/>
-                      </a:endParaRPr>
                     </a:p>
                   </a:txBody>
                   <a:tcPr marL="54864" marR="54864" marT="18288" marB="18288" anchor="ctr">
@@ -10012,6 +9076,11 @@
                     </a:solidFill>
                   </a:tcPr>
                 </a:tc>
+                <a:extLst>
+                  <a:ext uri="{0D108BD9-81ED-4DB2-BD59-A6C34878D82A}">
+                    <a16:rowId xmlns:a16="http://schemas.microsoft.com/office/drawing/2014/main" val="10000"/>
+                  </a:ext>
+                </a:extLst>
               </a:tr>
               <a:tr h="514350">
                 <a:tc>
@@ -10031,14 +9100,6 @@
                         </a:rPr>
                         <a:t>Test Top-1</a:t>
                       </a:r>
-                      <a:endParaRPr sz="1250" b="0">
-                        <a:solidFill>
-                          <a:srgbClr val="262626"/>
-                        </a:solidFill>
-                        <a:latin typeface="微软雅黑" panose="020B0503020204020204" charset="-122"/>
-                        <a:ea typeface="微软雅黑" panose="020B0503020204020204" charset="-122"/>
-                        <a:cs typeface="微软雅黑" panose="020B0503020204020204" charset="-122"/>
-                      </a:endParaRPr>
                     </a:p>
                   </a:txBody>
                   <a:tcPr marL="54864" marR="54864" marT="18288" marB="18288" anchor="ctr">
@@ -10064,14 +9125,6 @@
                         </a:rPr>
                         <a:t>45.67%</a:t>
                       </a:r>
-                      <a:endParaRPr sz="1250" b="0">
-                        <a:solidFill>
-                          <a:srgbClr val="262626"/>
-                        </a:solidFill>
-                        <a:latin typeface="微软雅黑" panose="020B0503020204020204" charset="-122"/>
-                        <a:ea typeface="微软雅黑" panose="020B0503020204020204" charset="-122"/>
-                        <a:cs typeface="微软雅黑" panose="020B0503020204020204" charset="-122"/>
-                      </a:endParaRPr>
                     </a:p>
                   </a:txBody>
                   <a:tcPr marL="54864" marR="54864" marT="18288" marB="18288" anchor="ctr">
@@ -10097,14 +9150,6 @@
                         </a:rPr>
                         <a:t>46.36%</a:t>
                       </a:r>
-                      <a:endParaRPr sz="1250" b="0">
-                        <a:solidFill>
-                          <a:srgbClr val="262626"/>
-                        </a:solidFill>
-                        <a:latin typeface="微软雅黑" panose="020B0503020204020204" charset="-122"/>
-                        <a:ea typeface="微软雅黑" panose="020B0503020204020204" charset="-122"/>
-                        <a:cs typeface="微软雅黑" panose="020B0503020204020204" charset="-122"/>
-                      </a:endParaRPr>
                     </a:p>
                   </a:txBody>
                   <a:tcPr marL="54864" marR="54864" marT="18288" marB="18288" anchor="ctr">
@@ -10130,14 +9175,6 @@
                         </a:rPr>
                         <a:t>+0.69 pt</a:t>
                       </a:r>
-                      <a:endParaRPr sz="1250" b="0">
-                        <a:solidFill>
-                          <a:srgbClr val="262626"/>
-                        </a:solidFill>
-                        <a:latin typeface="微软雅黑" panose="020B0503020204020204" charset="-122"/>
-                        <a:ea typeface="微软雅黑" panose="020B0503020204020204" charset="-122"/>
-                        <a:cs typeface="微软雅黑" panose="020B0503020204020204" charset="-122"/>
-                      </a:endParaRPr>
                     </a:p>
                   </a:txBody>
                   <a:tcPr marL="54864" marR="54864" marT="18288" marB="18288" anchor="ctr">
@@ -10146,6 +9183,11 @@
                     </a:solidFill>
                   </a:tcPr>
                 </a:tc>
+                <a:extLst>
+                  <a:ext uri="{0D108BD9-81ED-4DB2-BD59-A6C34878D82A}">
+                    <a16:rowId xmlns:a16="http://schemas.microsoft.com/office/drawing/2014/main" val="10001"/>
+                  </a:ext>
+                </a:extLst>
               </a:tr>
               <a:tr h="514350">
                 <a:tc>
@@ -10165,14 +9207,6 @@
                         </a:rPr>
                         <a:t>Test Top-5</a:t>
                       </a:r>
-                      <a:endParaRPr sz="1250" b="0">
-                        <a:solidFill>
-                          <a:srgbClr val="262626"/>
-                        </a:solidFill>
-                        <a:latin typeface="微软雅黑" panose="020B0503020204020204" charset="-122"/>
-                        <a:ea typeface="微软雅黑" panose="020B0503020204020204" charset="-122"/>
-                        <a:cs typeface="微软雅黑" panose="020B0503020204020204" charset="-122"/>
-                      </a:endParaRPr>
                     </a:p>
                   </a:txBody>
                   <a:tcPr marL="54864" marR="54864" marT="18288" marB="18288" anchor="ctr">
@@ -10198,14 +9232,6 @@
                         </a:rPr>
                         <a:t>74.73%</a:t>
                       </a:r>
-                      <a:endParaRPr sz="1250" b="0">
-                        <a:solidFill>
-                          <a:srgbClr val="262626"/>
-                        </a:solidFill>
-                        <a:latin typeface="微软雅黑" panose="020B0503020204020204" charset="-122"/>
-                        <a:ea typeface="微软雅黑" panose="020B0503020204020204" charset="-122"/>
-                        <a:cs typeface="微软雅黑" panose="020B0503020204020204" charset="-122"/>
-                      </a:endParaRPr>
                     </a:p>
                   </a:txBody>
                   <a:tcPr marL="54864" marR="54864" marT="18288" marB="18288" anchor="ctr">
@@ -10231,14 +9257,6 @@
                         </a:rPr>
                         <a:t>74.46%</a:t>
                       </a:r>
-                      <a:endParaRPr sz="1250" b="0">
-                        <a:solidFill>
-                          <a:srgbClr val="262626"/>
-                        </a:solidFill>
-                        <a:latin typeface="微软雅黑" panose="020B0503020204020204" charset="-122"/>
-                        <a:ea typeface="微软雅黑" panose="020B0503020204020204" charset="-122"/>
-                        <a:cs typeface="微软雅黑" panose="020B0503020204020204" charset="-122"/>
-                      </a:endParaRPr>
                     </a:p>
                   </a:txBody>
                   <a:tcPr marL="54864" marR="54864" marT="18288" marB="18288" anchor="ctr">
@@ -10264,14 +9282,6 @@
                         </a:rPr>
                         <a:t>−0.27 pt</a:t>
                       </a:r>
-                      <a:endParaRPr sz="1250" b="0">
-                        <a:solidFill>
-                          <a:srgbClr val="262626"/>
-                        </a:solidFill>
-                        <a:latin typeface="微软雅黑" panose="020B0503020204020204" charset="-122"/>
-                        <a:ea typeface="微软雅黑" panose="020B0503020204020204" charset="-122"/>
-                        <a:cs typeface="微软雅黑" panose="020B0503020204020204" charset="-122"/>
-                      </a:endParaRPr>
                     </a:p>
                   </a:txBody>
                   <a:tcPr marL="54864" marR="54864" marT="18288" marB="18288" anchor="ctr">
@@ -10280,6 +9290,11 @@
                     </a:solidFill>
                   </a:tcPr>
                 </a:tc>
+                <a:extLst>
+                  <a:ext uri="{0D108BD9-81ED-4DB2-BD59-A6C34878D82A}">
+                    <a16:rowId xmlns:a16="http://schemas.microsoft.com/office/drawing/2014/main" val="10002"/>
+                  </a:ext>
+                </a:extLst>
               </a:tr>
               <a:tr h="514350">
                 <a:tc>
@@ -10299,14 +9314,6 @@
                         </a:rPr>
                         <a:t>最优 Val Top-1</a:t>
                       </a:r>
-                      <a:endParaRPr sz="1250" b="0">
-                        <a:solidFill>
-                          <a:srgbClr val="262626"/>
-                        </a:solidFill>
-                        <a:latin typeface="微软雅黑" panose="020B0503020204020204" charset="-122"/>
-                        <a:ea typeface="微软雅黑" panose="020B0503020204020204" charset="-122"/>
-                        <a:cs typeface="微软雅黑" panose="020B0503020204020204" charset="-122"/>
-                      </a:endParaRPr>
                     </a:p>
                   </a:txBody>
                   <a:tcPr marL="54864" marR="54864" marT="18288" marB="18288" anchor="ctr">
@@ -10332,14 +9339,6 @@
                         </a:rPr>
                         <a:t>46.14% (ep13)</a:t>
                       </a:r>
-                      <a:endParaRPr sz="1250" b="0">
-                        <a:solidFill>
-                          <a:srgbClr val="262626"/>
-                        </a:solidFill>
-                        <a:latin typeface="微软雅黑" panose="020B0503020204020204" charset="-122"/>
-                        <a:ea typeface="微软雅黑" panose="020B0503020204020204" charset="-122"/>
-                        <a:cs typeface="微软雅黑" panose="020B0503020204020204" charset="-122"/>
-                      </a:endParaRPr>
                     </a:p>
                   </a:txBody>
                   <a:tcPr marL="54864" marR="54864" marT="18288" marB="18288" anchor="ctr">
@@ -10365,14 +9364,6 @@
                         </a:rPr>
                         <a:t>48.07% (ep20)</a:t>
                       </a:r>
-                      <a:endParaRPr sz="1250" b="0">
-                        <a:solidFill>
-                          <a:srgbClr val="262626"/>
-                        </a:solidFill>
-                        <a:latin typeface="微软雅黑" panose="020B0503020204020204" charset="-122"/>
-                        <a:ea typeface="微软雅黑" panose="020B0503020204020204" charset="-122"/>
-                        <a:cs typeface="微软雅黑" panose="020B0503020204020204" charset="-122"/>
-                      </a:endParaRPr>
                     </a:p>
                   </a:txBody>
                   <a:tcPr marL="54864" marR="54864" marT="18288" marB="18288" anchor="ctr">
@@ -10398,14 +9389,6 @@
                         </a:rPr>
                         <a:t>+1.93 pt</a:t>
                       </a:r>
-                      <a:endParaRPr sz="1250" b="0">
-                        <a:solidFill>
-                          <a:srgbClr val="262626"/>
-                        </a:solidFill>
-                        <a:latin typeface="微软雅黑" panose="020B0503020204020204" charset="-122"/>
-                        <a:ea typeface="微软雅黑" panose="020B0503020204020204" charset="-122"/>
-                        <a:cs typeface="微软雅黑" panose="020B0503020204020204" charset="-122"/>
-                      </a:endParaRPr>
                     </a:p>
                   </a:txBody>
                   <a:tcPr marL="54864" marR="54864" marT="18288" marB="18288" anchor="ctr">
@@ -10414,6 +9397,11 @@
                     </a:solidFill>
                   </a:tcPr>
                 </a:tc>
+                <a:extLst>
+                  <a:ext uri="{0D108BD9-81ED-4DB2-BD59-A6C34878D82A}">
+                    <a16:rowId xmlns:a16="http://schemas.microsoft.com/office/drawing/2014/main" val="10003"/>
+                  </a:ext>
+                </a:extLst>
               </a:tr>
               <a:tr h="514350">
                 <a:tc>
@@ -10433,14 +9421,6 @@
                         </a:rPr>
                         <a:t>末轮 Train Top-1</a:t>
                       </a:r>
-                      <a:endParaRPr sz="1250" b="0">
-                        <a:solidFill>
-                          <a:srgbClr val="262626"/>
-                        </a:solidFill>
-                        <a:latin typeface="微软雅黑" panose="020B0503020204020204" charset="-122"/>
-                        <a:ea typeface="微软雅黑" panose="020B0503020204020204" charset="-122"/>
-                        <a:cs typeface="微软雅黑" panose="020B0503020204020204" charset="-122"/>
-                      </a:endParaRPr>
                     </a:p>
                   </a:txBody>
                   <a:tcPr marL="54864" marR="54864" marT="18288" marB="18288" anchor="ctr">
@@ -10466,14 +9446,6 @@
                         </a:rPr>
                         <a:t>95.21%</a:t>
                       </a:r>
-                      <a:endParaRPr sz="1250" b="0">
-                        <a:solidFill>
-                          <a:srgbClr val="262626"/>
-                        </a:solidFill>
-                        <a:latin typeface="微软雅黑" panose="020B0503020204020204" charset="-122"/>
-                        <a:ea typeface="微软雅黑" panose="020B0503020204020204" charset="-122"/>
-                        <a:cs typeface="微软雅黑" panose="020B0503020204020204" charset="-122"/>
-                      </a:endParaRPr>
                     </a:p>
                   </a:txBody>
                   <a:tcPr marL="54864" marR="54864" marT="18288" marB="18288" anchor="ctr">
@@ -10499,14 +9471,6 @@
                         </a:rPr>
                         <a:t>97.52%</a:t>
                       </a:r>
-                      <a:endParaRPr sz="1250" b="0">
-                        <a:solidFill>
-                          <a:srgbClr val="262626"/>
-                        </a:solidFill>
-                        <a:latin typeface="微软雅黑" panose="020B0503020204020204" charset="-122"/>
-                        <a:ea typeface="微软雅黑" panose="020B0503020204020204" charset="-122"/>
-                        <a:cs typeface="微软雅黑" panose="020B0503020204020204" charset="-122"/>
-                      </a:endParaRPr>
                     </a:p>
                   </a:txBody>
                   <a:tcPr marL="54864" marR="54864" marT="18288" marB="18288" anchor="ctr">
@@ -10532,14 +9496,6 @@
                         </a:rPr>
                         <a:t>+2.31 pt</a:t>
                       </a:r>
-                      <a:endParaRPr sz="1250" b="0">
-                        <a:solidFill>
-                          <a:srgbClr val="262626"/>
-                        </a:solidFill>
-                        <a:latin typeface="微软雅黑" panose="020B0503020204020204" charset="-122"/>
-                        <a:ea typeface="微软雅黑" panose="020B0503020204020204" charset="-122"/>
-                        <a:cs typeface="微软雅黑" panose="020B0503020204020204" charset="-122"/>
-                      </a:endParaRPr>
                     </a:p>
                   </a:txBody>
                   <a:tcPr marL="54864" marR="54864" marT="18288" marB="18288" anchor="ctr">
@@ -10548,6 +9504,11 @@
                     </a:solidFill>
                   </a:tcPr>
                 </a:tc>
+                <a:extLst>
+                  <a:ext uri="{0D108BD9-81ED-4DB2-BD59-A6C34878D82A}">
+                    <a16:rowId xmlns:a16="http://schemas.microsoft.com/office/drawing/2014/main" val="10004"/>
+                  </a:ext>
+                </a:extLst>
               </a:tr>
               <a:tr h="514350">
                 <a:tc>
@@ -10567,14 +9528,6 @@
                         </a:rPr>
                         <a:t>Train − Val 差距</a:t>
                       </a:r>
-                      <a:endParaRPr sz="1250" b="0">
-                        <a:solidFill>
-                          <a:srgbClr val="262626"/>
-                        </a:solidFill>
-                        <a:latin typeface="微软雅黑" panose="020B0503020204020204" charset="-122"/>
-                        <a:ea typeface="微软雅黑" panose="020B0503020204020204" charset="-122"/>
-                        <a:cs typeface="微软雅黑" panose="020B0503020204020204" charset="-122"/>
-                      </a:endParaRPr>
                     </a:p>
                   </a:txBody>
                   <a:tcPr marL="54864" marR="54864" marT="18288" marB="18288" anchor="ctr">
@@ -10600,14 +9553,6 @@
                         </a:rPr>
                         <a:t>49.07 pt</a:t>
                       </a:r>
-                      <a:endParaRPr sz="1250" b="0">
-                        <a:solidFill>
-                          <a:srgbClr val="262626"/>
-                        </a:solidFill>
-                        <a:latin typeface="微软雅黑" panose="020B0503020204020204" charset="-122"/>
-                        <a:ea typeface="微软雅黑" panose="020B0503020204020204" charset="-122"/>
-                        <a:cs typeface="微软雅黑" panose="020B0503020204020204" charset="-122"/>
-                      </a:endParaRPr>
                     </a:p>
                   </a:txBody>
                   <a:tcPr marL="54864" marR="54864" marT="18288" marB="18288" anchor="ctr">
@@ -10633,14 +9578,6 @@
                         </a:rPr>
                         <a:t>49.45 pt</a:t>
                       </a:r>
-                      <a:endParaRPr sz="1250" b="0">
-                        <a:solidFill>
-                          <a:srgbClr val="262626"/>
-                        </a:solidFill>
-                        <a:latin typeface="微软雅黑" panose="020B0503020204020204" charset="-122"/>
-                        <a:ea typeface="微软雅黑" panose="020B0503020204020204" charset="-122"/>
-                        <a:cs typeface="微软雅黑" panose="020B0503020204020204" charset="-122"/>
-                      </a:endParaRPr>
                     </a:p>
                   </a:txBody>
                   <a:tcPr marL="54864" marR="54864" marT="18288" marB="18288" anchor="ctr">
@@ -10666,14 +9603,6 @@
                         </a:rPr>
                         <a:t>基本不变</a:t>
                       </a:r>
-                      <a:endParaRPr sz="1250" b="0">
-                        <a:solidFill>
-                          <a:srgbClr val="262626"/>
-                        </a:solidFill>
-                        <a:latin typeface="微软雅黑" panose="020B0503020204020204" charset="-122"/>
-                        <a:ea typeface="微软雅黑" panose="020B0503020204020204" charset="-122"/>
-                        <a:cs typeface="微软雅黑" panose="020B0503020204020204" charset="-122"/>
-                      </a:endParaRPr>
                     </a:p>
                   </a:txBody>
                   <a:tcPr marL="54864" marR="54864" marT="18288" marB="18288" anchor="ctr">
@@ -10682,6 +9611,11 @@
                     </a:solidFill>
                   </a:tcPr>
                 </a:tc>
+                <a:extLst>
+                  <a:ext uri="{0D108BD9-81ED-4DB2-BD59-A6C34878D82A}">
+                    <a16:rowId xmlns:a16="http://schemas.microsoft.com/office/drawing/2014/main" val="10005"/>
+                  </a:ext>
+                </a:extLst>
               </a:tr>
               <a:tr h="514350">
                 <a:tc>
@@ -10701,14 +9635,6 @@
                         </a:rPr>
                         <a:t>Val Loss 第 11 轮 → 第 30 轮</a:t>
                       </a:r>
-                      <a:endParaRPr sz="1250" b="0">
-                        <a:solidFill>
-                          <a:srgbClr val="262626"/>
-                        </a:solidFill>
-                        <a:latin typeface="微软雅黑" panose="020B0503020204020204" charset="-122"/>
-                        <a:ea typeface="微软雅黑" panose="020B0503020204020204" charset="-122"/>
-                        <a:cs typeface="微软雅黑" panose="020B0503020204020204" charset="-122"/>
-                      </a:endParaRPr>
                     </a:p>
                   </a:txBody>
                   <a:tcPr marL="54864" marR="54864" marT="18288" marB="18288" anchor="ctr">
@@ -10734,14 +9660,6 @@
                         </a:rPr>
                         <a:t>2.18 → 3.88（+78%）</a:t>
                       </a:r>
-                      <a:endParaRPr sz="1250" b="0">
-                        <a:solidFill>
-                          <a:srgbClr val="262626"/>
-                        </a:solidFill>
-                        <a:latin typeface="微软雅黑" panose="020B0503020204020204" charset="-122"/>
-                        <a:ea typeface="微软雅黑" panose="020B0503020204020204" charset="-122"/>
-                        <a:cs typeface="微软雅黑" panose="020B0503020204020204" charset="-122"/>
-                      </a:endParaRPr>
                     </a:p>
                   </a:txBody>
                   <a:tcPr marL="54864" marR="54864" marT="18288" marB="18288" anchor="ctr">
@@ -10767,14 +9685,6 @@
                         </a:rPr>
                         <a:t>2.66 → 2.88（+8%）</a:t>
                       </a:r>
-                      <a:endParaRPr sz="1250" b="0">
-                        <a:solidFill>
-                          <a:srgbClr val="262626"/>
-                        </a:solidFill>
-                        <a:latin typeface="微软雅黑" panose="020B0503020204020204" charset="-122"/>
-                        <a:ea typeface="微软雅黑" panose="020B0503020204020204" charset="-122"/>
-                        <a:cs typeface="微软雅黑" panose="020B0503020204020204" charset="-122"/>
-                      </a:endParaRPr>
                     </a:p>
                   </a:txBody>
                   <a:tcPr marL="54864" marR="54864" marT="18288" marB="18288" anchor="ctr">
@@ -10800,14 +9710,6 @@
                         </a:rPr>
                         <a:t>明显抑制</a:t>
                       </a:r>
-                      <a:endParaRPr sz="1250" b="0">
-                        <a:solidFill>
-                          <a:srgbClr val="262626"/>
-                        </a:solidFill>
-                        <a:latin typeface="微软雅黑" panose="020B0503020204020204" charset="-122"/>
-                        <a:ea typeface="微软雅黑" panose="020B0503020204020204" charset="-122"/>
-                        <a:cs typeface="微软雅黑" panose="020B0503020204020204" charset="-122"/>
-                      </a:endParaRPr>
                     </a:p>
                   </a:txBody>
                   <a:tcPr marL="54864" marR="54864" marT="18288" marB="18288" anchor="ctr">
@@ -10816,6 +9718,11 @@
                     </a:solidFill>
                   </a:tcPr>
                 </a:tc>
+                <a:extLst>
+                  <a:ext uri="{0D108BD9-81ED-4DB2-BD59-A6C34878D82A}">
+                    <a16:rowId xmlns:a16="http://schemas.microsoft.com/office/drawing/2014/main" val="10006"/>
+                  </a:ext>
+                </a:extLst>
               </a:tr>
             </a:tbl>
           </a:graphicData>
@@ -10859,14 +9766,6 @@
               </a:rPr>
               <a:t>注：两种损失函数的数值不可直接比较 —— Label Smoothing 的目标分布 y' 本身带非零下界，因此消融结论只能建立在准确率上。</a:t>
             </a:r>
-            <a:endParaRPr sz="1300" b="0">
-              <a:solidFill>
-                <a:srgbClr val="595959"/>
-              </a:solidFill>
-              <a:latin typeface="微软雅黑" panose="020B0503020204020204" charset="-122"/>
-              <a:ea typeface="微软雅黑" panose="020B0503020204020204" charset="-122"/>
-              <a:cs typeface="微软雅黑" panose="020B0503020204020204" charset="-122"/>
-            </a:endParaRPr>
           </a:p>
         </p:txBody>
       </p:sp>
@@ -10887,7 +9786,14 @@
         <p:cNvGrpSpPr/>
         <p:nvPr/>
       </p:nvGrpSpPr>
-      <p:grpSpPr/>
+      <p:grpSpPr>
+        <a:xfrm>
+          <a:off x="0" y="0"/>
+          <a:ext cx="0" cy="0"/>
+          <a:chOff x="0" y="0"/>
+          <a:chExt cx="0" cy="0"/>
+        </a:xfrm>
+      </p:grpSpPr>
       <p:sp>
         <p:nvSpPr>
           <p:cNvPr id="2" name="Rectangle 1"/>
@@ -10928,6 +9834,7 @@
           <a:lstStyle/>
           <a:p>
             <a:pPr algn="ctr"/>
+            <a:endParaRPr/>
           </a:p>
         </p:txBody>
       </p:sp>
@@ -10969,14 +9876,6 @@
               </a:rPr>
               <a:t>汇报大纲</a:t>
             </a:r>
-            <a:endParaRPr sz="2700" b="1">
-              <a:solidFill>
-                <a:srgbClr val="1F3864"/>
-              </a:solidFill>
-              <a:latin typeface="微软雅黑" panose="020B0503020204020204" charset="-122"/>
-              <a:ea typeface="微软雅黑" panose="020B0503020204020204" charset="-122"/>
-              <a:cs typeface="微软雅黑" panose="020B0503020204020204" charset="-122"/>
-            </a:endParaRPr>
           </a:p>
         </p:txBody>
       </p:sp>
@@ -11020,6 +9919,7 @@
           <a:lstStyle/>
           <a:p>
             <a:pPr algn="ctr"/>
+            <a:endParaRPr/>
           </a:p>
         </p:txBody>
       </p:sp>
@@ -11064,14 +9964,6 @@
               </a:rPr>
               <a:t>一、学习与调研要点</a:t>
             </a:r>
-            <a:endParaRPr sz="1700" b="1">
-              <a:solidFill>
-                <a:srgbClr val="1F3864"/>
-              </a:solidFill>
-              <a:latin typeface="微软雅黑" panose="020B0503020204020204" charset="-122"/>
-              <a:ea typeface="微软雅黑" panose="020B0503020204020204" charset="-122"/>
-              <a:cs typeface="微软雅黑" panose="020B0503020204020204" charset="-122"/>
-            </a:endParaRPr>
           </a:p>
           <a:p>
             <a:pPr lvl="1">
@@ -11093,14 +9985,6 @@
               </a:rPr>
               <a:t>卷积变体：标准卷积 / 深度可分离卷积 / 空洞卷积 / DCN，以及感受野递推公式</a:t>
             </a:r>
-            <a:endParaRPr sz="1500" b="0">
-              <a:solidFill>
-                <a:srgbClr val="595959"/>
-              </a:solidFill>
-              <a:latin typeface="微软雅黑" panose="020B0503020204020204" charset="-122"/>
-              <a:ea typeface="微软雅黑" panose="020B0503020204020204" charset="-122"/>
-              <a:cs typeface="微软雅黑" panose="020B0503020204020204" charset="-122"/>
-            </a:endParaRPr>
           </a:p>
           <a:p>
             <a:pPr lvl="1">
@@ -11122,14 +10006,6 @@
               </a:rPr>
               <a:t>激活函数：ReLU / GELU / SiLU</a:t>
             </a:r>
-            <a:endParaRPr sz="1500" b="0">
-              <a:solidFill>
-                <a:srgbClr val="595959"/>
-              </a:solidFill>
-              <a:latin typeface="微软雅黑" panose="020B0503020204020204" charset="-122"/>
-              <a:ea typeface="微软雅黑" panose="020B0503020204020204" charset="-122"/>
-              <a:cs typeface="微软雅黑" panose="020B0503020204020204" charset="-122"/>
-            </a:endParaRPr>
           </a:p>
           <a:p>
             <a:pPr lvl="1">
@@ -11151,14 +10027,6 @@
               </a:rPr>
               <a:t>损失函数：Cross-Entropy / Binary-Cross-Entropy / Label Smoothing / Focal Loss</a:t>
             </a:r>
-            <a:endParaRPr sz="1500" b="0">
-              <a:solidFill>
-                <a:srgbClr val="595959"/>
-              </a:solidFill>
-              <a:latin typeface="微软雅黑" panose="020B0503020204020204" charset="-122"/>
-              <a:ea typeface="微软雅黑" panose="020B0503020204020204" charset="-122"/>
-              <a:cs typeface="微软雅黑" panose="020B0503020204020204" charset="-122"/>
-            </a:endParaRPr>
           </a:p>
           <a:p>
             <a:pPr lvl="1">
@@ -11180,14 +10048,6 @@
               </a:rPr>
               <a:t>模型架构演进：ResNet → MobileNetV3 / ShuffleNetV2 → ViT / Swin / ConvNeXt</a:t>
             </a:r>
-            <a:endParaRPr sz="1500" b="0">
-              <a:solidFill>
-                <a:srgbClr val="595959"/>
-              </a:solidFill>
-              <a:latin typeface="微软雅黑" panose="020B0503020204020204" charset="-122"/>
-              <a:ea typeface="微软雅黑" panose="020B0503020204020204" charset="-122"/>
-              <a:cs typeface="微软雅黑" panose="020B0503020204020204" charset="-122"/>
-            </a:endParaRPr>
           </a:p>
           <a:p>
             <a:pPr>
@@ -11209,14 +10069,6 @@
               </a:rPr>
               <a:t>二、动手实验</a:t>
             </a:r>
-            <a:endParaRPr sz="1700" b="1">
-              <a:solidFill>
-                <a:srgbClr val="1F3864"/>
-              </a:solidFill>
-              <a:latin typeface="微软雅黑" panose="020B0503020204020204" charset="-122"/>
-              <a:ea typeface="微软雅黑" panose="020B0503020204020204" charset="-122"/>
-              <a:cs typeface="微软雅黑" panose="020B0503020204020204" charset="-122"/>
-            </a:endParaRPr>
           </a:p>
           <a:p>
             <a:pPr lvl="1">
@@ -11238,14 +10090,6 @@
               </a:rPr>
               <a:t>统一训练框架与实验设置</a:t>
             </a:r>
-            <a:endParaRPr sz="1500" b="0">
-              <a:solidFill>
-                <a:srgbClr val="595959"/>
-              </a:solidFill>
-              <a:latin typeface="微软雅黑" panose="020B0503020204020204" charset="-122"/>
-              <a:ea typeface="微软雅黑" panose="020B0503020204020204" charset="-122"/>
-              <a:cs typeface="微软雅黑" panose="020B0503020204020204" charset="-122"/>
-            </a:endParaRPr>
           </a:p>
           <a:p>
             <a:pPr lvl="1">
@@ -11267,14 +10111,6 @@
               </a:rPr>
               <a:t>基准性能对比：精度、参数量、MACs、推理延迟</a:t>
             </a:r>
-            <a:endParaRPr sz="1500" b="0">
-              <a:solidFill>
-                <a:srgbClr val="595959"/>
-              </a:solidFill>
-              <a:latin typeface="微软雅黑" panose="020B0503020204020204" charset="-122"/>
-              <a:ea typeface="微软雅黑" panose="020B0503020204020204" charset="-122"/>
-              <a:cs typeface="微软雅黑" panose="020B0503020204020204" charset="-122"/>
-            </a:endParaRPr>
           </a:p>
           <a:p>
             <a:pPr lvl="1">
@@ -11296,14 +10132,6 @@
               </a:rPr>
               <a:t>消融实验：Cross-Entropy vs Label Smoothing（α=0.1）</a:t>
             </a:r>
-            <a:endParaRPr sz="1500" b="0">
-              <a:solidFill>
-                <a:srgbClr val="595959"/>
-              </a:solidFill>
-              <a:latin typeface="微软雅黑" panose="020B0503020204020204" charset="-122"/>
-              <a:ea typeface="微软雅黑" panose="020B0503020204020204" charset="-122"/>
-              <a:cs typeface="微软雅黑" panose="020B0503020204020204" charset="-122"/>
-            </a:endParaRPr>
           </a:p>
           <a:p>
             <a:pPr>
@@ -11325,14 +10153,6 @@
               </a:rPr>
               <a:t>三、Bad Case 与时间分配</a:t>
             </a:r>
-            <a:endParaRPr sz="1700" b="1">
-              <a:solidFill>
-                <a:srgbClr val="1F3864"/>
-              </a:solidFill>
-              <a:latin typeface="微软雅黑" panose="020B0503020204020204" charset="-122"/>
-              <a:ea typeface="微软雅黑" panose="020B0503020204020204" charset="-122"/>
-              <a:cs typeface="微软雅黑" panose="020B0503020204020204" charset="-122"/>
-            </a:endParaRPr>
           </a:p>
           <a:p>
             <a:pPr lvl="1">
@@ -11354,14 +10174,6 @@
               </a:rPr>
               <a:t>典型失败案例；实验与学习两条线的时间投入</a:t>
             </a:r>
-            <a:endParaRPr sz="1500" b="0">
-              <a:solidFill>
-                <a:srgbClr val="595959"/>
-              </a:solidFill>
-              <a:latin typeface="微软雅黑" panose="020B0503020204020204" charset="-122"/>
-              <a:ea typeface="微软雅黑" panose="020B0503020204020204" charset="-122"/>
-              <a:cs typeface="微软雅黑" panose="020B0503020204020204" charset="-122"/>
-            </a:endParaRPr>
           </a:p>
         </p:txBody>
       </p:sp>
@@ -11382,7 +10194,14 @@
         <p:cNvGrpSpPr/>
         <p:nvPr/>
       </p:nvGrpSpPr>
-      <p:grpSpPr/>
+      <p:grpSpPr>
+        <a:xfrm>
+          <a:off x="0" y="0"/>
+          <a:ext cx="0" cy="0"/>
+          <a:chOff x="0" y="0"/>
+          <a:chExt cx="0" cy="0"/>
+        </a:xfrm>
+      </p:grpSpPr>
       <p:sp>
         <p:nvSpPr>
           <p:cNvPr id="2" name="Rectangle 1"/>
@@ -11423,6 +10242,7 @@
           <a:lstStyle/>
           <a:p>
             <a:pPr algn="ctr"/>
+            <a:endParaRPr/>
           </a:p>
         </p:txBody>
       </p:sp>
@@ -11464,14 +10284,6 @@
               </a:rPr>
               <a:t>消融实验曲线：Loss</a:t>
             </a:r>
-            <a:endParaRPr sz="2700" b="1">
-              <a:solidFill>
-                <a:srgbClr val="1F3864"/>
-              </a:solidFill>
-              <a:latin typeface="微软雅黑" panose="020B0503020204020204" charset="-122"/>
-              <a:ea typeface="微软雅黑" panose="020B0503020204020204" charset="-122"/>
-              <a:cs typeface="微软雅黑" panose="020B0503020204020204" charset="-122"/>
-            </a:endParaRPr>
           </a:p>
         </p:txBody>
       </p:sp>
@@ -11513,14 +10325,6 @@
               </a:rPr>
               <a:t>左：Cross-Entropy    右：Label Smoothing (α=0.1)</a:t>
             </a:r>
-            <a:endParaRPr sz="1350" b="0">
-              <a:solidFill>
-                <a:srgbClr val="595959"/>
-              </a:solidFill>
-              <a:latin typeface="微软雅黑" panose="020B0503020204020204" charset="-122"/>
-              <a:ea typeface="微软雅黑" panose="020B0503020204020204" charset="-122"/>
-              <a:cs typeface="微软雅黑" panose="020B0503020204020204" charset="-122"/>
-            </a:endParaRPr>
           </a:p>
         </p:txBody>
       </p:sp>
@@ -11564,36 +10368,13 @@
           <a:lstStyle/>
           <a:p>
             <a:pPr algn="ctr"/>
+            <a:endParaRPr/>
           </a:p>
         </p:txBody>
       </p:sp>
       <p:pic>
         <p:nvPicPr>
           <p:cNvPr id="6" name="Picture 5" descr="convnext_ce_loss_curve.png"/>
-          <p:cNvPicPr>
-            <a:picLocks noChangeAspect="1"/>
-          </p:cNvPicPr>
-          <p:nvPr/>
-        </p:nvPicPr>
-        <p:blipFill>
-          <a:blip r:embed="rId1"/>
-          <a:stretch>
-            <a:fillRect/>
-          </a:stretch>
-        </p:blipFill>
-        <p:spPr>
-          <a:xfrm>
-            <a:off x="594360" y="1536192"/>
-            <a:ext cx="4754880" cy="3566160"/>
-          </a:xfrm>
-          <a:prstGeom prst="rect">
-            <a:avLst/>
-          </a:prstGeom>
-        </p:spPr>
-      </p:pic>
-      <p:pic>
-        <p:nvPicPr>
-          <p:cNvPr id="7" name="Picture 6" descr="convnext_ls_loss_curve.png"/>
           <p:cNvPicPr>
             <a:picLocks noChangeAspect="1"/>
           </p:cNvPicPr>
@@ -11607,6 +10388,30 @@
         </p:blipFill>
         <p:spPr>
           <a:xfrm>
+            <a:off x="594360" y="1536192"/>
+            <a:ext cx="4754880" cy="3566160"/>
+          </a:xfrm>
+          <a:prstGeom prst="rect">
+            <a:avLst/>
+          </a:prstGeom>
+        </p:spPr>
+      </p:pic>
+      <p:pic>
+        <p:nvPicPr>
+          <p:cNvPr id="7" name="Picture 6" descr="convnext_ls_loss_curve.png"/>
+          <p:cNvPicPr>
+            <a:picLocks noChangeAspect="1"/>
+          </p:cNvPicPr>
+          <p:nvPr/>
+        </p:nvPicPr>
+        <p:blipFill>
+          <a:blip r:embed="rId3"/>
+          <a:stretch>
+            <a:fillRect/>
+          </a:stretch>
+        </p:blipFill>
+        <p:spPr>
+          <a:xfrm>
             <a:off x="6839712" y="1536192"/>
             <a:ext cx="4754880" cy="3566160"/>
           </a:xfrm>
@@ -11653,14 +10458,6 @@
               </a:rPr>
               <a:t>Cross-Entropy 的验证损失从谷底 2.1845 一路涨到 3.881（+78%），第 15 轮后与训练损失迅速背离；</a:t>
             </a:r>
-            <a:endParaRPr sz="1500" b="0">
-              <a:solidFill>
-                <a:srgbClr val="262626"/>
-              </a:solidFill>
-              <a:latin typeface="微软雅黑" panose="020B0503020204020204" charset="-122"/>
-              <a:ea typeface="微软雅黑" panose="020B0503020204020204" charset="-122"/>
-              <a:cs typeface="微软雅黑" panose="020B0503020204020204" charset="-122"/>
-            </a:endParaRPr>
           </a:p>
           <a:p>
             <a:pPr algn="l">
@@ -11679,14 +10476,6 @@
               </a:rPr>
               <a:t>Label Smoothing 的验证损失从 2.6590 只涨到 2.880（+8%），全程平稳，训练后期的劣化被明显抑制。</a:t>
             </a:r>
-            <a:endParaRPr sz="1500" b="0">
-              <a:solidFill>
-                <a:srgbClr val="262626"/>
-              </a:solidFill>
-              <a:latin typeface="微软雅黑" panose="020B0503020204020204" charset="-122"/>
-              <a:ea typeface="微软雅黑" panose="020B0503020204020204" charset="-122"/>
-              <a:cs typeface="微软雅黑" panose="020B0503020204020204" charset="-122"/>
-            </a:endParaRPr>
           </a:p>
         </p:txBody>
       </p:sp>
@@ -11707,7 +10496,14 @@
         <p:cNvGrpSpPr/>
         <p:nvPr/>
       </p:nvGrpSpPr>
-      <p:grpSpPr/>
+      <p:grpSpPr>
+        <a:xfrm>
+          <a:off x="0" y="0"/>
+          <a:ext cx="0" cy="0"/>
+          <a:chOff x="0" y="0"/>
+          <a:chExt cx="0" cy="0"/>
+        </a:xfrm>
+      </p:grpSpPr>
       <p:sp>
         <p:nvSpPr>
           <p:cNvPr id="2" name="Rectangle 1"/>
@@ -11748,6 +10544,7 @@
           <a:lstStyle/>
           <a:p>
             <a:pPr algn="ctr"/>
+            <a:endParaRPr/>
           </a:p>
         </p:txBody>
       </p:sp>
@@ -11789,14 +10586,6 @@
               </a:rPr>
               <a:t>消融实验曲线：Accuracy</a:t>
             </a:r>
-            <a:endParaRPr sz="2700" b="1">
-              <a:solidFill>
-                <a:srgbClr val="1F3864"/>
-              </a:solidFill>
-              <a:latin typeface="微软雅黑" panose="020B0503020204020204" charset="-122"/>
-              <a:ea typeface="微软雅黑" panose="020B0503020204020204" charset="-122"/>
-              <a:cs typeface="微软雅黑" panose="020B0503020204020204" charset="-122"/>
-            </a:endParaRPr>
           </a:p>
         </p:txBody>
       </p:sp>
@@ -11838,14 +10627,6 @@
               </a:rPr>
               <a:t>左：Cross-Entropy    右：Label Smoothing (α=0.1)</a:t>
             </a:r>
-            <a:endParaRPr sz="1350" b="0">
-              <a:solidFill>
-                <a:srgbClr val="595959"/>
-              </a:solidFill>
-              <a:latin typeface="微软雅黑" panose="020B0503020204020204" charset="-122"/>
-              <a:ea typeface="微软雅黑" panose="020B0503020204020204" charset="-122"/>
-              <a:cs typeface="微软雅黑" panose="020B0503020204020204" charset="-122"/>
-            </a:endParaRPr>
           </a:p>
         </p:txBody>
       </p:sp>
@@ -11889,36 +10670,13 @@
           <a:lstStyle/>
           <a:p>
             <a:pPr algn="ctr"/>
+            <a:endParaRPr/>
           </a:p>
         </p:txBody>
       </p:sp>
       <p:pic>
         <p:nvPicPr>
           <p:cNvPr id="6" name="Picture 5" descr="convnext_ce_accuracy_curve.png"/>
-          <p:cNvPicPr>
-            <a:picLocks noChangeAspect="1"/>
-          </p:cNvPicPr>
-          <p:nvPr/>
-        </p:nvPicPr>
-        <p:blipFill>
-          <a:blip r:embed="rId1"/>
-          <a:stretch>
-            <a:fillRect/>
-          </a:stretch>
-        </p:blipFill>
-        <p:spPr>
-          <a:xfrm>
-            <a:off x="594360" y="1536192"/>
-            <a:ext cx="4754880" cy="3566160"/>
-          </a:xfrm>
-          <a:prstGeom prst="rect">
-            <a:avLst/>
-          </a:prstGeom>
-        </p:spPr>
-      </p:pic>
-      <p:pic>
-        <p:nvPicPr>
-          <p:cNvPr id="7" name="Picture 6" descr="convnext_ls_accuracy_curve.png"/>
           <p:cNvPicPr>
             <a:picLocks noChangeAspect="1"/>
           </p:cNvPicPr>
@@ -11932,6 +10690,30 @@
         </p:blipFill>
         <p:spPr>
           <a:xfrm>
+            <a:off x="594360" y="1536192"/>
+            <a:ext cx="4754880" cy="3566160"/>
+          </a:xfrm>
+          <a:prstGeom prst="rect">
+            <a:avLst/>
+          </a:prstGeom>
+        </p:spPr>
+      </p:pic>
+      <p:pic>
+        <p:nvPicPr>
+          <p:cNvPr id="7" name="Picture 6" descr="convnext_ls_accuracy_curve.png"/>
+          <p:cNvPicPr>
+            <a:picLocks noChangeAspect="1"/>
+          </p:cNvPicPr>
+          <p:nvPr/>
+        </p:nvPicPr>
+        <p:blipFill>
+          <a:blip r:embed="rId3"/>
+          <a:stretch>
+            <a:fillRect/>
+          </a:stretch>
+        </p:blipFill>
+        <p:spPr>
+          <a:xfrm>
             <a:off x="6839712" y="1536192"/>
             <a:ext cx="4754880" cy="3566160"/>
           </a:xfrm>
@@ -11981,14 +10763,6 @@
               </a:rPr>
               <a:t>CE：验证准确率第 13 轮见顶 46.14%，之后掉头下滑到 45.20%</a:t>
             </a:r>
-            <a:endParaRPr sz="1400" b="0">
-              <a:solidFill>
-                <a:srgbClr val="1F3864"/>
-              </a:solidFill>
-              <a:latin typeface="微软雅黑" panose="020B0503020204020204" charset="-122"/>
-              <a:ea typeface="微软雅黑" panose="020B0503020204020204" charset="-122"/>
-              <a:cs typeface="微软雅黑" panose="020B0503020204020204" charset="-122"/>
-            </a:endParaRPr>
           </a:p>
           <a:p>
             <a:pPr>
@@ -12010,14 +10784,6 @@
               </a:rPr>
               <a:t>LS：验证准确率一路爬到第 20 轮 48.07%，并在 47% 附近稳住不再下滑</a:t>
             </a:r>
-            <a:endParaRPr sz="1400" b="0">
-              <a:solidFill>
-                <a:srgbClr val="1F3864"/>
-              </a:solidFill>
-              <a:latin typeface="微软雅黑" panose="020B0503020204020204" charset="-122"/>
-              <a:ea typeface="微软雅黑" panose="020B0503020204020204" charset="-122"/>
-              <a:cs typeface="微软雅黑" panose="020B0503020204020204" charset="-122"/>
-            </a:endParaRPr>
           </a:p>
           <a:p>
             <a:pPr>
@@ -12039,14 +10805,6 @@
               </a:rPr>
               <a:t>结论：Label Smoothing 有小幅正收益（Test Top-1 +0.69 pt、最优 Val Top-1 +1.93 pt），且末轮 Train Top-1 反而更高（97.52% vs 95.21%），Train − Val 差距并未缩小（49.07 → 49.45 pt）。</a:t>
             </a:r>
-            <a:endParaRPr sz="1400" b="1">
-              <a:solidFill>
-                <a:srgbClr val="1F3864"/>
-              </a:solidFill>
-              <a:latin typeface="微软雅黑" panose="020B0503020204020204" charset="-122"/>
-              <a:ea typeface="微软雅黑" panose="020B0503020204020204" charset="-122"/>
-              <a:cs typeface="微软雅黑" panose="020B0503020204020204" charset="-122"/>
-            </a:endParaRPr>
           </a:p>
         </p:txBody>
       </p:sp>
@@ -12067,7 +10825,14 @@
         <p:cNvGrpSpPr/>
         <p:nvPr/>
       </p:nvGrpSpPr>
-      <p:grpSpPr/>
+      <p:grpSpPr>
+        <a:xfrm>
+          <a:off x="0" y="0"/>
+          <a:ext cx="0" cy="0"/>
+          <a:chOff x="0" y="0"/>
+          <a:chExt cx="0" cy="0"/>
+        </a:xfrm>
+      </p:grpSpPr>
       <p:sp>
         <p:nvSpPr>
           <p:cNvPr id="2" name="Rectangle 1"/>
@@ -12108,6 +10873,7 @@
           <a:lstStyle/>
           <a:p>
             <a:pPr algn="ctr"/>
+            <a:endParaRPr/>
           </a:p>
         </p:txBody>
       </p:sp>
@@ -12149,14 +10915,6 @@
               </a:rPr>
               <a:t>Bad Case 分析：小目标被背景主导</a:t>
             </a:r>
-            <a:endParaRPr sz="2700" b="1">
-              <a:solidFill>
-                <a:srgbClr val="1F3864"/>
-              </a:solidFill>
-              <a:latin typeface="微软雅黑" panose="020B0503020204020204" charset="-122"/>
-              <a:ea typeface="微软雅黑" panose="020B0503020204020204" charset="-122"/>
-              <a:cs typeface="微软雅黑" panose="020B0503020204020204" charset="-122"/>
-            </a:endParaRPr>
           </a:p>
         </p:txBody>
       </p:sp>
@@ -12198,14 +10956,6 @@
               </a:rPr>
               <a:t>样本：val/n01532829/n0153282900000018.jpg（真值 n01532829，雀类）</a:t>
             </a:r>
-            <a:endParaRPr sz="1350" b="0">
-              <a:solidFill>
-                <a:srgbClr val="595959"/>
-              </a:solidFill>
-              <a:latin typeface="微软雅黑" panose="020B0503020204020204" charset="-122"/>
-              <a:ea typeface="微软雅黑" panose="020B0503020204020204" charset="-122"/>
-              <a:cs typeface="微软雅黑" panose="020B0503020204020204" charset="-122"/>
-            </a:endParaRPr>
           </a:p>
         </p:txBody>
       </p:sp>
@@ -12249,6 +10999,7 @@
           <a:lstStyle/>
           <a:p>
             <a:pPr algn="ctr"/>
+            <a:endParaRPr/>
           </a:p>
         </p:txBody>
       </p:sp>
@@ -12261,7 +11012,7 @@
           <p:nvPr/>
         </p:nvPicPr>
         <p:blipFill>
-          <a:blip r:embed="rId1"/>
+          <a:blip r:embed="rId2"/>
           <a:stretch>
             <a:fillRect/>
           </a:stretch>
@@ -12295,9 +11046,27 @@
                 <a:tableStyleId>{5C22544A-7EE6-4342-B048-85BDC9FD1C3A}</a:tableStyleId>
               </a:tblPr>
               <a:tblGrid>
-                <a:gridCol w="2557549"/>
-                <a:gridCol w="2360814"/>
-                <a:gridCol w="1573876"/>
+                <a:gridCol w="2557549">
+                  <a:extLst>
+                    <a:ext uri="{9D8B030D-6E8A-4147-A177-3AD203B41FA5}">
+                      <a16:colId xmlns:a16="http://schemas.microsoft.com/office/drawing/2014/main" val="20000"/>
+                    </a:ext>
+                  </a:extLst>
+                </a:gridCol>
+                <a:gridCol w="2360814">
+                  <a:extLst>
+                    <a:ext uri="{9D8B030D-6E8A-4147-A177-3AD203B41FA5}">
+                      <a16:colId xmlns:a16="http://schemas.microsoft.com/office/drawing/2014/main" val="20001"/>
+                    </a:ext>
+                  </a:extLst>
+                </a:gridCol>
+                <a:gridCol w="1573876">
+                  <a:extLst>
+                    <a:ext uri="{9D8B030D-6E8A-4147-A177-3AD203B41FA5}">
+                      <a16:colId xmlns:a16="http://schemas.microsoft.com/office/drawing/2014/main" val="20002"/>
+                    </a:ext>
+                  </a:extLst>
+                </a:gridCol>
               </a:tblGrid>
               <a:tr h="434340">
                 <a:tc>
@@ -12317,14 +11086,6 @@
                         </a:rPr>
                         <a:t>模型</a:t>
                       </a:r>
-                      <a:endParaRPr sz="1300" b="1">
-                        <a:solidFill>
-                          <a:srgbClr val="FFFFFF"/>
-                        </a:solidFill>
-                        <a:latin typeface="微软雅黑" panose="020B0503020204020204" charset="-122"/>
-                        <a:ea typeface="微软雅黑" panose="020B0503020204020204" charset="-122"/>
-                        <a:cs typeface="微软雅黑" panose="020B0503020204020204" charset="-122"/>
-                      </a:endParaRPr>
                     </a:p>
                   </a:txBody>
                   <a:tcPr marL="54864" marR="54864" marT="18288" marB="18288" anchor="ctr">
@@ -12350,14 +11111,6 @@
                         </a:rPr>
                         <a:t>Top-1 预测</a:t>
                       </a:r>
-                      <a:endParaRPr sz="1300" b="1">
-                        <a:solidFill>
-                          <a:srgbClr val="FFFFFF"/>
-                        </a:solidFill>
-                        <a:latin typeface="微软雅黑" panose="020B0503020204020204" charset="-122"/>
-                        <a:ea typeface="微软雅黑" panose="020B0503020204020204" charset="-122"/>
-                        <a:cs typeface="微软雅黑" panose="020B0503020204020204" charset="-122"/>
-                      </a:endParaRPr>
                     </a:p>
                   </a:txBody>
                   <a:tcPr marL="54864" marR="54864" marT="18288" marB="18288" anchor="ctr">
@@ -12383,14 +11136,6 @@
                         </a:rPr>
                         <a:t>概率</a:t>
                       </a:r>
-                      <a:endParaRPr sz="1300" b="1">
-                        <a:solidFill>
-                          <a:srgbClr val="FFFFFF"/>
-                        </a:solidFill>
-                        <a:latin typeface="微软雅黑" panose="020B0503020204020204" charset="-122"/>
-                        <a:ea typeface="微软雅黑" panose="020B0503020204020204" charset="-122"/>
-                        <a:cs typeface="微软雅黑" panose="020B0503020204020204" charset="-122"/>
-                      </a:endParaRPr>
                     </a:p>
                   </a:txBody>
                   <a:tcPr marL="54864" marR="54864" marT="18288" marB="18288" anchor="ctr">
@@ -12399,6 +11144,11 @@
                     </a:solidFill>
                   </a:tcPr>
                 </a:tc>
+                <a:extLst>
+                  <a:ext uri="{0D108BD9-81ED-4DB2-BD59-A6C34878D82A}">
+                    <a16:rowId xmlns:a16="http://schemas.microsoft.com/office/drawing/2014/main" val="10000"/>
+                  </a:ext>
+                </a:extLst>
               </a:tr>
               <a:tr h="434340">
                 <a:tc>
@@ -12418,14 +11168,6 @@
                         </a:rPr>
                         <a:t>ResNet-50</a:t>
                       </a:r>
-                      <a:endParaRPr sz="1300" b="0">
-                        <a:solidFill>
-                          <a:srgbClr val="262626"/>
-                        </a:solidFill>
-                        <a:latin typeface="微软雅黑" panose="020B0503020204020204" charset="-122"/>
-                        <a:ea typeface="微软雅黑" panose="020B0503020204020204" charset="-122"/>
-                        <a:cs typeface="微软雅黑" panose="020B0503020204020204" charset="-122"/>
-                      </a:endParaRPr>
                     </a:p>
                   </a:txBody>
                   <a:tcPr marL="54864" marR="54864" marT="18288" marB="18288" anchor="ctr">
@@ -12451,14 +11193,6 @@
                         </a:rPr>
                         <a:t>n04515003</a:t>
                       </a:r>
-                      <a:endParaRPr sz="1300" b="0">
-                        <a:solidFill>
-                          <a:srgbClr val="262626"/>
-                        </a:solidFill>
-                        <a:latin typeface="微软雅黑" panose="020B0503020204020204" charset="-122"/>
-                        <a:ea typeface="微软雅黑" panose="020B0503020204020204" charset="-122"/>
-                        <a:cs typeface="微软雅黑" panose="020B0503020204020204" charset="-122"/>
-                      </a:endParaRPr>
                     </a:p>
                   </a:txBody>
                   <a:tcPr marL="54864" marR="54864" marT="18288" marB="18288" anchor="ctr">
@@ -12484,14 +11218,6 @@
                         </a:rPr>
                         <a:t>41.38%</a:t>
                       </a:r>
-                      <a:endParaRPr sz="1300" b="0">
-                        <a:solidFill>
-                          <a:srgbClr val="262626"/>
-                        </a:solidFill>
-                        <a:latin typeface="微软雅黑" panose="020B0503020204020204" charset="-122"/>
-                        <a:ea typeface="微软雅黑" panose="020B0503020204020204" charset="-122"/>
-                        <a:cs typeface="微软雅黑" panose="020B0503020204020204" charset="-122"/>
-                      </a:endParaRPr>
                     </a:p>
                   </a:txBody>
                   <a:tcPr marL="54864" marR="54864" marT="18288" marB="18288" anchor="ctr">
@@ -12500,6 +11226,11 @@
                     </a:solidFill>
                   </a:tcPr>
                 </a:tc>
+                <a:extLst>
+                  <a:ext uri="{0D108BD9-81ED-4DB2-BD59-A6C34878D82A}">
+                    <a16:rowId xmlns:a16="http://schemas.microsoft.com/office/drawing/2014/main" val="10001"/>
+                  </a:ext>
+                </a:extLst>
               </a:tr>
               <a:tr h="434340">
                 <a:tc>
@@ -12519,14 +11250,6 @@
                         </a:rPr>
                         <a:t>MobileNetV3-Large</a:t>
                       </a:r>
-                      <a:endParaRPr sz="1300" b="0">
-                        <a:solidFill>
-                          <a:srgbClr val="262626"/>
-                        </a:solidFill>
-                        <a:latin typeface="微软雅黑" panose="020B0503020204020204" charset="-122"/>
-                        <a:ea typeface="微软雅黑" panose="020B0503020204020204" charset="-122"/>
-                        <a:cs typeface="微软雅黑" panose="020B0503020204020204" charset="-122"/>
-                      </a:endParaRPr>
                     </a:p>
                   </a:txBody>
                   <a:tcPr marL="54864" marR="54864" marT="18288" marB="18288" anchor="ctr">
@@ -12552,14 +11275,6 @@
                         </a:rPr>
                         <a:t>n04515003</a:t>
                       </a:r>
-                      <a:endParaRPr sz="1300" b="0">
-                        <a:solidFill>
-                          <a:srgbClr val="262626"/>
-                        </a:solidFill>
-                        <a:latin typeface="微软雅黑" panose="020B0503020204020204" charset="-122"/>
-                        <a:ea typeface="微软雅黑" panose="020B0503020204020204" charset="-122"/>
-                        <a:cs typeface="微软雅黑" panose="020B0503020204020204" charset="-122"/>
-                      </a:endParaRPr>
                     </a:p>
                   </a:txBody>
                   <a:tcPr marL="54864" marR="54864" marT="18288" marB="18288" anchor="ctr">
@@ -12585,14 +11300,6 @@
                         </a:rPr>
                         <a:t>27.43%</a:t>
                       </a:r>
-                      <a:endParaRPr sz="1300" b="0">
-                        <a:solidFill>
-                          <a:srgbClr val="262626"/>
-                        </a:solidFill>
-                        <a:latin typeface="微软雅黑" panose="020B0503020204020204" charset="-122"/>
-                        <a:ea typeface="微软雅黑" panose="020B0503020204020204" charset="-122"/>
-                        <a:cs typeface="微软雅黑" panose="020B0503020204020204" charset="-122"/>
-                      </a:endParaRPr>
                     </a:p>
                   </a:txBody>
                   <a:tcPr marL="54864" marR="54864" marT="18288" marB="18288" anchor="ctr">
@@ -12601,6 +11308,11 @@
                     </a:solidFill>
                   </a:tcPr>
                 </a:tc>
+                <a:extLst>
+                  <a:ext uri="{0D108BD9-81ED-4DB2-BD59-A6C34878D82A}">
+                    <a16:rowId xmlns:a16="http://schemas.microsoft.com/office/drawing/2014/main" val="10002"/>
+                  </a:ext>
+                </a:extLst>
               </a:tr>
               <a:tr h="434340">
                 <a:tc>
@@ -12620,14 +11332,6 @@
                         </a:rPr>
                         <a:t>ConvNeXt-Tiny</a:t>
                       </a:r>
-                      <a:endParaRPr sz="1300" b="0">
-                        <a:solidFill>
-                          <a:srgbClr val="262626"/>
-                        </a:solidFill>
-                        <a:latin typeface="微软雅黑" panose="020B0503020204020204" charset="-122"/>
-                        <a:ea typeface="微软雅黑" panose="020B0503020204020204" charset="-122"/>
-                        <a:cs typeface="微软雅黑" panose="020B0503020204020204" charset="-122"/>
-                      </a:endParaRPr>
                     </a:p>
                   </a:txBody>
                   <a:tcPr marL="54864" marR="54864" marT="18288" marB="18288" anchor="ctr">
@@ -12653,14 +11357,6 @@
                         </a:rPr>
                         <a:t>n04515003</a:t>
                       </a:r>
-                      <a:endParaRPr sz="1300" b="0">
-                        <a:solidFill>
-                          <a:srgbClr val="262626"/>
-                        </a:solidFill>
-                        <a:latin typeface="微软雅黑" panose="020B0503020204020204" charset="-122"/>
-                        <a:ea typeface="微软雅黑" panose="020B0503020204020204" charset="-122"/>
-                        <a:cs typeface="微软雅黑" panose="020B0503020204020204" charset="-122"/>
-                      </a:endParaRPr>
                     </a:p>
                   </a:txBody>
                   <a:tcPr marL="54864" marR="54864" marT="18288" marB="18288" anchor="ctr">
@@ -12686,14 +11382,6 @@
                         </a:rPr>
                         <a:t>16.73%</a:t>
                       </a:r>
-                      <a:endParaRPr sz="1300" b="0">
-                        <a:solidFill>
-                          <a:srgbClr val="262626"/>
-                        </a:solidFill>
-                        <a:latin typeface="微软雅黑" panose="020B0503020204020204" charset="-122"/>
-                        <a:ea typeface="微软雅黑" panose="020B0503020204020204" charset="-122"/>
-                        <a:cs typeface="微软雅黑" panose="020B0503020204020204" charset="-122"/>
-                      </a:endParaRPr>
                     </a:p>
                   </a:txBody>
                   <a:tcPr marL="54864" marR="54864" marT="18288" marB="18288" anchor="ctr">
@@ -12702,6 +11390,11 @@
                     </a:solidFill>
                   </a:tcPr>
                 </a:tc>
+                <a:extLst>
+                  <a:ext uri="{0D108BD9-81ED-4DB2-BD59-A6C34878D82A}">
+                    <a16:rowId xmlns:a16="http://schemas.microsoft.com/office/drawing/2014/main" val="10003"/>
+                  </a:ext>
+                </a:extLst>
               </a:tr>
             </a:tbl>
           </a:graphicData>
@@ -12748,14 +11441,6 @@
               </a:rPr>
               <a:t>三个模型独立地判成同一个错误类别 n04515003</a:t>
             </a:r>
-            <a:endParaRPr sz="1400" b="1">
-              <a:solidFill>
-                <a:srgbClr val="1F3864"/>
-              </a:solidFill>
-              <a:latin typeface="微软雅黑" panose="020B0503020204020204" charset="-122"/>
-              <a:ea typeface="微软雅黑" panose="020B0503020204020204" charset="-122"/>
-              <a:cs typeface="微软雅黑" panose="020B0503020204020204" charset="-122"/>
-            </a:endParaRPr>
           </a:p>
           <a:p>
             <a:pPr>
@@ -12810,14 +11495,6 @@
               </a:rPr>
               <a:t>被大背景目标主导</a:t>
             </a:r>
-            <a:endParaRPr sz="1400" b="0">
-              <a:solidFill>
-                <a:srgbClr val="1F3864"/>
-              </a:solidFill>
-              <a:latin typeface="微软雅黑" panose="020B0503020204020204" charset="-122"/>
-              <a:ea typeface="微软雅黑" panose="020B0503020204020204" charset="-122"/>
-              <a:cs typeface="微软雅黑" panose="020B0503020204020204" charset="-122"/>
-            </a:endParaRPr>
           </a:p>
           <a:p>
             <a:pPr>
@@ -12856,7 +11533,14 @@
         <p:cNvGrpSpPr/>
         <p:nvPr/>
       </p:nvGrpSpPr>
-      <p:grpSpPr/>
+      <p:grpSpPr>
+        <a:xfrm>
+          <a:off x="0" y="0"/>
+          <a:ext cx="0" cy="0"/>
+          <a:chOff x="0" y="0"/>
+          <a:chExt cx="0" cy="0"/>
+        </a:xfrm>
+      </p:grpSpPr>
       <p:sp>
         <p:nvSpPr>
           <p:cNvPr id="2" name="Rectangle 1"/>
@@ -12897,6 +11581,7 @@
           <a:lstStyle/>
           <a:p>
             <a:pPr algn="ctr"/>
+            <a:endParaRPr/>
           </a:p>
         </p:txBody>
       </p:sp>
@@ -12938,14 +11623,6 @@
               </a:rPr>
               <a:t>时间分配</a:t>
             </a:r>
-            <a:endParaRPr sz="2700" b="1">
-              <a:solidFill>
-                <a:srgbClr val="1F3864"/>
-              </a:solidFill>
-              <a:latin typeface="微软雅黑" panose="020B0503020204020204" charset="-122"/>
-              <a:ea typeface="微软雅黑" panose="020B0503020204020204" charset="-122"/>
-              <a:cs typeface="微软雅黑" panose="020B0503020204020204" charset="-122"/>
-            </a:endParaRPr>
           </a:p>
         </p:txBody>
       </p:sp>
@@ -12987,14 +11664,6 @@
               </a:rPr>
               <a:t>实验与学习两条线的时间投入</a:t>
             </a:r>
-            <a:endParaRPr sz="1350" b="0">
-              <a:solidFill>
-                <a:srgbClr val="595959"/>
-              </a:solidFill>
-              <a:latin typeface="微软雅黑" panose="020B0503020204020204" charset="-122"/>
-              <a:ea typeface="微软雅黑" panose="020B0503020204020204" charset="-122"/>
-              <a:cs typeface="微软雅黑" panose="020B0503020204020204" charset="-122"/>
-            </a:endParaRPr>
           </a:p>
         </p:txBody>
       </p:sp>
@@ -13038,6 +11707,7 @@
           <a:lstStyle/>
           <a:p>
             <a:pPr algn="ctr"/>
+            <a:endParaRPr/>
           </a:p>
         </p:txBody>
       </p:sp>
@@ -13060,8 +11730,20 @@
                 <a:tableStyleId>{5C22544A-7EE6-4342-B048-85BDC9FD1C3A}</a:tableStyleId>
               </a:tblPr>
               <a:tblGrid>
-                <a:gridCol w="4666183"/>
-                <a:gridCol w="6443776"/>
+                <a:gridCol w="4666183">
+                  <a:extLst>
+                    <a:ext uri="{9D8B030D-6E8A-4147-A177-3AD203B41FA5}">
+                      <a16:colId xmlns:a16="http://schemas.microsoft.com/office/drawing/2014/main" val="20000"/>
+                    </a:ext>
+                  </a:extLst>
+                </a:gridCol>
+                <a:gridCol w="6443776">
+                  <a:extLst>
+                    <a:ext uri="{9D8B030D-6E8A-4147-A177-3AD203B41FA5}">
+                      <a16:colId xmlns:a16="http://schemas.microsoft.com/office/drawing/2014/main" val="20001"/>
+                    </a:ext>
+                  </a:extLst>
+                </a:gridCol>
               </a:tblGrid>
               <a:tr h="822960">
                 <a:tc>
@@ -13081,14 +11763,6 @@
                         </a:rPr>
                         <a:t>实验</a:t>
                       </a:r>
-                      <a:endParaRPr sz="1500" b="1">
-                        <a:solidFill>
-                          <a:srgbClr val="FFFFFF"/>
-                        </a:solidFill>
-                        <a:latin typeface="微软雅黑" panose="020B0503020204020204" charset="-122"/>
-                        <a:ea typeface="微软雅黑" panose="020B0503020204020204" charset="-122"/>
-                        <a:cs typeface="微软雅黑" panose="020B0503020204020204" charset="-122"/>
-                      </a:endParaRPr>
                     </a:p>
                   </a:txBody>
                   <a:tcPr marL="109728" marR="73152" anchor="ctr">
@@ -13114,14 +11788,6 @@
                         </a:rPr>
                         <a:t>学习与调研</a:t>
                       </a:r>
-                      <a:endParaRPr sz="1500" b="1">
-                        <a:solidFill>
-                          <a:srgbClr val="FFFFFF"/>
-                        </a:solidFill>
-                        <a:latin typeface="微软雅黑" panose="020B0503020204020204" charset="-122"/>
-                        <a:ea typeface="微软雅黑" panose="020B0503020204020204" charset="-122"/>
-                        <a:cs typeface="微软雅黑" panose="020B0503020204020204" charset="-122"/>
-                      </a:endParaRPr>
                     </a:p>
                   </a:txBody>
                   <a:tcPr marL="109728" marR="73152" anchor="ctr">
@@ -13130,6 +11796,11 @@
                     </a:solidFill>
                   </a:tcPr>
                 </a:tc>
+                <a:extLst>
+                  <a:ext uri="{0D108BD9-81ED-4DB2-BD59-A6C34878D82A}">
+                    <a16:rowId xmlns:a16="http://schemas.microsoft.com/office/drawing/2014/main" val="10000"/>
+                  </a:ext>
+                </a:extLst>
               </a:tr>
               <a:tr h="822960">
                 <a:tc>
@@ -13149,14 +11820,6 @@
                         </a:rPr>
                         <a:t>10.09 – 10.12　完成主体代码</a:t>
                       </a:r>
-                      <a:endParaRPr sz="1400" b="1">
-                        <a:solidFill>
-                          <a:srgbClr val="262626"/>
-                        </a:solidFill>
-                        <a:latin typeface="微软雅黑" panose="020B0503020204020204" charset="-122"/>
-                        <a:ea typeface="微软雅黑" panose="020B0503020204020204" charset="-122"/>
-                        <a:cs typeface="微软雅黑" panose="020B0503020204020204" charset="-122"/>
-                      </a:endParaRPr>
                     </a:p>
                   </a:txBody>
                   <a:tcPr marL="109728" marR="73152" anchor="ctr">
@@ -13182,14 +11845,6 @@
                         </a:rPr>
                         <a:t>10.12 – 10.14　查找资料（主要为 CSDN 的解析）</a:t>
                       </a:r>
-                      <a:endParaRPr sz="1400" b="0">
-                        <a:solidFill>
-                          <a:srgbClr val="262626"/>
-                        </a:solidFill>
-                        <a:latin typeface="微软雅黑" panose="020B0503020204020204" charset="-122"/>
-                        <a:ea typeface="微软雅黑" panose="020B0503020204020204" charset="-122"/>
-                        <a:cs typeface="微软雅黑" panose="020B0503020204020204" charset="-122"/>
-                      </a:endParaRPr>
                     </a:p>
                   </a:txBody>
                   <a:tcPr marL="109728" marR="73152" anchor="ctr">
@@ -13198,6 +11853,11 @@
                     </a:solidFill>
                   </a:tcPr>
                 </a:tc>
+                <a:extLst>
+                  <a:ext uri="{0D108BD9-81ED-4DB2-BD59-A6C34878D82A}">
+                    <a16:rowId xmlns:a16="http://schemas.microsoft.com/office/drawing/2014/main" val="10001"/>
+                  </a:ext>
+                </a:extLst>
               </a:tr>
               <a:tr h="822960">
                 <a:tc>
@@ -13217,14 +11877,6 @@
                         </a:rPr>
                         <a:t>10.13 – 10.14　修复 bug 并跑出最终的实验</a:t>
                       </a:r>
-                      <a:endParaRPr sz="1400" b="1">
-                        <a:solidFill>
-                          <a:srgbClr val="262626"/>
-                        </a:solidFill>
-                        <a:latin typeface="微软雅黑" panose="020B0503020204020204" charset="-122"/>
-                        <a:ea typeface="微软雅黑" panose="020B0503020204020204" charset="-122"/>
-                        <a:cs typeface="微软雅黑" panose="020B0503020204020204" charset="-122"/>
-                      </a:endParaRPr>
                     </a:p>
                   </a:txBody>
                   <a:tcPr marL="109728" marR="73152" anchor="ctr">
@@ -13250,14 +11902,6 @@
                         </a:rPr>
                         <a:t>10.14 – 10.16　根据资料内容总结笔记</a:t>
                       </a:r>
-                      <a:endParaRPr sz="1400" b="0">
-                        <a:solidFill>
-                          <a:srgbClr val="262626"/>
-                        </a:solidFill>
-                        <a:latin typeface="微软雅黑" panose="020B0503020204020204" charset="-122"/>
-                        <a:ea typeface="微软雅黑" panose="020B0503020204020204" charset="-122"/>
-                        <a:cs typeface="微软雅黑" panose="020B0503020204020204" charset="-122"/>
-                      </a:endParaRPr>
                     </a:p>
                   </a:txBody>
                   <a:tcPr marL="109728" marR="73152" anchor="ctr">
@@ -13266,6 +11910,11 @@
                     </a:solidFill>
                   </a:tcPr>
                 </a:tc>
+                <a:extLst>
+                  <a:ext uri="{0D108BD9-81ED-4DB2-BD59-A6C34878D82A}">
+                    <a16:rowId xmlns:a16="http://schemas.microsoft.com/office/drawing/2014/main" val="10002"/>
+                  </a:ext>
+                </a:extLst>
               </a:tr>
               <a:tr h="822960">
                 <a:tc>
@@ -13285,14 +11934,6 @@
                         </a:rPr>
                         <a:t>10.16　AI debug 并补充单张推理脚本</a:t>
                       </a:r>
-                      <a:endParaRPr sz="1400" b="1">
-                        <a:solidFill>
-                          <a:srgbClr val="262626"/>
-                        </a:solidFill>
-                        <a:latin typeface="微软雅黑" panose="020B0503020204020204" charset="-122"/>
-                        <a:ea typeface="微软雅黑" panose="020B0503020204020204" charset="-122"/>
-                        <a:cs typeface="微软雅黑" panose="020B0503020204020204" charset="-122"/>
-                      </a:endParaRPr>
                     </a:p>
                   </a:txBody>
                   <a:tcPr marL="109728" marR="73152" anchor="ctr">
@@ -13318,14 +11959,6 @@
                         </a:rPr>
                         <a:t>10.15 – 10.16　用 AI 设计问题、自己回答，以完善理解</a:t>
                       </a:r>
-                      <a:endParaRPr sz="1400" b="0">
-                        <a:solidFill>
-                          <a:srgbClr val="262626"/>
-                        </a:solidFill>
-                        <a:latin typeface="微软雅黑" panose="020B0503020204020204" charset="-122"/>
-                        <a:ea typeface="微软雅黑" panose="020B0503020204020204" charset="-122"/>
-                        <a:cs typeface="微软雅黑" panose="020B0503020204020204" charset="-122"/>
-                      </a:endParaRPr>
                     </a:p>
                   </a:txBody>
                   <a:tcPr marL="109728" marR="73152" anchor="ctr">
@@ -13334,6 +11967,11 @@
                     </a:solidFill>
                   </a:tcPr>
                 </a:tc>
+                <a:extLst>
+                  <a:ext uri="{0D108BD9-81ED-4DB2-BD59-A6C34878D82A}">
+                    <a16:rowId xmlns:a16="http://schemas.microsoft.com/office/drawing/2014/main" val="10003"/>
+                  </a:ext>
+                </a:extLst>
               </a:tr>
             </a:tbl>
           </a:graphicData>
@@ -13356,7 +11994,14 @@
         <p:cNvGrpSpPr/>
         <p:nvPr/>
       </p:nvGrpSpPr>
-      <p:grpSpPr/>
+      <p:grpSpPr>
+        <a:xfrm>
+          <a:off x="0" y="0"/>
+          <a:ext cx="0" cy="0"/>
+          <a:chOff x="0" y="0"/>
+          <a:chExt cx="0" cy="0"/>
+        </a:xfrm>
+      </p:grpSpPr>
       <p:sp>
         <p:nvSpPr>
           <p:cNvPr id="2" name="Rectangle 1"/>
@@ -13397,6 +12042,7 @@
           <a:lstStyle/>
           <a:p>
             <a:pPr algn="ctr"/>
+            <a:endParaRPr/>
           </a:p>
         </p:txBody>
       </p:sp>
@@ -13438,14 +12084,6 @@
               </a:rPr>
               <a:t>Part 1</a:t>
             </a:r>
-            <a:endParaRPr sz="2000" b="0">
-              <a:solidFill>
-                <a:srgbClr val="9DC3E6"/>
-              </a:solidFill>
-              <a:latin typeface="微软雅黑" panose="020B0503020204020204" charset="-122"/>
-              <a:ea typeface="微软雅黑" panose="020B0503020204020204" charset="-122"/>
-              <a:cs typeface="微软雅黑" panose="020B0503020204020204" charset="-122"/>
-            </a:endParaRPr>
           </a:p>
         </p:txBody>
       </p:sp>
@@ -13487,14 +12125,6 @@
               </a:rPr>
               <a:t>学习与调研要点</a:t>
             </a:r>
-            <a:endParaRPr sz="3600" b="1">
-              <a:solidFill>
-                <a:srgbClr val="FFFFFF"/>
-              </a:solidFill>
-              <a:latin typeface="微软雅黑" panose="020B0503020204020204" charset="-122"/>
-              <a:ea typeface="微软雅黑" panose="020B0503020204020204" charset="-122"/>
-              <a:cs typeface="微软雅黑" panose="020B0503020204020204" charset="-122"/>
-            </a:endParaRPr>
           </a:p>
         </p:txBody>
       </p:sp>
@@ -13515,7 +12145,14 @@
         <p:cNvGrpSpPr/>
         <p:nvPr/>
       </p:nvGrpSpPr>
-      <p:grpSpPr/>
+      <p:grpSpPr>
+        <a:xfrm>
+          <a:off x="0" y="0"/>
+          <a:ext cx="0" cy="0"/>
+          <a:chOff x="0" y="0"/>
+          <a:chExt cx="0" cy="0"/>
+        </a:xfrm>
+      </p:grpSpPr>
       <p:sp>
         <p:nvSpPr>
           <p:cNvPr id="2" name="Rectangle 1"/>
@@ -13556,6 +12193,7 @@
           <a:lstStyle/>
           <a:p>
             <a:pPr algn="ctr"/>
+            <a:endParaRPr/>
           </a:p>
         </p:txBody>
       </p:sp>
@@ -13597,14 +12235,6 @@
               </a:rPr>
               <a:t>卷积变体：参数量 / 计算量 / 内存访问</a:t>
             </a:r>
-            <a:endParaRPr sz="2700" b="1">
-              <a:solidFill>
-                <a:srgbClr val="1F3864"/>
-              </a:solidFill>
-              <a:latin typeface="微软雅黑" panose="020B0503020204020204" charset="-122"/>
-              <a:ea typeface="微软雅黑" panose="020B0503020204020204" charset="-122"/>
-              <a:cs typeface="微软雅黑" panose="020B0503020204020204" charset="-122"/>
-            </a:endParaRPr>
           </a:p>
         </p:txBody>
       </p:sp>
@@ -13646,14 +12276,6 @@
               </a:rPr>
               <a:t>关注点：基本原理、数学计算、与其他方法的差异</a:t>
             </a:r>
-            <a:endParaRPr sz="1350" b="0">
-              <a:solidFill>
-                <a:srgbClr val="595959"/>
-              </a:solidFill>
-              <a:latin typeface="微软雅黑" panose="020B0503020204020204" charset="-122"/>
-              <a:ea typeface="微软雅黑" panose="020B0503020204020204" charset="-122"/>
-              <a:cs typeface="微软雅黑" panose="020B0503020204020204" charset="-122"/>
-            </a:endParaRPr>
           </a:p>
         </p:txBody>
       </p:sp>
@@ -13697,6 +12319,7 @@
           <a:lstStyle/>
           <a:p>
             <a:pPr algn="ctr"/>
+            <a:endParaRPr/>
           </a:p>
         </p:txBody>
       </p:sp>
@@ -13719,10 +12342,34 @@
                 <a:tableStyleId>{5C22544A-7EE6-4342-B048-85BDC9FD1C3A}</a:tableStyleId>
               </a:tblPr>
               <a:tblGrid>
-                <a:gridCol w="1527463"/>
-                <a:gridCol w="3054927"/>
-                <a:gridCol w="3971405"/>
-                <a:gridCol w="2647603"/>
+                <a:gridCol w="1527463">
+                  <a:extLst>
+                    <a:ext uri="{9D8B030D-6E8A-4147-A177-3AD203B41FA5}">
+                      <a16:colId xmlns:a16="http://schemas.microsoft.com/office/drawing/2014/main" val="20000"/>
+                    </a:ext>
+                  </a:extLst>
+                </a:gridCol>
+                <a:gridCol w="3054927">
+                  <a:extLst>
+                    <a:ext uri="{9D8B030D-6E8A-4147-A177-3AD203B41FA5}">
+                      <a16:colId xmlns:a16="http://schemas.microsoft.com/office/drawing/2014/main" val="20001"/>
+                    </a:ext>
+                  </a:extLst>
+                </a:gridCol>
+                <a:gridCol w="3971405">
+                  <a:extLst>
+                    <a:ext uri="{9D8B030D-6E8A-4147-A177-3AD203B41FA5}">
+                      <a16:colId xmlns:a16="http://schemas.microsoft.com/office/drawing/2014/main" val="20002"/>
+                    </a:ext>
+                  </a:extLst>
+                </a:gridCol>
+                <a:gridCol w="2647603">
+                  <a:extLst>
+                    <a:ext uri="{9D8B030D-6E8A-4147-A177-3AD203B41FA5}">
+                      <a16:colId xmlns:a16="http://schemas.microsoft.com/office/drawing/2014/main" val="20003"/>
+                    </a:ext>
+                  </a:extLst>
+                </a:gridCol>
               </a:tblGrid>
               <a:tr h="841247">
                 <a:tc>
@@ -13742,14 +12389,6 @@
                         </a:rPr>
                         <a:t>卷积类型</a:t>
                       </a:r>
-                      <a:endParaRPr sz="1400" b="1">
-                        <a:solidFill>
-                          <a:srgbClr val="FFFFFF"/>
-                        </a:solidFill>
-                        <a:latin typeface="微软雅黑" panose="020B0503020204020204" charset="-122"/>
-                        <a:ea typeface="微软雅黑" panose="020B0503020204020204" charset="-122"/>
-                        <a:cs typeface="微软雅黑" panose="020B0503020204020204" charset="-122"/>
-                      </a:endParaRPr>
                     </a:p>
                   </a:txBody>
                   <a:tcPr marL="54864" marR="54864" marT="18288" marB="18288" anchor="ctr">
@@ -13775,14 +12414,6 @@
                         </a:rPr>
                         <a:t>参数量</a:t>
                       </a:r>
-                      <a:endParaRPr sz="1400" b="1">
-                        <a:solidFill>
-                          <a:srgbClr val="FFFFFF"/>
-                        </a:solidFill>
-                        <a:latin typeface="微软雅黑" panose="020B0503020204020204" charset="-122"/>
-                        <a:ea typeface="微软雅黑" panose="020B0503020204020204" charset="-122"/>
-                        <a:cs typeface="微软雅黑" panose="020B0503020204020204" charset="-122"/>
-                      </a:endParaRPr>
                     </a:p>
                   </a:txBody>
                   <a:tcPr marL="54864" marR="54864" marT="18288" marB="18288" anchor="ctr">
@@ -13808,14 +12439,6 @@
                         </a:rPr>
                         <a:t>计算量 MACs</a:t>
                       </a:r>
-                      <a:endParaRPr sz="1400" b="1">
-                        <a:solidFill>
-                          <a:srgbClr val="FFFFFF"/>
-                        </a:solidFill>
-                        <a:latin typeface="微软雅黑" panose="020B0503020204020204" charset="-122"/>
-                        <a:ea typeface="微软雅黑" panose="020B0503020204020204" charset="-122"/>
-                        <a:cs typeface="微软雅黑" panose="020B0503020204020204" charset="-122"/>
-                      </a:endParaRPr>
                     </a:p>
                   </a:txBody>
                   <a:tcPr marL="54864" marR="54864" marT="18288" marB="18288" anchor="ctr">
@@ -13841,14 +12464,6 @@
                         </a:rPr>
                         <a:t>内存访问</a:t>
                       </a:r>
-                      <a:endParaRPr sz="1400" b="1">
-                        <a:solidFill>
-                          <a:srgbClr val="FFFFFF"/>
-                        </a:solidFill>
-                        <a:latin typeface="微软雅黑" panose="020B0503020204020204" charset="-122"/>
-                        <a:ea typeface="微软雅黑" panose="020B0503020204020204" charset="-122"/>
-                        <a:cs typeface="微软雅黑" panose="020B0503020204020204" charset="-122"/>
-                      </a:endParaRPr>
                     </a:p>
                   </a:txBody>
                   <a:tcPr marL="54864" marR="54864" marT="18288" marB="18288" anchor="ctr">
@@ -13857,6 +12472,11 @@
                     </a:solidFill>
                   </a:tcPr>
                 </a:tc>
+                <a:extLst>
+                  <a:ext uri="{0D108BD9-81ED-4DB2-BD59-A6C34878D82A}">
+                    <a16:rowId xmlns:a16="http://schemas.microsoft.com/office/drawing/2014/main" val="10000"/>
+                  </a:ext>
+                </a:extLst>
               </a:tr>
               <a:tr h="841247">
                 <a:tc>
@@ -13876,14 +12496,6 @@
                         </a:rPr>
                         <a:t>标准卷积</a:t>
                       </a:r>
-                      <a:endParaRPr sz="1250" b="0">
-                        <a:solidFill>
-                          <a:srgbClr val="262626"/>
-                        </a:solidFill>
-                        <a:latin typeface="微软雅黑" panose="020B0503020204020204" charset="-122"/>
-                        <a:ea typeface="微软雅黑" panose="020B0503020204020204" charset="-122"/>
-                        <a:cs typeface="微软雅黑" panose="020B0503020204020204" charset="-122"/>
-                      </a:endParaRPr>
                     </a:p>
                   </a:txBody>
                   <a:tcPr marL="54864" marR="54864" marT="18288" marB="18288" anchor="ctr">
@@ -13953,14 +12565,6 @@
                         </a:rPr>
                         <a:t>重复率高</a:t>
                       </a:r>
-                      <a:endParaRPr sz="1250" b="0">
-                        <a:solidFill>
-                          <a:srgbClr val="262626"/>
-                        </a:solidFill>
-                        <a:latin typeface="微软雅黑" panose="020B0503020204020204" charset="-122"/>
-                        <a:ea typeface="微软雅黑" panose="020B0503020204020204" charset="-122"/>
-                        <a:cs typeface="微软雅黑" panose="020B0503020204020204" charset="-122"/>
-                      </a:endParaRPr>
                     </a:p>
                   </a:txBody>
                   <a:tcPr marL="54864" marR="54864" marT="18288" marB="18288" anchor="ctr">
@@ -13969,6 +12573,11 @@
                     </a:solidFill>
                   </a:tcPr>
                 </a:tc>
+                <a:extLst>
+                  <a:ext uri="{0D108BD9-81ED-4DB2-BD59-A6C34878D82A}">
+                    <a16:rowId xmlns:a16="http://schemas.microsoft.com/office/drawing/2014/main" val="10001"/>
+                  </a:ext>
+                </a:extLst>
               </a:tr>
               <a:tr h="841247">
                 <a:tc>
@@ -13988,14 +12597,6 @@
                         </a:rPr>
                         <a:t>深度可分离卷积</a:t>
                       </a:r>
-                      <a:endParaRPr sz="1250" b="0">
-                        <a:solidFill>
-                          <a:srgbClr val="262626"/>
-                        </a:solidFill>
-                        <a:latin typeface="微软雅黑" panose="020B0503020204020204" charset="-122"/>
-                        <a:ea typeface="微软雅黑" panose="020B0503020204020204" charset="-122"/>
-                        <a:cs typeface="微软雅黑" panose="020B0503020204020204" charset="-122"/>
-                      </a:endParaRPr>
                     </a:p>
                   </a:txBody>
                   <a:tcPr marL="54864" marR="54864" marT="18288" marB="18288" anchor="ctr">
@@ -14065,14 +12666,6 @@
                         </a:rPr>
                         <a:t>算术强度低，会被带宽限制</a:t>
                       </a:r>
-                      <a:endParaRPr sz="1250" b="0">
-                        <a:solidFill>
-                          <a:srgbClr val="262626"/>
-                        </a:solidFill>
-                        <a:latin typeface="微软雅黑" panose="020B0503020204020204" charset="-122"/>
-                        <a:ea typeface="微软雅黑" panose="020B0503020204020204" charset="-122"/>
-                        <a:cs typeface="微软雅黑" panose="020B0503020204020204" charset="-122"/>
-                      </a:endParaRPr>
                     </a:p>
                   </a:txBody>
                   <a:tcPr marL="54864" marR="54864" marT="18288" marB="18288" anchor="ctr">
@@ -14081,6 +12674,11 @@
                     </a:solidFill>
                   </a:tcPr>
                 </a:tc>
+                <a:extLst>
+                  <a:ext uri="{0D108BD9-81ED-4DB2-BD59-A6C34878D82A}">
+                    <a16:rowId xmlns:a16="http://schemas.microsoft.com/office/drawing/2014/main" val="10002"/>
+                  </a:ext>
+                </a:extLst>
               </a:tr>
               <a:tr h="841247">
                 <a:tc>
@@ -14100,14 +12698,6 @@
                         </a:rPr>
                         <a:t>空洞卷积</a:t>
                       </a:r>
-                      <a:endParaRPr sz="1250" b="0">
-                        <a:solidFill>
-                          <a:srgbClr val="262626"/>
-                        </a:solidFill>
-                        <a:latin typeface="微软雅黑" panose="020B0503020204020204" charset="-122"/>
-                        <a:ea typeface="微软雅黑" panose="020B0503020204020204" charset="-122"/>
-                        <a:cs typeface="微软雅黑" panose="020B0503020204020204" charset="-122"/>
-                      </a:endParaRPr>
                     </a:p>
                   </a:txBody>
                   <a:tcPr marL="54864" marR="54864" marT="18288" marB="18288" anchor="ctr">
@@ -14177,14 +12767,6 @@
                         </a:rPr>
                         <a:t>重复率高且地址不连续</a:t>
                       </a:r>
-                      <a:endParaRPr sz="1250" b="0">
-                        <a:solidFill>
-                          <a:srgbClr val="262626"/>
-                        </a:solidFill>
-                        <a:latin typeface="微软雅黑" panose="020B0503020204020204" charset="-122"/>
-                        <a:ea typeface="微软雅黑" panose="020B0503020204020204" charset="-122"/>
-                        <a:cs typeface="微软雅黑" panose="020B0503020204020204" charset="-122"/>
-                      </a:endParaRPr>
                     </a:p>
                   </a:txBody>
                   <a:tcPr marL="54864" marR="54864" marT="18288" marB="18288" anchor="ctr">
@@ -14193,6 +12775,11 @@
                     </a:solidFill>
                   </a:tcPr>
                 </a:tc>
+                <a:extLst>
+                  <a:ext uri="{0D108BD9-81ED-4DB2-BD59-A6C34878D82A}">
+                    <a16:rowId xmlns:a16="http://schemas.microsoft.com/office/drawing/2014/main" val="10003"/>
+                  </a:ext>
+                </a:extLst>
               </a:tr>
               <a:tr h="841247">
                 <a:tc>
@@ -14212,14 +12799,6 @@
                         </a:rPr>
                         <a:t>DCN</a:t>
                       </a:r>
-                      <a:endParaRPr sz="1250" b="0">
-                        <a:solidFill>
-                          <a:srgbClr val="262626"/>
-                        </a:solidFill>
-                        <a:latin typeface="微软雅黑" panose="020B0503020204020204" charset="-122"/>
-                        <a:ea typeface="微软雅黑" panose="020B0503020204020204" charset="-122"/>
-                        <a:cs typeface="微软雅黑" panose="020B0503020204020204" charset="-122"/>
-                      </a:endParaRPr>
                     </a:p>
                   </a:txBody>
                   <a:tcPr marL="54864" marR="54864" marT="18288" marB="18288" anchor="ctr">
@@ -14267,14 +12846,6 @@
                         </a:rPr>
                         <a:t>主卷积 + offset + 插值</a:t>
                       </a:r>
-                      <a:endParaRPr sz="1250" b="0">
-                        <a:solidFill>
-                          <a:srgbClr val="262626"/>
-                        </a:solidFill>
-                        <a:latin typeface="微软雅黑" panose="020B0503020204020204" charset="-122"/>
-                        <a:ea typeface="微软雅黑" panose="020B0503020204020204" charset="-122"/>
-                        <a:cs typeface="微软雅黑" panose="020B0503020204020204" charset="-122"/>
-                      </a:endParaRPr>
                     </a:p>
                   </a:txBody>
                   <a:tcPr marL="54864" marR="54864" marT="18288" marB="18288" anchor="ctr">
@@ -14300,14 +12871,6 @@
                         </a:rPr>
                         <a:t>访问地址碎片化</a:t>
                       </a:r>
-                      <a:endParaRPr sz="1250" b="0">
-                        <a:solidFill>
-                          <a:srgbClr val="262626"/>
-                        </a:solidFill>
-                        <a:latin typeface="微软雅黑" panose="020B0503020204020204" charset="-122"/>
-                        <a:ea typeface="微软雅黑" panose="020B0503020204020204" charset="-122"/>
-                        <a:cs typeface="微软雅黑" panose="020B0503020204020204" charset="-122"/>
-                      </a:endParaRPr>
                     </a:p>
                   </a:txBody>
                   <a:tcPr marL="54864" marR="54864" marT="18288" marB="18288" anchor="ctr">
@@ -14316,6 +12879,11 @@
                     </a:solidFill>
                   </a:tcPr>
                 </a:tc>
+                <a:extLst>
+                  <a:ext uri="{0D108BD9-81ED-4DB2-BD59-A6C34878D82A}">
+                    <a16:rowId xmlns:a16="http://schemas.microsoft.com/office/drawing/2014/main" val="10004"/>
+                  </a:ext>
+                </a:extLst>
               </a:tr>
             </a:tbl>
           </a:graphicData>
@@ -14330,7 +12898,7 @@
           <p:nvPr/>
         </p:nvPicPr>
         <p:blipFill>
-          <a:blip r:embed="rId1"/>
+          <a:blip r:embed="rId2"/>
           <a:stretch>
             <a:fillRect/>
           </a:stretch>
@@ -14348,6 +12916,78 @@
       <p:pic>
         <p:nvPicPr>
           <p:cNvPr id="8" name="Picture 7" descr="conv_std_macs.png"/>
+          <p:cNvPicPr>
+            <a:picLocks noChangeAspect="1"/>
+          </p:cNvPicPr>
+          <p:nvPr/>
+        </p:nvPicPr>
+        <p:blipFill>
+          <a:blip r:embed="rId3"/>
+          <a:stretch>
+            <a:fillRect/>
+          </a:stretch>
+        </p:blipFill>
+        <p:spPr>
+          <a:xfrm>
+            <a:off x="5158462" y="2685005"/>
+            <a:ext cx="3825101" cy="408998"/>
+          </a:xfrm>
+          <a:prstGeom prst="rect">
+            <a:avLst/>
+          </a:prstGeom>
+        </p:spPr>
+      </p:pic>
+      <p:pic>
+        <p:nvPicPr>
+          <p:cNvPr id="9" name="Picture 8" descr="conv_dw_params.png"/>
+          <p:cNvPicPr>
+            <a:picLocks noChangeAspect="1"/>
+          </p:cNvPicPr>
+          <p:nvPr/>
+        </p:nvPicPr>
+        <p:blipFill>
+          <a:blip r:embed="rId4"/>
+          <a:stretch>
+            <a:fillRect/>
+          </a:stretch>
+        </p:blipFill>
+        <p:spPr>
+          <a:xfrm>
+            <a:off x="2103535" y="3537701"/>
+            <a:ext cx="2908623" cy="386100"/>
+          </a:xfrm>
+          <a:prstGeom prst="rect">
+            <a:avLst/>
+          </a:prstGeom>
+        </p:spPr>
+      </p:pic>
+      <p:pic>
+        <p:nvPicPr>
+          <p:cNvPr id="10" name="Picture 9" descr="conv_dw_macs.png"/>
+          <p:cNvPicPr>
+            <a:picLocks noChangeAspect="1"/>
+          </p:cNvPicPr>
+          <p:nvPr/>
+        </p:nvPicPr>
+        <p:blipFill>
+          <a:blip r:embed="rId5"/>
+          <a:stretch>
+            <a:fillRect/>
+          </a:stretch>
+        </p:blipFill>
+        <p:spPr>
+          <a:xfrm>
+            <a:off x="5158462" y="3601940"/>
+            <a:ext cx="3825101" cy="257624"/>
+          </a:xfrm>
+          <a:prstGeom prst="rect">
+            <a:avLst/>
+          </a:prstGeom>
+        </p:spPr>
+      </p:pic>
+      <p:pic>
+        <p:nvPicPr>
+          <p:cNvPr id="11" name="Picture 10" descr="conv_std_params.png"/>
           <p:cNvPicPr>
             <a:picLocks noChangeAspect="1"/>
           </p:cNvPicPr>
@@ -14361,8 +13001,8 @@
         </p:blipFill>
         <p:spPr>
           <a:xfrm>
-            <a:off x="5158462" y="2685005"/>
-            <a:ext cx="3825101" cy="408998"/>
+            <a:off x="2103535" y="4322485"/>
+            <a:ext cx="2908623" cy="499028"/>
           </a:xfrm>
           <a:prstGeom prst="rect">
             <a:avLst/>
@@ -14371,7 +13011,7 @@
       </p:pic>
       <p:pic>
         <p:nvPicPr>
-          <p:cNvPr id="9" name="Picture 8" descr="conv_dw_params.png"/>
+          <p:cNvPr id="12" name="Picture 11" descr="conv_std_macs.png"/>
           <p:cNvPicPr>
             <a:picLocks noChangeAspect="1"/>
           </p:cNvPicPr>
@@ -14385,78 +13025,6 @@
         </p:blipFill>
         <p:spPr>
           <a:xfrm>
-            <a:off x="2103535" y="3537701"/>
-            <a:ext cx="2908623" cy="386100"/>
-          </a:xfrm>
-          <a:prstGeom prst="rect">
-            <a:avLst/>
-          </a:prstGeom>
-        </p:spPr>
-      </p:pic>
-      <p:pic>
-        <p:nvPicPr>
-          <p:cNvPr id="10" name="Picture 9" descr="conv_dw_macs.png"/>
-          <p:cNvPicPr>
-            <a:picLocks noChangeAspect="1"/>
-          </p:cNvPicPr>
-          <p:nvPr/>
-        </p:nvPicPr>
-        <p:blipFill>
-          <a:blip r:embed="rId4"/>
-          <a:stretch>
-            <a:fillRect/>
-          </a:stretch>
-        </p:blipFill>
-        <p:spPr>
-          <a:xfrm>
-            <a:off x="5158462" y="3601940"/>
-            <a:ext cx="3825101" cy="257624"/>
-          </a:xfrm>
-          <a:prstGeom prst="rect">
-            <a:avLst/>
-          </a:prstGeom>
-        </p:spPr>
-      </p:pic>
-      <p:pic>
-        <p:nvPicPr>
-          <p:cNvPr id="11" name="Picture 10" descr="conv_std_params.png"/>
-          <p:cNvPicPr>
-            <a:picLocks noChangeAspect="1"/>
-          </p:cNvPicPr>
-          <p:nvPr/>
-        </p:nvPicPr>
-        <p:blipFill>
-          <a:blip r:embed="rId1"/>
-          <a:stretch>
-            <a:fillRect/>
-          </a:stretch>
-        </p:blipFill>
-        <p:spPr>
-          <a:xfrm>
-            <a:off x="2103535" y="4322485"/>
-            <a:ext cx="2908623" cy="499028"/>
-          </a:xfrm>
-          <a:prstGeom prst="rect">
-            <a:avLst/>
-          </a:prstGeom>
-        </p:spPr>
-      </p:pic>
-      <p:pic>
-        <p:nvPicPr>
-          <p:cNvPr id="12" name="Picture 11" descr="conv_std_macs.png"/>
-          <p:cNvPicPr>
-            <a:picLocks noChangeAspect="1"/>
-          </p:cNvPicPr>
-          <p:nvPr/>
-        </p:nvPicPr>
-        <p:blipFill>
-          <a:blip r:embed="rId2"/>
-          <a:stretch>
-            <a:fillRect/>
-          </a:stretch>
-        </p:blipFill>
-        <p:spPr>
-          <a:xfrm>
             <a:off x="5158462" y="4367501"/>
             <a:ext cx="3825101" cy="408998"/>
           </a:xfrm>
@@ -14474,7 +13042,7 @@
           <p:nvPr/>
         </p:nvPicPr>
         <p:blipFill>
-          <a:blip r:embed="rId5"/>
+          <a:blip r:embed="rId6"/>
           <a:stretch>
             <a:fillRect/>
           </a:stretch>
@@ -14506,7 +13074,14 @@
         <p:cNvGrpSpPr/>
         <p:nvPr/>
       </p:nvGrpSpPr>
-      <p:grpSpPr/>
+      <p:grpSpPr>
+        <a:xfrm>
+          <a:off x="0" y="0"/>
+          <a:ext cx="0" cy="0"/>
+          <a:chOff x="0" y="0"/>
+          <a:chExt cx="0" cy="0"/>
+        </a:xfrm>
+      </p:grpSpPr>
       <p:sp>
         <p:nvSpPr>
           <p:cNvPr id="2" name="Rectangle 1"/>
@@ -14547,6 +13122,7 @@
           <a:lstStyle/>
           <a:p>
             <a:pPr algn="ctr"/>
+            <a:endParaRPr/>
           </a:p>
         </p:txBody>
       </p:sp>
@@ -14588,14 +13164,6 @@
               </a:rPr>
               <a:t>感受野递推公式与可变形卷积</a:t>
             </a:r>
-            <a:endParaRPr sz="2700" b="1">
-              <a:solidFill>
-                <a:srgbClr val="1F3864"/>
-              </a:solidFill>
-              <a:latin typeface="微软雅黑" panose="020B0503020204020204" charset="-122"/>
-              <a:ea typeface="微软雅黑" panose="020B0503020204020204" charset="-122"/>
-              <a:cs typeface="微软雅黑" panose="020B0503020204020204" charset="-122"/>
-            </a:endParaRPr>
           </a:p>
         </p:txBody>
       </p:sp>
@@ -14639,6 +13207,7 @@
           <a:lstStyle/>
           <a:p>
             <a:pPr algn="ctr"/>
+            <a:endParaRPr/>
           </a:p>
         </p:txBody>
       </p:sp>
@@ -14680,44 +13249,12 @@
               </a:rPr>
               <a:t>感受野递推公式</a:t>
             </a:r>
-            <a:endParaRPr sz="1700" b="1">
-              <a:solidFill>
-                <a:srgbClr val="1F3864"/>
-              </a:solidFill>
-              <a:latin typeface="微软雅黑" panose="020B0503020204020204" charset="-122"/>
-              <a:ea typeface="微软雅黑" panose="020B0503020204020204" charset="-122"/>
-              <a:cs typeface="微软雅黑" panose="020B0503020204020204" charset="-122"/>
-            </a:endParaRPr>
           </a:p>
         </p:txBody>
       </p:sp>
       <p:pic>
         <p:nvPicPr>
           <p:cNvPr id="6" name="Picture 5" descr="rf.png"/>
-          <p:cNvPicPr>
-            <a:picLocks noChangeAspect="1"/>
-          </p:cNvPicPr>
-          <p:nvPr/>
-        </p:nvPicPr>
-        <p:blipFill>
-          <a:blip r:embed="rId1"/>
-          <a:stretch>
-            <a:fillRect/>
-          </a:stretch>
-        </p:blipFill>
-        <p:spPr>
-          <a:xfrm>
-            <a:off x="685800" y="2103120"/>
-            <a:ext cx="5394960" cy="585802"/>
-          </a:xfrm>
-          <a:prstGeom prst="rect">
-            <a:avLst/>
-          </a:prstGeom>
-        </p:spPr>
-      </p:pic>
-      <p:pic>
-        <p:nvPicPr>
-          <p:cNvPr id="7" name="Picture 6" descr="rf_s.png"/>
           <p:cNvPicPr>
             <a:picLocks noChangeAspect="1"/>
           </p:cNvPicPr>
@@ -14731,6 +13268,30 @@
         </p:blipFill>
         <p:spPr>
           <a:xfrm>
+            <a:off x="685800" y="2103120"/>
+            <a:ext cx="5394960" cy="585802"/>
+          </a:xfrm>
+          <a:prstGeom prst="rect">
+            <a:avLst/>
+          </a:prstGeom>
+        </p:spPr>
+      </p:pic>
+      <p:pic>
+        <p:nvPicPr>
+          <p:cNvPr id="7" name="Picture 6" descr="rf_s.png"/>
+          <p:cNvPicPr>
+            <a:picLocks noChangeAspect="1"/>
+          </p:cNvPicPr>
+          <p:nvPr/>
+        </p:nvPicPr>
+        <p:blipFill>
+          <a:blip r:embed="rId3"/>
+          <a:stretch>
+            <a:fillRect/>
+          </a:stretch>
+        </p:blipFill>
+        <p:spPr>
+          <a:xfrm>
             <a:off x="685800" y="2971800"/>
             <a:ext cx="1828800" cy="883578"/>
           </a:xfrm>
@@ -14780,14 +13341,6 @@
               </a:rPr>
               <a:t>DCNv1</a:t>
             </a:r>
-            <a:endParaRPr sz="1500" b="1">
-              <a:solidFill>
-                <a:srgbClr val="1F3864"/>
-              </a:solidFill>
-              <a:latin typeface="微软雅黑" panose="020B0503020204020204" charset="-122"/>
-              <a:ea typeface="微软雅黑" panose="020B0503020204020204" charset="-122"/>
-              <a:cs typeface="微软雅黑" panose="020B0503020204020204" charset="-122"/>
-            </a:endParaRPr>
           </a:p>
           <a:p>
             <a:pPr lvl="1">
@@ -14809,14 +13362,6 @@
               </a:rPr>
               <a:t>使用一个旁路网络 offset 预测采样点的漂移。可变形采样使用双线性插值使采样点坐标可导，以便反向传播训练旁路网络。</a:t>
             </a:r>
-            <a:endParaRPr sz="1300" b="0">
-              <a:solidFill>
-                <a:srgbClr val="595959"/>
-              </a:solidFill>
-              <a:latin typeface="微软雅黑" panose="020B0503020204020204" charset="-122"/>
-              <a:ea typeface="微软雅黑" panose="020B0503020204020204" charset="-122"/>
-              <a:cs typeface="微软雅黑" panose="020B0503020204020204" charset="-122"/>
-            </a:endParaRPr>
           </a:p>
           <a:p>
             <a:pPr>
@@ -14838,14 +13383,6 @@
               </a:rPr>
               <a:t>DCNv2</a:t>
             </a:r>
-            <a:endParaRPr sz="1500" b="1">
-              <a:solidFill>
-                <a:srgbClr val="1F3864"/>
-              </a:solidFill>
-              <a:latin typeface="微软雅黑" panose="020B0503020204020204" charset="-122"/>
-              <a:ea typeface="微软雅黑" panose="020B0503020204020204" charset="-122"/>
-              <a:cs typeface="微软雅黑" panose="020B0503020204020204" charset="-122"/>
-            </a:endParaRPr>
           </a:p>
           <a:p>
             <a:pPr lvl="1">
@@ -14867,14 +13404,6 @@
               </a:rPr>
               <a:t>modulation 为采样点按位置加权，由 offset 输出。</a:t>
             </a:r>
-            <a:endParaRPr sz="1300" b="0">
-              <a:solidFill>
-                <a:srgbClr val="595959"/>
-              </a:solidFill>
-              <a:latin typeface="微软雅黑" panose="020B0503020204020204" charset="-122"/>
-              <a:ea typeface="微软雅黑" panose="020B0503020204020204" charset="-122"/>
-              <a:cs typeface="微软雅黑" panose="020B0503020204020204" charset="-122"/>
-            </a:endParaRPr>
           </a:p>
           <a:p>
             <a:pPr>
@@ -14896,14 +13425,6 @@
               </a:rPr>
               <a:t>DCNv3</a:t>
             </a:r>
-            <a:endParaRPr sz="1500" b="1">
-              <a:solidFill>
-                <a:srgbClr val="1F3864"/>
-              </a:solidFill>
-              <a:latin typeface="微软雅黑" panose="020B0503020204020204" charset="-122"/>
-              <a:ea typeface="微软雅黑" panose="020B0503020204020204" charset="-122"/>
-              <a:cs typeface="微软雅黑" panose="020B0503020204020204" charset="-122"/>
-            </a:endParaRPr>
           </a:p>
           <a:p>
             <a:pPr lvl="1">
@@ -14925,14 +13446,6 @@
               </a:rPr>
               <a:t>将卷积按通道分为 G 个组，每组可以确定各自的独立漂移量。</a:t>
             </a:r>
-            <a:endParaRPr sz="1300" b="0">
-              <a:solidFill>
-                <a:srgbClr val="595959"/>
-              </a:solidFill>
-              <a:latin typeface="微软雅黑" panose="020B0503020204020204" charset="-122"/>
-              <a:ea typeface="微软雅黑" panose="020B0503020204020204" charset="-122"/>
-              <a:cs typeface="微软雅黑" panose="020B0503020204020204" charset="-122"/>
-            </a:endParaRPr>
           </a:p>
         </p:txBody>
       </p:sp>
@@ -14953,7 +13466,14 @@
         <p:cNvGrpSpPr/>
         <p:nvPr/>
       </p:nvGrpSpPr>
-      <p:grpSpPr/>
+      <p:grpSpPr>
+        <a:xfrm>
+          <a:off x="0" y="0"/>
+          <a:ext cx="0" cy="0"/>
+          <a:chOff x="0" y="0"/>
+          <a:chExt cx="0" cy="0"/>
+        </a:xfrm>
+      </p:grpSpPr>
       <p:sp>
         <p:nvSpPr>
           <p:cNvPr id="2" name="Rectangle 1"/>
@@ -14994,6 +13514,7 @@
           <a:lstStyle/>
           <a:p>
             <a:pPr algn="ctr"/>
+            <a:endParaRPr/>
           </a:p>
         </p:txBody>
       </p:sp>
@@ -15035,14 +13556,6 @@
               </a:rPr>
               <a:t>激活函数：ReLU / GELU / SiLU</a:t>
             </a:r>
-            <a:endParaRPr sz="2700" b="1">
-              <a:solidFill>
-                <a:srgbClr val="1F3864"/>
-              </a:solidFill>
-              <a:latin typeface="微软雅黑" panose="020B0503020204020204" charset="-122"/>
-              <a:ea typeface="微软雅黑" panose="020B0503020204020204" charset="-122"/>
-              <a:cs typeface="微软雅黑" panose="020B0503020204020204" charset="-122"/>
-            </a:endParaRPr>
           </a:p>
         </p:txBody>
       </p:sp>
@@ -15084,14 +13597,6 @@
               </a:rPr>
               <a:t>数学公式 · 梯度曲线 · 计算成本 · 死亡神经元</a:t>
             </a:r>
-            <a:endParaRPr sz="1350" b="0">
-              <a:solidFill>
-                <a:srgbClr val="595959"/>
-              </a:solidFill>
-              <a:latin typeface="微软雅黑" panose="020B0503020204020204" charset="-122"/>
-              <a:ea typeface="微软雅黑" panose="020B0503020204020204" charset="-122"/>
-              <a:cs typeface="微软雅黑" panose="020B0503020204020204" charset="-122"/>
-            </a:endParaRPr>
           </a:p>
         </p:txBody>
       </p:sp>
@@ -15135,6 +13640,7 @@
           <a:lstStyle/>
           <a:p>
             <a:pPr algn="ctr"/>
+            <a:endParaRPr/>
           </a:p>
         </p:txBody>
       </p:sp>
@@ -15157,11 +13663,41 @@
                 <a:tableStyleId>{5C22544A-7EE6-4342-B048-85BDC9FD1C3A}</a:tableStyleId>
               </a:tblPr>
               <a:tblGrid>
-                <a:gridCol w="1163900"/>
-                <a:gridCol w="2327801"/>
-                <a:gridCol w="4443984"/>
-                <a:gridCol w="1269709"/>
-                <a:gridCol w="1904564"/>
+                <a:gridCol w="1163900">
+                  <a:extLst>
+                    <a:ext uri="{9D8B030D-6E8A-4147-A177-3AD203B41FA5}">
+                      <a16:colId xmlns:a16="http://schemas.microsoft.com/office/drawing/2014/main" val="20000"/>
+                    </a:ext>
+                  </a:extLst>
+                </a:gridCol>
+                <a:gridCol w="2327801">
+                  <a:extLst>
+                    <a:ext uri="{9D8B030D-6E8A-4147-A177-3AD203B41FA5}">
+                      <a16:colId xmlns:a16="http://schemas.microsoft.com/office/drawing/2014/main" val="20001"/>
+                    </a:ext>
+                  </a:extLst>
+                </a:gridCol>
+                <a:gridCol w="4443984">
+                  <a:extLst>
+                    <a:ext uri="{9D8B030D-6E8A-4147-A177-3AD203B41FA5}">
+                      <a16:colId xmlns:a16="http://schemas.microsoft.com/office/drawing/2014/main" val="20002"/>
+                    </a:ext>
+                  </a:extLst>
+                </a:gridCol>
+                <a:gridCol w="1269709">
+                  <a:extLst>
+                    <a:ext uri="{9D8B030D-6E8A-4147-A177-3AD203B41FA5}">
+                      <a16:colId xmlns:a16="http://schemas.microsoft.com/office/drawing/2014/main" val="20003"/>
+                    </a:ext>
+                  </a:extLst>
+                </a:gridCol>
+                <a:gridCol w="1904564">
+                  <a:extLst>
+                    <a:ext uri="{9D8B030D-6E8A-4147-A177-3AD203B41FA5}">
+                      <a16:colId xmlns:a16="http://schemas.microsoft.com/office/drawing/2014/main" val="20004"/>
+                    </a:ext>
+                  </a:extLst>
+                </a:gridCol>
               </a:tblGrid>
               <a:tr h="822960">
                 <a:tc>
@@ -15203,14 +13739,6 @@
                         </a:rPr>
                         <a:t>数学公式</a:t>
                       </a:r>
-                      <a:endParaRPr sz="1400" b="1">
-                        <a:solidFill>
-                          <a:srgbClr val="FFFFFF"/>
-                        </a:solidFill>
-                        <a:latin typeface="微软雅黑" panose="020B0503020204020204" charset="-122"/>
-                        <a:ea typeface="微软雅黑" panose="020B0503020204020204" charset="-122"/>
-                        <a:cs typeface="微软雅黑" panose="020B0503020204020204" charset="-122"/>
-                      </a:endParaRPr>
                     </a:p>
                   </a:txBody>
                   <a:tcPr marL="54864" marR="54864" marT="18288" marB="18288" anchor="ctr">
@@ -15236,14 +13764,6 @@
                         </a:rPr>
                         <a:t>梯度曲线</a:t>
                       </a:r>
-                      <a:endParaRPr sz="1400" b="1">
-                        <a:solidFill>
-                          <a:srgbClr val="FFFFFF"/>
-                        </a:solidFill>
-                        <a:latin typeface="微软雅黑" panose="020B0503020204020204" charset="-122"/>
-                        <a:ea typeface="微软雅黑" panose="020B0503020204020204" charset="-122"/>
-                        <a:cs typeface="微软雅黑" panose="020B0503020204020204" charset="-122"/>
-                      </a:endParaRPr>
                     </a:p>
                   </a:txBody>
                   <a:tcPr marL="54864" marR="54864" marT="18288" marB="18288" anchor="ctr">
@@ -15269,14 +13789,6 @@
                         </a:rPr>
                         <a:t>计算成本</a:t>
                       </a:r>
-                      <a:endParaRPr sz="1400" b="1">
-                        <a:solidFill>
-                          <a:srgbClr val="FFFFFF"/>
-                        </a:solidFill>
-                        <a:latin typeface="微软雅黑" panose="020B0503020204020204" charset="-122"/>
-                        <a:ea typeface="微软雅黑" panose="020B0503020204020204" charset="-122"/>
-                        <a:cs typeface="微软雅黑" panose="020B0503020204020204" charset="-122"/>
-                      </a:endParaRPr>
                     </a:p>
                   </a:txBody>
                   <a:tcPr marL="54864" marR="54864" marT="18288" marB="18288" anchor="ctr">
@@ -15302,14 +13814,6 @@
                         </a:rPr>
                         <a:t>死亡神经元</a:t>
                       </a:r>
-                      <a:endParaRPr sz="1400" b="1">
-                        <a:solidFill>
-                          <a:srgbClr val="FFFFFF"/>
-                        </a:solidFill>
-                        <a:latin typeface="微软雅黑" panose="020B0503020204020204" charset="-122"/>
-                        <a:ea typeface="微软雅黑" panose="020B0503020204020204" charset="-122"/>
-                        <a:cs typeface="微软雅黑" panose="020B0503020204020204" charset="-122"/>
-                      </a:endParaRPr>
                     </a:p>
                   </a:txBody>
                   <a:tcPr marL="54864" marR="54864" marT="18288" marB="18288" anchor="ctr">
@@ -15318,6 +13822,11 @@
                     </a:solidFill>
                   </a:tcPr>
                 </a:tc>
+                <a:extLst>
+                  <a:ext uri="{0D108BD9-81ED-4DB2-BD59-A6C34878D82A}">
+                    <a16:rowId xmlns:a16="http://schemas.microsoft.com/office/drawing/2014/main" val="10000"/>
+                  </a:ext>
+                </a:extLst>
               </a:tr>
               <a:tr h="822960">
                 <a:tc>
@@ -15337,14 +13846,6 @@
                         </a:rPr>
                         <a:t>ReLU</a:t>
                       </a:r>
-                      <a:endParaRPr sz="1300" b="1">
-                        <a:solidFill>
-                          <a:srgbClr val="262626"/>
-                        </a:solidFill>
-                        <a:latin typeface="微软雅黑" panose="020B0503020204020204" charset="-122"/>
-                        <a:ea typeface="微软雅黑" panose="020B0503020204020204" charset="-122"/>
-                        <a:cs typeface="微软雅黑" panose="020B0503020204020204" charset="-122"/>
-                      </a:endParaRPr>
                     </a:p>
                   </a:txBody>
                   <a:tcPr marL="54864" marR="54864" marT="18288" marB="18288" anchor="ctr">
@@ -15392,14 +13893,6 @@
                         </a:rPr>
                         <a:t>在 0 点跳变，负半轴为 0</a:t>
                       </a:r>
-                      <a:endParaRPr sz="1300" b="0">
-                        <a:solidFill>
-                          <a:srgbClr val="262626"/>
-                        </a:solidFill>
-                        <a:latin typeface="微软雅黑" panose="020B0503020204020204" charset="-122"/>
-                        <a:ea typeface="微软雅黑" panose="020B0503020204020204" charset="-122"/>
-                        <a:cs typeface="微软雅黑" panose="020B0503020204020204" charset="-122"/>
-                      </a:endParaRPr>
                     </a:p>
                   </a:txBody>
                   <a:tcPr marL="54864" marR="54864" marT="18288" marB="18288" anchor="ctr">
@@ -15425,14 +13918,6 @@
                         </a:rPr>
                         <a:t>低</a:t>
                       </a:r>
-                      <a:endParaRPr sz="1300" b="0">
-                        <a:solidFill>
-                          <a:srgbClr val="262626"/>
-                        </a:solidFill>
-                        <a:latin typeface="微软雅黑" panose="020B0503020204020204" charset="-122"/>
-                        <a:ea typeface="微软雅黑" panose="020B0503020204020204" charset="-122"/>
-                        <a:cs typeface="微软雅黑" panose="020B0503020204020204" charset="-122"/>
-                      </a:endParaRPr>
                     </a:p>
                   </a:txBody>
                   <a:tcPr marL="54864" marR="54864" marT="18288" marB="18288" anchor="ctr">
@@ -15458,14 +13943,6 @@
                         </a:rPr>
                         <a:t>有</a:t>
                       </a:r>
-                      <a:endParaRPr sz="1300" b="0">
-                        <a:solidFill>
-                          <a:srgbClr val="262626"/>
-                        </a:solidFill>
-                        <a:latin typeface="微软雅黑" panose="020B0503020204020204" charset="-122"/>
-                        <a:ea typeface="微软雅黑" panose="020B0503020204020204" charset="-122"/>
-                        <a:cs typeface="微软雅黑" panose="020B0503020204020204" charset="-122"/>
-                      </a:endParaRPr>
                     </a:p>
                   </a:txBody>
                   <a:tcPr marL="54864" marR="54864" marT="18288" marB="18288" anchor="ctr">
@@ -15474,6 +13951,11 @@
                     </a:solidFill>
                   </a:tcPr>
                 </a:tc>
+                <a:extLst>
+                  <a:ext uri="{0D108BD9-81ED-4DB2-BD59-A6C34878D82A}">
+                    <a16:rowId xmlns:a16="http://schemas.microsoft.com/office/drawing/2014/main" val="10001"/>
+                  </a:ext>
+                </a:extLst>
               </a:tr>
               <a:tr h="822960">
                 <a:tc>
@@ -15493,14 +13975,6 @@
                         </a:rPr>
                         <a:t>GELU</a:t>
                       </a:r>
-                      <a:endParaRPr sz="1300" b="1">
-                        <a:solidFill>
-                          <a:srgbClr val="262626"/>
-                        </a:solidFill>
-                        <a:latin typeface="微软雅黑" panose="020B0503020204020204" charset="-122"/>
-                        <a:ea typeface="微软雅黑" panose="020B0503020204020204" charset="-122"/>
-                        <a:cs typeface="微软雅黑" panose="020B0503020204020204" charset="-122"/>
-                      </a:endParaRPr>
                     </a:p>
                   </a:txBody>
                   <a:tcPr marL="54864" marR="54864" marT="18288" marB="18288" anchor="ctr">
@@ -15548,14 +14022,6 @@
                         </a:rPr>
                         <a:t>平滑，在 x&lt;0 时有小的负梯度</a:t>
                       </a:r>
-                      <a:endParaRPr sz="1300" b="0">
-                        <a:solidFill>
-                          <a:srgbClr val="262626"/>
-                        </a:solidFill>
-                        <a:latin typeface="微软雅黑" panose="020B0503020204020204" charset="-122"/>
-                        <a:ea typeface="微软雅黑" panose="020B0503020204020204" charset="-122"/>
-                        <a:cs typeface="微软雅黑" panose="020B0503020204020204" charset="-122"/>
-                      </a:endParaRPr>
                     </a:p>
                   </a:txBody>
                   <a:tcPr marL="54864" marR="54864" marT="18288" marB="18288" anchor="ctr">
@@ -15581,14 +14047,6 @@
                         </a:rPr>
                         <a:t>高</a:t>
                       </a:r>
-                      <a:endParaRPr sz="1300" b="0">
-                        <a:solidFill>
-                          <a:srgbClr val="262626"/>
-                        </a:solidFill>
-                        <a:latin typeface="微软雅黑" panose="020B0503020204020204" charset="-122"/>
-                        <a:ea typeface="微软雅黑" panose="020B0503020204020204" charset="-122"/>
-                        <a:cs typeface="微软雅黑" panose="020B0503020204020204" charset="-122"/>
-                      </a:endParaRPr>
                     </a:p>
                   </a:txBody>
                   <a:tcPr marL="54864" marR="54864" marT="18288" marB="18288" anchor="ctr">
@@ -15614,14 +14072,6 @@
                         </a:rPr>
                         <a:t>极端负饱和</a:t>
                       </a:r>
-                      <a:endParaRPr sz="1300" b="0">
-                        <a:solidFill>
-                          <a:srgbClr val="262626"/>
-                        </a:solidFill>
-                        <a:latin typeface="微软雅黑" panose="020B0503020204020204" charset="-122"/>
-                        <a:ea typeface="微软雅黑" panose="020B0503020204020204" charset="-122"/>
-                        <a:cs typeface="微软雅黑" panose="020B0503020204020204" charset="-122"/>
-                      </a:endParaRPr>
                     </a:p>
                   </a:txBody>
                   <a:tcPr marL="54864" marR="54864" marT="18288" marB="18288" anchor="ctr">
@@ -15630,6 +14080,11 @@
                     </a:solidFill>
                   </a:tcPr>
                 </a:tc>
+                <a:extLst>
+                  <a:ext uri="{0D108BD9-81ED-4DB2-BD59-A6C34878D82A}">
+                    <a16:rowId xmlns:a16="http://schemas.microsoft.com/office/drawing/2014/main" val="10002"/>
+                  </a:ext>
+                </a:extLst>
               </a:tr>
               <a:tr h="822960">
                 <a:tc>
@@ -15649,14 +14104,6 @@
                         </a:rPr>
                         <a:t>SiLU</a:t>
                       </a:r>
-                      <a:endParaRPr sz="1300" b="1">
-                        <a:solidFill>
-                          <a:srgbClr val="262626"/>
-                        </a:solidFill>
-                        <a:latin typeface="微软雅黑" panose="020B0503020204020204" charset="-122"/>
-                        <a:ea typeface="微软雅黑" panose="020B0503020204020204" charset="-122"/>
-                        <a:cs typeface="微软雅黑" panose="020B0503020204020204" charset="-122"/>
-                      </a:endParaRPr>
                     </a:p>
                   </a:txBody>
                   <a:tcPr marL="54864" marR="54864" marT="18288" marB="18288" anchor="ctr">
@@ -15704,14 +14151,6 @@
                         </a:rPr>
                         <a:t>平滑，x&lt;0 有小的负梯度</a:t>
                       </a:r>
-                      <a:endParaRPr sz="1300" b="0">
-                        <a:solidFill>
-                          <a:srgbClr val="262626"/>
-                        </a:solidFill>
-                        <a:latin typeface="微软雅黑" panose="020B0503020204020204" charset="-122"/>
-                        <a:ea typeface="微软雅黑" panose="020B0503020204020204" charset="-122"/>
-                        <a:cs typeface="微软雅黑" panose="020B0503020204020204" charset="-122"/>
-                      </a:endParaRPr>
                     </a:p>
                   </a:txBody>
                   <a:tcPr marL="54864" marR="54864" marT="18288" marB="18288" anchor="ctr">
@@ -15737,14 +14176,6 @@
                         </a:rPr>
                         <a:t>中</a:t>
                       </a:r>
-                      <a:endParaRPr sz="1300" b="0">
-                        <a:solidFill>
-                          <a:srgbClr val="262626"/>
-                        </a:solidFill>
-                        <a:latin typeface="微软雅黑" panose="020B0503020204020204" charset="-122"/>
-                        <a:ea typeface="微软雅黑" panose="020B0503020204020204" charset="-122"/>
-                        <a:cs typeface="微软雅黑" panose="020B0503020204020204" charset="-122"/>
-                      </a:endParaRPr>
                     </a:p>
                   </a:txBody>
                   <a:tcPr marL="54864" marR="54864" marT="18288" marB="18288" anchor="ctr">
@@ -15770,14 +14201,6 @@
                         </a:rPr>
                         <a:t>极端负饱和</a:t>
                       </a:r>
-                      <a:endParaRPr sz="1300" b="0">
-                        <a:solidFill>
-                          <a:srgbClr val="262626"/>
-                        </a:solidFill>
-                        <a:latin typeface="微软雅黑" panose="020B0503020204020204" charset="-122"/>
-                        <a:ea typeface="微软雅黑" panose="020B0503020204020204" charset="-122"/>
-                        <a:cs typeface="微软雅黑" panose="020B0503020204020204" charset="-122"/>
-                      </a:endParaRPr>
                     </a:p>
                   </a:txBody>
                   <a:tcPr marL="54864" marR="54864" marT="18288" marB="18288" anchor="ctr">
@@ -15786,6 +14209,11 @@
                     </a:solidFill>
                   </a:tcPr>
                 </a:tc>
+                <a:extLst>
+                  <a:ext uri="{0D108BD9-81ED-4DB2-BD59-A6C34878D82A}">
+                    <a16:rowId xmlns:a16="http://schemas.microsoft.com/office/drawing/2014/main" val="10003"/>
+                  </a:ext>
+                </a:extLst>
               </a:tr>
             </a:tbl>
           </a:graphicData>
@@ -15800,7 +14228,7 @@
           <p:nvPr/>
         </p:nvPicPr>
         <p:blipFill>
-          <a:blip r:embed="rId1"/>
+          <a:blip r:embed="rId2"/>
           <a:stretch>
             <a:fillRect/>
           </a:stretch>
@@ -15824,7 +14252,7 @@
           <p:nvPr/>
         </p:nvPicPr>
         <p:blipFill>
-          <a:blip r:embed="rId2"/>
+          <a:blip r:embed="rId3"/>
           <a:stretch>
             <a:fillRect/>
           </a:stretch>
@@ -15848,7 +14276,7 @@
           <p:nvPr/>
         </p:nvPicPr>
         <p:blipFill>
-          <a:blip r:embed="rId3"/>
+          <a:blip r:embed="rId4"/>
           <a:stretch>
             <a:fillRect/>
           </a:stretch>
@@ -15880,7 +14308,14 @@
         <p:cNvGrpSpPr/>
         <p:nvPr/>
       </p:nvGrpSpPr>
-      <p:grpSpPr/>
+      <p:grpSpPr>
+        <a:xfrm>
+          <a:off x="0" y="0"/>
+          <a:ext cx="0" cy="0"/>
+          <a:chOff x="0" y="0"/>
+          <a:chExt cx="0" cy="0"/>
+        </a:xfrm>
+      </p:grpSpPr>
       <p:sp>
         <p:nvSpPr>
           <p:cNvPr id="2" name="Rectangle 1"/>
@@ -15921,6 +14356,7 @@
           <a:lstStyle/>
           <a:p>
             <a:pPr algn="ctr"/>
+            <a:endParaRPr/>
           </a:p>
         </p:txBody>
       </p:sp>
@@ -15962,14 +14398,6 @@
               </a:rPr>
               <a:t>损失函数对比</a:t>
             </a:r>
-            <a:endParaRPr sz="2700" b="1">
-              <a:solidFill>
-                <a:srgbClr val="1F3864"/>
-              </a:solidFill>
-              <a:latin typeface="微软雅黑" panose="020B0503020204020204" charset="-122"/>
-              <a:ea typeface="微软雅黑" panose="020B0503020204020204" charset="-122"/>
-              <a:cs typeface="微软雅黑" panose="020B0503020204020204" charset="-122"/>
-            </a:endParaRPr>
           </a:p>
         </p:txBody>
       </p:sp>
@@ -16011,14 +14439,6 @@
               </a:rPr>
               <a:t>数学公式 · 对 logit 的梯度 · 类别不平衡处理 · 适配任务 · 正则化</a:t>
             </a:r>
-            <a:endParaRPr sz="1350" b="0">
-              <a:solidFill>
-                <a:srgbClr val="595959"/>
-              </a:solidFill>
-              <a:latin typeface="微软雅黑" panose="020B0503020204020204" charset="-122"/>
-              <a:ea typeface="微软雅黑" panose="020B0503020204020204" charset="-122"/>
-              <a:cs typeface="微软雅黑" panose="020B0503020204020204" charset="-122"/>
-            </a:endParaRPr>
           </a:p>
         </p:txBody>
       </p:sp>
@@ -16062,6 +14482,7 @@
           <a:lstStyle/>
           <a:p>
             <a:pPr algn="ctr"/>
+            <a:endParaRPr/>
           </a:p>
         </p:txBody>
       </p:sp>
@@ -16084,12 +14505,48 @@
                 <a:tableStyleId>{5C22544A-7EE6-4342-B048-85BDC9FD1C3A}</a:tableStyleId>
               </a:tblPr>
               <a:tblGrid>
-                <a:gridCol w="1328569"/>
-                <a:gridCol w="2408032"/>
-                <a:gridCol w="2989281"/>
-                <a:gridCol w="1411605"/>
-                <a:gridCol w="1411605"/>
-                <a:gridCol w="1743747"/>
+                <a:gridCol w="1328569">
+                  <a:extLst>
+                    <a:ext uri="{9D8B030D-6E8A-4147-A177-3AD203B41FA5}">
+                      <a16:colId xmlns:a16="http://schemas.microsoft.com/office/drawing/2014/main" val="20000"/>
+                    </a:ext>
+                  </a:extLst>
+                </a:gridCol>
+                <a:gridCol w="2408032">
+                  <a:extLst>
+                    <a:ext uri="{9D8B030D-6E8A-4147-A177-3AD203B41FA5}">
+                      <a16:colId xmlns:a16="http://schemas.microsoft.com/office/drawing/2014/main" val="20001"/>
+                    </a:ext>
+                  </a:extLst>
+                </a:gridCol>
+                <a:gridCol w="2989281">
+                  <a:extLst>
+                    <a:ext uri="{9D8B030D-6E8A-4147-A177-3AD203B41FA5}">
+                      <a16:colId xmlns:a16="http://schemas.microsoft.com/office/drawing/2014/main" val="20002"/>
+                    </a:ext>
+                  </a:extLst>
+                </a:gridCol>
+                <a:gridCol w="1411605">
+                  <a:extLst>
+                    <a:ext uri="{9D8B030D-6E8A-4147-A177-3AD203B41FA5}">
+                      <a16:colId xmlns:a16="http://schemas.microsoft.com/office/drawing/2014/main" val="20003"/>
+                    </a:ext>
+                  </a:extLst>
+                </a:gridCol>
+                <a:gridCol w="1411605">
+                  <a:extLst>
+                    <a:ext uri="{9D8B030D-6E8A-4147-A177-3AD203B41FA5}">
+                      <a16:colId xmlns:a16="http://schemas.microsoft.com/office/drawing/2014/main" val="20004"/>
+                    </a:ext>
+                  </a:extLst>
+                </a:gridCol>
+                <a:gridCol w="1743747">
+                  <a:extLst>
+                    <a:ext uri="{9D8B030D-6E8A-4147-A177-3AD203B41FA5}">
+                      <a16:colId xmlns:a16="http://schemas.microsoft.com/office/drawing/2014/main" val="20005"/>
+                    </a:ext>
+                  </a:extLst>
+                </a:gridCol>
               </a:tblGrid>
               <a:tr h="914400">
                 <a:tc>
@@ -16131,14 +14588,6 @@
                         </a:rPr>
                         <a:t>数学公式</a:t>
                       </a:r>
-                      <a:endParaRPr sz="1250" b="1">
-                        <a:solidFill>
-                          <a:srgbClr val="FFFFFF"/>
-                        </a:solidFill>
-                        <a:latin typeface="微软雅黑" panose="020B0503020204020204" charset="-122"/>
-                        <a:ea typeface="微软雅黑" panose="020B0503020204020204" charset="-122"/>
-                        <a:cs typeface="微软雅黑" panose="020B0503020204020204" charset="-122"/>
-                      </a:endParaRPr>
                     </a:p>
                   </a:txBody>
                   <a:tcPr marL="54864" marR="54864" marT="18288" marB="18288" anchor="ctr">
@@ -16164,14 +14613,6 @@
                         </a:rPr>
                         <a:t>梯度（对 logit 求导）</a:t>
                       </a:r>
-                      <a:endParaRPr sz="1250" b="1">
-                        <a:solidFill>
-                          <a:srgbClr val="FFFFFF"/>
-                        </a:solidFill>
-                        <a:latin typeface="微软雅黑" panose="020B0503020204020204" charset="-122"/>
-                        <a:ea typeface="微软雅黑" panose="020B0503020204020204" charset="-122"/>
-                        <a:cs typeface="微软雅黑" panose="020B0503020204020204" charset="-122"/>
-                      </a:endParaRPr>
                     </a:p>
                   </a:txBody>
                   <a:tcPr marL="54864" marR="54864" marT="18288" marB="18288" anchor="ctr">
@@ -16197,14 +14638,6 @@
                         </a:rPr>
                         <a:t>类别不平衡处理</a:t>
                       </a:r>
-                      <a:endParaRPr sz="1250" b="1">
-                        <a:solidFill>
-                          <a:srgbClr val="FFFFFF"/>
-                        </a:solidFill>
-                        <a:latin typeface="微软雅黑" panose="020B0503020204020204" charset="-122"/>
-                        <a:ea typeface="微软雅黑" panose="020B0503020204020204" charset="-122"/>
-                        <a:cs typeface="微软雅黑" panose="020B0503020204020204" charset="-122"/>
-                      </a:endParaRPr>
                     </a:p>
                   </a:txBody>
                   <a:tcPr marL="54864" marR="54864" marT="18288" marB="18288" anchor="ctr">
@@ -16230,14 +14663,6 @@
                         </a:rPr>
                         <a:t>适配任务</a:t>
                       </a:r>
-                      <a:endParaRPr sz="1250" b="1">
-                        <a:solidFill>
-                          <a:srgbClr val="FFFFFF"/>
-                        </a:solidFill>
-                        <a:latin typeface="微软雅黑" panose="020B0503020204020204" charset="-122"/>
-                        <a:ea typeface="微软雅黑" panose="020B0503020204020204" charset="-122"/>
-                        <a:cs typeface="微软雅黑" panose="020B0503020204020204" charset="-122"/>
-                      </a:endParaRPr>
                     </a:p>
                   </a:txBody>
                   <a:tcPr marL="54864" marR="54864" marT="18288" marB="18288" anchor="ctr">
@@ -16263,14 +14688,6 @@
                         </a:rPr>
                         <a:t>正则化</a:t>
                       </a:r>
-                      <a:endParaRPr sz="1250" b="1">
-                        <a:solidFill>
-                          <a:srgbClr val="FFFFFF"/>
-                        </a:solidFill>
-                        <a:latin typeface="微软雅黑" panose="020B0503020204020204" charset="-122"/>
-                        <a:ea typeface="微软雅黑" panose="020B0503020204020204" charset="-122"/>
-                        <a:cs typeface="微软雅黑" panose="020B0503020204020204" charset="-122"/>
-                      </a:endParaRPr>
                     </a:p>
                   </a:txBody>
                   <a:tcPr marL="54864" marR="54864" marT="18288" marB="18288" anchor="ctr">
@@ -16279,6 +14696,11 @@
                     </a:solidFill>
                   </a:tcPr>
                 </a:tc>
+                <a:extLst>
+                  <a:ext uri="{0D108BD9-81ED-4DB2-BD59-A6C34878D82A}">
+                    <a16:rowId xmlns:a16="http://schemas.microsoft.com/office/drawing/2014/main" val="10000"/>
+                  </a:ext>
+                </a:extLst>
               </a:tr>
               <a:tr h="914400">
                 <a:tc>
@@ -16298,14 +14720,6 @@
                         </a:rPr>
                         <a:t>CE</a:t>
                       </a:r>
-                      <a:endParaRPr sz="1100" b="1">
-                        <a:solidFill>
-                          <a:srgbClr val="262626"/>
-                        </a:solidFill>
-                        <a:latin typeface="微软雅黑" panose="020B0503020204020204" charset="-122"/>
-                        <a:ea typeface="微软雅黑" panose="020B0503020204020204" charset="-122"/>
-                        <a:cs typeface="微软雅黑" panose="020B0503020204020204" charset="-122"/>
-                      </a:endParaRPr>
                     </a:p>
                   </a:txBody>
                   <a:tcPr marL="54864" marR="54864" marT="18288" marB="18288" anchor="ctr">
@@ -16375,14 +14789,6 @@
                         </a:rPr>
                         <a:t>需要类权重</a:t>
                       </a:r>
-                      <a:endParaRPr sz="1100" b="0">
-                        <a:solidFill>
-                          <a:srgbClr val="262626"/>
-                        </a:solidFill>
-                        <a:latin typeface="微软雅黑" panose="020B0503020204020204" charset="-122"/>
-                        <a:ea typeface="微软雅黑" panose="020B0503020204020204" charset="-122"/>
-                        <a:cs typeface="微软雅黑" panose="020B0503020204020204" charset="-122"/>
-                      </a:endParaRPr>
                     </a:p>
                   </a:txBody>
                   <a:tcPr marL="54864" marR="54864" marT="18288" marB="18288" anchor="ctr">
@@ -16408,14 +14814,6 @@
                         </a:rPr>
                         <a:t>互斥分类</a:t>
                       </a:r>
-                      <a:endParaRPr sz="1100" b="0">
-                        <a:solidFill>
-                          <a:srgbClr val="262626"/>
-                        </a:solidFill>
-                        <a:latin typeface="微软雅黑" panose="020B0503020204020204" charset="-122"/>
-                        <a:ea typeface="微软雅黑" panose="020B0503020204020204" charset="-122"/>
-                        <a:cs typeface="微软雅黑" panose="020B0503020204020204" charset="-122"/>
-                      </a:endParaRPr>
                     </a:p>
                   </a:txBody>
                   <a:tcPr marL="54864" marR="54864" marT="18288" marB="18288" anchor="ctr">
@@ -16441,14 +14839,6 @@
                         </a:rPr>
                         <a:t>—</a:t>
                       </a:r>
-                      <a:endParaRPr sz="1100" b="0">
-                        <a:solidFill>
-                          <a:srgbClr val="262626"/>
-                        </a:solidFill>
-                        <a:latin typeface="微软雅黑" panose="020B0503020204020204" charset="-122"/>
-                        <a:ea typeface="微软雅黑" panose="020B0503020204020204" charset="-122"/>
-                        <a:cs typeface="微软雅黑" panose="020B0503020204020204" charset="-122"/>
-                      </a:endParaRPr>
                     </a:p>
                   </a:txBody>
                   <a:tcPr marL="54864" marR="54864" marT="18288" marB="18288" anchor="ctr">
@@ -16457,6 +14847,11 @@
                     </a:solidFill>
                   </a:tcPr>
                 </a:tc>
+                <a:extLst>
+                  <a:ext uri="{0D108BD9-81ED-4DB2-BD59-A6C34878D82A}">
+                    <a16:rowId xmlns:a16="http://schemas.microsoft.com/office/drawing/2014/main" val="10001"/>
+                  </a:ext>
+                </a:extLst>
               </a:tr>
               <a:tr h="914400">
                 <a:tc>
@@ -16476,14 +14871,6 @@
                         </a:rPr>
                         <a:t>Binary-CE</a:t>
                       </a:r>
-                      <a:endParaRPr sz="1100" b="1">
-                        <a:solidFill>
-                          <a:srgbClr val="262626"/>
-                        </a:solidFill>
-                        <a:latin typeface="微软雅黑" panose="020B0503020204020204" charset="-122"/>
-                        <a:ea typeface="微软雅黑" panose="020B0503020204020204" charset="-122"/>
-                        <a:cs typeface="微软雅黑" panose="020B0503020204020204" charset="-122"/>
-                      </a:endParaRPr>
                     </a:p>
                   </a:txBody>
                   <a:tcPr marL="54864" marR="54864" marT="18288" marB="18288" anchor="ctr">
@@ -16553,14 +14940,6 @@
                         </a:rPr>
                         <a:t>需要类权重</a:t>
                       </a:r>
-                      <a:endParaRPr sz="1100" b="0">
-                        <a:solidFill>
-                          <a:srgbClr val="262626"/>
-                        </a:solidFill>
-                        <a:latin typeface="微软雅黑" panose="020B0503020204020204" charset="-122"/>
-                        <a:ea typeface="微软雅黑" panose="020B0503020204020204" charset="-122"/>
-                        <a:cs typeface="微软雅黑" panose="020B0503020204020204" charset="-122"/>
-                      </a:endParaRPr>
                     </a:p>
                   </a:txBody>
                   <a:tcPr marL="54864" marR="54864" marT="18288" marB="18288" anchor="ctr">
@@ -16586,14 +14965,6 @@
                         </a:rPr>
                         <a:t>二分类，多标签分类</a:t>
                       </a:r>
-                      <a:endParaRPr sz="1100" b="0">
-                        <a:solidFill>
-                          <a:srgbClr val="262626"/>
-                        </a:solidFill>
-                        <a:latin typeface="微软雅黑" panose="020B0503020204020204" charset="-122"/>
-                        <a:ea typeface="微软雅黑" panose="020B0503020204020204" charset="-122"/>
-                        <a:cs typeface="微软雅黑" panose="020B0503020204020204" charset="-122"/>
-                      </a:endParaRPr>
                     </a:p>
                   </a:txBody>
                   <a:tcPr marL="54864" marR="54864" marT="18288" marB="18288" anchor="ctr">
@@ -16619,14 +14990,6 @@
                         </a:rPr>
                         <a:t>—</a:t>
                       </a:r>
-                      <a:endParaRPr sz="1100" b="0">
-                        <a:solidFill>
-                          <a:srgbClr val="262626"/>
-                        </a:solidFill>
-                        <a:latin typeface="微软雅黑" panose="020B0503020204020204" charset="-122"/>
-                        <a:ea typeface="微软雅黑" panose="020B0503020204020204" charset="-122"/>
-                        <a:cs typeface="微软雅黑" panose="020B0503020204020204" charset="-122"/>
-                      </a:endParaRPr>
                     </a:p>
                   </a:txBody>
                   <a:tcPr marL="54864" marR="54864" marT="18288" marB="18288" anchor="ctr">
@@ -16635,6 +14998,11 @@
                     </a:solidFill>
                   </a:tcPr>
                 </a:tc>
+                <a:extLst>
+                  <a:ext uri="{0D108BD9-81ED-4DB2-BD59-A6C34878D82A}">
+                    <a16:rowId xmlns:a16="http://schemas.microsoft.com/office/drawing/2014/main" val="10002"/>
+                  </a:ext>
+                </a:extLst>
               </a:tr>
               <a:tr h="914400">
                 <a:tc>
@@ -16654,14 +15022,6 @@
                         </a:rPr>
                         <a:t>Label Smoothing CE</a:t>
                       </a:r>
-                      <a:endParaRPr sz="1100" b="1">
-                        <a:solidFill>
-                          <a:srgbClr val="262626"/>
-                        </a:solidFill>
-                        <a:latin typeface="微软雅黑" panose="020B0503020204020204" charset="-122"/>
-                        <a:ea typeface="微软雅黑" panose="020B0503020204020204" charset="-122"/>
-                        <a:cs typeface="微软雅黑" panose="020B0503020204020204" charset="-122"/>
-                      </a:endParaRPr>
                     </a:p>
                   </a:txBody>
                   <a:tcPr marL="54864" marR="54864" marT="18288" marB="18288" anchor="ctr">
@@ -16731,14 +15091,6 @@
                         </a:rPr>
                         <a:t>需要类权重</a:t>
                       </a:r>
-                      <a:endParaRPr sz="1100" b="0">
-                        <a:solidFill>
-                          <a:srgbClr val="262626"/>
-                        </a:solidFill>
-                        <a:latin typeface="微软雅黑" panose="020B0503020204020204" charset="-122"/>
-                        <a:ea typeface="微软雅黑" panose="020B0503020204020204" charset="-122"/>
-                        <a:cs typeface="微软雅黑" panose="020B0503020204020204" charset="-122"/>
-                      </a:endParaRPr>
                     </a:p>
                   </a:txBody>
                   <a:tcPr marL="54864" marR="54864" marT="18288" marB="18288" anchor="ctr">
@@ -16764,14 +15116,6 @@
                         </a:rPr>
                         <a:t>互斥分类</a:t>
                       </a:r>
-                      <a:endParaRPr sz="1100" b="0">
-                        <a:solidFill>
-                          <a:srgbClr val="262626"/>
-                        </a:solidFill>
-                        <a:latin typeface="微软雅黑" panose="020B0503020204020204" charset="-122"/>
-                        <a:ea typeface="微软雅黑" panose="020B0503020204020204" charset="-122"/>
-                        <a:cs typeface="微软雅黑" panose="020B0503020204020204" charset="-122"/>
-                      </a:endParaRPr>
                     </a:p>
                   </a:txBody>
                   <a:tcPr marL="54864" marR="54864" marT="18288" marB="18288" anchor="ctr">
@@ -16797,14 +15141,6 @@
                         </a:rPr>
                         <a:t>使得预测 logit 最优解不会推向正无穷，从而稳定训练</a:t>
                       </a:r>
-                      <a:endParaRPr sz="1100" b="0">
-                        <a:solidFill>
-                          <a:srgbClr val="262626"/>
-                        </a:solidFill>
-                        <a:latin typeface="微软雅黑" panose="020B0503020204020204" charset="-122"/>
-                        <a:ea typeface="微软雅黑" panose="020B0503020204020204" charset="-122"/>
-                        <a:cs typeface="微软雅黑" panose="020B0503020204020204" charset="-122"/>
-                      </a:endParaRPr>
                     </a:p>
                   </a:txBody>
                   <a:tcPr marL="54864" marR="54864" marT="18288" marB="18288" anchor="ctr">
@@ -16813,6 +15149,11 @@
                     </a:solidFill>
                   </a:tcPr>
                 </a:tc>
+                <a:extLst>
+                  <a:ext uri="{0D108BD9-81ED-4DB2-BD59-A6C34878D82A}">
+                    <a16:rowId xmlns:a16="http://schemas.microsoft.com/office/drawing/2014/main" val="10003"/>
+                  </a:ext>
+                </a:extLst>
               </a:tr>
               <a:tr h="914400">
                 <a:tc>
@@ -16832,14 +15173,6 @@
                         </a:rPr>
                         <a:t>Focal Loss</a:t>
                       </a:r>
-                      <a:endParaRPr sz="1100" b="1">
-                        <a:solidFill>
-                          <a:srgbClr val="262626"/>
-                        </a:solidFill>
-                        <a:latin typeface="微软雅黑" panose="020B0503020204020204" charset="-122"/>
-                        <a:ea typeface="微软雅黑" panose="020B0503020204020204" charset="-122"/>
-                        <a:cs typeface="微软雅黑" panose="020B0503020204020204" charset="-122"/>
-                      </a:endParaRPr>
                     </a:p>
                   </a:txBody>
                   <a:tcPr marL="54864" marR="54864" marT="18288" marB="18288" anchor="ctr">
@@ -16909,14 +15242,6 @@
                         </a:rPr>
                         <a:t>类权重，难易样本分别加权处理不平衡</a:t>
                       </a:r>
-                      <a:endParaRPr sz="1100" b="0">
-                        <a:solidFill>
-                          <a:srgbClr val="262626"/>
-                        </a:solidFill>
-                        <a:latin typeface="微软雅黑" panose="020B0503020204020204" charset="-122"/>
-                        <a:ea typeface="微软雅黑" panose="020B0503020204020204" charset="-122"/>
-                        <a:cs typeface="微软雅黑" panose="020B0503020204020204" charset="-122"/>
-                      </a:endParaRPr>
                     </a:p>
                   </a:txBody>
                   <a:tcPr marL="54864" marR="54864" marT="18288" marB="18288" anchor="ctr">
@@ -16942,14 +15267,6 @@
                         </a:rPr>
                         <a:t>互斥分类 / 二分类 / 多标签</a:t>
                       </a:r>
-                      <a:endParaRPr sz="1100" b="0">
-                        <a:solidFill>
-                          <a:srgbClr val="262626"/>
-                        </a:solidFill>
-                        <a:latin typeface="微软雅黑" panose="020B0503020204020204" charset="-122"/>
-                        <a:ea typeface="微软雅黑" panose="020B0503020204020204" charset="-122"/>
-                        <a:cs typeface="微软雅黑" panose="020B0503020204020204" charset="-122"/>
-                      </a:endParaRPr>
                     </a:p>
                   </a:txBody>
                   <a:tcPr marL="54864" marR="54864" marT="18288" marB="18288" anchor="ctr">
@@ -16975,14 +15292,6 @@
                         </a:rPr>
                         <a:t>—</a:t>
                       </a:r>
-                      <a:endParaRPr sz="1100" b="0">
-                        <a:solidFill>
-                          <a:srgbClr val="262626"/>
-                        </a:solidFill>
-                        <a:latin typeface="微软雅黑" panose="020B0503020204020204" charset="-122"/>
-                        <a:ea typeface="微软雅黑" panose="020B0503020204020204" charset="-122"/>
-                        <a:cs typeface="微软雅黑" panose="020B0503020204020204" charset="-122"/>
-                      </a:endParaRPr>
                     </a:p>
                   </a:txBody>
                   <a:tcPr marL="54864" marR="54864" marT="18288" marB="18288" anchor="ctr">
@@ -16991,6 +15300,11 @@
                     </a:solidFill>
                   </a:tcPr>
                 </a:tc>
+                <a:extLst>
+                  <a:ext uri="{0D108BD9-81ED-4DB2-BD59-A6C34878D82A}">
+                    <a16:rowId xmlns:a16="http://schemas.microsoft.com/office/drawing/2014/main" val="10004"/>
+                  </a:ext>
+                </a:extLst>
               </a:tr>
             </a:tbl>
           </a:graphicData>
@@ -17005,30 +15319,6 @@
           <p:nvPr/>
         </p:nvPicPr>
         <p:blipFill>
-          <a:blip r:embed="rId1"/>
-          <a:stretch>
-            <a:fillRect/>
-          </a:stretch>
-        </p:blipFill>
-        <p:spPr>
-          <a:xfrm>
-            <a:off x="2201798" y="2587752"/>
-            <a:ext cx="1575973" cy="768096"/>
-          </a:xfrm>
-          <a:prstGeom prst="rect">
-            <a:avLst/>
-          </a:prstGeom>
-        </p:spPr>
-      </p:pic>
-      <p:pic>
-        <p:nvPicPr>
-          <p:cNvPr id="8" name="Picture 7" descr="bce.png"/>
-          <p:cNvPicPr>
-            <a:picLocks noChangeAspect="1"/>
-          </p:cNvPicPr>
-          <p:nvPr/>
-        </p:nvPicPr>
-        <p:blipFill>
           <a:blip r:embed="rId2"/>
           <a:stretch>
             <a:fillRect/>
@@ -17036,8 +15326,8 @@
         </p:blipFill>
         <p:spPr>
           <a:xfrm>
-            <a:off x="1858921" y="3776297"/>
-            <a:ext cx="2261728" cy="219805"/>
+            <a:off x="2201798" y="2587752"/>
+            <a:ext cx="1575973" cy="768096"/>
           </a:xfrm>
           <a:prstGeom prst="rect">
             <a:avLst/>
@@ -17046,7 +15336,7 @@
       </p:pic>
       <p:pic>
         <p:nvPicPr>
-          <p:cNvPr id="9" name="Picture 8" descr="ls.png"/>
+          <p:cNvPr id="8" name="Picture 7" descr="bce.png"/>
           <p:cNvPicPr>
             <a:picLocks noChangeAspect="1"/>
           </p:cNvPicPr>
@@ -17060,8 +15350,8 @@
         </p:blipFill>
         <p:spPr>
           <a:xfrm>
-            <a:off x="2155896" y="4416552"/>
-            <a:ext cx="1667778" cy="768096"/>
+            <a:off x="1858921" y="3776297"/>
+            <a:ext cx="2261728" cy="219805"/>
           </a:xfrm>
           <a:prstGeom prst="rect">
             <a:avLst/>
@@ -17070,7 +15360,7 @@
       </p:pic>
       <p:pic>
         <p:nvPicPr>
-          <p:cNvPr id="10" name="Picture 9" descr="focal.png"/>
+          <p:cNvPr id="9" name="Picture 8" descr="ls.png"/>
           <p:cNvPicPr>
             <a:picLocks noChangeAspect="1"/>
           </p:cNvPicPr>
@@ -17084,8 +15374,8 @@
         </p:blipFill>
         <p:spPr>
           <a:xfrm>
-            <a:off x="1858921" y="5407473"/>
-            <a:ext cx="2261728" cy="615053"/>
+            <a:off x="2155896" y="4416552"/>
+            <a:ext cx="1667778" cy="768096"/>
           </a:xfrm>
           <a:prstGeom prst="rect">
             <a:avLst/>
@@ -17094,7 +15384,7 @@
       </p:pic>
       <p:pic>
         <p:nvPicPr>
-          <p:cNvPr id="11" name="Picture 10" descr="grad_py.png"/>
+          <p:cNvPr id="10" name="Picture 9" descr="focal.png"/>
           <p:cNvPicPr>
             <a:picLocks noChangeAspect="1"/>
           </p:cNvPicPr>
@@ -17108,8 +15398,8 @@
         </p:blipFill>
         <p:spPr>
           <a:xfrm>
-            <a:off x="4960579" y="2587752"/>
-            <a:ext cx="1455724" cy="768096"/>
+            <a:off x="1858921" y="5407473"/>
+            <a:ext cx="2261728" cy="615053"/>
           </a:xfrm>
           <a:prstGeom prst="rect">
             <a:avLst/>
@@ -17118,31 +15408,7 @@
       </p:pic>
       <p:pic>
         <p:nvPicPr>
-          <p:cNvPr id="12" name="Picture 11" descr="grad_py.png"/>
-          <p:cNvPicPr>
-            <a:picLocks noChangeAspect="1"/>
-          </p:cNvPicPr>
-          <p:nvPr/>
-        </p:nvPicPr>
-        <p:blipFill>
-          <a:blip r:embed="rId5"/>
-          <a:stretch>
-            <a:fillRect/>
-          </a:stretch>
-        </p:blipFill>
-        <p:spPr>
-          <a:xfrm>
-            <a:off x="4960579" y="3502152"/>
-            <a:ext cx="1455724" cy="768096"/>
-          </a:xfrm>
-          <a:prstGeom prst="rect">
-            <a:avLst/>
-          </a:prstGeom>
-        </p:spPr>
-      </p:pic>
-      <p:pic>
-        <p:nvPicPr>
-          <p:cNvPr id="13" name="Picture 12" descr="grad_py2.png"/>
+          <p:cNvPr id="11" name="Picture 10" descr="grad_py.png"/>
           <p:cNvPicPr>
             <a:picLocks noChangeAspect="1"/>
           </p:cNvPicPr>
@@ -17156,6 +15422,54 @@
         </p:blipFill>
         <p:spPr>
           <a:xfrm>
+            <a:off x="4960579" y="2587752"/>
+            <a:ext cx="1455724" cy="768096"/>
+          </a:xfrm>
+          <a:prstGeom prst="rect">
+            <a:avLst/>
+          </a:prstGeom>
+        </p:spPr>
+      </p:pic>
+      <p:pic>
+        <p:nvPicPr>
+          <p:cNvPr id="12" name="Picture 11" descr="grad_py.png"/>
+          <p:cNvPicPr>
+            <a:picLocks noChangeAspect="1"/>
+          </p:cNvPicPr>
+          <p:nvPr/>
+        </p:nvPicPr>
+        <p:blipFill>
+          <a:blip r:embed="rId6"/>
+          <a:stretch>
+            <a:fillRect/>
+          </a:stretch>
+        </p:blipFill>
+        <p:spPr>
+          <a:xfrm>
+            <a:off x="4960579" y="3502152"/>
+            <a:ext cx="1455724" cy="768096"/>
+          </a:xfrm>
+          <a:prstGeom prst="rect">
+            <a:avLst/>
+          </a:prstGeom>
+        </p:spPr>
+      </p:pic>
+      <p:pic>
+        <p:nvPicPr>
+          <p:cNvPr id="13" name="Picture 12" descr="grad_py2.png"/>
+          <p:cNvPicPr>
+            <a:picLocks noChangeAspect="1"/>
+          </p:cNvPicPr>
+          <p:nvPr/>
+        </p:nvPicPr>
+        <p:blipFill>
+          <a:blip r:embed="rId7"/>
+          <a:stretch>
+            <a:fillRect/>
+          </a:stretch>
+        </p:blipFill>
+        <p:spPr>
+          <a:xfrm>
             <a:off x="4883770" y="4416552"/>
             <a:ext cx="1609344" cy="768096"/>
           </a:xfrm>
@@ -17173,7 +15487,7 @@
           <p:nvPr/>
         </p:nvPicPr>
         <p:blipFill>
-          <a:blip r:embed="rId7"/>
+          <a:blip r:embed="rId8"/>
           <a:stretch>
             <a:fillRect/>
           </a:stretch>
@@ -17205,7 +15519,14 @@
         <p:cNvGrpSpPr/>
         <p:nvPr/>
       </p:nvGrpSpPr>
-      <p:grpSpPr/>
+      <p:grpSpPr>
+        <a:xfrm>
+          <a:off x="0" y="0"/>
+          <a:ext cx="0" cy="0"/>
+          <a:chOff x="0" y="0"/>
+          <a:chExt cx="0" cy="0"/>
+        </a:xfrm>
+      </p:grpSpPr>
       <p:sp>
         <p:nvSpPr>
           <p:cNvPr id="2" name="Rectangle 1"/>
@@ -17246,6 +15567,7 @@
           <a:lstStyle/>
           <a:p>
             <a:pPr algn="ctr"/>
+            <a:endParaRPr/>
           </a:p>
         </p:txBody>
       </p:sp>
@@ -17287,14 +15609,6 @@
               </a:rPr>
               <a:t>Part 2</a:t>
             </a:r>
-            <a:endParaRPr sz="2000" b="0">
-              <a:solidFill>
-                <a:srgbClr val="9DC3E6"/>
-              </a:solidFill>
-              <a:latin typeface="微软雅黑" panose="020B0503020204020204" charset="-122"/>
-              <a:ea typeface="微软雅黑" panose="020B0503020204020204" charset="-122"/>
-              <a:cs typeface="微软雅黑" panose="020B0503020204020204" charset="-122"/>
-            </a:endParaRPr>
           </a:p>
         </p:txBody>
       </p:sp>
@@ -17336,14 +15650,6 @@
               </a:rPr>
               <a:t>模型架构演进</a:t>
             </a:r>
-            <a:endParaRPr sz="3600" b="1">
-              <a:solidFill>
-                <a:srgbClr val="FFFFFF"/>
-              </a:solidFill>
-              <a:latin typeface="微软雅黑" panose="020B0503020204020204" charset="-122"/>
-              <a:ea typeface="微软雅黑" panose="020B0503020204020204" charset="-122"/>
-              <a:cs typeface="微软雅黑" panose="020B0503020204020204" charset="-122"/>
-            </a:endParaRPr>
           </a:p>
         </p:txBody>
       </p:sp>
@@ -17364,7 +15670,14 @@
         <p:cNvGrpSpPr/>
         <p:nvPr/>
       </p:nvGrpSpPr>
-      <p:grpSpPr/>
+      <p:grpSpPr>
+        <a:xfrm>
+          <a:off x="0" y="0"/>
+          <a:ext cx="0" cy="0"/>
+          <a:chOff x="0" y="0"/>
+          <a:chExt cx="0" cy="0"/>
+        </a:xfrm>
+      </p:grpSpPr>
       <p:sp>
         <p:nvSpPr>
           <p:cNvPr id="2" name="Rectangle 1"/>
@@ -17405,6 +15718,7 @@
           <a:lstStyle/>
           <a:p>
             <a:pPr algn="ctr"/>
+            <a:endParaRPr/>
           </a:p>
         </p:txBody>
       </p:sp>
@@ -17446,14 +15760,6 @@
               </a:rPr>
               <a:t>ResNet：退化问题与残差连接</a:t>
             </a:r>
-            <a:endParaRPr sz="2700" b="1">
-              <a:solidFill>
-                <a:srgbClr val="1F3864"/>
-              </a:solidFill>
-              <a:latin typeface="微软雅黑" panose="020B0503020204020204" charset="-122"/>
-              <a:ea typeface="微软雅黑" panose="020B0503020204020204" charset="-122"/>
-              <a:cs typeface="微软雅黑" panose="020B0503020204020204" charset="-122"/>
-            </a:endParaRPr>
           </a:p>
         </p:txBody>
       </p:sp>
@@ -17495,14 +15801,6 @@
               </a:rPr>
               <a:t>经典架构</a:t>
             </a:r>
-            <a:endParaRPr sz="1350" b="0">
-              <a:solidFill>
-                <a:srgbClr val="595959"/>
-              </a:solidFill>
-              <a:latin typeface="微软雅黑" panose="020B0503020204020204" charset="-122"/>
-              <a:ea typeface="微软雅黑" panose="020B0503020204020204" charset="-122"/>
-              <a:cs typeface="微软雅黑" panose="020B0503020204020204" charset="-122"/>
-            </a:endParaRPr>
           </a:p>
         </p:txBody>
       </p:sp>
@@ -17546,6 +15844,7 @@
           <a:lstStyle/>
           <a:p>
             <a:pPr algn="ctr"/>
+            <a:endParaRPr/>
           </a:p>
         </p:txBody>
       </p:sp>
@@ -17590,14 +15889,6 @@
               </a:rPr>
               <a:t>退化问题</a:t>
             </a:r>
-            <a:endParaRPr sz="1600" b="1">
-              <a:solidFill>
-                <a:srgbClr val="1F3864"/>
-              </a:solidFill>
-              <a:latin typeface="微软雅黑" panose="020B0503020204020204" charset="-122"/>
-              <a:ea typeface="微软雅黑" panose="020B0503020204020204" charset="-122"/>
-              <a:cs typeface="微软雅黑" panose="020B0503020204020204" charset="-122"/>
-            </a:endParaRPr>
           </a:p>
           <a:p>
             <a:pPr lvl="1">
@@ -17619,14 +15910,6 @@
               </a:rPr>
               <a:t>是「在同样训练配置下，深层网络训练误差不如浅层网络」的现象。</a:t>
             </a:r>
-            <a:endParaRPr sz="1400" b="0">
-              <a:solidFill>
-                <a:srgbClr val="595959"/>
-              </a:solidFill>
-              <a:latin typeface="微软雅黑" panose="020B0503020204020204" charset="-122"/>
-              <a:ea typeface="微软雅黑" panose="020B0503020204020204" charset="-122"/>
-              <a:cs typeface="微软雅黑" panose="020B0503020204020204" charset="-122"/>
-            </a:endParaRPr>
           </a:p>
           <a:p>
             <a:pPr lvl="1">
@@ -17648,14 +15931,6 @@
               </a:rPr>
               <a:t>成因一：由深度加深引起的层间连乘增加，导致的输入-输出雅可比条件数 κ 增大，引起的强各向异性。</a:t>
             </a:r>
-            <a:endParaRPr sz="1400" b="0">
-              <a:solidFill>
-                <a:srgbClr val="595959"/>
-              </a:solidFill>
-              <a:latin typeface="微软雅黑" panose="020B0503020204020204" charset="-122"/>
-              <a:ea typeface="微软雅黑" panose="020B0503020204020204" charset="-122"/>
-              <a:cs typeface="微软雅黑" panose="020B0503020204020204" charset="-122"/>
-            </a:endParaRPr>
           </a:p>
           <a:p>
             <a:pPr lvl="1">
@@ -17677,14 +15952,6 @@
               </a:rPr>
               <a:t>成因二：非线性层的增加引起的恒等变换难以学习。</a:t>
             </a:r>
-            <a:endParaRPr sz="1400" b="0">
-              <a:solidFill>
-                <a:srgbClr val="595959"/>
-              </a:solidFill>
-              <a:latin typeface="微软雅黑" panose="020B0503020204020204" charset="-122"/>
-              <a:ea typeface="微软雅黑" panose="020B0503020204020204" charset="-122"/>
-              <a:cs typeface="微软雅黑" panose="020B0503020204020204" charset="-122"/>
-            </a:endParaRPr>
           </a:p>
           <a:p>
             <a:pPr lvl="1">
@@ -17706,14 +15973,6 @@
               </a:rPr>
               <a:t>在二者共同作用下，优化轨迹在高损失平台长时间滞留，训练误差下降缓慢。</a:t>
             </a:r>
-            <a:endParaRPr sz="1400" b="0">
-              <a:solidFill>
-                <a:srgbClr val="595959"/>
-              </a:solidFill>
-              <a:latin typeface="微软雅黑" panose="020B0503020204020204" charset="-122"/>
-              <a:ea typeface="微软雅黑" panose="020B0503020204020204" charset="-122"/>
-              <a:cs typeface="微软雅黑" panose="020B0503020204020204" charset="-122"/>
-            </a:endParaRPr>
           </a:p>
           <a:p>
             <a:pPr>
@@ -17735,14 +15994,6 @@
               </a:rPr>
               <a:t>残差连接原理</a:t>
             </a:r>
-            <a:endParaRPr sz="1600" b="1">
-              <a:solidFill>
-                <a:srgbClr val="1F3864"/>
-              </a:solidFill>
-              <a:latin typeface="微软雅黑" panose="020B0503020204020204" charset="-122"/>
-              <a:ea typeface="微软雅黑" panose="020B0503020204020204" charset="-122"/>
-              <a:cs typeface="微软雅黑" panose="020B0503020204020204" charset="-122"/>
-            </a:endParaRPr>
           </a:p>
           <a:p>
             <a:pPr lvl="1">
@@ -17764,14 +16015,6 @@
               </a:rPr>
               <a:t>把 y = f(x) 改为 y = f(x) + x，使得恒等映射容易学习。</a:t>
             </a:r>
-            <a:endParaRPr sz="1400" b="0">
-              <a:solidFill>
-                <a:srgbClr val="595959"/>
-              </a:solidFill>
-              <a:latin typeface="微软雅黑" panose="020B0503020204020204" charset="-122"/>
-              <a:ea typeface="微软雅黑" panose="020B0503020204020204" charset="-122"/>
-              <a:cs typeface="微软雅黑" panose="020B0503020204020204" charset="-122"/>
-            </a:endParaRPr>
           </a:p>
           <a:p>
             <a:pPr lvl="1">
@@ -17793,14 +16036,6 @@
               </a:rPr>
               <a:t>① f = 0 情况下有 y = x 的默认解。</a:t>
             </a:r>
-            <a:endParaRPr sz="1400" b="0">
-              <a:solidFill>
-                <a:srgbClr val="595959"/>
-              </a:solidFill>
-              <a:latin typeface="微软雅黑" panose="020B0503020204020204" charset="-122"/>
-              <a:ea typeface="微软雅黑" panose="020B0503020204020204" charset="-122"/>
-              <a:cs typeface="微软雅黑" panose="020B0503020204020204" charset="-122"/>
-            </a:endParaRPr>
           </a:p>
           <a:p>
             <a:pPr lvl="1">
@@ -17822,14 +16057,6 @@
               </a:rPr>
               <a:t>② 梯度反向传播过程中提供越过 f 直接向 x 传播的无衰减支路。</a:t>
             </a:r>
-            <a:endParaRPr sz="1400" b="0">
-              <a:solidFill>
-                <a:srgbClr val="595959"/>
-              </a:solidFill>
-              <a:latin typeface="微软雅黑" panose="020B0503020204020204" charset="-122"/>
-              <a:ea typeface="微软雅黑" panose="020B0503020204020204" charset="-122"/>
-              <a:cs typeface="微软雅黑" panose="020B0503020204020204" charset="-122"/>
-            </a:endParaRPr>
           </a:p>
         </p:txBody>
       </p:sp>
@@ -18157,6 +16384,7 @@
       </a:style>
     </a:lnDef>
   </a:objectDefaults>
+  <a:extraClrSchemeLst/>
   <a:extLst>
     <a:ext uri="{05A4C25C-085E-4340-85A3-A5531E510DB2}">
       <thm15:themeFamily xmlns:thm15="http://schemas.microsoft.com/office/thememl/2012/main" name="Office Theme" id="{62F939B6-93AF-4DB8-9C6B-D6C7DFDC589F}" vid="{4A3C46E8-61CC-4603-A589-7422A47A8E4A}"/>

--- a/docs/第一周汇报.pptx
+++ b/docs/第一周汇报.pptx
@@ -9954,7 +9954,7 @@
               </a:spcAft>
             </a:pPr>
             <a:r>
-              <a:rPr sz="1700" b="1">
+              <a:rPr sz="1700" b="1" dirty="0" err="1">
                 <a:solidFill>
                   <a:srgbClr val="1F3864"/>
                 </a:solidFill>
@@ -9964,6 +9964,14 @@
               </a:rPr>
               <a:t>一、学习与调研要点</a:t>
             </a:r>
+            <a:endParaRPr sz="1700" b="1" dirty="0">
+              <a:solidFill>
+                <a:srgbClr val="1F3864"/>
+              </a:solidFill>
+              <a:latin typeface="微软雅黑" panose="020B0503020204020204" charset="-122"/>
+              <a:ea typeface="微软雅黑" panose="020B0503020204020204" charset="-122"/>
+              <a:cs typeface="微软雅黑" panose="020B0503020204020204" charset="-122"/>
+            </a:endParaRPr>
           </a:p>
           <a:p>
             <a:pPr lvl="1">
@@ -9975,7 +9983,7 @@
               </a:spcAft>
             </a:pPr>
             <a:r>
-              <a:rPr sz="1500" b="0">
+              <a:rPr sz="1500" b="0" dirty="0" err="1">
                 <a:solidFill>
                   <a:srgbClr val="595959"/>
                 </a:solidFill>
@@ -9983,8 +9991,82 @@
                 <a:ea typeface="微软雅黑" panose="020B0503020204020204" charset="-122"/>
                 <a:cs typeface="微软雅黑" panose="020B0503020204020204" charset="-122"/>
               </a:rPr>
-              <a:t>卷积变体：标准卷积 / 深度可分离卷积 / 空洞卷积 / DCN，以及感受野递推公式</a:t>
-            </a:r>
+              <a:t>卷积变体：标准卷积</a:t>
+            </a:r>
+            <a:r>
+              <a:rPr sz="1500" b="0" dirty="0">
+                <a:solidFill>
+                  <a:srgbClr val="595959"/>
+                </a:solidFill>
+                <a:latin typeface="微软雅黑" panose="020B0503020204020204" charset="-122"/>
+                <a:ea typeface="微软雅黑" panose="020B0503020204020204" charset="-122"/>
+                <a:cs typeface="微软雅黑" panose="020B0503020204020204" charset="-122"/>
+              </a:rPr>
+              <a:t> / </a:t>
+            </a:r>
+            <a:r>
+              <a:rPr sz="1500" b="0" dirty="0" err="1">
+                <a:solidFill>
+                  <a:srgbClr val="595959"/>
+                </a:solidFill>
+                <a:latin typeface="微软雅黑" panose="020B0503020204020204" charset="-122"/>
+                <a:ea typeface="微软雅黑" panose="020B0503020204020204" charset="-122"/>
+                <a:cs typeface="微软雅黑" panose="020B0503020204020204" charset="-122"/>
+              </a:rPr>
+              <a:t>深度可分离卷积</a:t>
+            </a:r>
+            <a:r>
+              <a:rPr sz="1500" b="0" dirty="0">
+                <a:solidFill>
+                  <a:srgbClr val="595959"/>
+                </a:solidFill>
+                <a:latin typeface="微软雅黑" panose="020B0503020204020204" charset="-122"/>
+                <a:ea typeface="微软雅黑" panose="020B0503020204020204" charset="-122"/>
+                <a:cs typeface="微软雅黑" panose="020B0503020204020204" charset="-122"/>
+              </a:rPr>
+              <a:t> / </a:t>
+            </a:r>
+            <a:r>
+              <a:rPr sz="1500" b="0" dirty="0" err="1">
+                <a:solidFill>
+                  <a:srgbClr val="595959"/>
+                </a:solidFill>
+                <a:latin typeface="微软雅黑" panose="020B0503020204020204" charset="-122"/>
+                <a:ea typeface="微软雅黑" panose="020B0503020204020204" charset="-122"/>
+                <a:cs typeface="微软雅黑" panose="020B0503020204020204" charset="-122"/>
+              </a:rPr>
+              <a:t>空洞卷积</a:t>
+            </a:r>
+            <a:r>
+              <a:rPr sz="1500" b="0" dirty="0">
+                <a:solidFill>
+                  <a:srgbClr val="595959"/>
+                </a:solidFill>
+                <a:latin typeface="微软雅黑" panose="020B0503020204020204" charset="-122"/>
+                <a:ea typeface="微软雅黑" panose="020B0503020204020204" charset="-122"/>
+                <a:cs typeface="微软雅黑" panose="020B0503020204020204" charset="-122"/>
+              </a:rPr>
+              <a:t> / </a:t>
+            </a:r>
+            <a:r>
+              <a:rPr sz="1500" b="0" dirty="0" err="1">
+                <a:solidFill>
+                  <a:srgbClr val="595959"/>
+                </a:solidFill>
+                <a:latin typeface="微软雅黑" panose="020B0503020204020204" charset="-122"/>
+                <a:ea typeface="微软雅黑" panose="020B0503020204020204" charset="-122"/>
+                <a:cs typeface="微软雅黑" panose="020B0503020204020204" charset="-122"/>
+              </a:rPr>
+              <a:t>DCN，以及感受野递推公式</a:t>
+            </a:r>
+            <a:endParaRPr sz="1500" b="0" dirty="0">
+              <a:solidFill>
+                <a:srgbClr val="595959"/>
+              </a:solidFill>
+              <a:latin typeface="微软雅黑" panose="020B0503020204020204" charset="-122"/>
+              <a:ea typeface="微软雅黑" panose="020B0503020204020204" charset="-122"/>
+              <a:cs typeface="微软雅黑" panose="020B0503020204020204" charset="-122"/>
+            </a:endParaRPr>
           </a:p>
           <a:p>
             <a:pPr lvl="1">
@@ -9996,7 +10078,7 @@
               </a:spcAft>
             </a:pPr>
             <a:r>
-              <a:rPr sz="1500" b="0">
+              <a:rPr sz="1500" b="0" dirty="0" err="1">
                 <a:solidFill>
                   <a:srgbClr val="595959"/>
                 </a:solidFill>
@@ -10004,8 +10086,38 @@
                 <a:ea typeface="微软雅黑" panose="020B0503020204020204" charset="-122"/>
                 <a:cs typeface="微软雅黑" panose="020B0503020204020204" charset="-122"/>
               </a:rPr>
-              <a:t>激活函数：ReLU / GELU / SiLU</a:t>
-            </a:r>
+              <a:t>激活函数：ReLU</a:t>
+            </a:r>
+            <a:r>
+              <a:rPr sz="1500" b="0" dirty="0">
+                <a:solidFill>
+                  <a:srgbClr val="595959"/>
+                </a:solidFill>
+                <a:latin typeface="微软雅黑" panose="020B0503020204020204" charset="-122"/>
+                <a:ea typeface="微软雅黑" panose="020B0503020204020204" charset="-122"/>
+                <a:cs typeface="微软雅黑" panose="020B0503020204020204" charset="-122"/>
+              </a:rPr>
+              <a:t> / GELU / </a:t>
+            </a:r>
+            <a:r>
+              <a:rPr sz="1500" b="0" dirty="0" err="1">
+                <a:solidFill>
+                  <a:srgbClr val="595959"/>
+                </a:solidFill>
+                <a:latin typeface="微软雅黑" panose="020B0503020204020204" charset="-122"/>
+                <a:ea typeface="微软雅黑" panose="020B0503020204020204" charset="-122"/>
+                <a:cs typeface="微软雅黑" panose="020B0503020204020204" charset="-122"/>
+              </a:rPr>
+              <a:t>SiLU</a:t>
+            </a:r>
+            <a:endParaRPr sz="1500" b="0" dirty="0">
+              <a:solidFill>
+                <a:srgbClr val="595959"/>
+              </a:solidFill>
+              <a:latin typeface="微软雅黑" panose="020B0503020204020204" charset="-122"/>
+              <a:ea typeface="微软雅黑" panose="020B0503020204020204" charset="-122"/>
+              <a:cs typeface="微软雅黑" panose="020B0503020204020204" charset="-122"/>
+            </a:endParaRPr>
           </a:p>
           <a:p>
             <a:pPr lvl="1">
@@ -10017,7 +10129,7 @@
               </a:spcAft>
             </a:pPr>
             <a:r>
-              <a:rPr sz="1500" b="0">
+              <a:rPr sz="1500" b="0" dirty="0" err="1">
                 <a:solidFill>
                   <a:srgbClr val="595959"/>
                 </a:solidFill>
@@ -10025,7 +10137,18 @@
                 <a:ea typeface="微软雅黑" panose="020B0503020204020204" charset="-122"/>
                 <a:cs typeface="微软雅黑" panose="020B0503020204020204" charset="-122"/>
               </a:rPr>
-              <a:t>损失函数：Cross-Entropy / Binary-Cross-Entropy / Label Smoothing / Focal Loss</a:t>
+              <a:t>损失函数：Cross-Entropy</a:t>
+            </a:r>
+            <a:r>
+              <a:rPr sz="1500" b="0" dirty="0">
+                <a:solidFill>
+                  <a:srgbClr val="595959"/>
+                </a:solidFill>
+                <a:latin typeface="微软雅黑" panose="020B0503020204020204" charset="-122"/>
+                <a:ea typeface="微软雅黑" panose="020B0503020204020204" charset="-122"/>
+                <a:cs typeface="微软雅黑" panose="020B0503020204020204" charset="-122"/>
+              </a:rPr>
+              <a:t> / Binary-Cross-Entropy / Label Smoothing / Focal Loss</a:t>
             </a:r>
           </a:p>
           <a:p>
@@ -10038,7 +10161,7 @@
               </a:spcAft>
             </a:pPr>
             <a:r>
-              <a:rPr sz="1500" b="0">
+              <a:rPr sz="1500" b="0" dirty="0" err="1">
                 <a:solidFill>
                   <a:srgbClr val="595959"/>
                 </a:solidFill>
@@ -10046,8 +10169,82 @@
                 <a:ea typeface="微软雅黑" panose="020B0503020204020204" charset="-122"/>
                 <a:cs typeface="微软雅黑" panose="020B0503020204020204" charset="-122"/>
               </a:rPr>
-              <a:t>模型架构演进：ResNet → MobileNetV3 / ShuffleNetV2 → ViT / Swin / ConvNeXt</a:t>
-            </a:r>
+              <a:t>模型架构演进：ResNet</a:t>
+            </a:r>
+            <a:r>
+              <a:rPr sz="1500" b="0" dirty="0">
+                <a:solidFill>
+                  <a:srgbClr val="595959"/>
+                </a:solidFill>
+                <a:latin typeface="微软雅黑" panose="020B0503020204020204" charset="-122"/>
+                <a:ea typeface="微软雅黑" panose="020B0503020204020204" charset="-122"/>
+                <a:cs typeface="微软雅黑" panose="020B0503020204020204" charset="-122"/>
+              </a:rPr>
+              <a:t> → MobileNetV3 / ShuffleNetV2 → </a:t>
+            </a:r>
+            <a:r>
+              <a:rPr sz="1500" b="0" dirty="0" err="1">
+                <a:solidFill>
+                  <a:srgbClr val="595959"/>
+                </a:solidFill>
+                <a:latin typeface="微软雅黑" panose="020B0503020204020204" charset="-122"/>
+                <a:ea typeface="微软雅黑" panose="020B0503020204020204" charset="-122"/>
+                <a:cs typeface="微软雅黑" panose="020B0503020204020204" charset="-122"/>
+              </a:rPr>
+              <a:t>ViT</a:t>
+            </a:r>
+            <a:r>
+              <a:rPr sz="1500" b="0" dirty="0">
+                <a:solidFill>
+                  <a:srgbClr val="595959"/>
+                </a:solidFill>
+                <a:latin typeface="微软雅黑" panose="020B0503020204020204" charset="-122"/>
+                <a:ea typeface="微软雅黑" panose="020B0503020204020204" charset="-122"/>
+                <a:cs typeface="微软雅黑" panose="020B0503020204020204" charset="-122"/>
+              </a:rPr>
+              <a:t> / </a:t>
+            </a:r>
+            <a:r>
+              <a:rPr sz="1500" b="0" dirty="0" err="1">
+                <a:solidFill>
+                  <a:srgbClr val="595959"/>
+                </a:solidFill>
+                <a:latin typeface="微软雅黑" panose="020B0503020204020204" charset="-122"/>
+                <a:ea typeface="微软雅黑" panose="020B0503020204020204" charset="-122"/>
+                <a:cs typeface="微软雅黑" panose="020B0503020204020204" charset="-122"/>
+              </a:rPr>
+              <a:t>Swin</a:t>
+            </a:r>
+            <a:r>
+              <a:rPr sz="1500" b="0" dirty="0">
+                <a:solidFill>
+                  <a:srgbClr val="595959"/>
+                </a:solidFill>
+                <a:latin typeface="微软雅黑" panose="020B0503020204020204" charset="-122"/>
+                <a:ea typeface="微软雅黑" panose="020B0503020204020204" charset="-122"/>
+                <a:cs typeface="微软雅黑" panose="020B0503020204020204" charset="-122"/>
+              </a:rPr>
+              <a:t> / </a:t>
+            </a:r>
+            <a:r>
+              <a:rPr sz="1500" b="0" dirty="0" err="1">
+                <a:solidFill>
+                  <a:srgbClr val="595959"/>
+                </a:solidFill>
+                <a:latin typeface="微软雅黑" panose="020B0503020204020204" charset="-122"/>
+                <a:ea typeface="微软雅黑" panose="020B0503020204020204" charset="-122"/>
+                <a:cs typeface="微软雅黑" panose="020B0503020204020204" charset="-122"/>
+              </a:rPr>
+              <a:t>ConvNeXt</a:t>
+            </a:r>
+            <a:endParaRPr sz="1500" b="0" dirty="0">
+              <a:solidFill>
+                <a:srgbClr val="595959"/>
+              </a:solidFill>
+              <a:latin typeface="微软雅黑" panose="020B0503020204020204" charset="-122"/>
+              <a:ea typeface="微软雅黑" panose="020B0503020204020204" charset="-122"/>
+              <a:cs typeface="微软雅黑" panose="020B0503020204020204" charset="-122"/>
+            </a:endParaRPr>
           </a:p>
           <a:p>
             <a:pPr>
@@ -10059,7 +10256,7 @@
               </a:spcAft>
             </a:pPr>
             <a:r>
-              <a:rPr sz="1700" b="1">
+              <a:rPr sz="1700" b="1" dirty="0" err="1">
                 <a:solidFill>
                   <a:srgbClr val="1F3864"/>
                 </a:solidFill>
@@ -10069,6 +10266,14 @@
               </a:rPr>
               <a:t>二、动手实验</a:t>
             </a:r>
+            <a:endParaRPr sz="1700" b="1" dirty="0">
+              <a:solidFill>
+                <a:srgbClr val="1F3864"/>
+              </a:solidFill>
+              <a:latin typeface="微软雅黑" panose="020B0503020204020204" charset="-122"/>
+              <a:ea typeface="微软雅黑" panose="020B0503020204020204" charset="-122"/>
+              <a:cs typeface="微软雅黑" panose="020B0503020204020204" charset="-122"/>
+            </a:endParaRPr>
           </a:p>
           <a:p>
             <a:pPr lvl="1">
@@ -10080,7 +10285,7 @@
               </a:spcAft>
             </a:pPr>
             <a:r>
-              <a:rPr sz="1500" b="0">
+              <a:rPr sz="1500" b="0" dirty="0" err="1">
                 <a:solidFill>
                   <a:srgbClr val="595959"/>
                 </a:solidFill>
@@ -10090,6 +10295,14 @@
               </a:rPr>
               <a:t>统一训练框架与实验设置</a:t>
             </a:r>
+            <a:endParaRPr sz="1500" b="0" dirty="0">
+              <a:solidFill>
+                <a:srgbClr val="595959"/>
+              </a:solidFill>
+              <a:latin typeface="微软雅黑" panose="020B0503020204020204" charset="-122"/>
+              <a:ea typeface="微软雅黑" panose="020B0503020204020204" charset="-122"/>
+              <a:cs typeface="微软雅黑" panose="020B0503020204020204" charset="-122"/>
+            </a:endParaRPr>
           </a:p>
           <a:p>
             <a:pPr lvl="1">
@@ -10101,7 +10314,7 @@
               </a:spcAft>
             </a:pPr>
             <a:r>
-              <a:rPr sz="1500" b="0">
+              <a:rPr sz="1500" b="0" dirty="0" err="1">
                 <a:solidFill>
                   <a:srgbClr val="595959"/>
                 </a:solidFill>
@@ -10111,6 +10324,14 @@
               </a:rPr>
               <a:t>基准性能对比：精度、参数量、MACs、推理延迟</a:t>
             </a:r>
+            <a:endParaRPr sz="1500" b="0" dirty="0">
+              <a:solidFill>
+                <a:srgbClr val="595959"/>
+              </a:solidFill>
+              <a:latin typeface="微软雅黑" panose="020B0503020204020204" charset="-122"/>
+              <a:ea typeface="微软雅黑" panose="020B0503020204020204" charset="-122"/>
+              <a:cs typeface="微软雅黑" panose="020B0503020204020204" charset="-122"/>
+            </a:endParaRPr>
           </a:p>
           <a:p>
             <a:pPr lvl="1">
@@ -10122,7 +10343,7 @@
               </a:spcAft>
             </a:pPr>
             <a:r>
-              <a:rPr sz="1500" b="0">
+              <a:rPr sz="1500" b="0" dirty="0" err="1">
                 <a:solidFill>
                   <a:srgbClr val="595959"/>
                 </a:solidFill>
@@ -10130,8 +10351,67 @@
                 <a:ea typeface="微软雅黑" panose="020B0503020204020204" charset="-122"/>
                 <a:cs typeface="微软雅黑" panose="020B0503020204020204" charset="-122"/>
               </a:rPr>
-              <a:t>消融实验：Cross-Entropy vs Label Smoothing（α=0.1）</a:t>
-            </a:r>
+              <a:t>消融实验：Cross-Entropy</a:t>
+            </a:r>
+            <a:r>
+              <a:rPr sz="1500" b="0" dirty="0">
+                <a:solidFill>
+                  <a:srgbClr val="595959"/>
+                </a:solidFill>
+                <a:latin typeface="微软雅黑" panose="020B0503020204020204" charset="-122"/>
+                <a:ea typeface="微软雅黑" panose="020B0503020204020204" charset="-122"/>
+                <a:cs typeface="微软雅黑" panose="020B0503020204020204" charset="-122"/>
+              </a:rPr>
+              <a:t> vs Label Smoothing（α=0.1</a:t>
+            </a:r>
+            <a:r>
+              <a:rPr sz="1500" b="0" dirty="0" smtClean="0">
+                <a:solidFill>
+                  <a:srgbClr val="595959"/>
+                </a:solidFill>
+                <a:latin typeface="微软雅黑" panose="020B0503020204020204" charset="-122"/>
+                <a:ea typeface="微软雅黑" panose="020B0503020204020204" charset="-122"/>
+                <a:cs typeface="微软雅黑" panose="020B0503020204020204" charset="-122"/>
+              </a:rPr>
+              <a:t>）</a:t>
+            </a:r>
+            <a:endParaRPr lang="en-US" sz="1500" b="0" dirty="0" smtClean="0">
+              <a:solidFill>
+                <a:srgbClr val="595959"/>
+              </a:solidFill>
+              <a:latin typeface="微软雅黑" panose="020B0503020204020204" charset="-122"/>
+              <a:ea typeface="微软雅黑" panose="020B0503020204020204" charset="-122"/>
+              <a:cs typeface="微软雅黑" panose="020B0503020204020204" charset="-122"/>
+            </a:endParaRPr>
+          </a:p>
+          <a:p>
+            <a:pPr lvl="1">
+              <a:lnSpc>
+                <a:spcPct val="118000"/>
+              </a:lnSpc>
+              <a:spcAft>
+                <a:spcPts val="800"/>
+              </a:spcAft>
+            </a:pPr>
+            <a:r>
+              <a:rPr lang="en-US" sz="1500" dirty="0">
+                <a:solidFill>
+                  <a:srgbClr val="595959"/>
+                </a:solidFill>
+                <a:latin typeface="微软雅黑" panose="020B0503020204020204" charset="-122"/>
+                <a:ea typeface="微软雅黑" panose="020B0503020204020204" charset="-122"/>
+                <a:cs typeface="微软雅黑" panose="020B0503020204020204" charset="-122"/>
+              </a:rPr>
+              <a:t>Bad Case </a:t>
+            </a:r>
+            <a:endParaRPr sz="1500" b="0" dirty="0">
+              <a:solidFill>
+                <a:srgbClr val="595959"/>
+              </a:solidFill>
+              <a:latin typeface="微软雅黑" panose="020B0503020204020204" charset="-122"/>
+              <a:ea typeface="微软雅黑" panose="020B0503020204020204" charset="-122"/>
+              <a:cs typeface="微软雅黑" panose="020B0503020204020204" charset="-122"/>
+            </a:endParaRPr>
           </a:p>
           <a:p>
             <a:pPr>
@@ -10143,7 +10423,7 @@
               </a:spcAft>
             </a:pPr>
             <a:r>
-              <a:rPr sz="1700" b="1">
+              <a:rPr sz="1700" b="1" dirty="0">
                 <a:solidFill>
                   <a:srgbClr val="1F3864"/>
                 </a:solidFill>
@@ -10151,8 +10431,38 @@
                 <a:ea typeface="微软雅黑" panose="020B0503020204020204" charset="-122"/>
                 <a:cs typeface="微软雅黑" panose="020B0503020204020204" charset="-122"/>
               </a:rPr>
-              <a:t>三、Bad Case 与时间分配</a:t>
-            </a:r>
+              <a:t>三</a:t>
+            </a:r>
+            <a:r>
+              <a:rPr sz="1700" b="1" dirty="0" smtClean="0">
+                <a:solidFill>
+                  <a:srgbClr val="1F3864"/>
+                </a:solidFill>
+                <a:latin typeface="微软雅黑" panose="020B0503020204020204" charset="-122"/>
+                <a:ea typeface="微软雅黑" panose="020B0503020204020204" charset="-122"/>
+                <a:cs typeface="微软雅黑" panose="020B0503020204020204" charset="-122"/>
+              </a:rPr>
+              <a:t>、 </a:t>
+            </a:r>
+            <a:r>
+              <a:rPr sz="1700" b="1" dirty="0" err="1" smtClean="0">
+                <a:solidFill>
+                  <a:srgbClr val="1F3864"/>
+                </a:solidFill>
+                <a:latin typeface="微软雅黑" panose="020B0503020204020204" charset="-122"/>
+                <a:ea typeface="微软雅黑" panose="020B0503020204020204" charset="-122"/>
+                <a:cs typeface="微软雅黑" panose="020B0503020204020204" charset="-122"/>
+              </a:rPr>
+              <a:t>时间分配</a:t>
+            </a:r>
+            <a:endParaRPr sz="1700" b="1" dirty="0">
+              <a:solidFill>
+                <a:srgbClr val="1F3864"/>
+              </a:solidFill>
+              <a:latin typeface="微软雅黑" panose="020B0503020204020204" charset="-122"/>
+              <a:ea typeface="微软雅黑" panose="020B0503020204020204" charset="-122"/>
+              <a:cs typeface="微软雅黑" panose="020B0503020204020204" charset="-122"/>
+            </a:endParaRPr>
           </a:p>
           <a:p>
             <a:pPr lvl="1">
@@ -10164,7 +10474,7 @@
               </a:spcAft>
             </a:pPr>
             <a:r>
-              <a:rPr sz="1500" b="0">
+              <a:rPr sz="1500" b="0" dirty="0" err="1" smtClean="0">
                 <a:solidFill>
                   <a:srgbClr val="595959"/>
                 </a:solidFill>
@@ -10172,8 +10482,16 @@
                 <a:ea typeface="微软雅黑" panose="020B0503020204020204" charset="-122"/>
                 <a:cs typeface="微软雅黑" panose="020B0503020204020204" charset="-122"/>
               </a:rPr>
-              <a:t>典型失败案例；实验与学习两条线的时间投入</a:t>
-            </a:r>
+              <a:t>实验与学习两条线的时间投入</a:t>
+            </a:r>
+            <a:endParaRPr sz="1500" b="0" dirty="0">
+              <a:solidFill>
+                <a:srgbClr val="595959"/>
+              </a:solidFill>
+              <a:latin typeface="微软雅黑" panose="020B0503020204020204" charset="-122"/>
+              <a:ea typeface="微软雅黑" panose="020B0503020204020204" charset="-122"/>
+              <a:cs typeface="微软雅黑" panose="020B0503020204020204" charset="-122"/>
+            </a:endParaRPr>
           </a:p>
         </p:txBody>
       </p:sp>
@@ -11019,8 +11337,8 @@
         </p:blipFill>
         <p:spPr>
           <a:xfrm>
-            <a:off x="640080" y="1691640"/>
-            <a:ext cx="4206240" cy="3154680"/>
+            <a:off x="711101" y="1691640"/>
+            <a:ext cx="3745489" cy="2809117"/>
           </a:xfrm>
           <a:prstGeom prst="rect">
             <a:avLst/>
@@ -11409,7 +11727,7 @@
         <p:spPr>
           <a:xfrm>
             <a:off x="5120640" y="3749039"/>
-            <a:ext cx="6583680" cy="2743200"/>
+            <a:ext cx="6583680" cy="909626"/>
           </a:xfrm>
           <a:prstGeom prst="rect">
             <a:avLst/>
@@ -11431,7 +11749,7 @@
               </a:spcAft>
             </a:pPr>
             <a:r>
-              <a:rPr sz="1400" b="1">
+              <a:rPr sz="1400" b="1" dirty="0" err="1">
                 <a:solidFill>
                   <a:srgbClr val="1F3864"/>
                 </a:solidFill>
@@ -11439,7 +11757,18 @@
                 <a:ea typeface="微软雅黑" panose="020B0503020204020204" charset="-122"/>
                 <a:cs typeface="微软雅黑" panose="020B0503020204020204" charset="-122"/>
               </a:rPr>
-              <a:t>三个模型独立地判成同一个错误类别 n04515003</a:t>
+              <a:t>三个模型独立地判成同一个错误类别</a:t>
+            </a:r>
+            <a:r>
+              <a:rPr sz="1400" b="1" dirty="0">
+                <a:solidFill>
+                  <a:srgbClr val="1F3864"/>
+                </a:solidFill>
+                <a:latin typeface="微软雅黑" panose="020B0503020204020204" charset="-122"/>
+                <a:ea typeface="微软雅黑" panose="020B0503020204020204" charset="-122"/>
+                <a:cs typeface="微软雅黑" panose="020B0503020204020204" charset="-122"/>
+              </a:rPr>
+              <a:t> n04515003</a:t>
             </a:r>
           </a:p>
           <a:p>
@@ -11452,7 +11781,7 @@
               </a:spcAft>
             </a:pPr>
             <a:r>
-              <a:rPr sz="1400" b="0">
+              <a:rPr sz="1400" b="0" dirty="0" err="1">
                 <a:solidFill>
                   <a:srgbClr val="1F3864"/>
                 </a:solidFill>
@@ -11460,10 +11789,10 @@
                 <a:ea typeface="微软雅黑" panose="020B0503020204020204" charset="-122"/>
                 <a:cs typeface="微软雅黑" panose="020B0503020204020204" charset="-122"/>
               </a:rPr>
-              <a:t>技术归因：鸟只占画面很小一块，而背景中的喂食器尺寸大、纹理显著</a:t>
-            </a:r>
-            <a:r>
-              <a:rPr lang="en-US" sz="1400" b="0">
+              <a:t>技术归因：鸟只占画面很小一块，</a:t>
+            </a:r>
+            <a:r>
+              <a:rPr sz="1400" b="0" dirty="0" err="1" smtClean="0">
                 <a:solidFill>
                   <a:srgbClr val="1F3864"/>
                 </a:solidFill>
@@ -11471,10 +11800,54 @@
                 <a:ea typeface="微软雅黑" panose="020B0503020204020204" charset="-122"/>
                 <a:cs typeface="微软雅黑" panose="020B0503020204020204" charset="-122"/>
               </a:rPr>
+              <a:t>而背景中的</a:t>
+            </a:r>
+            <a:r>
+              <a:rPr lang="zh-CN" altLang="en-US" sz="1400" b="0" dirty="0" smtClean="0">
+                <a:solidFill>
+                  <a:srgbClr val="1F3864"/>
+                </a:solidFill>
+                <a:latin typeface="微软雅黑" panose="020B0503020204020204" charset="-122"/>
+                <a:ea typeface="微软雅黑" panose="020B0503020204020204" charset="-122"/>
+                <a:cs typeface="微软雅黑" panose="020B0503020204020204" charset="-122"/>
+              </a:rPr>
+              <a:t>木头结构</a:t>
+            </a:r>
+            <a:r>
+              <a:rPr sz="1400" b="0" dirty="0" err="1" smtClean="0">
+                <a:solidFill>
+                  <a:srgbClr val="1F3864"/>
+                </a:solidFill>
+                <a:latin typeface="微软雅黑" panose="020B0503020204020204" charset="-122"/>
+                <a:ea typeface="微软雅黑" panose="020B0503020204020204" charset="-122"/>
+                <a:cs typeface="微软雅黑" panose="020B0503020204020204" charset="-122"/>
+              </a:rPr>
+              <a:t>尺寸大</a:t>
+            </a:r>
+            <a:r>
+              <a:rPr sz="1400" b="0" dirty="0" err="1">
+                <a:solidFill>
+                  <a:srgbClr val="1F3864"/>
+                </a:solidFill>
+                <a:latin typeface="微软雅黑" panose="020B0503020204020204" charset="-122"/>
+                <a:ea typeface="微软雅黑" panose="020B0503020204020204" charset="-122"/>
+                <a:cs typeface="微软雅黑" panose="020B0503020204020204" charset="-122"/>
+              </a:rPr>
+              <a:t>、纹理显著</a:t>
+            </a:r>
+            <a:r>
+              <a:rPr lang="en-US" sz="1400" b="0" dirty="0">
+                <a:solidFill>
+                  <a:srgbClr val="1F3864"/>
+                </a:solidFill>
+                <a:latin typeface="微软雅黑" panose="020B0503020204020204" charset="-122"/>
+                <a:ea typeface="微软雅黑" panose="020B0503020204020204" charset="-122"/>
+                <a:cs typeface="微软雅黑" panose="020B0503020204020204" charset="-122"/>
+              </a:rPr>
               <a:t>,</a:t>
             </a:r>
             <a:r>
-              <a:rPr lang="zh-CN" altLang="en-US" sz="1400" b="0">
+              <a:rPr lang="zh-CN" altLang="en-US" sz="1400" b="0" dirty="0">
                 <a:solidFill>
                   <a:srgbClr val="1F3864"/>
                 </a:solidFill>
@@ -11485,7 +11858,7 @@
               <a:t>模型</a:t>
             </a:r>
             <a:r>
-              <a:rPr sz="1400" b="0">
+              <a:rPr sz="1400" b="0" dirty="0" err="1">
                 <a:solidFill>
                   <a:srgbClr val="1F3864"/>
                 </a:solidFill>
@@ -11495,6 +11868,14 @@
               </a:rPr>
               <a:t>被大背景目标主导</a:t>
             </a:r>
+            <a:endParaRPr sz="1400" b="0" dirty="0">
+              <a:solidFill>
+                <a:srgbClr val="1F3864"/>
+              </a:solidFill>
+              <a:latin typeface="微软雅黑" panose="020B0503020204020204" charset="-122"/>
+              <a:ea typeface="微软雅黑" panose="020B0503020204020204" charset="-122"/>
+              <a:cs typeface="微软雅黑" panose="020B0503020204020204" charset="-122"/>
+            </a:endParaRPr>
           </a:p>
           <a:p>
             <a:pPr>
@@ -11505,7 +11886,159 @@
                 <a:spcPts val="600"/>
               </a:spcAft>
             </a:pPr>
-            <a:endParaRPr sz="1400" b="0">
+            <a:endParaRPr sz="1400" b="0" dirty="0">
+              <a:solidFill>
+                <a:srgbClr val="1F3864"/>
+              </a:solidFill>
+              <a:latin typeface="微软雅黑" panose="020B0503020204020204" charset="-122"/>
+              <a:ea typeface="微软雅黑" panose="020B0503020204020204" charset="-122"/>
+              <a:cs typeface="微软雅黑" panose="020B0503020204020204" charset="-122"/>
+            </a:endParaRPr>
+          </a:p>
+        </p:txBody>
+      </p:sp>
+      <p:pic>
+        <p:nvPicPr>
+          <p:cNvPr id="9" name="图片 8"/>
+          <p:cNvPicPr>
+            <a:picLocks noChangeAspect="1"/>
+          </p:cNvPicPr>
+          <p:nvPr/>
+        </p:nvPicPr>
+        <p:blipFill>
+          <a:blip r:embed="rId3">
+            <a:extLst>
+              <a:ext uri="{28A0092B-C50C-407E-A947-70E740481C1C}">
+                <a14:useLocalDpi xmlns:a14="http://schemas.microsoft.com/office/drawing/2010/main" val="0"/>
+              </a:ext>
+            </a:extLst>
+          </a:blip>
+          <a:stretch>
+            <a:fillRect/>
+          </a:stretch>
+        </p:blipFill>
+        <p:spPr>
+          <a:xfrm>
+            <a:off x="711101" y="4658665"/>
+            <a:ext cx="2632969" cy="1974727"/>
+          </a:xfrm>
+          <a:prstGeom prst="rect">
+            <a:avLst/>
+          </a:prstGeom>
+        </p:spPr>
+      </p:pic>
+      <p:pic>
+        <p:nvPicPr>
+          <p:cNvPr id="10" name="图片 9"/>
+          <p:cNvPicPr>
+            <a:picLocks noChangeAspect="1"/>
+          </p:cNvPicPr>
+          <p:nvPr/>
+        </p:nvPicPr>
+        <p:blipFill>
+          <a:blip r:embed="rId4">
+            <a:extLst>
+              <a:ext uri="{28A0092B-C50C-407E-A947-70E740481C1C}">
+                <a14:useLocalDpi xmlns:a14="http://schemas.microsoft.com/office/drawing/2010/main" val="0"/>
+              </a:ext>
+            </a:extLst>
+          </a:blip>
+          <a:stretch>
+            <a:fillRect/>
+          </a:stretch>
+        </p:blipFill>
+        <p:spPr>
+          <a:xfrm>
+            <a:off x="3548063" y="4658665"/>
+            <a:ext cx="2685098" cy="2007550"/>
+          </a:xfrm>
+          <a:prstGeom prst="rect">
+            <a:avLst/>
+          </a:prstGeom>
+        </p:spPr>
+      </p:pic>
+      <p:sp>
+        <p:nvSpPr>
+          <p:cNvPr id="11" name="TextBox 7"/>
+          <p:cNvSpPr txBox="1"/>
+          <p:nvPr/>
+        </p:nvSpPr>
+        <p:spPr>
+          <a:xfrm>
+            <a:off x="6361368" y="5091047"/>
+            <a:ext cx="5108582" cy="909626"/>
+          </a:xfrm>
+          <a:prstGeom prst="rect">
+            <a:avLst/>
+          </a:prstGeom>
+          <a:noFill/>
+        </p:spPr>
+        <p:txBody>
+          <a:bodyPr wrap="square">
+            <a:noAutofit/>
+          </a:bodyPr>
+          <a:lstStyle/>
+          <a:p>
+            <a:pPr>
+              <a:lnSpc>
+                <a:spcPct val="118000"/>
+              </a:lnSpc>
+              <a:spcAft>
+                <a:spcPts val="600"/>
+              </a:spcAft>
+            </a:pPr>
+            <a:r>
+              <a:rPr lang="en-US" sz="1400" b="1" dirty="0" smtClean="0">
+                <a:solidFill>
+                  <a:srgbClr val="1F3864"/>
+                </a:solidFill>
+                <a:latin typeface="微软雅黑" panose="020B0503020204020204" charset="-122"/>
+                <a:ea typeface="微软雅黑" panose="020B0503020204020204" charset="-122"/>
+                <a:cs typeface="微软雅黑" panose="020B0503020204020204" charset="-122"/>
+              </a:rPr>
+              <a:t>N</a:t>
+            </a:r>
+            <a:r>
+              <a:rPr sz="1400" b="1" dirty="0" smtClean="0">
+                <a:solidFill>
+                  <a:srgbClr val="1F3864"/>
+                </a:solidFill>
+                <a:latin typeface="微软雅黑" panose="020B0503020204020204" charset="-122"/>
+                <a:ea typeface="微软雅黑" panose="020B0503020204020204" charset="-122"/>
+                <a:cs typeface="微软雅黑" panose="020B0503020204020204" charset="-122"/>
+              </a:rPr>
+              <a:t>04515003</a:t>
+            </a:r>
+            <a:r>
+              <a:rPr lang="zh-CN" altLang="en-US" sz="1400" b="1" dirty="0" smtClean="0">
+                <a:solidFill>
+                  <a:srgbClr val="1F3864"/>
+                </a:solidFill>
+                <a:latin typeface="微软雅黑" panose="020B0503020204020204" charset="-122"/>
+                <a:ea typeface="微软雅黑" panose="020B0503020204020204" charset="-122"/>
+                <a:cs typeface="微软雅黑" panose="020B0503020204020204" charset="-122"/>
+              </a:rPr>
+              <a:t>样例：类别是钢琴</a:t>
+            </a:r>
+            <a:endParaRPr sz="1400" b="1" dirty="0">
+              <a:solidFill>
+                <a:srgbClr val="1F3864"/>
+              </a:solidFill>
+              <a:latin typeface="微软雅黑" panose="020B0503020204020204" charset="-122"/>
+              <a:ea typeface="微软雅黑" panose="020B0503020204020204" charset="-122"/>
+              <a:cs typeface="微软雅黑" panose="020B0503020204020204" charset="-122"/>
+            </a:endParaRPr>
+          </a:p>
+          <a:p>
+            <a:pPr>
+              <a:lnSpc>
+                <a:spcPct val="118000"/>
+              </a:lnSpc>
+              <a:spcAft>
+                <a:spcPts val="600"/>
+              </a:spcAft>
+            </a:pPr>
+            <a:endParaRPr sz="1400" b="0" dirty="0">
               <a:solidFill>
                 <a:srgbClr val="1F3864"/>
               </a:solidFill>

--- a/docs/第一周汇报.pptx
+++ b/docs/第一周汇报.pptx
@@ -28,6 +28,7 @@
     <p:sldId id="276" r:id="rId22"/>
     <p:sldId id="277" r:id="rId23"/>
     <p:sldId id="278" r:id="rId24"/>
+    <p:sldId id="279" r:id="rId25"/>
   </p:sldIdLst>
   <p:sldSz cx="12192000" cy="6858000"/>
   <p:notesSz cx="6858000" cy="9144000"/>
@@ -8937,7 +8938,7 @@
         </p:nvGraphicFramePr>
         <p:xfrm>
           <a:off x="457200" y="1645920"/>
-          <a:ext cx="11292837" cy="4114800"/>
+          <a:ext cx="11292837" cy="3600450"/>
         </p:xfrm>
         <a:graphic>
           <a:graphicData uri="http://schemas.openxmlformats.org/drawingml/2006/table">
@@ -10483,6 +10484,17 @@
                 <a:cs typeface="微软雅黑" panose="020B0503020204020204" charset="-122"/>
               </a:rPr>
               <a:t>实验与学习两条线的时间投入</a:t>
+            </a:r>
+            <a:r>
+              <a:rPr lang="zh-CN" altLang="en-US" sz="1500" b="0" dirty="0" smtClean="0">
+                <a:solidFill>
+                  <a:srgbClr val="595959"/>
+                </a:solidFill>
+                <a:latin typeface="微软雅黑" panose="020B0503020204020204" charset="-122"/>
+                <a:ea typeface="微软雅黑" panose="020B0503020204020204" charset="-122"/>
+                <a:cs typeface="微软雅黑" panose="020B0503020204020204" charset="-122"/>
+              </a:rPr>
+              <a:t>，下周计划</a:t>
             </a:r>
             <a:endParaRPr sz="1500" b="0" dirty="0">
               <a:solidFill>
@@ -12511,6 +12523,1031 @@
         </a:graphic>
       </p:graphicFrame>
     </p:spTree>
+  </p:cSld>
+  <p:clrMapOvr>
+    <a:masterClrMapping/>
+  </p:clrMapOvr>
+</p:sld>
+</file>
+
+<file path=ppt/slides/slide24.xml><?xml version="1.0" encoding="utf-8"?>
+<p:sld xmlns:a="http://schemas.openxmlformats.org/drawingml/2006/main" xmlns:r="http://schemas.openxmlformats.org/officeDocument/2006/relationships" xmlns:p="http://schemas.openxmlformats.org/presentationml/2006/main">
+  <p:cSld>
+    <p:spTree>
+      <p:nvGrpSpPr>
+        <p:cNvPr id="1" name=""/>
+        <p:cNvGrpSpPr/>
+        <p:nvPr/>
+      </p:nvGrpSpPr>
+      <p:grpSpPr>
+        <a:xfrm>
+          <a:off x="0" y="0"/>
+          <a:ext cx="0" cy="0"/>
+          <a:chOff x="0" y="0"/>
+          <a:chExt cx="0" cy="0"/>
+        </a:xfrm>
+      </p:grpSpPr>
+      <p:sp>
+        <p:nvSpPr>
+          <p:cNvPr id="2" name="Rectangle 1"/>
+          <p:cNvSpPr/>
+          <p:nvPr/>
+        </p:nvSpPr>
+        <p:spPr>
+          <a:xfrm>
+            <a:off x="0" y="0"/>
+            <a:ext cx="128016" cy="6858000"/>
+          </a:xfrm>
+          <a:prstGeom prst="rect">
+            <a:avLst/>
+          </a:prstGeom>
+          <a:solidFill>
+            <a:srgbClr val="2E75B6"/>
+          </a:solidFill>
+          <a:ln>
+            <a:noFill/>
+          </a:ln>
+        </p:spPr>
+        <p:style>
+          <a:lnRef idx="1">
+            <a:schemeClr val="accent1"/>
+          </a:lnRef>
+          <a:fillRef idx="3">
+            <a:schemeClr val="accent1"/>
+          </a:fillRef>
+          <a:effectRef idx="2">
+            <a:schemeClr val="accent1"/>
+          </a:effectRef>
+          <a:fontRef idx="minor">
+            <a:schemeClr val="lt1"/>
+          </a:fontRef>
+        </p:style>
+        <p:txBody>
+          <a:bodyPr rtlCol="0" anchor="ctr"/>
+          <a:lstStyle/>
+          <a:p>
+            <a:pPr algn="ctr"/>
+            <a:endParaRPr/>
+          </a:p>
+        </p:txBody>
+      </p:sp>
+      <p:sp>
+        <p:nvSpPr>
+          <p:cNvPr id="3" name="TextBox 2"/>
+          <p:cNvSpPr txBox="1"/>
+          <p:nvPr/>
+        </p:nvSpPr>
+        <p:spPr>
+          <a:xfrm>
+            <a:off x="502920" y="292608"/>
+            <a:ext cx="11247120" cy="640080"/>
+          </a:xfrm>
+          <a:prstGeom prst="rect">
+            <a:avLst/>
+          </a:prstGeom>
+          <a:noFill/>
+        </p:spPr>
+        <p:txBody>
+          <a:bodyPr wrap="square" anchor="t">
+            <a:noAutofit/>
+          </a:bodyPr>
+          <a:lstStyle/>
+          <a:p>
+            <a:pPr algn="l">
+              <a:lnSpc>
+                <a:spcPct val="115000"/>
+              </a:lnSpc>
+            </a:pPr>
+            <a:r>
+              <a:rPr lang="zh-CN" altLang="en-US" sz="2700" b="1" dirty="0" smtClean="0">
+                <a:solidFill>
+                  <a:srgbClr val="1F3864"/>
+                </a:solidFill>
+                <a:latin typeface="微软雅黑" panose="020B0503020204020204" charset="-122"/>
+                <a:ea typeface="微软雅黑" panose="020B0503020204020204" charset="-122"/>
+                <a:cs typeface="微软雅黑" panose="020B0503020204020204" charset="-122"/>
+              </a:rPr>
+              <a:t>目前的问题，下周计划</a:t>
+            </a:r>
+            <a:endParaRPr sz="2700" b="1" dirty="0">
+              <a:solidFill>
+                <a:srgbClr val="1F3864"/>
+              </a:solidFill>
+              <a:latin typeface="微软雅黑" panose="020B0503020204020204" charset="-122"/>
+              <a:ea typeface="微软雅黑" panose="020B0503020204020204" charset="-122"/>
+              <a:cs typeface="微软雅黑" panose="020B0503020204020204" charset="-122"/>
+            </a:endParaRPr>
+          </a:p>
+        </p:txBody>
+      </p:sp>
+      <p:sp>
+        <p:nvSpPr>
+          <p:cNvPr id="4" name="TextBox 3"/>
+          <p:cNvSpPr txBox="1"/>
+          <p:nvPr/>
+        </p:nvSpPr>
+        <p:spPr>
+          <a:xfrm>
+            <a:off x="502920" y="932688"/>
+            <a:ext cx="11247120" cy="411480"/>
+          </a:xfrm>
+          <a:prstGeom prst="rect">
+            <a:avLst/>
+          </a:prstGeom>
+          <a:noFill/>
+        </p:spPr>
+        <p:txBody>
+          <a:bodyPr wrap="square" anchor="t">
+            <a:noAutofit/>
+          </a:bodyPr>
+          <a:lstStyle/>
+          <a:p>
+            <a:pPr algn="l">
+              <a:lnSpc>
+                <a:spcPct val="115000"/>
+              </a:lnSpc>
+            </a:pPr>
+            <a:r>
+              <a:rPr sz="1350" b="0">
+                <a:solidFill>
+                  <a:srgbClr val="595959"/>
+                </a:solidFill>
+                <a:latin typeface="微软雅黑"/>
+                <a:ea typeface="微软雅黑"/>
+                <a:cs typeface="微软雅黑"/>
+              </a:rPr>
+              <a:t>代码仓库规范差距 · 下一步重构与学习路线</a:t>
+            </a:r>
+            <a:endParaRPr sz="1350" b="0" dirty="0">
+              <a:solidFill>
+                <a:srgbClr val="595959"/>
+              </a:solidFill>
+              <a:latin typeface="微软雅黑" panose="020B0503020204020204" charset="-122"/>
+              <a:ea typeface="微软雅黑" panose="020B0503020204020204" charset="-122"/>
+              <a:cs typeface="微软雅黑" panose="020B0503020204020204" charset="-122"/>
+            </a:endParaRPr>
+          </a:p>
+        </p:txBody>
+      </p:sp>
+      <p:sp>
+        <p:nvSpPr>
+          <p:cNvPr id="5" name="Rectangle 4"/>
+          <p:cNvSpPr/>
+          <p:nvPr/>
+        </p:nvSpPr>
+        <p:spPr>
+          <a:xfrm>
+            <a:off x="502920" y="1316736"/>
+            <a:ext cx="11201400" cy="18288"/>
+          </a:xfrm>
+          <a:prstGeom prst="rect">
+            <a:avLst/>
+          </a:prstGeom>
+          <a:solidFill>
+            <a:srgbClr val="DEE9F7"/>
+          </a:solidFill>
+          <a:ln>
+            <a:noFill/>
+          </a:ln>
+        </p:spPr>
+        <p:style>
+          <a:lnRef idx="1">
+            <a:schemeClr val="accent1"/>
+          </a:lnRef>
+          <a:fillRef idx="3">
+            <a:schemeClr val="accent1"/>
+          </a:fillRef>
+          <a:effectRef idx="2">
+            <a:schemeClr val="accent1"/>
+          </a:effectRef>
+          <a:fontRef idx="minor">
+            <a:schemeClr val="lt1"/>
+          </a:fontRef>
+        </p:style>
+        <p:txBody>
+          <a:bodyPr rtlCol="0" anchor="ctr"/>
+          <a:lstStyle/>
+          <a:p>
+            <a:pPr algn="ctr"/>
+            <a:endParaRPr/>
+          </a:p>
+        </p:txBody>
+      </p:sp>
+      <p:graphicFrame>
+        <p:nvGraphicFramePr>
+          <p:cNvPr id="6" name="Table 5"/>
+          <p:cNvGraphicFramePr>
+            <a:graphicFrameLocks noGrp="1"/>
+          </p:cNvGraphicFramePr>
+          <p:nvPr>
+            <p:extLst>
+              <p:ext uri="{D42A27DB-BD31-4B8C-83A1-F6EECF244321}">
+                <p14:modId xmlns:p14="http://schemas.microsoft.com/office/powerpoint/2010/main" val="2714043454"/>
+              </p:ext>
+            </p:extLst>
+          </p:nvPr>
+        </p:nvGraphicFramePr>
+        <p:xfrm>
+          <a:off x="502920" y="1536192"/>
+          <a:ext cx="11201400" cy="2307336"/>
+        </p:xfrm>
+        <a:graphic>
+          <a:graphicData uri="http://schemas.openxmlformats.org/drawingml/2006/table">
+            <a:tbl>
+              <a:tblPr firstRow="1" bandRow="1">
+                <a:tableStyleId>{5C22544A-7EE6-4342-B048-85BDC9FD1C3A}</a:tableStyleId>
+              </a:tblPr>
+              <a:tblGrid>
+                <a:gridCol w="1097280">
+                  <a:extLst>
+                    <a:ext uri="{9D8B030D-6E8A-4147-A177-3AD203B41FA5}">
+                      <a16:colId xmlns:a16="http://schemas.microsoft.com/office/drawing/2014/main" val="20000"/>
+                    </a:ext>
+                  </a:extLst>
+                </a:gridCol>
+                <a:gridCol w="5897880">
+                  <a:extLst>
+                    <a:ext uri="{9D8B030D-6E8A-4147-A177-3AD203B41FA5}">
+                      <a16:colId xmlns:a16="http://schemas.microsoft.com/office/drawing/2014/main" val="20001"/>
+                    </a:ext>
+                  </a:extLst>
+                </a:gridCol>
+                <a:gridCol w="4206240">
+                  <a:extLst>
+                    <a:ext uri="{9D8B030D-6E8A-4147-A177-3AD203B41FA5}">
+                      <a16:colId xmlns:a16="http://schemas.microsoft.com/office/drawing/2014/main" val="20002"/>
+                    </a:ext>
+                  </a:extLst>
+                </a:gridCol>
+              </a:tblGrid>
+              <a:tr h="347472">
+                <a:tc>
+                  <a:txBody>
+                    <a:bodyPr/>
+                    <a:lstStyle/>
+                    <a:p>
+                      <a:pPr algn="l"/>
+                      <a:r>
+                        <a:rPr sz="1200" b="1">
+                          <a:solidFill>
+                            <a:srgbClr val="FFFFFF"/>
+                          </a:solidFill>
+                          <a:latin typeface="微软雅黑"/>
+                          <a:ea typeface="微软雅黑"/>
+                          <a:cs typeface="微软雅黑"/>
+                        </a:rPr>
+                        <a:t>类别</a:t>
+                      </a:r>
+                    </a:p>
+                  </a:txBody>
+                  <a:tcPr marR="73152" marT="36576" marB="36576" anchor="ctr"/>
+                </a:tc>
+                <a:tc>
+                  <a:txBody>
+                    <a:bodyPr/>
+                    <a:lstStyle/>
+                    <a:p>
+                      <a:pPr algn="l"/>
+                      <a:r>
+                        <a:rPr sz="1200" b="1">
+                          <a:solidFill>
+                            <a:srgbClr val="FFFFFF"/>
+                          </a:solidFill>
+                          <a:latin typeface="微软雅黑"/>
+                          <a:ea typeface="微软雅黑"/>
+                          <a:cs typeface="微软雅黑"/>
+                        </a:rPr>
+                        <a:t>具体表现（已量化）</a:t>
+                      </a:r>
+                    </a:p>
+                  </a:txBody>
+                  <a:tcPr marR="73152" marT="36576" marB="36576" anchor="ctr"/>
+                </a:tc>
+                <a:tc>
+                  <a:txBody>
+                    <a:bodyPr/>
+                    <a:lstStyle/>
+                    <a:p>
+                      <a:pPr algn="l"/>
+                      <a:r>
+                        <a:rPr sz="1200" b="1">
+                          <a:solidFill>
+                            <a:srgbClr val="FFFFFF"/>
+                          </a:solidFill>
+                          <a:latin typeface="微软雅黑"/>
+                          <a:ea typeface="微软雅黑"/>
+                          <a:cs typeface="微软雅黑"/>
+                        </a:rPr>
+                        <a:t>后果</a:t>
+                      </a:r>
+                    </a:p>
+                  </a:txBody>
+                  <a:tcPr marR="73152" marT="36576" marB="36576" anchor="ctr"/>
+                </a:tc>
+                <a:extLst>
+                  <a:ext uri="{0D108BD9-81ED-4DB2-BD59-A6C34878D82A}">
+                    <a16:rowId xmlns:a16="http://schemas.microsoft.com/office/drawing/2014/main" val="10000"/>
+                  </a:ext>
+                </a:extLst>
+              </a:tr>
+              <a:tr h="384048">
+                <a:tc>
+                  <a:txBody>
+                    <a:bodyPr/>
+                    <a:lstStyle/>
+                    <a:p>
+                      <a:pPr algn="l"/>
+                      <a:r>
+                        <a:rPr sz="1200" b="1">
+                          <a:solidFill>
+                            <a:srgbClr val="1F3864"/>
+                          </a:solidFill>
+                          <a:latin typeface="微软雅黑"/>
+                          <a:ea typeface="微软雅黑"/>
+                          <a:cs typeface="微软雅黑"/>
+                        </a:rPr>
+                        <a:t>模块化</a:t>
+                      </a:r>
+                    </a:p>
+                  </a:txBody>
+                  <a:tcPr marR="73152" marT="36576" marB="36576" anchor="ctr"/>
+                </a:tc>
+                <a:tc>
+                  <a:txBody>
+                    <a:bodyPr/>
+                    <a:lstStyle/>
+                    <a:p>
+                      <a:pPr algn="l"/>
+                      <a:r>
+                        <a:rPr sz="1150" b="0" smtClean="0">
+                          <a:solidFill>
+                            <a:srgbClr val="262626"/>
+                          </a:solidFill>
+                          <a:latin typeface="微软雅黑"/>
+                          <a:ea typeface="微软雅黑"/>
+                          <a:cs typeface="微软雅黑"/>
+                        </a:rPr>
+                        <a:t>1 </a:t>
+                      </a:r>
+                      <a:r>
+                        <a:rPr sz="1150" b="0" dirty="0">
+                          <a:solidFill>
+                            <a:srgbClr val="262626"/>
+                          </a:solidFill>
+                          <a:latin typeface="微软雅黑"/>
+                          <a:ea typeface="微软雅黑"/>
+                          <a:cs typeface="微软雅黑"/>
+                        </a:rPr>
+                        <a:t>个 trainer </a:t>
+                      </a:r>
+                      <a:r>
+                        <a:rPr sz="1150" b="0" dirty="0" err="1" smtClean="0">
+                          <a:solidFill>
+                            <a:srgbClr val="262626"/>
+                          </a:solidFill>
+                          <a:latin typeface="微软雅黑"/>
+                          <a:ea typeface="微软雅黑"/>
+                          <a:cs typeface="微软雅黑"/>
+                        </a:rPr>
+                        <a:t>类承载全部功能</a:t>
+                      </a:r>
+                      <a:r>
+                        <a:rPr sz="1150" b="0" dirty="0" err="1">
+                          <a:solidFill>
+                            <a:srgbClr val="262626"/>
+                          </a:solidFill>
+                          <a:latin typeface="微软雅黑"/>
+                          <a:ea typeface="微软雅黑"/>
+                          <a:cs typeface="微软雅黑"/>
+                        </a:rPr>
+                        <a:t>，未达到模块化清晰、对象化程度高</a:t>
+                      </a:r>
+                      <a:endParaRPr sz="1150" b="0" dirty="0">
+                        <a:solidFill>
+                          <a:srgbClr val="262626"/>
+                        </a:solidFill>
+                        <a:latin typeface="微软雅黑"/>
+                        <a:ea typeface="微软雅黑"/>
+                        <a:cs typeface="微软雅黑"/>
+                      </a:endParaRPr>
+                    </a:p>
+                  </a:txBody>
+                  <a:tcPr marR="73152" marT="36576" marB="36576" anchor="ctr"/>
+                </a:tc>
+                <a:tc>
+                  <a:txBody>
+                    <a:bodyPr/>
+                    <a:lstStyle/>
+                    <a:p>
+                      <a:pPr algn="l"/>
+                      <a:r>
+                        <a:rPr sz="1150" b="0">
+                          <a:solidFill>
+                            <a:srgbClr val="C00000"/>
+                          </a:solidFill>
+                          <a:latin typeface="微软雅黑"/>
+                          <a:ea typeface="微软雅黑"/>
+                          <a:cs typeface="微软雅黑"/>
+                        </a:rPr>
+                        <a:t>无分层，难复用、难单测</a:t>
+                      </a:r>
+                    </a:p>
+                  </a:txBody>
+                  <a:tcPr marR="73152" marT="36576" marB="36576" anchor="ctr"/>
+                </a:tc>
+                <a:extLst>
+                  <a:ext uri="{0D108BD9-81ED-4DB2-BD59-A6C34878D82A}">
+                    <a16:rowId xmlns:a16="http://schemas.microsoft.com/office/drawing/2014/main" val="10001"/>
+                  </a:ext>
+                </a:extLst>
+              </a:tr>
+              <a:tr h="384048">
+                <a:tc>
+                  <a:txBody>
+                    <a:bodyPr/>
+                    <a:lstStyle/>
+                    <a:p>
+                      <a:pPr algn="l"/>
+                      <a:r>
+                        <a:rPr sz="1200" b="1">
+                          <a:solidFill>
+                            <a:srgbClr val="1F3864"/>
+                          </a:solidFill>
+                          <a:latin typeface="微软雅黑"/>
+                          <a:ea typeface="微软雅黑"/>
+                          <a:cs typeface="微软雅黑"/>
+                        </a:rPr>
+                        <a:t>PEP8</a:t>
+                      </a:r>
+                    </a:p>
+                  </a:txBody>
+                  <a:tcPr marR="73152" marT="36576" marB="36576" anchor="ctr"/>
+                </a:tc>
+                <a:tc>
+                  <a:txBody>
+                    <a:bodyPr/>
+                    <a:lstStyle/>
+                    <a:p>
+                      <a:pPr algn="l"/>
+                      <a:r>
+                        <a:rPr sz="1150" b="0">
+                          <a:solidFill>
+                            <a:srgbClr val="262626"/>
+                          </a:solidFill>
+                          <a:latin typeface="微软雅黑"/>
+                          <a:ea typeface="微软雅黑"/>
+                          <a:cs typeface="微软雅黑"/>
+                        </a:rPr>
+                        <a:t>超长行 56 处（&gt;120 列 8 处）；= 两侧缺空格约 140 行；未使用导入 6 个；类前缺空行</a:t>
+                      </a:r>
+                    </a:p>
+                  </a:txBody>
+                  <a:tcPr marR="73152" marT="36576" marB="36576" anchor="ctr"/>
+                </a:tc>
+                <a:tc>
+                  <a:txBody>
+                    <a:bodyPr/>
+                    <a:lstStyle/>
+                    <a:p>
+                      <a:pPr algn="l"/>
+                      <a:r>
+                        <a:rPr sz="1150" b="0">
+                          <a:solidFill>
+                            <a:srgbClr val="C00000"/>
+                          </a:solidFill>
+                          <a:latin typeface="微软雅黑"/>
+                          <a:ea typeface="微软雅黑"/>
+                          <a:cs typeface="微软雅黑"/>
+                        </a:rPr>
+                        <a:t>可读性不一致</a:t>
+                      </a:r>
+                    </a:p>
+                  </a:txBody>
+                  <a:tcPr marR="73152" marT="36576" marB="36576" anchor="ctr"/>
+                </a:tc>
+                <a:extLst>
+                  <a:ext uri="{0D108BD9-81ED-4DB2-BD59-A6C34878D82A}">
+                    <a16:rowId xmlns:a16="http://schemas.microsoft.com/office/drawing/2014/main" val="10002"/>
+                  </a:ext>
+                </a:extLst>
+              </a:tr>
+              <a:tr h="384048">
+                <a:tc>
+                  <a:txBody>
+                    <a:bodyPr/>
+                    <a:lstStyle/>
+                    <a:p>
+                      <a:pPr algn="l"/>
+                      <a:r>
+                        <a:rPr sz="1200" b="1">
+                          <a:solidFill>
+                            <a:srgbClr val="1F3864"/>
+                          </a:solidFill>
+                          <a:latin typeface="微软雅黑"/>
+                          <a:ea typeface="微软雅黑"/>
+                          <a:cs typeface="微软雅黑"/>
+                        </a:rPr>
+                        <a:t>注释</a:t>
+                      </a:r>
+                    </a:p>
+                  </a:txBody>
+                  <a:tcPr marR="73152" marT="36576" marB="36576" anchor="ctr"/>
+                </a:tc>
+                <a:tc>
+                  <a:txBody>
+                    <a:bodyPr/>
+                    <a:lstStyle/>
+                    <a:p>
+                      <a:pPr algn="l"/>
+                      <a:r>
+                        <a:rPr sz="1150" b="0">
+                          <a:solidFill>
+                            <a:srgbClr val="262626"/>
+                          </a:solidFill>
+                          <a:latin typeface="微软雅黑"/>
+                          <a:ea typeface="微软雅黑"/>
+                          <a:cs typeface="微软雅黑"/>
+                        </a:rPr>
+                        <a:t>docstring 0 个（21 个方法全无）；注释共 9 行且全在 train.py</a:t>
+                      </a:r>
+                    </a:p>
+                  </a:txBody>
+                  <a:tcPr marR="73152" marT="36576" marB="36576" anchor="ctr"/>
+                </a:tc>
+                <a:tc>
+                  <a:txBody>
+                    <a:bodyPr/>
+                    <a:lstStyle/>
+                    <a:p>
+                      <a:pPr algn="l"/>
+                      <a:r>
+                        <a:rPr sz="1150" b="0">
+                          <a:solidFill>
+                            <a:srgbClr val="C00000"/>
+                          </a:solidFill>
+                          <a:latin typeface="微软雅黑"/>
+                          <a:ea typeface="微软雅黑"/>
+                          <a:cs typeface="微软雅黑"/>
+                        </a:rPr>
+                        <a:t>读代码靠猜意图</a:t>
+                      </a:r>
+                    </a:p>
+                  </a:txBody>
+                  <a:tcPr marR="73152" marT="36576" marB="36576" anchor="ctr"/>
+                </a:tc>
+                <a:extLst>
+                  <a:ext uri="{0D108BD9-81ED-4DB2-BD59-A6C34878D82A}">
+                    <a16:rowId xmlns:a16="http://schemas.microsoft.com/office/drawing/2014/main" val="10003"/>
+                  </a:ext>
+                </a:extLst>
+              </a:tr>
+              <a:tr h="384048">
+                <a:tc>
+                  <a:txBody>
+                    <a:bodyPr/>
+                    <a:lstStyle/>
+                    <a:p>
+                      <a:pPr algn="l"/>
+                      <a:r>
+                        <a:rPr sz="1200" b="1">
+                          <a:solidFill>
+                            <a:srgbClr val="1F3864"/>
+                          </a:solidFill>
+                          <a:latin typeface="微软雅黑"/>
+                          <a:ea typeface="微软雅黑"/>
+                          <a:cs typeface="微软雅黑"/>
+                        </a:rPr>
+                        <a:t>重点学习内容</a:t>
+                      </a:r>
+                    </a:p>
+                  </a:txBody>
+                  <a:tcPr marR="73152" marT="36576" marB="36576" anchor="ctr"/>
+                </a:tc>
+                <a:tc>
+                  <a:txBody>
+                    <a:bodyPr/>
+                    <a:lstStyle/>
+                    <a:p>
+                      <a:pPr algn="l"/>
+                      <a:r>
+                        <a:rPr sz="1150" b="0">
+                          <a:solidFill>
+                            <a:srgbClr val="262626"/>
+                          </a:solidFill>
+                          <a:latin typeface="微软雅黑"/>
+                          <a:ea typeface="微软雅黑"/>
+                          <a:cs typeface="微软雅黑"/>
+                        </a:rPr>
+                        <a:t>模型 / 激活 / 损失 / 卷积全部直接调用 torchvision 预设，无一行自研实现</a:t>
+                      </a:r>
+                    </a:p>
+                  </a:txBody>
+                  <a:tcPr marR="73152" marT="36576" marB="36576" anchor="ctr"/>
+                </a:tc>
+                <a:tc>
+                  <a:txBody>
+                    <a:bodyPr/>
+                    <a:lstStyle/>
+                    <a:p>
+                      <a:pPr algn="l"/>
+                      <a:r>
+                        <a:rPr sz="1150" b="0">
+                          <a:solidFill>
+                            <a:srgbClr val="C00000"/>
+                          </a:solidFill>
+                          <a:latin typeface="微软雅黑"/>
+                          <a:ea typeface="微软雅黑"/>
+                          <a:cs typeface="微软雅黑"/>
+                        </a:rPr>
+                        <a:t>逐行注释无实现可落笔</a:t>
+                      </a:r>
+                    </a:p>
+                  </a:txBody>
+                  <a:tcPr marR="73152" marT="36576" marB="36576" anchor="ctr"/>
+                </a:tc>
+                <a:extLst>
+                  <a:ext uri="{0D108BD9-81ED-4DB2-BD59-A6C34878D82A}">
+                    <a16:rowId xmlns:a16="http://schemas.microsoft.com/office/drawing/2014/main" val="10004"/>
+                  </a:ext>
+                </a:extLst>
+              </a:tr>
+              <a:tr h="384048">
+                <a:tc>
+                  <a:txBody>
+                    <a:bodyPr/>
+                    <a:lstStyle/>
+                    <a:p>
+                      <a:pPr algn="l"/>
+                      <a:r>
+                        <a:rPr sz="1200" b="1">
+                          <a:solidFill>
+                            <a:srgbClr val="1F3864"/>
+                          </a:solidFill>
+                          <a:latin typeface="微软雅黑"/>
+                          <a:ea typeface="微软雅黑"/>
+                          <a:cs typeface="微软雅黑"/>
+                        </a:rPr>
+                        <a:t>实验进度</a:t>
+                      </a:r>
+                    </a:p>
+                  </a:txBody>
+                  <a:tcPr marR="73152" marT="36576" marB="36576" anchor="ctr"/>
+                </a:tc>
+                <a:tc>
+                  <a:txBody>
+                    <a:bodyPr/>
+                    <a:lstStyle/>
+                    <a:p>
+                      <a:pPr algn="l"/>
+                      <a:r>
+                        <a:rPr sz="1150" b="0">
+                          <a:solidFill>
+                            <a:srgbClr val="262626"/>
+                          </a:solidFill>
+                          <a:latin typeface="微软雅黑"/>
+                          <a:ea typeface="微软雅黑"/>
+                          <a:cs typeface="微软雅黑"/>
+                        </a:rPr>
+                        <a:t>基准对比与 CE vs LS 消融已跑通（第 17–21 页）</a:t>
+                      </a:r>
+                    </a:p>
+                  </a:txBody>
+                  <a:tcPr marR="73152" marT="36576" marB="36576" anchor="ctr"/>
+                </a:tc>
+                <a:tc>
+                  <a:txBody>
+                    <a:bodyPr/>
+                    <a:lstStyle/>
+                    <a:p>
+                      <a:pPr algn="l"/>
+                      <a:r>
+                        <a:rPr sz="1150" b="0" dirty="0">
+                          <a:solidFill>
+                            <a:srgbClr val="1F7A3D"/>
+                          </a:solidFill>
+                          <a:latin typeface="微软雅黑"/>
+                          <a:ea typeface="微软雅黑"/>
+                          <a:cs typeface="微软雅黑"/>
+                        </a:rPr>
+                        <a:t>dev </a:t>
+                      </a:r>
+                      <a:r>
+                        <a:rPr sz="1150" b="0" dirty="0" err="1">
+                          <a:solidFill>
+                            <a:srgbClr val="1F7A3D"/>
+                          </a:solidFill>
+                          <a:latin typeface="微软雅黑"/>
+                          <a:ea typeface="微软雅黑"/>
+                          <a:cs typeface="微软雅黑"/>
+                        </a:rPr>
+                        <a:t>版可复用，作为重构基线</a:t>
+                      </a:r>
+                      <a:endParaRPr sz="1150" b="0" dirty="0">
+                        <a:solidFill>
+                          <a:srgbClr val="1F7A3D"/>
+                        </a:solidFill>
+                        <a:latin typeface="微软雅黑"/>
+                        <a:ea typeface="微软雅黑"/>
+                        <a:cs typeface="微软雅黑"/>
+                      </a:endParaRPr>
+                    </a:p>
+                  </a:txBody>
+                  <a:tcPr marR="73152" marT="36576" marB="36576" anchor="ctr"/>
+                </a:tc>
+                <a:extLst>
+                  <a:ext uri="{0D108BD9-81ED-4DB2-BD59-A6C34878D82A}">
+                    <a16:rowId xmlns:a16="http://schemas.microsoft.com/office/drawing/2014/main" val="10005"/>
+                  </a:ext>
+                </a:extLst>
+              </a:tr>
+            </a:tbl>
+          </a:graphicData>
+        </a:graphic>
+      </p:graphicFrame>
+      <p:graphicFrame>
+        <p:nvGraphicFramePr>
+          <p:cNvPr id="7" name="Table 6"/>
+          <p:cNvGraphicFramePr>
+            <a:graphicFrameLocks noGrp="1"/>
+          </p:cNvGraphicFramePr>
+          <p:nvPr/>
+        </p:nvGraphicFramePr>
+        <p:xfrm>
+          <a:off x="502920" y="3950208"/>
+          <a:ext cx="11201400" cy="1495044"/>
+        </p:xfrm>
+        <a:graphic>
+          <a:graphicData uri="http://schemas.openxmlformats.org/drawingml/2006/table">
+            <a:tbl>
+              <a:tblPr firstRow="1" bandRow="1">
+                <a:tableStyleId>{5C22544A-7EE6-4342-B048-85BDC9FD1C3A}</a:tableStyleId>
+              </a:tblPr>
+              <a:tblGrid>
+                <a:gridCol w="1097280">
+                  <a:extLst>
+                    <a:ext uri="{9D8B030D-6E8A-4147-A177-3AD203B41FA5}">
+                      <a16:colId xmlns:a16="http://schemas.microsoft.com/office/drawing/2014/main" val="20000"/>
+                    </a:ext>
+                  </a:extLst>
+                </a:gridCol>
+                <a:gridCol w="10104120">
+                  <a:extLst>
+                    <a:ext uri="{9D8B030D-6E8A-4147-A177-3AD203B41FA5}">
+                      <a16:colId xmlns:a16="http://schemas.microsoft.com/office/drawing/2014/main" val="20001"/>
+                    </a:ext>
+                  </a:extLst>
+                </a:gridCol>
+              </a:tblGrid>
+              <a:tr h="310896">
+                <a:tc>
+                  <a:txBody>
+                    <a:bodyPr/>
+                    <a:lstStyle/>
+                    <a:p>
+                      <a:pPr algn="l"/>
+                      <a:r>
+                        <a:rPr sz="1200" b="1">
+                          <a:solidFill>
+                            <a:srgbClr val="FFFFFF"/>
+                          </a:solidFill>
+                          <a:latin typeface="微软雅黑"/>
+                          <a:ea typeface="微软雅黑"/>
+                          <a:cs typeface="微软雅黑"/>
+                        </a:rPr>
+                        <a:t>层面</a:t>
+                      </a:r>
+                    </a:p>
+                  </a:txBody>
+                  <a:tcPr marR="73152" marT="36576" marB="36576" anchor="ctr"/>
+                </a:tc>
+                <a:tc>
+                  <a:txBody>
+                    <a:bodyPr/>
+                    <a:lstStyle/>
+                    <a:p>
+                      <a:pPr algn="l"/>
+                      <a:r>
+                        <a:rPr sz="1200" b="1">
+                          <a:solidFill>
+                            <a:srgbClr val="FFFFFF"/>
+                          </a:solidFill>
+                          <a:latin typeface="微软雅黑"/>
+                          <a:ea typeface="微软雅黑"/>
+                          <a:cs typeface="微软雅黑"/>
+                        </a:rPr>
+                        <a:t>下周计划</a:t>
+                      </a:r>
+                    </a:p>
+                  </a:txBody>
+                  <a:tcPr marR="73152" marT="36576" marB="36576" anchor="ctr"/>
+                </a:tc>
+                <a:extLst>
+                  <a:ext uri="{0D108BD9-81ED-4DB2-BD59-A6C34878D82A}">
+                    <a16:rowId xmlns:a16="http://schemas.microsoft.com/office/drawing/2014/main" val="10000"/>
+                  </a:ext>
+                </a:extLst>
+              </a:tr>
+              <a:tr h="585216">
+                <a:tc>
+                  <a:txBody>
+                    <a:bodyPr/>
+                    <a:lstStyle/>
+                    <a:p>
+                      <a:pPr algn="l"/>
+                      <a:r>
+                        <a:rPr sz="1200" b="1">
+                          <a:solidFill>
+                            <a:srgbClr val="1F3864"/>
+                          </a:solidFill>
+                          <a:latin typeface="微软雅黑"/>
+                          <a:ea typeface="微软雅黑"/>
+                          <a:cs typeface="微软雅黑"/>
+                        </a:rPr>
+                        <a:t>代码</a:t>
+                      </a:r>
+                    </a:p>
+                  </a:txBody>
+                  <a:tcPr marR="73152" marT="36576" marB="36576" anchor="ctr"/>
+                </a:tc>
+                <a:tc>
+                  <a:txBody>
+                    <a:bodyPr/>
+                    <a:lstStyle/>
+                    <a:p>
+                      <a:pPr algn="l"/>
+                      <a:r>
+                        <a:rPr sz="1150" b="0">
+                          <a:solidFill>
+                            <a:srgbClr val="262626"/>
+                          </a:solidFill>
+                          <a:latin typeface="微软雅黑"/>
+                          <a:ea typeface="微软雅黑"/>
+                          <a:cs typeface="微软雅黑"/>
+                        </a:rPr>
+                        <a:t>① 先搭框架：直接仿照论文结构写骨架，只写类 / 函数接口与实现思路，不做具体实现</a:t>
+                      </a:r>
+                    </a:p>
+                    <a:p>
+                      <a:pPr algn="l"/>
+                      <a:r>
+                        <a:rPr sz="1150" b="0">
+                          <a:solidFill>
+                            <a:srgbClr val="262626"/>
+                          </a:solidFill>
+                          <a:latin typeface="微软雅黑"/>
+                          <a:ea typeface="微软雅黑"/>
+                          <a:cs typeface="微软雅黑"/>
+                        </a:rPr>
+                        <a:t>② 按模块依次学习 → 逐个补齐实现，边实现边写逐行注释并 debug</a:t>
+                      </a:r>
+                    </a:p>
+                    <a:p>
+                      <a:pPr algn="l"/>
+                      <a:r>
+                        <a:rPr sz="1150" b="0">
+                          <a:solidFill>
+                            <a:srgbClr val="262626"/>
+                          </a:solidFill>
+                          <a:latin typeface="微软雅黑"/>
+                          <a:ea typeface="微软雅黑"/>
+                          <a:cs typeface="微软雅黑"/>
+                        </a:rPr>
+                        <a:t>③ 全部模块完成后统一跑实验，与原 dev 版本结果对照</a:t>
+                      </a:r>
+                    </a:p>
+                  </a:txBody>
+                  <a:tcPr marR="73152" marT="36576" marB="36576" anchor="ctr"/>
+                </a:tc>
+                <a:extLst>
+                  <a:ext uri="{0D108BD9-81ED-4DB2-BD59-A6C34878D82A}">
+                    <a16:rowId xmlns:a16="http://schemas.microsoft.com/office/drawing/2014/main" val="10001"/>
+                  </a:ext>
+                </a:extLst>
+              </a:tr>
+              <a:tr h="585216">
+                <a:tc>
+                  <a:txBody>
+                    <a:bodyPr/>
+                    <a:lstStyle/>
+                    <a:p>
+                      <a:pPr algn="l"/>
+                      <a:r>
+                        <a:rPr sz="1200" b="1">
+                          <a:solidFill>
+                            <a:srgbClr val="1F3864"/>
+                          </a:solidFill>
+                          <a:latin typeface="微软雅黑"/>
+                          <a:ea typeface="微软雅黑"/>
+                          <a:cs typeface="微软雅黑"/>
+                        </a:rPr>
+                        <a:t>学习</a:t>
+                      </a:r>
+                    </a:p>
+                  </a:txBody>
+                  <a:tcPr marR="73152" marT="36576" marB="36576" anchor="ctr"/>
+                </a:tc>
+                <a:tc>
+                  <a:txBody>
+                    <a:bodyPr/>
+                    <a:lstStyle/>
+                    <a:p>
+                      <a:pPr algn="l"/>
+                      <a:r>
+                        <a:rPr sz="1150" b="0">
+                          <a:solidFill>
+                            <a:srgbClr val="262626"/>
+                          </a:solidFill>
+                          <a:latin typeface="微软雅黑"/>
+                          <a:ea typeface="微软雅黑"/>
+                          <a:cs typeface="微软雅黑"/>
+                        </a:rPr>
+                        <a:t>① 先了解总体架构，再依次深入各模块的具体实现</a:t>
+                      </a:r>
+                    </a:p>
+                    <a:p>
+                      <a:pPr algn="l"/>
+                      <a:r>
+                        <a:rPr sz="1150" b="0">
+                          <a:solidFill>
+                            <a:srgbClr val="262626"/>
+                          </a:solidFill>
+                          <a:latin typeface="微软雅黑"/>
+                          <a:ea typeface="微软雅黑"/>
+                          <a:cs typeface="微软雅黑"/>
+                        </a:rPr>
+                        <a:t>② 用 AI 出题、自己作答的方式巩固知识点</a:t>
+                      </a:r>
+                    </a:p>
+                  </a:txBody>
+                  <a:tcPr marR="73152" marT="36576" marB="36576" anchor="ctr"/>
+                </a:tc>
+                <a:extLst>
+                  <a:ext uri="{0D108BD9-81ED-4DB2-BD59-A6C34878D82A}">
+                    <a16:rowId xmlns:a16="http://schemas.microsoft.com/office/drawing/2014/main" val="10002"/>
+                  </a:ext>
+                </a:extLst>
+              </a:tr>
+            </a:tbl>
+          </a:graphicData>
+        </a:graphic>
+      </p:graphicFrame>
+      <p:sp>
+        <p:nvSpPr>
+          <p:cNvPr id="8" name="TextBox 7"/>
+          <p:cNvSpPr txBox="1"/>
+          <p:nvPr/>
+        </p:nvSpPr>
+        <p:spPr>
+          <a:xfrm>
+            <a:off x="502920" y="5541264"/>
+            <a:ext cx="11201400" cy="960120"/>
+          </a:xfrm>
+          <a:prstGeom prst="rect">
+            <a:avLst/>
+          </a:prstGeom>
+          <a:noFill/>
+        </p:spPr>
+        <p:txBody>
+          <a:bodyPr wrap="square">
+            <a:spAutoFit/>
+          </a:bodyPr>
+          <a:lstStyle/>
+          <a:p>
+            <a:pPr algn="l"/>
+            <a:r>
+              <a:rPr sz="1100" b="0">
+                <a:solidFill>
+                  <a:srgbClr val="595959"/>
+                </a:solidFill>
+                <a:latin typeface="微软雅黑"/>
+                <a:ea typeface="微软雅黑"/>
+                <a:cs typeface="微软雅黑"/>
+              </a:rPr>
+              <a:t>归因：初期仿照自己此前用 AI 跑通的结构，把功能全部塞进单个 trainer；模型 / 激活函数 / 损失函数 / 卷积均直接调用 torch 预设架构，既没有分层，也没有可供注释的实现。</a:t>
+            </a:r>
+          </a:p>
+          <a:p>
+            <a:pPr algn="l"/>
+            <a:r>
+              <a:rPr sz="1100" b="1">
+                <a:solidFill>
+                  <a:srgbClr val="1F3864"/>
+                </a:solidFill>
+                <a:latin typeface="微软雅黑"/>
+                <a:ea typeface="微软雅黑"/>
+                <a:cs typeface="微软雅黑"/>
+              </a:rPr>
+              <a:t>下一步：重构一份可对比的实现，边学边注释，把「学习重点」落到代码里。</a:t>
+            </a:r>
+          </a:p>
+        </p:txBody>
+      </p:sp>
+    </p:spTree>
+    <p:extLst>
+      <p:ext uri="{BB962C8B-B14F-4D97-AF65-F5344CB8AC3E}">
+        <p14:creationId xmlns:p14="http://schemas.microsoft.com/office/powerpoint/2010/main" val="230280514"/>
+      </p:ext>
+    </p:extLst>
   </p:cSld>
   <p:clrMapOvr>
     <a:masterClrMapping/>
